--- a/docs/Jetson_Nano_Local_AI_Experiments.pptx
+++ b/docs/Jetson_Nano_Local_AI_Experiments.pptx
@@ -2,21 +2,22 @@
 <file path=ppt/presentation.xml><?xml version="1.0" encoding="utf-8"?>
 <p:presentation xmlns:p="http://schemas.openxmlformats.org/presentationml/2006/main">
   <p:sldMasterIdLst>
-    <p:sldMasterId xmlns:r="http://schemas.openxmlformats.org/officeDocument/2006/relationships" id="2147483648" r:id="R1251fd97218945cb"/>
+    <p:sldMasterId xmlns:r="http://schemas.openxmlformats.org/officeDocument/2006/relationships" id="2147483648" r:id="R63c9e2d4bc2d42ee"/>
   </p:sldMasterIdLst>
   <p:notesMasterIdLst>
-    <p:notesMasterId xmlns:r="http://schemas.openxmlformats.org/officeDocument/2006/relationships" r:id="Rb6504080706f4424"/>
+    <p:notesMasterId xmlns:r="http://schemas.openxmlformats.org/officeDocument/2006/relationships" r:id="R243c1052c57c4d20"/>
   </p:notesMasterIdLst>
   <p:sldIdLst>
-    <p:sldId xmlns:r="http://schemas.openxmlformats.org/officeDocument/2006/relationships" id="256" r:id="Rff13e2302f924329"/>
-    <p:sldId xmlns:r="http://schemas.openxmlformats.org/officeDocument/2006/relationships" id="257" r:id="R16597203d05a46e1"/>
-    <p:sldId xmlns:r="http://schemas.openxmlformats.org/officeDocument/2006/relationships" id="258" r:id="R125cfc08b68544ce"/>
-    <p:sldId xmlns:r="http://schemas.openxmlformats.org/officeDocument/2006/relationships" id="259" r:id="R054fcbc363294d2e"/>
-    <p:sldId xmlns:r="http://schemas.openxmlformats.org/officeDocument/2006/relationships" id="260" r:id="R910bf0c1635140a9"/>
-    <p:sldId xmlns:r="http://schemas.openxmlformats.org/officeDocument/2006/relationships" id="261" r:id="Rcd04c2b5b6b84767"/>
-    <p:sldId xmlns:r="http://schemas.openxmlformats.org/officeDocument/2006/relationships" id="262" r:id="R9be3b26dd6e54694"/>
-    <p:sldId xmlns:r="http://schemas.openxmlformats.org/officeDocument/2006/relationships" id="263" r:id="R55eb15488beb4b05"/>
-    <p:sldId xmlns:r="http://schemas.openxmlformats.org/officeDocument/2006/relationships" id="264" r:id="R7ba55a05dec64852"/>
+    <p:sldId xmlns:r="http://schemas.openxmlformats.org/officeDocument/2006/relationships" id="256" r:id="Rd35f6f33c2764035"/>
+    <p:sldId xmlns:r="http://schemas.openxmlformats.org/officeDocument/2006/relationships" id="257" r:id="Rb967bbbd29db421c"/>
+    <p:sldId xmlns:r="http://schemas.openxmlformats.org/officeDocument/2006/relationships" id="258" r:id="Rb5647ad114b34648"/>
+    <p:sldId xmlns:r="http://schemas.openxmlformats.org/officeDocument/2006/relationships" id="259" r:id="R15b1ff74641a4d9b"/>
+    <p:sldId xmlns:r="http://schemas.openxmlformats.org/officeDocument/2006/relationships" id="260" r:id="R528cdc9c1af34cc4"/>
+    <p:sldId xmlns:r="http://schemas.openxmlformats.org/officeDocument/2006/relationships" id="261" r:id="R9258778ac5e146f8"/>
+    <p:sldId xmlns:r="http://schemas.openxmlformats.org/officeDocument/2006/relationships" id="262" r:id="R6fd447b9efe14302"/>
+    <p:sldId xmlns:r="http://schemas.openxmlformats.org/officeDocument/2006/relationships" id="263" r:id="Ree3d3b135f6c4e66"/>
+    <p:sldId xmlns:r="http://schemas.openxmlformats.org/officeDocument/2006/relationships" id="264" r:id="R3aaa7acc11774167"/>
+    <p:sldId xmlns:r="http://schemas.openxmlformats.org/officeDocument/2006/relationships" id="265" r:id="R8bf70701525b47ff"/>
   </p:sldIdLst>
   <p:sldSz cx="12192000" cy="6858000"/>
   <p:notesSz cx="6858000" cy="9144000"/>
@@ -450,12 +451,92 @@
           <a:lstStyle xmlns:a="http://schemas.openxmlformats.org/drawingml/2006/main"/>
           <a:p xmlns:a="http://schemas.openxmlformats.org/drawingml/2006/main">
             <a:r>
-              <a:t>Implementation source: https://github.com/nileshsarkar-ai/JetsonNano-Demo</a:t>
-            </a:r>
-          </a:p>
-          <a:p xmlns:a="http://schemas.openxmlformats.org/drawingml/2006/main">
-            <a:r>
-              <a:t>Current named routes: scripts/demo_menu.py. Full scope: docs/EXPERIMENTS.md. Software prepared; physical Nano execution unverified. The original 72-topic catalogue is a historical ideas reference. This deck covers only implemented local menu entries, with optional camera.</a:t>
+              <a:t>Image: NVIDIA, https://www.nvidia.com/en-us/autonomous-machines/embedded-systems/jetson-nano/product-development/</a:t>
+            </a:r>
+          </a:p>
+          <a:p xmlns:a="http://schemas.openxmlformats.org/drawingml/2006/main">
+            <a:r>
+              <a:t>Asset: https://www.nvidia.com/content/nvidiaGDC/us/en_US/autonomous-machines/embedded-systems/jetson-nano/product-development/_jcr_content/root/responsivegrid/nv_container_1169488117/nv_container_copy/nv_image.coreimg.jpeg/1710770678070/jetson-nano-2560x1440.jpeg</a:t>
+            </a:r>
+          </a:p>
+          <a:p xmlns:a="http://schemas.openxmlformats.org/drawingml/2006/main">
+            <a:r>
+              <a:t>Photo is a product reference, not this user’s board. Code scope: docs/EXPERIMENTS.md in https://github.com/nileshsarkar-ai/JetsonNano-Demo. No physical-board performance claim.</a:t>
+            </a:r>
+          </a:p>
+        </p:txBody>
+      </p:sp>
+      <p:sp>
+        <p:nvSpPr>
+          <p:cNvPr id="4" name="Slide Number Placeholder 3"/>
+          <p:cNvSpPr>
+            <a:spLocks xmlns:a="http://schemas.openxmlformats.org/drawingml/2006/main" noGrp="1"/>
+          </p:cNvSpPr>
+          <p:nvPr>
+            <p:ph type="sldNum" idx="5"/>
+          </p:nvPr>
+        </p:nvSpPr>
+        <p:spPr/>
+        <p:txBody>
+          <a:bodyPr xmlns:a="http://schemas.openxmlformats.org/drawingml/2006/main"/>
+          <a:lstStyle xmlns:a="http://schemas.openxmlformats.org/drawingml/2006/main"/>
+          <a:p xmlns:a="http://schemas.openxmlformats.org/drawingml/2006/main"/>
+        </p:txBody>
+      </p:sp>
+    </p:spTree>
+  </p:cSld>
+  <p:clrMapOvr>
+    <a:masterClrMapping xmlns:a="http://schemas.openxmlformats.org/drawingml/2006/main"/>
+  </p:clrMapOvr>
+</p:notes>
+</file>
+
+<file path=ppt/notesSlides/notesSlide10.xml><?xml version="1.0" encoding="utf-8"?>
+<p:notes xmlns:p="http://schemas.openxmlformats.org/presentationml/2006/main">
+  <p:cSld>
+    <p:spTree>
+      <p:nvGrpSpPr>
+        <p:cNvPr id="1" name=""/>
+        <p:cNvGrpSpPr/>
+        <p:nvPr/>
+      </p:nvGrpSpPr>
+      <p:grpSpPr>
+        <a:xfrm xmlns:a="http://schemas.openxmlformats.org/drawingml/2006/main"/>
+      </p:grpSpPr>
+      <p:sp>
+        <p:nvSpPr>
+          <p:cNvPr id="2" name="Slide Image Placeholder 1"/>
+          <p:cNvSpPr>
+            <a:spLocks xmlns:a="http://schemas.openxmlformats.org/drawingml/2006/main" noGrp="1"/>
+          </p:cNvSpPr>
+          <p:nvPr>
+            <p:ph type="sldImg" idx="0"/>
+          </p:nvPr>
+        </p:nvSpPr>
+        <p:spPr/>
+      </p:sp>
+      <p:sp>
+        <p:nvSpPr>
+          <p:cNvPr id="3" name="Notes Placeholder 2"/>
+          <p:cNvSpPr>
+            <a:spLocks xmlns:a="http://schemas.openxmlformats.org/drawingml/2006/main" noGrp="1"/>
+          </p:cNvSpPr>
+          <p:nvPr>
+            <p:ph type="body" idx="1"/>
+          </p:nvPr>
+        </p:nvSpPr>
+        <p:spPr/>
+        <p:txBody>
+          <a:bodyPr xmlns:a="http://schemas.openxmlformats.org/drawingml/2006/main"/>
+          <a:lstStyle xmlns:a="http://schemas.openxmlformats.org/drawingml/2006/main"/>
+          <a:p xmlns:a="http://schemas.openxmlformats.org/drawingml/2006/main">
+            <a:r>
+              <a:t>Code and menu: https://github.com/nileshsarkar-ai/JetsonNano-Demo/tree/master</a:t>
+            </a:r>
+          </a:p>
+          <a:p xmlns:a="http://schemas.openxmlformats.org/drawingml/2006/main">
+            <a:r>
+              <a:t>Scope and names: docs/EXPERIMENTS.md. Presenter notes: Physical Nano execution unverified. Software tests use mocks. Models may hallucinate; prompt separation and self-critique are not security or accuracy guarantees. Check against visible source facts. Camera projects use object detections plus text generation, not a vision-language model. Default setup does not need audio or external training. Rehearse power, cooling, camera capture, latency and answer quality on the actual board. This is the current local programme, not the historical 72-topic idea catalogue.</a:t>
             </a:r>
           </a:p>
         </p:txBody>
@@ -525,12 +606,12 @@
           <a:lstStyle xmlns:a="http://schemas.openxmlformats.org/drawingml/2006/main"/>
           <a:p xmlns:a="http://schemas.openxmlformats.org/drawingml/2006/main">
             <a:r>
-              <a:t>Implementation source: https://github.com/nileshsarkar-ai/JetsonNano-Demo</a:t>
-            </a:r>
-          </a:p>
-          <a:p xmlns:a="http://schemas.openxmlformats.org/drawingml/2006/main">
-            <a:r>
-              <a:t>Current named routes: scripts/demo_menu.py. Full scope: docs/EXPERIMENTS.md. Software prepared; physical Nano execution unverified. The original 72-topic catalogue is a historical ideas reference. This deck covers only implemented local menu entries, with optional camera.</a:t>
+              <a:t>Code and menu: https://github.com/nileshsarkar-ai/JetsonNano-Demo/tree/master</a:t>
+            </a:r>
+          </a:p>
+          <a:p xmlns:a="http://schemas.openxmlformats.org/drawingml/2006/main">
+            <a:r>
+              <a:t>Scope and names: docs/EXPERIMENTS.md. Presenter notes: Physical Nano execution unverified. Software tests use mocks. Models may hallucinate; prompt separation and self-critique are not security or accuracy guarantees. Check against visible source facts. Camera projects use object detections plus text generation, not a vision-language model. Default setup does not need audio or external training. Rehearse power, cooling, camera capture, latency and answer quality on the actual board. This is the current local programme, not the historical 72-topic idea catalogue.</a:t>
             </a:r>
           </a:p>
         </p:txBody>
@@ -600,12 +681,12 @@
           <a:lstStyle xmlns:a="http://schemas.openxmlformats.org/drawingml/2006/main"/>
           <a:p xmlns:a="http://schemas.openxmlformats.org/drawingml/2006/main">
             <a:r>
-              <a:t>Implementation source: https://github.com/nileshsarkar-ai/JetsonNano-Demo</a:t>
-            </a:r>
-          </a:p>
-          <a:p xmlns:a="http://schemas.openxmlformats.org/drawingml/2006/main">
-            <a:r>
-              <a:t>Current named routes: scripts/demo_menu.py. Full scope: docs/EXPERIMENTS.md. Software prepared; physical Nano execution unverified. The original 72-topic catalogue is a historical ideas reference. This deck covers only implemented local menu entries, with optional camera.</a:t>
+              <a:t>Code and menu: https://github.com/nileshsarkar-ai/JetsonNano-Demo/tree/master</a:t>
+            </a:r>
+          </a:p>
+          <a:p xmlns:a="http://schemas.openxmlformats.org/drawingml/2006/main">
+            <a:r>
+              <a:t>Scope and names: docs/EXPERIMENTS.md. Presenter notes: Physical Nano execution unverified. Software tests use mocks. Models may hallucinate; prompt separation and self-critique are not security or accuracy guarantees. Check against visible source facts. Camera projects use object detections plus text generation, not a vision-language model. Default setup does not need audio or external training. Rehearse power, cooling, camera capture, latency and answer quality on the actual board. This is the current local programme, not the historical 72-topic idea catalogue.</a:t>
             </a:r>
           </a:p>
         </p:txBody>
@@ -675,12 +756,12 @@
           <a:lstStyle xmlns:a="http://schemas.openxmlformats.org/drawingml/2006/main"/>
           <a:p xmlns:a="http://schemas.openxmlformats.org/drawingml/2006/main">
             <a:r>
-              <a:t>Implementation source: https://github.com/nileshsarkar-ai/JetsonNano-Demo</a:t>
-            </a:r>
-          </a:p>
-          <a:p xmlns:a="http://schemas.openxmlformats.org/drawingml/2006/main">
-            <a:r>
-              <a:t>Current named routes: scripts/demo_menu.py. Full scope: docs/EXPERIMENTS.md. Software prepared; physical Nano execution unverified. The original 72-topic catalogue is a historical ideas reference. This deck covers only implemented local menu entries, with optional camera.</a:t>
+              <a:t>Code and menu: https://github.com/nileshsarkar-ai/JetsonNano-Demo/tree/master</a:t>
+            </a:r>
+          </a:p>
+          <a:p xmlns:a="http://schemas.openxmlformats.org/drawingml/2006/main">
+            <a:r>
+              <a:t>Scope and names: docs/EXPERIMENTS.md. Presenter notes: Physical Nano execution unverified. Software tests use mocks. Models may hallucinate; prompt separation and self-critique are not security or accuracy guarantees. Check against visible source facts. Camera projects use object detections plus text generation, not a vision-language model. Default setup does not need audio or external training. Rehearse power, cooling, camera capture, latency and answer quality on the actual board. This is the current local programme, not the historical 72-topic idea catalogue.</a:t>
             </a:r>
           </a:p>
         </p:txBody>
@@ -750,12 +831,12 @@
           <a:lstStyle xmlns:a="http://schemas.openxmlformats.org/drawingml/2006/main"/>
           <a:p xmlns:a="http://schemas.openxmlformats.org/drawingml/2006/main">
             <a:r>
-              <a:t>Implementation source: https://github.com/nileshsarkar-ai/JetsonNano-Demo</a:t>
-            </a:r>
-          </a:p>
-          <a:p xmlns:a="http://schemas.openxmlformats.org/drawingml/2006/main">
-            <a:r>
-              <a:t>Current named routes: scripts/demo_menu.py. Full scope: docs/EXPERIMENTS.md. Software prepared; physical Nano execution unverified. The original 72-topic catalogue is a historical ideas reference. This deck covers only implemented local menu entries, with optional camera.</a:t>
+              <a:t>Code and menu: https://github.com/nileshsarkar-ai/JetsonNano-Demo/tree/master</a:t>
+            </a:r>
+          </a:p>
+          <a:p xmlns:a="http://schemas.openxmlformats.org/drawingml/2006/main">
+            <a:r>
+              <a:t>Scope and names: docs/EXPERIMENTS.md. Presenter notes: Physical Nano execution unverified. Software tests use mocks. Models may hallucinate; prompt separation and self-critique are not security or accuracy guarantees. Check against visible source facts. Camera projects use object detections plus text generation, not a vision-language model. Default setup does not need audio or external training. Rehearse power, cooling, camera capture, latency and answer quality on the actual board. This is the current local programme, not the historical 72-topic idea catalogue.</a:t>
             </a:r>
           </a:p>
         </p:txBody>
@@ -825,12 +906,12 @@
           <a:lstStyle xmlns:a="http://schemas.openxmlformats.org/drawingml/2006/main"/>
           <a:p xmlns:a="http://schemas.openxmlformats.org/drawingml/2006/main">
             <a:r>
-              <a:t>Implementation source: https://github.com/nileshsarkar-ai/JetsonNano-Demo</a:t>
-            </a:r>
-          </a:p>
-          <a:p xmlns:a="http://schemas.openxmlformats.org/drawingml/2006/main">
-            <a:r>
-              <a:t>Current named routes: scripts/demo_menu.py. Full scope: docs/EXPERIMENTS.md. Software prepared; physical Nano execution unverified. The original 72-topic catalogue is a historical ideas reference. This deck covers only implemented local menu entries, with optional camera.</a:t>
+              <a:t>Code and menu: https://github.com/nileshsarkar-ai/JetsonNano-Demo/tree/master</a:t>
+            </a:r>
+          </a:p>
+          <a:p xmlns:a="http://schemas.openxmlformats.org/drawingml/2006/main">
+            <a:r>
+              <a:t>Scope and names: docs/EXPERIMENTS.md. Presenter notes: Physical Nano execution unverified. Software tests use mocks. Models may hallucinate; prompt separation and self-critique are not security or accuracy guarantees. Check against visible source facts. Camera projects use object detections plus text generation, not a vision-language model. Default setup does not need audio or external training. Rehearse power, cooling, camera capture, latency and answer quality on the actual board. This is the current local programme, not the historical 72-topic idea catalogue.</a:t>
             </a:r>
           </a:p>
         </p:txBody>
@@ -900,12 +981,12 @@
           <a:lstStyle xmlns:a="http://schemas.openxmlformats.org/drawingml/2006/main"/>
           <a:p xmlns:a="http://schemas.openxmlformats.org/drawingml/2006/main">
             <a:r>
-              <a:t>Implementation source: https://github.com/nileshsarkar-ai/JetsonNano-Demo</a:t>
-            </a:r>
-          </a:p>
-          <a:p xmlns:a="http://schemas.openxmlformats.org/drawingml/2006/main">
-            <a:r>
-              <a:t>Current named routes: scripts/demo_menu.py. Full scope: docs/EXPERIMENTS.md. Software prepared; physical Nano execution unverified. The original 72-topic catalogue is a historical ideas reference. This deck covers only implemented local menu entries, with optional camera.</a:t>
+              <a:t>Code and menu: https://github.com/nileshsarkar-ai/JetsonNano-Demo/tree/master</a:t>
+            </a:r>
+          </a:p>
+          <a:p xmlns:a="http://schemas.openxmlformats.org/drawingml/2006/main">
+            <a:r>
+              <a:t>Scope and names: docs/EXPERIMENTS.md. Presenter notes: Physical Nano execution unverified. Software tests use mocks. Models may hallucinate; prompt separation and self-critique are not security or accuracy guarantees. Check against visible source facts. Camera projects use object detections plus text generation, not a vision-language model. Default setup does not need audio or external training. Rehearse power, cooling, camera capture, latency and answer quality on the actual board. This is the current local programme, not the historical 72-topic idea catalogue.</a:t>
             </a:r>
           </a:p>
         </p:txBody>
@@ -975,12 +1056,12 @@
           <a:lstStyle xmlns:a="http://schemas.openxmlformats.org/drawingml/2006/main"/>
           <a:p xmlns:a="http://schemas.openxmlformats.org/drawingml/2006/main">
             <a:r>
-              <a:t>Implementation source: https://github.com/nileshsarkar-ai/JetsonNano-Demo</a:t>
-            </a:r>
-          </a:p>
-          <a:p xmlns:a="http://schemas.openxmlformats.org/drawingml/2006/main">
-            <a:r>
-              <a:t>Current named routes: scripts/demo_menu.py. Full scope: docs/EXPERIMENTS.md. Software prepared; physical Nano execution unverified. The original 72-topic catalogue is a historical ideas reference. This deck covers only implemented local menu entries, with optional camera.</a:t>
+              <a:t>Code and menu: https://github.com/nileshsarkar-ai/JetsonNano-Demo/tree/master</a:t>
+            </a:r>
+          </a:p>
+          <a:p xmlns:a="http://schemas.openxmlformats.org/drawingml/2006/main">
+            <a:r>
+              <a:t>Scope and names: docs/EXPERIMENTS.md. Presenter notes: Physical Nano execution unverified. Software tests use mocks. Models may hallucinate; prompt separation and self-critique are not security or accuracy guarantees. Check against visible source facts. Camera projects use object detections plus text generation, not a vision-language model. Default setup does not need audio or external training. Rehearse power, cooling, camera capture, latency and answer quality on the actual board. This is the current local programme, not the historical 72-topic idea catalogue.</a:t>
             </a:r>
           </a:p>
         </p:txBody>
@@ -1050,12 +1131,12 @@
           <a:lstStyle xmlns:a="http://schemas.openxmlformats.org/drawingml/2006/main"/>
           <a:p xmlns:a="http://schemas.openxmlformats.org/drawingml/2006/main">
             <a:r>
-              <a:t>Implementation source: https://github.com/nileshsarkar-ai/JetsonNano-Demo</a:t>
-            </a:r>
-          </a:p>
-          <a:p xmlns:a="http://schemas.openxmlformats.org/drawingml/2006/main">
-            <a:r>
-              <a:t>Current named routes: scripts/demo_menu.py. Full scope: docs/EXPERIMENTS.md. Software prepared; physical Nano execution unverified. The original 72-topic catalogue is a historical ideas reference. This deck covers only implemented local menu entries, with optional camera.</a:t>
+              <a:t>Code and menu: https://github.com/nileshsarkar-ai/JetsonNano-Demo/tree/master</a:t>
+            </a:r>
+          </a:p>
+          <a:p xmlns:a="http://schemas.openxmlformats.org/drawingml/2006/main">
+            <a:r>
+              <a:t>Scope and names: docs/EXPERIMENTS.md. Presenter notes: Physical Nano execution unverified. Software tests use mocks. Models may hallucinate; prompt separation and self-critique are not security or accuracy guarantees. Check against visible source facts. Camera projects use object detections plus text generation, not a vision-language model. Default setup does not need audio or external training. Rehearse power, cooling, camera capture, latency and answer quality on the actual board. This is the current local programme, not the historical 72-topic idea catalogue.</a:t>
             </a:r>
           </a:p>
         </p:txBody>
@@ -1123,7 +1204,7 @@
   </p:cSld>
   <p:clrMap bg1="lt1" tx1="dk1" bg2="lt2" tx2="dk2" accent1="accent1" accent2="accent2" accent3="accent3" accent4="accent4" accent5="accent5" accent6="accent6" hlink="hlink" folHlink="folHlink"/>
   <p:sldLayoutIdLst>
-    <p:sldLayoutId xmlns:r="http://schemas.openxmlformats.org/officeDocument/2006/relationships" id="2147483649" r:id="Rd21861b6e26c48b0"/>
+    <p:sldLayoutId xmlns:r="http://schemas.openxmlformats.org/officeDocument/2006/relationships" id="2147483649" r:id="Ra5c741f6d8f742c9"/>
   </p:sldLayoutIdLst>
   <p:txStyles>
     <p:titleStyle>
@@ -1656,7 +1737,7 @@
     <p:bg>
       <p:bgPr>
         <a:solidFill xmlns:a="http://schemas.openxmlformats.org/drawingml/2006/main">
-          <a:srgbClr val="0C1825"/>
+          <a:srgbClr val="FFFFFF"/>
         </a:solidFill>
       </p:bgPr>
     </p:bg>
@@ -1671,10 +1752,10 @@
       </p:grpSpPr>
       <p:sp>
         <p:nvSpPr>
-          <p:cNvPr id="7" name="">
+          <p:cNvPr id="8" name="">
             <a:extLst xmlns:a="http://schemas.openxmlformats.org/drawingml/2006/main">
               <a:ext uri="{FF2B5EF4-FFF2-40B4-BE49-F238E27FC236}">
-                <a16:creationId xmlns:a16="http://schemas.microsoft.com/office/drawing/2014/main" id="{E41750CB-5785-41A3-84CF-54F87731C028}"/>
+                <a16:creationId xmlns:a16="http://schemas.microsoft.com/office/drawing/2014/main" id="{652D6817-1018-499B-AE97-27ECF4A92967}"/>
               </a:ext>
             </a:extLst>
           </p:cNvPr>
@@ -1685,8 +1766,8 @@
         </p:nvSpPr>
         <p:spPr>
           <a:xfrm xmlns:a="http://schemas.openxmlformats.org/drawingml/2006/main">
-            <a:off x="609600" y="438150"/>
-            <a:ext cx="10934700" cy="857250"/>
+            <a:off x="685800" y="647700"/>
+            <a:ext cx="10668000" cy="381000"/>
           </a:xfrm>
           <a:prstGeom xmlns:a="http://schemas.openxmlformats.org/drawingml/2006/main" prst="rect">
             <a:avLst/>
@@ -1703,25 +1784,25 @@
           <a:lstStyle xmlns:a="http://schemas.openxmlformats.org/drawingml/2006/main"/>
           <a:p xmlns:a="http://schemas.openxmlformats.org/drawingml/2006/main">
             <a:pPr>
-              <a:defRPr sz="3750" b="1">
-                <a:solidFill>
-                  <a:srgbClr val="F2F7FB"/>
-                </a:solidFill>
-                <a:latin typeface="Arial"/>
-                <a:ea typeface="Arial"/>
-                <a:cs typeface="Arial"/>
-              </a:defRPr>
-            </a:pPr>
-            <a:r>
-              <a:rPr sz="3750" b="1">
-                <a:solidFill>
-                  <a:srgbClr val="F2F7FB"/>
-                </a:solidFill>
-                <a:latin typeface="Arial"/>
-                <a:ea typeface="Arial"/>
-                <a:cs typeface="Arial"/>
-              </a:rPr>
-              <a:t>Local AI on Jetson Nano</a:t>
+              <a:defRPr sz="1575" b="1">
+                <a:solidFill>
+                  <a:srgbClr val="397718"/>
+                </a:solidFill>
+                <a:latin typeface="Arial"/>
+                <a:ea typeface="Arial"/>
+                <a:cs typeface="Arial"/>
+              </a:defRPr>
+            </a:pPr>
+            <a:r>
+              <a:rPr sz="1575" b="1">
+                <a:solidFill>
+                  <a:srgbClr val="397718"/>
+                </a:solidFill>
+                <a:latin typeface="Arial"/>
+                <a:ea typeface="Arial"/>
+                <a:cs typeface="Arial"/>
+              </a:rPr>
+              <a:t>LOCAL AI / CLASSROOM EXPERIMENTS</a:t>
             </a:r>
           </a:p>
         </p:txBody>
@@ -1731,7 +1812,7 @@
           <p:cNvPr id="2" name="">
             <a:extLst xmlns:a="http://schemas.openxmlformats.org/drawingml/2006/main">
               <a:ext uri="{FF2B5EF4-FFF2-40B4-BE49-F238E27FC236}">
-                <a16:creationId xmlns:a16="http://schemas.microsoft.com/office/drawing/2014/main" id="{BF709039-A895-4A24-B8D8-0D6993DE0262}"/>
+                <a16:creationId xmlns:a16="http://schemas.microsoft.com/office/drawing/2014/main" id="{AB77F809-9AE7-42B4-B2C8-57DC9D6D7116}"/>
               </a:ext>
             </a:extLst>
           </p:cNvPr>
@@ -1742,8 +1823,8 @@
         </p:nvSpPr>
         <p:spPr>
           <a:xfrm xmlns:a="http://schemas.openxmlformats.org/drawingml/2006/main">
-            <a:off x="647700" y="1362075"/>
-            <a:ext cx="10763250" cy="857250"/>
+            <a:off x="666750" y="1638300"/>
+            <a:ext cx="6000750" cy="1809750"/>
           </a:xfrm>
           <a:prstGeom xmlns:a="http://schemas.openxmlformats.org/drawingml/2006/main" prst="rect">
             <a:avLst/>
@@ -1760,48 +1841,48 @@
           <a:lstStyle xmlns:a="http://schemas.openxmlformats.org/drawingml/2006/main"/>
           <a:p xmlns:a="http://schemas.openxmlformats.org/drawingml/2006/main">
             <a:pPr>
-              <a:defRPr sz="2100" b="0">
-                <a:solidFill>
-                  <a:srgbClr val="76DAC7"/>
-                </a:solidFill>
-                <a:latin typeface="Arial"/>
-                <a:ea typeface="Arial"/>
-                <a:cs typeface="Arial"/>
-              </a:defRPr>
-            </a:pPr>
-            <a:r>
-              <a:rPr sz="2100" b="0">
-                <a:solidFill>
-                  <a:srgbClr val="76DAC7"/>
-                </a:solidFill>
-                <a:latin typeface="Arial"/>
-                <a:ea typeface="Arial"/>
-                <a:cs typeface="Arial"/>
-              </a:rPr>
-              <a:t>25 named experiments for a classroom</a:t>
-            </a:r>
-          </a:p>
-          <a:p xmlns:a="http://schemas.openxmlformats.org/drawingml/2006/main">
-            <a:pPr>
-              <a:defRPr sz="2100" b="0">
-                <a:solidFill>
-                  <a:srgbClr val="76DAC7"/>
-                </a:solidFill>
-                <a:latin typeface="Arial"/>
-                <a:ea typeface="Arial"/>
-                <a:cs typeface="Arial"/>
-              </a:defRPr>
-            </a:pPr>
-            <a:r>
-              <a:rPr sz="2100" b="0">
-                <a:solidFill>
-                  <a:srgbClr val="76DAC7"/>
-                </a:solidFill>
-                <a:latin typeface="Arial"/>
-                <a:ea typeface="Arial"/>
-                <a:cs typeface="Arial"/>
-              </a:rPr>
-              <a:t>Original Nano 4GB, JetPack 4, Python 3.6</a:t>
+              <a:defRPr sz="5700" b="1">
+                <a:solidFill>
+                  <a:srgbClr val="19332A"/>
+                </a:solidFill>
+                <a:latin typeface="Arial"/>
+                <a:ea typeface="Arial"/>
+                <a:cs typeface="Arial"/>
+              </a:defRPr>
+            </a:pPr>
+            <a:r>
+              <a:rPr sz="5700" b="1">
+                <a:solidFill>
+                  <a:srgbClr val="19332A"/>
+                </a:solidFill>
+                <a:latin typeface="Arial"/>
+                <a:ea typeface="Arial"/>
+                <a:cs typeface="Arial"/>
+              </a:rPr>
+              <a:t>Local AI on</a:t>
+            </a:r>
+          </a:p>
+          <a:p xmlns:a="http://schemas.openxmlformats.org/drawingml/2006/main">
+            <a:pPr>
+              <a:defRPr sz="5700" b="1">
+                <a:solidFill>
+                  <a:srgbClr val="19332A"/>
+                </a:solidFill>
+                <a:latin typeface="Arial"/>
+                <a:ea typeface="Arial"/>
+                <a:cs typeface="Arial"/>
+              </a:defRPr>
+            </a:pPr>
+            <a:r>
+              <a:rPr sz="5700" b="1">
+                <a:solidFill>
+                  <a:srgbClr val="19332A"/>
+                </a:solidFill>
+                <a:latin typeface="Arial"/>
+                <a:ea typeface="Arial"/>
+                <a:cs typeface="Arial"/>
+              </a:rPr>
+              <a:t>Jetson Nano</a:t>
             </a:r>
           </a:p>
         </p:txBody>
@@ -1811,7 +1892,7 @@
           <p:cNvPr id="3" name="">
             <a:extLst xmlns:a="http://schemas.openxmlformats.org/drawingml/2006/main">
               <a:ext uri="{FF2B5EF4-FFF2-40B4-BE49-F238E27FC236}">
-                <a16:creationId xmlns:a16="http://schemas.microsoft.com/office/drawing/2014/main" id="{24148F7A-4512-4D6F-8F91-EA5AC414786F}"/>
+                <a16:creationId xmlns:a16="http://schemas.microsoft.com/office/drawing/2014/main" id="{B6BA6D0A-27ED-4EE6-A6FC-13751BB7F949}"/>
               </a:ext>
             </a:extLst>
           </p:cNvPr>
@@ -1822,8 +1903,8 @@
         </p:nvSpPr>
         <p:spPr>
           <a:xfrm xmlns:a="http://schemas.openxmlformats.org/drawingml/2006/main">
-            <a:off x="685800" y="2324100"/>
-            <a:ext cx="10810875" cy="571500"/>
+            <a:off x="723900" y="3714750"/>
+            <a:ext cx="5429250" cy="895350"/>
           </a:xfrm>
           <a:prstGeom xmlns:a="http://schemas.openxmlformats.org/drawingml/2006/main" prst="rect">
             <a:avLst/>
@@ -1840,25 +1921,48 @@
           <a:lstStyle xmlns:a="http://schemas.openxmlformats.org/drawingml/2006/main"/>
           <a:p xmlns:a="http://schemas.openxmlformats.org/drawingml/2006/main">
             <a:pPr>
-              <a:defRPr sz="2100" b="0">
-                <a:solidFill>
-                  <a:srgbClr val="F2F7FB"/>
-                </a:solidFill>
-                <a:latin typeface="Arial"/>
-                <a:ea typeface="Arial"/>
-                <a:cs typeface="Arial"/>
-              </a:defRPr>
-            </a:pPr>
-            <a:r>
-              <a:rPr sz="2100" b="0">
-                <a:solidFill>
-                  <a:srgbClr val="F2F7FB"/>
-                </a:solidFill>
-                <a:latin typeface="Arial"/>
-                <a:ea typeface="Arial"/>
-                <a:cs typeface="Arial"/>
-              </a:rPr>
-              <a:t>Language models, evidence and memory</a:t>
+              <a:defRPr sz="2175" b="0">
+                <a:solidFill>
+                  <a:srgbClr val="52635B"/>
+                </a:solidFill>
+                <a:latin typeface="Arial"/>
+                <a:ea typeface="Arial"/>
+                <a:cs typeface="Arial"/>
+              </a:defRPr>
+            </a:pPr>
+            <a:r>
+              <a:rPr sz="2175" b="0">
+                <a:solidFill>
+                  <a:srgbClr val="52635B"/>
+                </a:solidFill>
+                <a:latin typeface="Arial"/>
+                <a:ea typeface="Arial"/>
+                <a:cs typeface="Arial"/>
+              </a:rPr>
+              <a:t>Explore language, memory and vision</a:t>
+            </a:r>
+          </a:p>
+          <a:p xmlns:a="http://schemas.openxmlformats.org/drawingml/2006/main">
+            <a:pPr>
+              <a:defRPr sz="2175" b="0">
+                <a:solidFill>
+                  <a:srgbClr val="52635B"/>
+                </a:solidFill>
+                <a:latin typeface="Arial"/>
+                <a:ea typeface="Arial"/>
+                <a:cs typeface="Arial"/>
+              </a:defRPr>
+            </a:pPr>
+            <a:r>
+              <a:rPr sz="2175" b="0">
+                <a:solidFill>
+                  <a:srgbClr val="52635B"/>
+                </a:solidFill>
+                <a:latin typeface="Arial"/>
+                <a:ea typeface="Arial"/>
+                <a:cs typeface="Arial"/>
+              </a:rPr>
+              <a:t>with local models and a camera.</a:t>
             </a:r>
           </a:p>
         </p:txBody>
@@ -1868,7 +1972,7 @@
           <p:cNvPr id="4" name="">
             <a:extLst xmlns:a="http://schemas.openxmlformats.org/drawingml/2006/main">
               <a:ext uri="{FF2B5EF4-FFF2-40B4-BE49-F238E27FC236}">
-                <a16:creationId xmlns:a16="http://schemas.microsoft.com/office/drawing/2014/main" id="{7789CA0C-88EF-4F1B-9DBC-3F7591CF5EF0}"/>
+                <a16:creationId xmlns:a16="http://schemas.microsoft.com/office/drawing/2014/main" id="{B6AB0054-8BC7-4A8B-9D6C-82710923E27E}"/>
               </a:ext>
             </a:extLst>
           </p:cNvPr>
@@ -1879,8 +1983,8 @@
         </p:nvSpPr>
         <p:spPr>
           <a:xfrm xmlns:a="http://schemas.openxmlformats.org/drawingml/2006/main">
-            <a:off x="685800" y="2990850"/>
-            <a:ext cx="10810875" cy="571500"/>
+            <a:off x="685800" y="4972050"/>
+            <a:ext cx="1428750" cy="952500"/>
           </a:xfrm>
           <a:prstGeom xmlns:a="http://schemas.openxmlformats.org/drawingml/2006/main" prst="rect">
             <a:avLst/>
@@ -1897,25 +2001,25 @@
           <a:lstStyle xmlns:a="http://schemas.openxmlformats.org/drawingml/2006/main"/>
           <a:p xmlns:a="http://schemas.openxmlformats.org/drawingml/2006/main">
             <a:pPr>
-              <a:defRPr sz="2100" b="0">
-                <a:solidFill>
-                  <a:srgbClr val="F2F7FB"/>
-                </a:solidFill>
-                <a:latin typeface="Arial"/>
-                <a:ea typeface="Arial"/>
-                <a:cs typeface="Arial"/>
-              </a:defRPr>
-            </a:pPr>
-            <a:r>
-              <a:rPr sz="2100" b="0">
-                <a:solidFill>
-                  <a:srgbClr val="F2F7FB"/>
-                </a:solidFill>
-                <a:latin typeface="Arial"/>
-                <a:ea typeface="Arial"/>
-                <a:cs typeface="Arial"/>
-              </a:rPr>
-              <a:t>Interactive camera projects</a:t>
+              <a:defRPr sz="6000" b="1">
+                <a:solidFill>
+                  <a:srgbClr val="397718"/>
+                </a:solidFill>
+                <a:latin typeface="Arial"/>
+                <a:ea typeface="Arial"/>
+                <a:cs typeface="Arial"/>
+              </a:defRPr>
+            </a:pPr>
+            <a:r>
+              <a:rPr sz="6000" b="1">
+                <a:solidFill>
+                  <a:srgbClr val="397718"/>
+                </a:solidFill>
+                <a:latin typeface="Arial"/>
+                <a:ea typeface="Arial"/>
+                <a:cs typeface="Arial"/>
+              </a:rPr>
+              <a:t>27</a:t>
             </a:r>
           </a:p>
         </p:txBody>
@@ -1925,7 +2029,7 @@
           <p:cNvPr id="5" name="">
             <a:extLst xmlns:a="http://schemas.openxmlformats.org/drawingml/2006/main">
               <a:ext uri="{FF2B5EF4-FFF2-40B4-BE49-F238E27FC236}">
-                <a16:creationId xmlns:a16="http://schemas.microsoft.com/office/drawing/2014/main" id="{B882BD6B-B539-43FE-8F30-31ED472CF133}"/>
+                <a16:creationId xmlns:a16="http://schemas.microsoft.com/office/drawing/2014/main" id="{00AD9E32-303F-4F9D-B29E-4536B52A5CE5}"/>
               </a:ext>
             </a:extLst>
           </p:cNvPr>
@@ -1936,8 +2040,8 @@
         </p:nvSpPr>
         <p:spPr>
           <a:xfrm xmlns:a="http://schemas.openxmlformats.org/drawingml/2006/main">
-            <a:off x="685800" y="3657600"/>
-            <a:ext cx="10810875" cy="571500"/>
+            <a:off x="2171700" y="5181600"/>
+            <a:ext cx="3429000" cy="762000"/>
           </a:xfrm>
           <a:prstGeom xmlns:a="http://schemas.openxmlformats.org/drawingml/2006/main" prst="rect">
             <a:avLst/>
@@ -1956,7 +2060,7 @@
             <a:pPr>
               <a:defRPr sz="2100" b="0">
                 <a:solidFill>
-                  <a:srgbClr val="F2F7FB"/>
+                  <a:srgbClr val="19332A"/>
                 </a:solidFill>
                 <a:latin typeface="Arial"/>
                 <a:ea typeface="Arial"/>
@@ -1966,23 +2070,68 @@
             <a:r>
               <a:rPr sz="2100" b="0">
                 <a:solidFill>
-                  <a:srgbClr val="F2F7FB"/>
-                </a:solidFill>
-                <a:latin typeface="Arial"/>
-                <a:ea typeface="Arial"/>
-                <a:cs typeface="Arial"/>
-              </a:rPr>
-              <a:t>One Bash launcher</a:t>
-            </a:r>
-          </a:p>
-        </p:txBody>
-      </p:sp>
-      <p:sp>
-        <p:nvSpPr>
-          <p:cNvPr id="6" name="">
+                  <a:srgbClr val="19332A"/>
+                </a:solidFill>
+                <a:latin typeface="Arial"/>
+                <a:ea typeface="Arial"/>
+                <a:cs typeface="Arial"/>
+              </a:rPr>
+              <a:t>named experiments</a:t>
+            </a:r>
+          </a:p>
+          <a:p xmlns:a="http://schemas.openxmlformats.org/drawingml/2006/main">
+            <a:pPr>
+              <a:defRPr sz="2100" b="0">
+                <a:solidFill>
+                  <a:srgbClr val="19332A"/>
+                </a:solidFill>
+                <a:latin typeface="Arial"/>
+                <a:ea typeface="Arial"/>
+                <a:cs typeface="Arial"/>
+              </a:defRPr>
+            </a:pPr>
+            <a:r>
+              <a:rPr sz="2100" b="0">
+                <a:solidFill>
+                  <a:srgbClr val="19332A"/>
+                </a:solidFill>
+                <a:latin typeface="Arial"/>
+                <a:ea typeface="Arial"/>
+                <a:cs typeface="Arial"/>
+              </a:rPr>
+              <a:t>one Bash launcher</a:t>
+            </a:r>
+          </a:p>
+        </p:txBody>
+      </p:sp>
+      <p:pic>
+        <p:nvPicPr>
+          <p:cNvPr id="13" name=""/>
+          <p:cNvPicPr>
+            <a:picLocks xmlns:a="http://schemas.openxmlformats.org/drawingml/2006/main" noChangeAspect="1"/>
+          </p:cNvPicPr>
+          <p:nvPr/>
+        </p:nvPicPr>
+        <p:blipFill>
+          <a:blip xmlns:r="http://schemas.openxmlformats.org/officeDocument/2006/relationships" xmlns:a="http://schemas.openxmlformats.org/drawingml/2006/main" r:embed="Rc4e22e0fe44447e8"/>
+          <a:stretch xmlns:a="http://schemas.openxmlformats.org/drawingml/2006/main"/>
+        </p:blipFill>
+        <p:spPr>
+          <a:xfrm xmlns:a="http://schemas.openxmlformats.org/drawingml/2006/main">
+            <a:off x="6096000" y="1980009"/>
+            <a:ext cx="5524500" cy="3107531"/>
+          </a:xfrm>
+          <a:prstGeom xmlns:a="http://schemas.openxmlformats.org/drawingml/2006/main" prst="rect">
+            <a:avLst/>
+          </a:prstGeom>
+        </p:spPr>
+      </p:pic>
+      <p:sp>
+        <p:nvSpPr>
+          <p:cNvPr id="7" name="">
             <a:extLst xmlns:a="http://schemas.openxmlformats.org/drawingml/2006/main">
               <a:ext uri="{FF2B5EF4-FFF2-40B4-BE49-F238E27FC236}">
-                <a16:creationId xmlns:a16="http://schemas.microsoft.com/office/drawing/2014/main" id="{9154FB2E-C9DC-4546-AF3A-C707FEE4B53A}"/>
+                <a16:creationId xmlns:a16="http://schemas.microsoft.com/office/drawing/2014/main" id="{F0BC6F1F-F461-4009-A0E1-F4EF8034499C}"/>
               </a:ext>
             </a:extLst>
           </p:cNvPr>
@@ -1993,8 +2142,8 @@
         </p:nvSpPr>
         <p:spPr>
           <a:xfrm xmlns:a="http://schemas.openxmlformats.org/drawingml/2006/main">
-            <a:off x="647700" y="6229350"/>
-            <a:ext cx="10572750" cy="428625"/>
+            <a:off x="714375" y="6286500"/>
+            <a:ext cx="8572500" cy="304800"/>
           </a:xfrm>
           <a:prstGeom xmlns:a="http://schemas.openxmlformats.org/drawingml/2006/main" prst="rect">
             <a:avLst/>
@@ -2013,7 +2162,7 @@
             <a:pPr>
               <a:defRPr sz="1425" b="0">
                 <a:solidFill>
-                  <a:srgbClr val="B6C6D5"/>
+                  <a:srgbClr val="52635B"/>
                 </a:solidFill>
                 <a:latin typeface="Arial"/>
                 <a:ea typeface="Arial"/>
@@ -2023,13 +2172,13 @@
             <a:r>
               <a:rPr sz="1425" b="0">
                 <a:solidFill>
-                  <a:srgbClr val="B6C6D5"/>
-                </a:solidFill>
-                <a:latin typeface="Arial"/>
-                <a:ea typeface="Arial"/>
-                <a:cs typeface="Arial"/>
-              </a:rPr>
-              <a:t>Nano and optional camera only. No external GPU, training, microphone or speaker.</a:t>
+                  <a:srgbClr val="52635B"/>
+                </a:solidFill>
+                <a:latin typeface="Arial"/>
+                <a:ea typeface="Arial"/>
+                <a:cs typeface="Arial"/>
+              </a:rPr>
+              <a:t>Original Nano 4GB, JetPack 4, Python 3.6</a:t>
             </a:r>
           </a:p>
         </p:txBody>
@@ -2037,7 +2186,606 @@
     </p:spTree>
     <p:extLst>
       <p:ext uri="{BB962C8B-B14F-4D97-AF65-F5344CB8AC3E}">
-        <p14:creationId xmlns:p14="http://schemas.microsoft.com/office/powerpoint/2010/main" val="906723375"/>
+        <p14:creationId xmlns:p14="http://schemas.microsoft.com/office/powerpoint/2010/main" val="1809943120"/>
+      </p:ext>
+    </p:extLst>
+  </p:cSld>
+</p:sld>
+</file>
+
+<file path=ppt/slides/slide10.xml><?xml version="1.0" encoding="utf-8"?>
+<p:sld xmlns:p="http://schemas.openxmlformats.org/presentationml/2006/main">
+  <p:cSld>
+    <p:bg>
+      <p:bgPr>
+        <a:solidFill xmlns:a="http://schemas.openxmlformats.org/drawingml/2006/main">
+          <a:srgbClr val="FFFFFF"/>
+        </a:solidFill>
+      </p:bgPr>
+    </p:bg>
+    <p:spTree>
+      <p:nvGrpSpPr>
+        <p:cNvPr id="1" name=""/>
+        <p:cNvGrpSpPr/>
+        <p:nvPr/>
+      </p:nvGrpSpPr>
+      <p:grpSpPr>
+        <a:xfrm xmlns:a="http://schemas.openxmlformats.org/drawingml/2006/main"/>
+      </p:grpSpPr>
+      <p:sp>
+        <p:nvSpPr>
+          <p:cNvPr id="11" name="">
+            <a:extLst xmlns:a="http://schemas.openxmlformats.org/drawingml/2006/main">
+              <a:ext uri="{FF2B5EF4-FFF2-40B4-BE49-F238E27FC236}">
+                <a16:creationId xmlns:a16="http://schemas.microsoft.com/office/drawing/2014/main" id="{C3952B3D-2EDE-4DF9-A5DD-FEDCD7A65305}"/>
+              </a:ext>
+            </a:extLst>
+          </p:cNvPr>
+          <p:cNvSpPr>
+            <a:spLocks xmlns:a="http://schemas.openxmlformats.org/drawingml/2006/main" noGrp="1"/>
+          </p:cNvSpPr>
+          <p:nvPr/>
+        </p:nvSpPr>
+        <p:spPr>
+          <a:xfrm xmlns:a="http://schemas.openxmlformats.org/drawingml/2006/main">
+            <a:off x="628650" y="457200"/>
+            <a:ext cx="10953750" cy="762000"/>
+          </a:xfrm>
+          <a:prstGeom xmlns:a="http://schemas.openxmlformats.org/drawingml/2006/main" prst="rect">
+            <a:avLst/>
+          </a:prstGeom>
+          <a:noFill xmlns:a="http://schemas.openxmlformats.org/drawingml/2006/main"/>
+          <a:ln xmlns:a="http://schemas.openxmlformats.org/drawingml/2006/main" w="0">
+            <a:noFill/>
+          </a:ln>
+        </p:spPr>
+        <p:txBody>
+          <a:bodyPr xmlns:a="http://schemas.openxmlformats.org/drawingml/2006/main">
+            <a:noAutofit/>
+          </a:bodyPr>
+          <a:lstStyle xmlns:a="http://schemas.openxmlformats.org/drawingml/2006/main"/>
+          <a:p xmlns:a="http://schemas.openxmlformats.org/drawingml/2006/main">
+            <a:pPr>
+              <a:defRPr sz="3600" b="1">
+                <a:solidFill>
+                  <a:srgbClr val="19332A"/>
+                </a:solidFill>
+                <a:latin typeface="Arial"/>
+                <a:ea typeface="Arial"/>
+                <a:cs typeface="Arial"/>
+              </a:defRPr>
+            </a:pPr>
+            <a:r>
+              <a:rPr sz="3600" b="1">
+                <a:solidFill>
+                  <a:srgbClr val="19332A"/>
+                </a:solidFill>
+                <a:latin typeface="Arial"/>
+                <a:ea typeface="Arial"/>
+                <a:cs typeface="Arial"/>
+              </a:rPr>
+              <a:t>A classroom sequence</a:t>
+            </a:r>
+          </a:p>
+        </p:txBody>
+      </p:sp>
+      <p:sp>
+        <p:nvSpPr>
+          <p:cNvPr id="2" name="">
+            <a:extLst xmlns:a="http://schemas.openxmlformats.org/drawingml/2006/main">
+              <a:ext uri="{FF2B5EF4-FFF2-40B4-BE49-F238E27FC236}">
+                <a16:creationId xmlns:a16="http://schemas.microsoft.com/office/drawing/2014/main" id="{9DF5FB92-DF7E-49B7-A58B-BBA48F3FDD47}"/>
+              </a:ext>
+            </a:extLst>
+          </p:cNvPr>
+          <p:cNvSpPr>
+            <a:spLocks xmlns:a="http://schemas.openxmlformats.org/drawingml/2006/main" noGrp="1"/>
+          </p:cNvSpPr>
+          <p:nvPr/>
+        </p:nvSpPr>
+        <p:spPr>
+          <a:xfrm xmlns:a="http://schemas.openxmlformats.org/drawingml/2006/main">
+            <a:off x="666750" y="1333500"/>
+            <a:ext cx="10858500" cy="619125"/>
+          </a:xfrm>
+          <a:prstGeom xmlns:a="http://schemas.openxmlformats.org/drawingml/2006/main" prst="rect">
+            <a:avLst/>
+          </a:prstGeom>
+          <a:noFill xmlns:a="http://schemas.openxmlformats.org/drawingml/2006/main"/>
+          <a:ln xmlns:a="http://schemas.openxmlformats.org/drawingml/2006/main" w="0">
+            <a:noFill/>
+          </a:ln>
+        </p:spPr>
+        <p:txBody>
+          <a:bodyPr xmlns:a="http://schemas.openxmlformats.org/drawingml/2006/main">
+            <a:noAutofit/>
+          </a:bodyPr>
+          <a:lstStyle xmlns:a="http://schemas.openxmlformats.org/drawingml/2006/main"/>
+          <a:p xmlns:a="http://schemas.openxmlformats.org/drawingml/2006/main">
+            <a:pPr>
+              <a:defRPr sz="1950" b="0">
+                <a:solidFill>
+                  <a:srgbClr val="52635B"/>
+                </a:solidFill>
+                <a:latin typeface="Arial"/>
+                <a:ea typeface="Arial"/>
+                <a:cs typeface="Arial"/>
+              </a:defRPr>
+            </a:pPr>
+            <a:r>
+              <a:rPr sz="1950" b="0">
+                <a:solidFill>
+                  <a:srgbClr val="52635B"/>
+                </a:solidFill>
+                <a:latin typeface="Arial"/>
+                <a:ea typeface="Arial"/>
+                <a:cs typeface="Arial"/>
+              </a:rPr>
+              <a:t>Choose a few experiments and let the audience steer.</a:t>
+            </a:r>
+          </a:p>
+        </p:txBody>
+      </p:sp>
+      <p:sp>
+        <p:nvSpPr>
+          <p:cNvPr id="3" name="">
+            <a:extLst xmlns:a="http://schemas.openxmlformats.org/drawingml/2006/main">
+              <a:ext uri="{FF2B5EF4-FFF2-40B4-BE49-F238E27FC236}">
+                <a16:creationId xmlns:a16="http://schemas.microsoft.com/office/drawing/2014/main" id="{5252BF21-84FC-489F-AFC7-111D58066FAA}"/>
+              </a:ext>
+            </a:extLst>
+          </p:cNvPr>
+          <p:cNvSpPr>
+            <a:spLocks xmlns:a="http://schemas.openxmlformats.org/drawingml/2006/main" noGrp="1"/>
+          </p:cNvSpPr>
+          <p:nvPr/>
+        </p:nvSpPr>
+        <p:spPr>
+          <a:xfrm xmlns:a="http://schemas.openxmlformats.org/drawingml/2006/main">
+            <a:off x="666750" y="6191250"/>
+            <a:ext cx="10287000" cy="419100"/>
+          </a:xfrm>
+          <a:prstGeom xmlns:a="http://schemas.openxmlformats.org/drawingml/2006/main" prst="rect">
+            <a:avLst/>
+          </a:prstGeom>
+          <a:noFill xmlns:a="http://schemas.openxmlformats.org/drawingml/2006/main"/>
+          <a:ln xmlns:a="http://schemas.openxmlformats.org/drawingml/2006/main" w="0">
+            <a:noFill/>
+          </a:ln>
+        </p:spPr>
+        <p:txBody>
+          <a:bodyPr xmlns:a="http://schemas.openxmlformats.org/drawingml/2006/main">
+            <a:noAutofit/>
+          </a:bodyPr>
+          <a:lstStyle xmlns:a="http://schemas.openxmlformats.org/drawingml/2006/main"/>
+          <a:p xmlns:a="http://schemas.openxmlformats.org/drawingml/2006/main">
+            <a:pPr>
+              <a:defRPr sz="1350" b="0">
+                <a:solidFill>
+                  <a:srgbClr val="52635B"/>
+                </a:solidFill>
+                <a:latin typeface="Arial"/>
+                <a:ea typeface="Arial"/>
+                <a:cs typeface="Arial"/>
+              </a:defRPr>
+            </a:pPr>
+            <a:r>
+              <a:rPr sz="1350" b="0">
+                <a:solidFill>
+                  <a:srgbClr val="52635B"/>
+                </a:solidFill>
+                <a:latin typeface="Arial"/>
+                <a:ea typeface="Arial"/>
+                <a:cs typeface="Arial"/>
+              </a:rPr>
+              <a:t>Start with a conversation, invite a plot twist, then bring the camera into the demonstration.</a:t>
+            </a:r>
+          </a:p>
+        </p:txBody>
+      </p:sp>
+      <p:sp>
+        <p:nvSpPr>
+          <p:cNvPr id="4" name="">
+            <a:extLst xmlns:a="http://schemas.openxmlformats.org/drawingml/2006/main">
+              <a:ext uri="{FF2B5EF4-FFF2-40B4-BE49-F238E27FC236}">
+                <a16:creationId xmlns:a16="http://schemas.microsoft.com/office/drawing/2014/main" id="{33A8B963-5181-492D-B70F-032C96C7ECAA}"/>
+              </a:ext>
+            </a:extLst>
+          </p:cNvPr>
+          <p:cNvSpPr>
+            <a:spLocks xmlns:a="http://schemas.openxmlformats.org/drawingml/2006/main" noGrp="1"/>
+          </p:cNvSpPr>
+          <p:nvPr/>
+        </p:nvSpPr>
+        <p:spPr>
+          <a:xfrm xmlns:a="http://schemas.openxmlformats.org/drawingml/2006/main">
+            <a:off x="11182350" y="6200775"/>
+            <a:ext cx="523875" cy="333375"/>
+          </a:xfrm>
+          <a:prstGeom xmlns:a="http://schemas.openxmlformats.org/drawingml/2006/main" prst="rect">
+            <a:avLst/>
+          </a:prstGeom>
+          <a:noFill xmlns:a="http://schemas.openxmlformats.org/drawingml/2006/main"/>
+          <a:ln xmlns:a="http://schemas.openxmlformats.org/drawingml/2006/main" w="0">
+            <a:noFill/>
+          </a:ln>
+        </p:spPr>
+        <p:txBody>
+          <a:bodyPr xmlns:a="http://schemas.openxmlformats.org/drawingml/2006/main">
+            <a:noAutofit/>
+          </a:bodyPr>
+          <a:lstStyle xmlns:a="http://schemas.openxmlformats.org/drawingml/2006/main"/>
+          <a:p xmlns:a="http://schemas.openxmlformats.org/drawingml/2006/main">
+            <a:pPr>
+              <a:defRPr sz="1350" b="1">
+                <a:solidFill>
+                  <a:srgbClr val="397718"/>
+                </a:solidFill>
+                <a:latin typeface="Arial"/>
+                <a:ea typeface="Arial"/>
+                <a:cs typeface="Arial"/>
+              </a:defRPr>
+            </a:pPr>
+            <a:r>
+              <a:rPr sz="1350" b="1">
+                <a:solidFill>
+                  <a:srgbClr val="397718"/>
+                </a:solidFill>
+                <a:latin typeface="Arial"/>
+                <a:ea typeface="Arial"/>
+                <a:cs typeface="Arial"/>
+              </a:rPr>
+              <a:t>10</a:t>
+            </a:r>
+          </a:p>
+        </p:txBody>
+      </p:sp>
+      <p:sp>
+        <p:nvSpPr>
+          <p:cNvPr id="5" name="">
+            <a:extLst xmlns:a="http://schemas.openxmlformats.org/drawingml/2006/main">
+              <a:ext uri="{FF2B5EF4-FFF2-40B4-BE49-F238E27FC236}">
+                <a16:creationId xmlns:a16="http://schemas.microsoft.com/office/drawing/2014/main" id="{CBE98558-B21D-48A0-95F9-4E3F561C6AD5}"/>
+              </a:ext>
+            </a:extLst>
+          </p:cNvPr>
+          <p:cNvSpPr>
+            <a:spLocks xmlns:a="http://schemas.openxmlformats.org/drawingml/2006/main" noGrp="1"/>
+          </p:cNvSpPr>
+          <p:nvPr/>
+        </p:nvSpPr>
+        <p:spPr>
+          <a:xfrm xmlns:a="http://schemas.openxmlformats.org/drawingml/2006/main">
+            <a:off x="714375" y="2181225"/>
+            <a:ext cx="10287000" cy="476250"/>
+          </a:xfrm>
+          <a:prstGeom xmlns:a="http://schemas.openxmlformats.org/drawingml/2006/main" prst="rect">
+            <a:avLst/>
+          </a:prstGeom>
+          <a:noFill xmlns:a="http://schemas.openxmlformats.org/drawingml/2006/main"/>
+          <a:ln xmlns:a="http://schemas.openxmlformats.org/drawingml/2006/main" w="0">
+            <a:noFill/>
+          </a:ln>
+        </p:spPr>
+        <p:txBody>
+          <a:bodyPr xmlns:a="http://schemas.openxmlformats.org/drawingml/2006/main">
+            <a:noAutofit/>
+          </a:bodyPr>
+          <a:lstStyle xmlns:a="http://schemas.openxmlformats.org/drawingml/2006/main"/>
+          <a:p xmlns:a="http://schemas.openxmlformats.org/drawingml/2006/main">
+            <a:pPr>
+              <a:defRPr sz="2550" b="1">
+                <a:solidFill>
+                  <a:srgbClr val="19332A"/>
+                </a:solidFill>
+                <a:latin typeface="Arial"/>
+                <a:ea typeface="Arial"/>
+                <a:cs typeface="Arial"/>
+              </a:defRPr>
+            </a:pPr>
+            <a:r>
+              <a:rPr sz="2550" b="1">
+                <a:solidFill>
+                  <a:srgbClr val="19332A"/>
+                </a:solidFill>
+                <a:latin typeface="Arial"/>
+                <a:ea typeface="Arial"/>
+                <a:cs typeface="Arial"/>
+              </a:rPr>
+              <a:t>Start with an assistant</a:t>
+            </a:r>
+          </a:p>
+        </p:txBody>
+      </p:sp>
+      <p:sp>
+        <p:nvSpPr>
+          <p:cNvPr id="6" name="">
+            <a:extLst xmlns:a="http://schemas.openxmlformats.org/drawingml/2006/main">
+              <a:ext uri="{FF2B5EF4-FFF2-40B4-BE49-F238E27FC236}">
+                <a16:creationId xmlns:a16="http://schemas.microsoft.com/office/drawing/2014/main" id="{C3EB005F-47B3-4945-8754-EA440C1DF125}"/>
+              </a:ext>
+            </a:extLst>
+          </p:cNvPr>
+          <p:cNvSpPr>
+            <a:spLocks xmlns:a="http://schemas.openxmlformats.org/drawingml/2006/main" noGrp="1"/>
+          </p:cNvSpPr>
+          <p:nvPr/>
+        </p:nvSpPr>
+        <p:spPr>
+          <a:xfrm xmlns:a="http://schemas.openxmlformats.org/drawingml/2006/main">
+            <a:off x="742950" y="2695575"/>
+            <a:ext cx="10668000" cy="476250"/>
+          </a:xfrm>
+          <a:prstGeom xmlns:a="http://schemas.openxmlformats.org/drawingml/2006/main" prst="rect">
+            <a:avLst/>
+          </a:prstGeom>
+          <a:noFill xmlns:a="http://schemas.openxmlformats.org/drawingml/2006/main"/>
+          <a:ln xmlns:a="http://schemas.openxmlformats.org/drawingml/2006/main" w="0">
+            <a:noFill/>
+          </a:ln>
+        </p:spPr>
+        <p:txBody>
+          <a:bodyPr xmlns:a="http://schemas.openxmlformats.org/drawingml/2006/main">
+            <a:noAutofit/>
+          </a:bodyPr>
+          <a:lstStyle xmlns:a="http://schemas.openxmlformats.org/drawingml/2006/main"/>
+          <a:p xmlns:a="http://schemas.openxmlformats.org/drawingml/2006/main">
+            <a:pPr>
+              <a:defRPr sz="1950" b="0">
+                <a:solidFill>
+                  <a:srgbClr val="52635B"/>
+                </a:solidFill>
+                <a:latin typeface="Arial"/>
+                <a:ea typeface="Arial"/>
+                <a:cs typeface="Arial"/>
+              </a:defRPr>
+            </a:pPr>
+            <a:r>
+              <a:rPr sz="1950" b="0">
+                <a:solidFill>
+                  <a:srgbClr val="52635B"/>
+                </a:solidFill>
+                <a:latin typeface="Arial"/>
+                <a:ea typeface="Arial"/>
+                <a:cs typeface="Arial"/>
+              </a:rPr>
+              <a:t>15 Mission Control or 17 Story Director gives students a task to direct.</a:t>
+            </a:r>
+          </a:p>
+        </p:txBody>
+      </p:sp>
+      <p:sp>
+        <p:nvSpPr>
+          <p:cNvPr id="7" name="">
+            <a:extLst xmlns:a="http://schemas.openxmlformats.org/drawingml/2006/main">
+              <a:ext uri="{FF2B5EF4-FFF2-40B4-BE49-F238E27FC236}">
+                <a16:creationId xmlns:a16="http://schemas.microsoft.com/office/drawing/2014/main" id="{19F3F0B1-2928-46D8-9C61-0C6CB34BB256}"/>
+              </a:ext>
+            </a:extLst>
+          </p:cNvPr>
+          <p:cNvSpPr>
+            <a:spLocks xmlns:a="http://schemas.openxmlformats.org/drawingml/2006/main" noGrp="1"/>
+          </p:cNvSpPr>
+          <p:nvPr/>
+        </p:nvSpPr>
+        <p:spPr>
+          <a:xfrm xmlns:a="http://schemas.openxmlformats.org/drawingml/2006/main">
+            <a:off x="714375" y="3457575"/>
+            <a:ext cx="10287000" cy="476250"/>
+          </a:xfrm>
+          <a:prstGeom xmlns:a="http://schemas.openxmlformats.org/drawingml/2006/main" prst="rect">
+            <a:avLst/>
+          </a:prstGeom>
+          <a:noFill xmlns:a="http://schemas.openxmlformats.org/drawingml/2006/main"/>
+          <a:ln xmlns:a="http://schemas.openxmlformats.org/drawingml/2006/main" w="0">
+            <a:noFill/>
+          </a:ln>
+        </p:spPr>
+        <p:txBody>
+          <a:bodyPr xmlns:a="http://schemas.openxmlformats.org/drawingml/2006/main">
+            <a:noAutofit/>
+          </a:bodyPr>
+          <a:lstStyle xmlns:a="http://schemas.openxmlformats.org/drawingml/2006/main"/>
+          <a:p xmlns:a="http://schemas.openxmlformats.org/drawingml/2006/main">
+            <a:pPr>
+              <a:defRPr sz="2550" b="1">
+                <a:solidFill>
+                  <a:srgbClr val="19332A"/>
+                </a:solidFill>
+                <a:latin typeface="Arial"/>
+                <a:ea typeface="Arial"/>
+                <a:cs typeface="Arial"/>
+              </a:defRPr>
+            </a:pPr>
+            <a:r>
+              <a:rPr sz="2550" b="1">
+                <a:solidFill>
+                  <a:srgbClr val="19332A"/>
+                </a:solidFill>
+                <a:latin typeface="Arial"/>
+                <a:ea typeface="Arial"/>
+                <a:cs typeface="Arial"/>
+              </a:rPr>
+              <a:t>Introduce the camera</a:t>
+            </a:r>
+          </a:p>
+        </p:txBody>
+      </p:sp>
+      <p:sp>
+        <p:nvSpPr>
+          <p:cNvPr id="8" name="">
+            <a:extLst xmlns:a="http://schemas.openxmlformats.org/drawingml/2006/main">
+              <a:ext uri="{FF2B5EF4-FFF2-40B4-BE49-F238E27FC236}">
+                <a16:creationId xmlns:a16="http://schemas.microsoft.com/office/drawing/2014/main" id="{56AA2B63-EDA5-4390-A9E2-188B8DE2A074}"/>
+              </a:ext>
+            </a:extLst>
+          </p:cNvPr>
+          <p:cNvSpPr>
+            <a:spLocks xmlns:a="http://schemas.openxmlformats.org/drawingml/2006/main" noGrp="1"/>
+          </p:cNvSpPr>
+          <p:nvPr/>
+        </p:nvSpPr>
+        <p:spPr>
+          <a:xfrm xmlns:a="http://schemas.openxmlformats.org/drawingml/2006/main">
+            <a:off x="742950" y="3971925"/>
+            <a:ext cx="10668000" cy="476250"/>
+          </a:xfrm>
+          <a:prstGeom xmlns:a="http://schemas.openxmlformats.org/drawingml/2006/main" prst="rect">
+            <a:avLst/>
+          </a:prstGeom>
+          <a:noFill xmlns:a="http://schemas.openxmlformats.org/drawingml/2006/main"/>
+          <a:ln xmlns:a="http://schemas.openxmlformats.org/drawingml/2006/main" w="0">
+            <a:noFill/>
+          </a:ln>
+        </p:spPr>
+        <p:txBody>
+          <a:bodyPr xmlns:a="http://schemas.openxmlformats.org/drawingml/2006/main">
+            <a:noAutofit/>
+          </a:bodyPr>
+          <a:lstStyle xmlns:a="http://schemas.openxmlformats.org/drawingml/2006/main"/>
+          <a:p xmlns:a="http://schemas.openxmlformats.org/drawingml/2006/main">
+            <a:pPr>
+              <a:defRPr sz="1950" b="0">
+                <a:solidFill>
+                  <a:srgbClr val="52635B"/>
+                </a:solidFill>
+                <a:latin typeface="Arial"/>
+                <a:ea typeface="Arial"/>
+                <a:cs typeface="Arial"/>
+              </a:defRPr>
+            </a:pPr>
+            <a:r>
+              <a:rPr sz="1950" b="0">
+                <a:solidFill>
+                  <a:srgbClr val="52635B"/>
+                </a:solidFill>
+                <a:latin typeface="Arial"/>
+                <a:ea typeface="Arial"/>
+                <a:cs typeface="Arial"/>
+              </a:rPr>
+              <a:t>18 Scene Memory turns a small change on the desk into evidence to discuss.</a:t>
+            </a:r>
+          </a:p>
+        </p:txBody>
+      </p:sp>
+      <p:sp>
+        <p:nvSpPr>
+          <p:cNvPr id="9" name="">
+            <a:extLst xmlns:a="http://schemas.openxmlformats.org/drawingml/2006/main">
+              <a:ext uri="{FF2B5EF4-FFF2-40B4-BE49-F238E27FC236}">
+                <a16:creationId xmlns:a16="http://schemas.microsoft.com/office/drawing/2014/main" id="{2BD6389B-8CBA-4810-B55D-F1D680D06036}"/>
+              </a:ext>
+            </a:extLst>
+          </p:cNvPr>
+          <p:cNvSpPr>
+            <a:spLocks xmlns:a="http://schemas.openxmlformats.org/drawingml/2006/main" noGrp="1"/>
+          </p:cNvSpPr>
+          <p:nvPr/>
+        </p:nvSpPr>
+        <p:spPr>
+          <a:xfrm xmlns:a="http://schemas.openxmlformats.org/drawingml/2006/main">
+            <a:off x="714375" y="4733925"/>
+            <a:ext cx="10287000" cy="476250"/>
+          </a:xfrm>
+          <a:prstGeom xmlns:a="http://schemas.openxmlformats.org/drawingml/2006/main" prst="rect">
+            <a:avLst/>
+          </a:prstGeom>
+          <a:noFill xmlns:a="http://schemas.openxmlformats.org/drawingml/2006/main"/>
+          <a:ln xmlns:a="http://schemas.openxmlformats.org/drawingml/2006/main" w="0">
+            <a:noFill/>
+          </a:ln>
+        </p:spPr>
+        <p:txBody>
+          <a:bodyPr xmlns:a="http://schemas.openxmlformats.org/drawingml/2006/main">
+            <a:noAutofit/>
+          </a:bodyPr>
+          <a:lstStyle xmlns:a="http://schemas.openxmlformats.org/drawingml/2006/main"/>
+          <a:p xmlns:a="http://schemas.openxmlformats.org/drawingml/2006/main">
+            <a:pPr>
+              <a:defRPr sz="2550" b="1">
+                <a:solidFill>
+                  <a:srgbClr val="19332A"/>
+                </a:solidFill>
+                <a:latin typeface="Arial"/>
+                <a:ea typeface="Arial"/>
+                <a:cs typeface="Arial"/>
+              </a:defRPr>
+            </a:pPr>
+            <a:r>
+              <a:rPr sz="2550" b="1">
+                <a:solidFill>
+                  <a:srgbClr val="19332A"/>
+                </a:solidFill>
+                <a:latin typeface="Arial"/>
+                <a:ea typeface="Arial"/>
+                <a:cs typeface="Arial"/>
+              </a:rPr>
+              <a:t>Recover and repeat</a:t>
+            </a:r>
+          </a:p>
+        </p:txBody>
+      </p:sp>
+      <p:sp>
+        <p:nvSpPr>
+          <p:cNvPr id="10" name="">
+            <a:extLst xmlns:a="http://schemas.openxmlformats.org/drawingml/2006/main">
+              <a:ext uri="{FF2B5EF4-FFF2-40B4-BE49-F238E27FC236}">
+                <a16:creationId xmlns:a16="http://schemas.microsoft.com/office/drawing/2014/main" id="{C23ED6FD-9E21-4643-A903-79C5821F9CFA}"/>
+              </a:ext>
+            </a:extLst>
+          </p:cNvPr>
+          <p:cNvSpPr>
+            <a:spLocks xmlns:a="http://schemas.openxmlformats.org/drawingml/2006/main" noGrp="1"/>
+          </p:cNvSpPr>
+          <p:nvPr/>
+        </p:nvSpPr>
+        <p:spPr>
+          <a:xfrm xmlns:a="http://schemas.openxmlformats.org/drawingml/2006/main">
+            <a:off x="742950" y="5248275"/>
+            <a:ext cx="10668000" cy="619125"/>
+          </a:xfrm>
+          <a:prstGeom xmlns:a="http://schemas.openxmlformats.org/drawingml/2006/main" prst="rect">
+            <a:avLst/>
+          </a:prstGeom>
+          <a:noFill xmlns:a="http://schemas.openxmlformats.org/drawingml/2006/main"/>
+          <a:ln xmlns:a="http://schemas.openxmlformats.org/drawingml/2006/main" w="0">
+            <a:noFill/>
+          </a:ln>
+        </p:spPr>
+        <p:txBody>
+          <a:bodyPr xmlns:a="http://schemas.openxmlformats.org/drawingml/2006/main">
+            <a:noAutofit/>
+          </a:bodyPr>
+          <a:lstStyle xmlns:a="http://schemas.openxmlformats.org/drawingml/2006/main"/>
+          <a:p xmlns:a="http://schemas.openxmlformats.org/drawingml/2006/main">
+            <a:pPr>
+              <a:defRPr sz="1875" b="0">
+                <a:solidFill>
+                  <a:srgbClr val="52635B"/>
+                </a:solidFill>
+                <a:latin typeface="Arial"/>
+                <a:ea typeface="Arial"/>
+                <a:cs typeface="Arial"/>
+              </a:defRPr>
+            </a:pPr>
+            <a:r>
+              <a:rPr sz="1875" b="0">
+                <a:solidFill>
+                  <a:srgbClr val="52635B"/>
+                </a:solidFill>
+                <a:latin typeface="Arial"/>
+                <a:ea typeface="Arial"/>
+                <a:cs typeface="Arial"/>
+              </a:rPr>
+              <a:t>Ctrl+C returns to the menu. 0 exits. 21 runs the prepared demonstration sequence.</a:t>
+            </a:r>
+          </a:p>
+        </p:txBody>
+      </p:sp>
+    </p:spTree>
+    <p:extLst>
+      <p:ext uri="{BB962C8B-B14F-4D97-AF65-F5344CB8AC3E}">
+        <p14:creationId xmlns:p14="http://schemas.microsoft.com/office/powerpoint/2010/main" val="624355846"/>
       </p:ext>
     </p:extLst>
   </p:cSld>
@@ -2050,7 +2798,7 @@
     <p:bg>
       <p:bgPr>
         <a:solidFill xmlns:a="http://schemas.openxmlformats.org/drawingml/2006/main">
-          <a:srgbClr val="0C1825"/>
+          <a:srgbClr val="FFFFFF"/>
         </a:solidFill>
       </p:bgPr>
     </p:bg>
@@ -2065,10 +2813,10 @@
       </p:grpSpPr>
       <p:sp>
         <p:nvSpPr>
-          <p:cNvPr id="8" name="">
+          <p:cNvPr id="14" name="">
             <a:extLst xmlns:a="http://schemas.openxmlformats.org/drawingml/2006/main">
               <a:ext uri="{FF2B5EF4-FFF2-40B4-BE49-F238E27FC236}">
-                <a16:creationId xmlns:a16="http://schemas.microsoft.com/office/drawing/2014/main" id="{5BDAAF39-5269-4439-9F35-BB3AD6F07937}"/>
+                <a16:creationId xmlns:a16="http://schemas.microsoft.com/office/drawing/2014/main" id="{E249BB3B-3496-4B0F-81C3-033DD8A6921B}"/>
               </a:ext>
             </a:extLst>
           </p:cNvPr>
@@ -2079,8 +2827,8 @@
         </p:nvSpPr>
         <p:spPr>
           <a:xfrm xmlns:a="http://schemas.openxmlformats.org/drawingml/2006/main">
-            <a:off x="609600" y="438150"/>
-            <a:ext cx="10934700" cy="857250"/>
+            <a:off x="628650" y="457200"/>
+            <a:ext cx="10953750" cy="762000"/>
           </a:xfrm>
           <a:prstGeom xmlns:a="http://schemas.openxmlformats.org/drawingml/2006/main" prst="rect">
             <a:avLst/>
@@ -2097,25 +2845,25 @@
           <a:lstStyle xmlns:a="http://schemas.openxmlformats.org/drawingml/2006/main"/>
           <a:p xmlns:a="http://schemas.openxmlformats.org/drawingml/2006/main">
             <a:pPr>
-              <a:defRPr sz="3750" b="1">
-                <a:solidFill>
-                  <a:srgbClr val="F2F7FB"/>
-                </a:solidFill>
-                <a:latin typeface="Arial"/>
-                <a:ea typeface="Arial"/>
-                <a:cs typeface="Arial"/>
-              </a:defRPr>
-            </a:pPr>
-            <a:r>
-              <a:rPr sz="3750" b="1">
-                <a:solidFill>
-                  <a:srgbClr val="F2F7FB"/>
-                </a:solidFill>
-                <a:latin typeface="Arial"/>
-                <a:ea typeface="Arial"/>
-                <a:cs typeface="Arial"/>
-              </a:rPr>
-              <a:t>One command, named experiments</a:t>
+              <a:defRPr sz="3600" b="1">
+                <a:solidFill>
+                  <a:srgbClr val="19332A"/>
+                </a:solidFill>
+                <a:latin typeface="Arial"/>
+                <a:ea typeface="Arial"/>
+                <a:cs typeface="Arial"/>
+              </a:defRPr>
+            </a:pPr>
+            <a:r>
+              <a:rPr sz="3600" b="1">
+                <a:solidFill>
+                  <a:srgbClr val="19332A"/>
+                </a:solidFill>
+                <a:latin typeface="Arial"/>
+                <a:ea typeface="Arial"/>
+                <a:cs typeface="Arial"/>
+              </a:rPr>
+              <a:t>Setup and the experiment menu</a:t>
             </a:r>
           </a:p>
         </p:txBody>
@@ -2125,7 +2873,7 @@
           <p:cNvPr id="2" name="">
             <a:extLst xmlns:a="http://schemas.openxmlformats.org/drawingml/2006/main">
               <a:ext uri="{FF2B5EF4-FFF2-40B4-BE49-F238E27FC236}">
-                <a16:creationId xmlns:a16="http://schemas.microsoft.com/office/drawing/2014/main" id="{7ABF45B2-60F2-4230-8357-0A675DCA6D02}"/>
+                <a16:creationId xmlns:a16="http://schemas.microsoft.com/office/drawing/2014/main" id="{7A60ECE8-7FDD-473B-AACA-5C11AB29F4BA}"/>
               </a:ext>
             </a:extLst>
           </p:cNvPr>
@@ -2136,8 +2884,8 @@
         </p:nvSpPr>
         <p:spPr>
           <a:xfrm xmlns:a="http://schemas.openxmlformats.org/drawingml/2006/main">
-            <a:off x="647700" y="1362075"/>
-            <a:ext cx="10763250" cy="857250"/>
+            <a:off x="666750" y="1333500"/>
+            <a:ext cx="10858500" cy="619125"/>
           </a:xfrm>
           <a:prstGeom xmlns:a="http://schemas.openxmlformats.org/drawingml/2006/main" prst="rect">
             <a:avLst/>
@@ -2154,25 +2902,25 @@
           <a:lstStyle xmlns:a="http://schemas.openxmlformats.org/drawingml/2006/main"/>
           <a:p xmlns:a="http://schemas.openxmlformats.org/drawingml/2006/main">
             <a:pPr>
-              <a:defRPr sz="2100" b="0">
-                <a:solidFill>
-                  <a:srgbClr val="76DAC7"/>
-                </a:solidFill>
-                <a:latin typeface="Arial"/>
-                <a:ea typeface="Arial"/>
-                <a:cs typeface="Arial"/>
-              </a:defRPr>
-            </a:pPr>
-            <a:r>
-              <a:rPr sz="2100" b="0">
-                <a:solidFill>
-                  <a:srgbClr val="76DAC7"/>
-                </a:solidFill>
-                <a:latin typeface="Arial"/>
-                <a:ea typeface="Arial"/>
-                <a:cs typeface="Arial"/>
-              </a:rPr>
-              <a:t>Run these commands in a terminal on the Nano</a:t>
+              <a:defRPr sz="1950" b="0">
+                <a:solidFill>
+                  <a:srgbClr val="52635B"/>
+                </a:solidFill>
+                <a:latin typeface="Arial"/>
+                <a:ea typeface="Arial"/>
+                <a:cs typeface="Arial"/>
+              </a:defRPr>
+            </a:pPr>
+            <a:r>
+              <a:rPr sz="1950" b="0">
+                <a:solidFill>
+                  <a:srgbClr val="52635B"/>
+                </a:solidFill>
+                <a:latin typeface="Arial"/>
+                <a:ea typeface="Arial"/>
+                <a:cs typeface="Arial"/>
+              </a:rPr>
+              <a:t>Run these commands in a terminal on the Nano.</a:t>
             </a:r>
           </a:p>
         </p:txBody>
@@ -2182,7 +2930,7 @@
           <p:cNvPr id="3" name="">
             <a:extLst xmlns:a="http://schemas.openxmlformats.org/drawingml/2006/main">
               <a:ext uri="{FF2B5EF4-FFF2-40B4-BE49-F238E27FC236}">
-                <a16:creationId xmlns:a16="http://schemas.microsoft.com/office/drawing/2014/main" id="{09D78A72-4CC6-4149-A880-31BBE4CD13A5}"/>
+                <a16:creationId xmlns:a16="http://schemas.microsoft.com/office/drawing/2014/main" id="{E1B0C650-546B-4D1D-BE08-6B38301F309C}"/>
               </a:ext>
             </a:extLst>
           </p:cNvPr>
@@ -2193,8 +2941,8 @@
         </p:nvSpPr>
         <p:spPr>
           <a:xfrm xmlns:a="http://schemas.openxmlformats.org/drawingml/2006/main">
-            <a:off x="685800" y="2324100"/>
-            <a:ext cx="10810875" cy="571500"/>
+            <a:off x="666750" y="6191250"/>
+            <a:ext cx="10287000" cy="419100"/>
           </a:xfrm>
           <a:prstGeom xmlns:a="http://schemas.openxmlformats.org/drawingml/2006/main" prst="rect">
             <a:avLst/>
@@ -2211,25 +2959,25 @@
           <a:lstStyle xmlns:a="http://schemas.openxmlformats.org/drawingml/2006/main"/>
           <a:p xmlns:a="http://schemas.openxmlformats.org/drawingml/2006/main">
             <a:pPr>
-              <a:defRPr sz="1875" b="0">
-                <a:solidFill>
-                  <a:srgbClr val="F2F7FB"/>
-                </a:solidFill>
-                <a:latin typeface="Arial"/>
-                <a:ea typeface="Arial"/>
-                <a:cs typeface="Arial"/>
-              </a:defRPr>
-            </a:pPr>
-            <a:r>
-              <a:rPr sz="1875" b="0">
-                <a:solidFill>
-                  <a:srgbClr val="F2F7FB"/>
-                </a:solidFill>
-                <a:latin typeface="Arial"/>
-                <a:ea typeface="Arial"/>
-                <a:cs typeface="Arial"/>
-              </a:rPr>
-              <a:t>git clone https://github.com/nileshsarkar-ai/JetsonNano-Demo.git</a:t>
+              <a:defRPr sz="1350" b="0">
+                <a:solidFill>
+                  <a:srgbClr val="52635B"/>
+                </a:solidFill>
+                <a:latin typeface="Arial"/>
+                <a:ea typeface="Arial"/>
+                <a:cs typeface="Arial"/>
+              </a:defRPr>
+            </a:pPr>
+            <a:r>
+              <a:rPr sz="1350" b="0">
+                <a:solidFill>
+                  <a:srgbClr val="52635B"/>
+                </a:solidFill>
+                <a:latin typeface="Arial"/>
+                <a:ea typeface="Arial"/>
+                <a:cs typeface="Arial"/>
+              </a:rPr>
+              <a:t>Prepare once, then choose a local AI experiment by its menu number.</a:t>
             </a:r>
           </a:p>
         </p:txBody>
@@ -2239,7 +2987,7 @@
           <p:cNvPr id="4" name="">
             <a:extLst xmlns:a="http://schemas.openxmlformats.org/drawingml/2006/main">
               <a:ext uri="{FF2B5EF4-FFF2-40B4-BE49-F238E27FC236}">
-                <a16:creationId xmlns:a16="http://schemas.microsoft.com/office/drawing/2014/main" id="{9DE6A5AA-67F9-47F1-8C05-69EE70E0489E}"/>
+                <a16:creationId xmlns:a16="http://schemas.microsoft.com/office/drawing/2014/main" id="{C884B7E3-C81E-4A04-A6E7-0C5452ABD5EB}"/>
               </a:ext>
             </a:extLst>
           </p:cNvPr>
@@ -2250,8 +2998,8 @@
         </p:nvSpPr>
         <p:spPr>
           <a:xfrm xmlns:a="http://schemas.openxmlformats.org/drawingml/2006/main">
-            <a:off x="685800" y="2990850"/>
-            <a:ext cx="10810875" cy="571500"/>
+            <a:off x="11182350" y="6200775"/>
+            <a:ext cx="523875" cy="333375"/>
           </a:xfrm>
           <a:prstGeom xmlns:a="http://schemas.openxmlformats.org/drawingml/2006/main" prst="rect">
             <a:avLst/>
@@ -2268,25 +3016,25 @@
           <a:lstStyle xmlns:a="http://schemas.openxmlformats.org/drawingml/2006/main"/>
           <a:p xmlns:a="http://schemas.openxmlformats.org/drawingml/2006/main">
             <a:pPr>
-              <a:defRPr sz="1875" b="0">
-                <a:solidFill>
-                  <a:srgbClr val="F2F7FB"/>
-                </a:solidFill>
-                <a:latin typeface="Arial"/>
-                <a:ea typeface="Arial"/>
-                <a:cs typeface="Arial"/>
-              </a:defRPr>
-            </a:pPr>
-            <a:r>
-              <a:rPr sz="1875" b="0">
-                <a:solidFill>
-                  <a:srgbClr val="F2F7FB"/>
-                </a:solidFill>
-                <a:latin typeface="Arial"/>
-                <a:ea typeface="Arial"/>
-                <a:cs typeface="Arial"/>
-              </a:rPr>
-              <a:t>cd JetsonNano-Demo</a:t>
+              <a:defRPr sz="1350" b="1">
+                <a:solidFill>
+                  <a:srgbClr val="397718"/>
+                </a:solidFill>
+                <a:latin typeface="Arial"/>
+                <a:ea typeface="Arial"/>
+                <a:cs typeface="Arial"/>
+              </a:defRPr>
+            </a:pPr>
+            <a:r>
+              <a:rPr sz="1350" b="1">
+                <a:solidFill>
+                  <a:srgbClr val="397718"/>
+                </a:solidFill>
+                <a:latin typeface="Arial"/>
+                <a:ea typeface="Arial"/>
+                <a:cs typeface="Arial"/>
+              </a:rPr>
+              <a:t>02</a:t>
             </a:r>
           </a:p>
         </p:txBody>
@@ -2296,7 +3044,7 @@
           <p:cNvPr id="5" name="">
             <a:extLst xmlns:a="http://schemas.openxmlformats.org/drawingml/2006/main">
               <a:ext uri="{FF2B5EF4-FFF2-40B4-BE49-F238E27FC236}">
-                <a16:creationId xmlns:a16="http://schemas.microsoft.com/office/drawing/2014/main" id="{99E78F68-00E6-420B-9FE9-C4E9C492C04F}"/>
+                <a16:creationId xmlns:a16="http://schemas.microsoft.com/office/drawing/2014/main" id="{5912FAA5-619F-4479-BF73-44A2DA90D71F}"/>
               </a:ext>
             </a:extLst>
           </p:cNvPr>
@@ -2307,8 +3055,8 @@
         </p:nvSpPr>
         <p:spPr>
           <a:xfrm xmlns:a="http://schemas.openxmlformats.org/drawingml/2006/main">
-            <a:off x="685800" y="3657600"/>
-            <a:ext cx="10810875" cy="571500"/>
+            <a:off x="723900" y="2305050"/>
+            <a:ext cx="10763250" cy="523875"/>
           </a:xfrm>
           <a:prstGeom xmlns:a="http://schemas.openxmlformats.org/drawingml/2006/main" prst="rect">
             <a:avLst/>
@@ -2327,23 +3075,23 @@
             <a:pPr>
               <a:defRPr sz="1875" b="0">
                 <a:solidFill>
-                  <a:srgbClr val="F2F7FB"/>
-                </a:solidFill>
-                <a:latin typeface="Arial"/>
-                <a:ea typeface="Arial"/>
-                <a:cs typeface="Arial"/>
+                  <a:srgbClr val="19332A"/>
+                </a:solidFill>
+                <a:latin typeface="Courier New"/>
+                <a:ea typeface="Courier New"/>
+                <a:cs typeface="Courier New"/>
               </a:defRPr>
             </a:pPr>
             <a:r>
               <a:rPr sz="1875" b="0">
                 <a:solidFill>
-                  <a:srgbClr val="F2F7FB"/>
-                </a:solidFill>
-                <a:latin typeface="Arial"/>
-                <a:ea typeface="Arial"/>
-                <a:cs typeface="Arial"/>
-              </a:rPr>
-              <a:t>bash scripts/run_demo.sh</a:t>
+                  <a:srgbClr val="19332A"/>
+                </a:solidFill>
+                <a:latin typeface="Courier New"/>
+                <a:ea typeface="Courier New"/>
+                <a:cs typeface="Courier New"/>
+              </a:rPr>
+              <a:t>git clone https://github.com/nileshsarkar-ai/JetsonNano-Demo.git</a:t>
             </a:r>
           </a:p>
         </p:txBody>
@@ -2353,7 +3101,7 @@
           <p:cNvPr id="6" name="">
             <a:extLst xmlns:a="http://schemas.openxmlformats.org/drawingml/2006/main">
               <a:ext uri="{FF2B5EF4-FFF2-40B4-BE49-F238E27FC236}">
-                <a16:creationId xmlns:a16="http://schemas.microsoft.com/office/drawing/2014/main" id="{1FFEF60A-AEB6-46FB-AA5D-AB69D57BC2CC}"/>
+                <a16:creationId xmlns:a16="http://schemas.microsoft.com/office/drawing/2014/main" id="{4DC9035A-760C-440B-BB84-4A63280DF73A}"/>
               </a:ext>
             </a:extLst>
           </p:cNvPr>
@@ -2364,8 +3112,8 @@
         </p:nvSpPr>
         <p:spPr>
           <a:xfrm xmlns:a="http://schemas.openxmlformats.org/drawingml/2006/main">
-            <a:off x="685800" y="4324350"/>
-            <a:ext cx="10810875" cy="571500"/>
+            <a:off x="723900" y="2933700"/>
+            <a:ext cx="10763250" cy="523875"/>
           </a:xfrm>
           <a:prstGeom xmlns:a="http://schemas.openxmlformats.org/drawingml/2006/main" prst="rect">
             <a:avLst/>
@@ -2382,25 +3130,25 @@
           <a:lstStyle xmlns:a="http://schemas.openxmlformats.org/drawingml/2006/main"/>
           <a:p xmlns:a="http://schemas.openxmlformats.org/drawingml/2006/main">
             <a:pPr>
-              <a:defRPr sz="1875" b="0">
-                <a:solidFill>
-                  <a:srgbClr val="F2F7FB"/>
-                </a:solidFill>
-                <a:latin typeface="Arial"/>
-                <a:ea typeface="Arial"/>
-                <a:cs typeface="Arial"/>
-              </a:defRPr>
-            </a:pPr>
-            <a:r>
-              <a:rPr sz="1875" b="0">
-                <a:solidFill>
-                  <a:srgbClr val="F2F7FB"/>
-                </a:solidFill>
-                <a:latin typeface="Arial"/>
-                <a:ea typeface="Arial"/>
-                <a:cs typeface="Arial"/>
-              </a:rPr>
-              <a:t>Setup: 1 prepares dependencies; 2 checks board resources</a:t>
+              <a:defRPr sz="2025" b="0">
+                <a:solidFill>
+                  <a:srgbClr val="19332A"/>
+                </a:solidFill>
+                <a:latin typeface="Courier New"/>
+                <a:ea typeface="Courier New"/>
+                <a:cs typeface="Courier New"/>
+              </a:defRPr>
+            </a:pPr>
+            <a:r>
+              <a:rPr sz="2025" b="0">
+                <a:solidFill>
+                  <a:srgbClr val="19332A"/>
+                </a:solidFill>
+                <a:latin typeface="Courier New"/>
+                <a:ea typeface="Courier New"/>
+                <a:cs typeface="Courier New"/>
+              </a:rPr>
+              <a:t>cd JetsonNano-Demo</a:t>
             </a:r>
           </a:p>
         </p:txBody>
@@ -2410,7 +3158,7 @@
           <p:cNvPr id="7" name="">
             <a:extLst xmlns:a="http://schemas.openxmlformats.org/drawingml/2006/main">
               <a:ext uri="{FF2B5EF4-FFF2-40B4-BE49-F238E27FC236}">
-                <a16:creationId xmlns:a16="http://schemas.microsoft.com/office/drawing/2014/main" id="{0609F068-CDAC-401A-82B8-18CE4D4854B3}"/>
+                <a16:creationId xmlns:a16="http://schemas.microsoft.com/office/drawing/2014/main" id="{BC72FDE0-176F-4EEE-9B6A-926169FE43A2}"/>
               </a:ext>
             </a:extLst>
           </p:cNvPr>
@@ -2421,8 +3169,8 @@
         </p:nvSpPr>
         <p:spPr>
           <a:xfrm xmlns:a="http://schemas.openxmlformats.org/drawingml/2006/main">
-            <a:off x="647700" y="6229350"/>
-            <a:ext cx="10572750" cy="428625"/>
+            <a:off x="723900" y="3562350"/>
+            <a:ext cx="10763250" cy="619125"/>
           </a:xfrm>
           <a:prstGeom xmlns:a="http://schemas.openxmlformats.org/drawingml/2006/main" prst="rect">
             <a:avLst/>
@@ -2439,25 +3187,367 @@
           <a:lstStyle xmlns:a="http://schemas.openxmlformats.org/drawingml/2006/main"/>
           <a:p xmlns:a="http://schemas.openxmlformats.org/drawingml/2006/main">
             <a:pPr>
-              <a:defRPr sz="1425" b="0">
-                <a:solidFill>
-                  <a:srgbClr val="B6C6D5"/>
-                </a:solidFill>
-                <a:latin typeface="Arial"/>
-                <a:ea typeface="Arial"/>
-                <a:cs typeface="Arial"/>
-              </a:defRPr>
-            </a:pPr>
-            <a:r>
-              <a:rPr sz="1425" b="0">
-                <a:solidFill>
-                  <a:srgbClr val="B6C6D5"/>
-                </a:solidFill>
-                <a:latin typeface="Arial"/>
-                <a:ea typeface="Arial"/>
-                <a:cs typeface="Arial"/>
-              </a:rPr>
-              <a:t>Preparation needs Internet. Prepared inference is local. Select a numbered experiment after setup.</a:t>
+              <a:defRPr sz="2550" b="1">
+                <a:solidFill>
+                  <a:srgbClr val="397718"/>
+                </a:solidFill>
+                <a:latin typeface="Courier New"/>
+                <a:ea typeface="Courier New"/>
+                <a:cs typeface="Courier New"/>
+              </a:defRPr>
+            </a:pPr>
+            <a:r>
+              <a:rPr sz="2550" b="1">
+                <a:solidFill>
+                  <a:srgbClr val="397718"/>
+                </a:solidFill>
+                <a:latin typeface="Courier New"/>
+                <a:ea typeface="Courier New"/>
+                <a:cs typeface="Courier New"/>
+              </a:rPr>
+              <a:t>bash scripts/run_demo.sh</a:t>
+            </a:r>
+          </a:p>
+        </p:txBody>
+      </p:sp>
+      <p:sp>
+        <p:nvSpPr>
+          <p:cNvPr id="8" name="">
+            <a:extLst xmlns:a="http://schemas.openxmlformats.org/drawingml/2006/main">
+              <a:ext uri="{FF2B5EF4-FFF2-40B4-BE49-F238E27FC236}">
+                <a16:creationId xmlns:a16="http://schemas.microsoft.com/office/drawing/2014/main" id="{602850A4-3540-42D2-A4DE-0053D8690FA1}"/>
+              </a:ext>
+            </a:extLst>
+          </p:cNvPr>
+          <p:cNvSpPr>
+            <a:spLocks xmlns:a="http://schemas.openxmlformats.org/drawingml/2006/main" noGrp="1"/>
+          </p:cNvSpPr>
+          <p:nvPr/>
+        </p:nvSpPr>
+        <p:spPr>
+          <a:xfrm xmlns:a="http://schemas.openxmlformats.org/drawingml/2006/main">
+            <a:off x="742950" y="4762500"/>
+            <a:ext cx="2571750" cy="476250"/>
+          </a:xfrm>
+          <a:prstGeom xmlns:a="http://schemas.openxmlformats.org/drawingml/2006/main" prst="rect">
+            <a:avLst/>
+          </a:prstGeom>
+          <a:noFill xmlns:a="http://schemas.openxmlformats.org/drawingml/2006/main"/>
+          <a:ln xmlns:a="http://schemas.openxmlformats.org/drawingml/2006/main" w="0">
+            <a:noFill/>
+          </a:ln>
+        </p:spPr>
+        <p:txBody>
+          <a:bodyPr xmlns:a="http://schemas.openxmlformats.org/drawingml/2006/main">
+            <a:noAutofit/>
+          </a:bodyPr>
+          <a:lstStyle xmlns:a="http://schemas.openxmlformats.org/drawingml/2006/main"/>
+          <a:p xmlns:a="http://schemas.openxmlformats.org/drawingml/2006/main">
+            <a:pPr>
+              <a:defRPr sz="2175" b="1">
+                <a:solidFill>
+                  <a:srgbClr val="19332A"/>
+                </a:solidFill>
+                <a:latin typeface="Arial"/>
+                <a:ea typeface="Arial"/>
+                <a:cs typeface="Arial"/>
+              </a:defRPr>
+            </a:pPr>
+            <a:r>
+              <a:rPr sz="2175" b="1">
+                <a:solidFill>
+                  <a:srgbClr val="19332A"/>
+                </a:solidFill>
+                <a:latin typeface="Arial"/>
+                <a:ea typeface="Arial"/>
+                <a:cs typeface="Arial"/>
+              </a:rPr>
+              <a:t>Prepare</a:t>
+            </a:r>
+          </a:p>
+        </p:txBody>
+      </p:sp>
+      <p:sp>
+        <p:nvSpPr>
+          <p:cNvPr id="9" name="">
+            <a:extLst xmlns:a="http://schemas.openxmlformats.org/drawingml/2006/main">
+              <a:ext uri="{FF2B5EF4-FFF2-40B4-BE49-F238E27FC236}">
+                <a16:creationId xmlns:a16="http://schemas.microsoft.com/office/drawing/2014/main" id="{04DC4B2D-9A69-44D8-B0B8-3F56FFB532DF}"/>
+              </a:ext>
+            </a:extLst>
+          </p:cNvPr>
+          <p:cNvSpPr>
+            <a:spLocks xmlns:a="http://schemas.openxmlformats.org/drawingml/2006/main" noGrp="1"/>
+          </p:cNvSpPr>
+          <p:nvPr/>
+        </p:nvSpPr>
+        <p:spPr>
+          <a:xfrm xmlns:a="http://schemas.openxmlformats.org/drawingml/2006/main">
+            <a:off x="742950" y="5248275"/>
+            <a:ext cx="2857500" cy="514350"/>
+          </a:xfrm>
+          <a:prstGeom xmlns:a="http://schemas.openxmlformats.org/drawingml/2006/main" prst="rect">
+            <a:avLst/>
+          </a:prstGeom>
+          <a:noFill xmlns:a="http://schemas.openxmlformats.org/drawingml/2006/main"/>
+          <a:ln xmlns:a="http://schemas.openxmlformats.org/drawingml/2006/main" w="0">
+            <a:noFill/>
+          </a:ln>
+        </p:spPr>
+        <p:txBody>
+          <a:bodyPr xmlns:a="http://schemas.openxmlformats.org/drawingml/2006/main">
+            <a:noAutofit/>
+          </a:bodyPr>
+          <a:lstStyle xmlns:a="http://schemas.openxmlformats.org/drawingml/2006/main"/>
+          <a:p xmlns:a="http://schemas.openxmlformats.org/drawingml/2006/main">
+            <a:pPr>
+              <a:defRPr sz="1800" b="0">
+                <a:solidFill>
+                  <a:srgbClr val="52635B"/>
+                </a:solidFill>
+                <a:latin typeface="Arial"/>
+                <a:ea typeface="Arial"/>
+                <a:cs typeface="Arial"/>
+              </a:defRPr>
+            </a:pPr>
+            <a:r>
+              <a:rPr sz="1800" b="0">
+                <a:solidFill>
+                  <a:srgbClr val="52635B"/>
+                </a:solidFill>
+                <a:latin typeface="Arial"/>
+                <a:ea typeface="Arial"/>
+                <a:cs typeface="Arial"/>
+              </a:rPr>
+              <a:t>Choose 1 before class.</a:t>
+            </a:r>
+          </a:p>
+        </p:txBody>
+      </p:sp>
+      <p:sp>
+        <p:nvSpPr>
+          <p:cNvPr id="10" name="">
+            <a:extLst xmlns:a="http://schemas.openxmlformats.org/drawingml/2006/main">
+              <a:ext uri="{FF2B5EF4-FFF2-40B4-BE49-F238E27FC236}">
+                <a16:creationId xmlns:a16="http://schemas.microsoft.com/office/drawing/2014/main" id="{C2D2093F-4752-4CF0-815C-EB24FDB90871}"/>
+              </a:ext>
+            </a:extLst>
+          </p:cNvPr>
+          <p:cNvSpPr>
+            <a:spLocks xmlns:a="http://schemas.openxmlformats.org/drawingml/2006/main" noGrp="1"/>
+          </p:cNvSpPr>
+          <p:nvPr/>
+        </p:nvSpPr>
+        <p:spPr>
+          <a:xfrm xmlns:a="http://schemas.openxmlformats.org/drawingml/2006/main">
+            <a:off x="4314825" y="4762500"/>
+            <a:ext cx="2571750" cy="476250"/>
+          </a:xfrm>
+          <a:prstGeom xmlns:a="http://schemas.openxmlformats.org/drawingml/2006/main" prst="rect">
+            <a:avLst/>
+          </a:prstGeom>
+          <a:noFill xmlns:a="http://schemas.openxmlformats.org/drawingml/2006/main"/>
+          <a:ln xmlns:a="http://schemas.openxmlformats.org/drawingml/2006/main" w="0">
+            <a:noFill/>
+          </a:ln>
+        </p:spPr>
+        <p:txBody>
+          <a:bodyPr xmlns:a="http://schemas.openxmlformats.org/drawingml/2006/main">
+            <a:noAutofit/>
+          </a:bodyPr>
+          <a:lstStyle xmlns:a="http://schemas.openxmlformats.org/drawingml/2006/main"/>
+          <a:p xmlns:a="http://schemas.openxmlformats.org/drawingml/2006/main">
+            <a:pPr>
+              <a:defRPr sz="2175" b="1">
+                <a:solidFill>
+                  <a:srgbClr val="19332A"/>
+                </a:solidFill>
+                <a:latin typeface="Arial"/>
+                <a:ea typeface="Arial"/>
+                <a:cs typeface="Arial"/>
+              </a:defRPr>
+            </a:pPr>
+            <a:r>
+              <a:rPr sz="2175" b="1">
+                <a:solidFill>
+                  <a:srgbClr val="19332A"/>
+                </a:solidFill>
+                <a:latin typeface="Arial"/>
+                <a:ea typeface="Arial"/>
+                <a:cs typeface="Arial"/>
+              </a:rPr>
+              <a:t>Check</a:t>
+            </a:r>
+          </a:p>
+        </p:txBody>
+      </p:sp>
+      <p:sp>
+        <p:nvSpPr>
+          <p:cNvPr id="11" name="">
+            <a:extLst xmlns:a="http://schemas.openxmlformats.org/drawingml/2006/main">
+              <a:ext uri="{FF2B5EF4-FFF2-40B4-BE49-F238E27FC236}">
+                <a16:creationId xmlns:a16="http://schemas.microsoft.com/office/drawing/2014/main" id="{7668139E-4F1C-4FDB-ACC2-6D2F707743FF}"/>
+              </a:ext>
+            </a:extLst>
+          </p:cNvPr>
+          <p:cNvSpPr>
+            <a:spLocks xmlns:a="http://schemas.openxmlformats.org/drawingml/2006/main" noGrp="1"/>
+          </p:cNvSpPr>
+          <p:nvPr/>
+        </p:nvSpPr>
+        <p:spPr>
+          <a:xfrm xmlns:a="http://schemas.openxmlformats.org/drawingml/2006/main">
+            <a:off x="4314825" y="5248275"/>
+            <a:ext cx="3048000" cy="514350"/>
+          </a:xfrm>
+          <a:prstGeom xmlns:a="http://schemas.openxmlformats.org/drawingml/2006/main" prst="rect">
+            <a:avLst/>
+          </a:prstGeom>
+          <a:noFill xmlns:a="http://schemas.openxmlformats.org/drawingml/2006/main"/>
+          <a:ln xmlns:a="http://schemas.openxmlformats.org/drawingml/2006/main" w="0">
+            <a:noFill/>
+          </a:ln>
+        </p:spPr>
+        <p:txBody>
+          <a:bodyPr xmlns:a="http://schemas.openxmlformats.org/drawingml/2006/main">
+            <a:noAutofit/>
+          </a:bodyPr>
+          <a:lstStyle xmlns:a="http://schemas.openxmlformats.org/drawingml/2006/main"/>
+          <a:p xmlns:a="http://schemas.openxmlformats.org/drawingml/2006/main">
+            <a:pPr>
+              <a:defRPr sz="1800" b="0">
+                <a:solidFill>
+                  <a:srgbClr val="52635B"/>
+                </a:solidFill>
+                <a:latin typeface="Arial"/>
+                <a:ea typeface="Arial"/>
+                <a:cs typeface="Arial"/>
+              </a:defRPr>
+            </a:pPr>
+            <a:r>
+              <a:rPr sz="1800" b="0">
+                <a:solidFill>
+                  <a:srgbClr val="52635B"/>
+                </a:solidFill>
+                <a:latin typeface="Arial"/>
+                <a:ea typeface="Arial"/>
+                <a:cs typeface="Arial"/>
+              </a:rPr>
+              <a:t>Choose 2 for board status.</a:t>
+            </a:r>
+          </a:p>
+        </p:txBody>
+      </p:sp>
+      <p:sp>
+        <p:nvSpPr>
+          <p:cNvPr id="12" name="">
+            <a:extLst xmlns:a="http://schemas.openxmlformats.org/drawingml/2006/main">
+              <a:ext uri="{FF2B5EF4-FFF2-40B4-BE49-F238E27FC236}">
+                <a16:creationId xmlns:a16="http://schemas.microsoft.com/office/drawing/2014/main" id="{EA006D79-F7E9-4330-ADF8-EFA14E2A90F5}"/>
+              </a:ext>
+            </a:extLst>
+          </p:cNvPr>
+          <p:cNvSpPr>
+            <a:spLocks xmlns:a="http://schemas.openxmlformats.org/drawingml/2006/main" noGrp="1"/>
+          </p:cNvSpPr>
+          <p:nvPr/>
+        </p:nvSpPr>
+        <p:spPr>
+          <a:xfrm xmlns:a="http://schemas.openxmlformats.org/drawingml/2006/main">
+            <a:off x="8039100" y="4762500"/>
+            <a:ext cx="3143250" cy="476250"/>
+          </a:xfrm>
+          <a:prstGeom xmlns:a="http://schemas.openxmlformats.org/drawingml/2006/main" prst="rect">
+            <a:avLst/>
+          </a:prstGeom>
+          <a:noFill xmlns:a="http://schemas.openxmlformats.org/drawingml/2006/main"/>
+          <a:ln xmlns:a="http://schemas.openxmlformats.org/drawingml/2006/main" w="0">
+            <a:noFill/>
+          </a:ln>
+        </p:spPr>
+        <p:txBody>
+          <a:bodyPr xmlns:a="http://schemas.openxmlformats.org/drawingml/2006/main">
+            <a:noAutofit/>
+          </a:bodyPr>
+          <a:lstStyle xmlns:a="http://schemas.openxmlformats.org/drawingml/2006/main"/>
+          <a:p xmlns:a="http://schemas.openxmlformats.org/drawingml/2006/main">
+            <a:pPr>
+              <a:defRPr sz="2175" b="1">
+                <a:solidFill>
+                  <a:srgbClr val="19332A"/>
+                </a:solidFill>
+                <a:latin typeface="Arial"/>
+                <a:ea typeface="Arial"/>
+                <a:cs typeface="Arial"/>
+              </a:defRPr>
+            </a:pPr>
+            <a:r>
+              <a:rPr sz="2175" b="1">
+                <a:solidFill>
+                  <a:srgbClr val="19332A"/>
+                </a:solidFill>
+                <a:latin typeface="Arial"/>
+                <a:ea typeface="Arial"/>
+                <a:cs typeface="Arial"/>
+              </a:rPr>
+              <a:t>Explore</a:t>
+            </a:r>
+          </a:p>
+        </p:txBody>
+      </p:sp>
+      <p:sp>
+        <p:nvSpPr>
+          <p:cNvPr id="13" name="">
+            <a:extLst xmlns:a="http://schemas.openxmlformats.org/drawingml/2006/main">
+              <a:ext uri="{FF2B5EF4-FFF2-40B4-BE49-F238E27FC236}">
+                <a16:creationId xmlns:a16="http://schemas.microsoft.com/office/drawing/2014/main" id="{5CD72529-7107-455A-A1DC-6269ABD027E5}"/>
+              </a:ext>
+            </a:extLst>
+          </p:cNvPr>
+          <p:cNvSpPr>
+            <a:spLocks xmlns:a="http://schemas.openxmlformats.org/drawingml/2006/main" noGrp="1"/>
+          </p:cNvSpPr>
+          <p:nvPr/>
+        </p:nvSpPr>
+        <p:spPr>
+          <a:xfrm xmlns:a="http://schemas.openxmlformats.org/drawingml/2006/main">
+            <a:off x="8039100" y="5248275"/>
+            <a:ext cx="3333750" cy="619125"/>
+          </a:xfrm>
+          <a:prstGeom xmlns:a="http://schemas.openxmlformats.org/drawingml/2006/main" prst="rect">
+            <a:avLst/>
+          </a:prstGeom>
+          <a:noFill xmlns:a="http://schemas.openxmlformats.org/drawingml/2006/main"/>
+          <a:ln xmlns:a="http://schemas.openxmlformats.org/drawingml/2006/main" w="0">
+            <a:noFill/>
+          </a:ln>
+        </p:spPr>
+        <p:txBody>
+          <a:bodyPr xmlns:a="http://schemas.openxmlformats.org/drawingml/2006/main">
+            <a:noAutofit/>
+          </a:bodyPr>
+          <a:lstStyle xmlns:a="http://schemas.openxmlformats.org/drawingml/2006/main"/>
+          <a:p xmlns:a="http://schemas.openxmlformats.org/drawingml/2006/main">
+            <a:pPr>
+              <a:defRPr sz="1800" b="0">
+                <a:solidFill>
+                  <a:srgbClr val="52635B"/>
+                </a:solidFill>
+                <a:latin typeface="Arial"/>
+                <a:ea typeface="Arial"/>
+                <a:cs typeface="Arial"/>
+              </a:defRPr>
+            </a:pPr>
+            <a:r>
+              <a:rPr sz="1800" b="0">
+                <a:solidFill>
+                  <a:srgbClr val="52635B"/>
+                </a:solidFill>
+                <a:latin typeface="Arial"/>
+                <a:ea typeface="Arial"/>
+                <a:cs typeface="Arial"/>
+              </a:rPr>
+              <a:t>Select any experiment number.</a:t>
             </a:r>
           </a:p>
         </p:txBody>
@@ -2465,7 +3555,7 @@
     </p:spTree>
     <p:extLst>
       <p:ext uri="{BB962C8B-B14F-4D97-AF65-F5344CB8AC3E}">
-        <p14:creationId xmlns:p14="http://schemas.microsoft.com/office/powerpoint/2010/main" val="2032050093"/>
+        <p14:creationId xmlns:p14="http://schemas.microsoft.com/office/powerpoint/2010/main" val="801142662"/>
       </p:ext>
     </p:extLst>
   </p:cSld>
@@ -2478,7 +3568,7 @@
     <p:bg>
       <p:bgPr>
         <a:solidFill xmlns:a="http://schemas.openxmlformats.org/drawingml/2006/main">
-          <a:srgbClr val="0C1825"/>
+          <a:srgbClr val="FFFFFF"/>
         </a:solidFill>
       </p:bgPr>
     </p:bg>
@@ -2493,10 +3583,10 @@
       </p:grpSpPr>
       <p:sp>
         <p:nvSpPr>
-          <p:cNvPr id="9" name="">
+          <p:cNvPr id="13" name="">
             <a:extLst xmlns:a="http://schemas.openxmlformats.org/drawingml/2006/main">
               <a:ext uri="{FF2B5EF4-FFF2-40B4-BE49-F238E27FC236}">
-                <a16:creationId xmlns:a16="http://schemas.microsoft.com/office/drawing/2014/main" id="{4CBC969A-60B9-4D7B-9337-E5BAD19D409C}"/>
+                <a16:creationId xmlns:a16="http://schemas.microsoft.com/office/drawing/2014/main" id="{250E9F42-3427-4566-BB27-DA649C0919D7}"/>
               </a:ext>
             </a:extLst>
           </p:cNvPr>
@@ -2507,8 +3597,8 @@
         </p:nvSpPr>
         <p:spPr>
           <a:xfrm xmlns:a="http://schemas.openxmlformats.org/drawingml/2006/main">
-            <a:off x="609600" y="438150"/>
-            <a:ext cx="10934700" cy="857250"/>
+            <a:off x="628650" y="457200"/>
+            <a:ext cx="10953750" cy="762000"/>
           </a:xfrm>
           <a:prstGeom xmlns:a="http://schemas.openxmlformats.org/drawingml/2006/main" prst="rect">
             <a:avLst/>
@@ -2525,25 +3615,25 @@
           <a:lstStyle xmlns:a="http://schemas.openxmlformats.org/drawingml/2006/main"/>
           <a:p xmlns:a="http://schemas.openxmlformats.org/drawingml/2006/main">
             <a:pPr>
-              <a:defRPr sz="3750" b="1">
-                <a:solidFill>
-                  <a:srgbClr val="F2F7FB"/>
-                </a:solidFill>
-                <a:latin typeface="Arial"/>
-                <a:ea typeface="Arial"/>
-                <a:cs typeface="Arial"/>
-              </a:defRPr>
-            </a:pPr>
-            <a:r>
-              <a:rPr sz="3750" b="1">
-                <a:solidFill>
-                  <a:srgbClr val="F2F7FB"/>
-                </a:solidFill>
-                <a:latin typeface="Arial"/>
-                <a:ea typeface="Arial"/>
-                <a:cs typeface="Arial"/>
-              </a:rPr>
-              <a:t>Assistants with inspectable evidence</a:t>
+              <a:defRPr sz="3600" b="1">
+                <a:solidFill>
+                  <a:srgbClr val="19332A"/>
+                </a:solidFill>
+                <a:latin typeface="Arial"/>
+                <a:ea typeface="Arial"/>
+                <a:cs typeface="Arial"/>
+              </a:defRPr>
+            </a:pPr>
+            <a:r>
+              <a:rPr sz="3600" b="1">
+                <a:solidFill>
+                  <a:srgbClr val="19332A"/>
+                </a:solidFill>
+                <a:latin typeface="Arial"/>
+                <a:ea typeface="Arial"/>
+                <a:cs typeface="Arial"/>
+              </a:rPr>
+              <a:t>Conversations that involve the class</a:t>
             </a:r>
           </a:p>
         </p:txBody>
@@ -2553,7 +3643,7 @@
           <p:cNvPr id="2" name="">
             <a:extLst xmlns:a="http://schemas.openxmlformats.org/drawingml/2006/main">
               <a:ext uri="{FF2B5EF4-FFF2-40B4-BE49-F238E27FC236}">
-                <a16:creationId xmlns:a16="http://schemas.microsoft.com/office/drawing/2014/main" id="{B39F3CF7-B64C-4607-8B7A-82E7D581B386}"/>
+                <a16:creationId xmlns:a16="http://schemas.microsoft.com/office/drawing/2014/main" id="{2D4EA3AB-3FD3-415A-A1CB-102F550EC9A8}"/>
               </a:ext>
             </a:extLst>
           </p:cNvPr>
@@ -2564,8 +3654,8 @@
         </p:nvSpPr>
         <p:spPr>
           <a:xfrm xmlns:a="http://schemas.openxmlformats.org/drawingml/2006/main">
-            <a:off x="647700" y="1362075"/>
-            <a:ext cx="10763250" cy="857250"/>
+            <a:off x="666750" y="1333500"/>
+            <a:ext cx="10858500" cy="619125"/>
           </a:xfrm>
           <a:prstGeom xmlns:a="http://schemas.openxmlformats.org/drawingml/2006/main" prst="rect">
             <a:avLst/>
@@ -2582,25 +3672,25 @@
           <a:lstStyle xmlns:a="http://schemas.openxmlformats.org/drawingml/2006/main"/>
           <a:p xmlns:a="http://schemas.openxmlformats.org/drawingml/2006/main">
             <a:pPr>
-              <a:defRPr sz="2100" b="0">
-                <a:solidFill>
-                  <a:srgbClr val="76DAC7"/>
-                </a:solidFill>
-                <a:latin typeface="Arial"/>
-                <a:ea typeface="Arial"/>
-                <a:cs typeface="Arial"/>
-              </a:defRPr>
-            </a:pPr>
-            <a:r>
-              <a:rPr sz="2100" b="0">
-                <a:solidFill>
-                  <a:srgbClr val="76DAC7"/>
-                </a:solidFill>
-                <a:latin typeface="Arial"/>
-                <a:ea typeface="Arial"/>
-                <a:cs typeface="Arial"/>
-              </a:rPr>
-              <a:t>Students can inspect the information behind the answer</a:t>
+              <a:defRPr sz="1950" b="0">
+                <a:solidFill>
+                  <a:srgbClr val="52635B"/>
+                </a:solidFill>
+                <a:latin typeface="Arial"/>
+                <a:ea typeface="Arial"/>
+                <a:cs typeface="Arial"/>
+              </a:defRPr>
+            </a:pPr>
+            <a:r>
+              <a:rPr sz="1950" b="0">
+                <a:solidFill>
+                  <a:srgbClr val="52635B"/>
+                </a:solidFill>
+                <a:latin typeface="Arial"/>
+                <a:ea typeface="Arial"/>
+                <a:cs typeface="Arial"/>
+              </a:rPr>
+              <a:t>Students take the next turn and shape what happens.</a:t>
             </a:r>
           </a:p>
         </p:txBody>
@@ -2610,7 +3700,7 @@
           <p:cNvPr id="3" name="">
             <a:extLst xmlns:a="http://schemas.openxmlformats.org/drawingml/2006/main">
               <a:ext uri="{FF2B5EF4-FFF2-40B4-BE49-F238E27FC236}">
-                <a16:creationId xmlns:a16="http://schemas.microsoft.com/office/drawing/2014/main" id="{6A1C8EBC-5170-4687-B3F6-4F7B094B9277}"/>
+                <a16:creationId xmlns:a16="http://schemas.microsoft.com/office/drawing/2014/main" id="{0D195F22-FDBC-4B14-AD10-B623A09107B5}"/>
               </a:ext>
             </a:extLst>
           </p:cNvPr>
@@ -2621,8 +3711,8 @@
         </p:nvSpPr>
         <p:spPr>
           <a:xfrm xmlns:a="http://schemas.openxmlformats.org/drawingml/2006/main">
-            <a:off x="685800" y="2324100"/>
-            <a:ext cx="10810875" cy="571500"/>
+            <a:off x="666750" y="6191250"/>
+            <a:ext cx="10287000" cy="419100"/>
           </a:xfrm>
           <a:prstGeom xmlns:a="http://schemas.openxmlformats.org/drawingml/2006/main" prst="rect">
             <a:avLst/>
@@ -2639,25 +3729,25 @@
           <a:lstStyle xmlns:a="http://schemas.openxmlformats.org/drawingml/2006/main"/>
           <a:p xmlns:a="http://schemas.openxmlformats.org/drawingml/2006/main">
             <a:pPr>
-              <a:defRPr sz="2100" b="0">
-                <a:solidFill>
-                  <a:srgbClr val="F2F7FB"/>
-                </a:solidFill>
-                <a:latin typeface="Arial"/>
-                <a:ea typeface="Arial"/>
-                <a:cs typeface="Arial"/>
-              </a:defRPr>
-            </a:pPr>
-            <a:r>
-              <a:rPr sz="2100" b="0">
-                <a:solidFill>
-                  <a:srgbClr val="F2F7FB"/>
-                </a:solidFill>
-                <a:latin typeface="Arial"/>
-                <a:ea typeface="Arial"/>
-                <a:cs typeface="Arial"/>
-              </a:rPr>
-              <a:t>Experiment 15: Mission Control: Tool-Planning Assistant</a:t>
+              <a:defRPr sz="1350" b="0">
+                <a:solidFill>
+                  <a:srgbClr val="52635B"/>
+                </a:solidFill>
+                <a:latin typeface="Arial"/>
+                <a:ea typeface="Arial"/>
+                <a:cs typeface="Arial"/>
+              </a:defRPr>
+            </a:pPr>
+            <a:r>
+              <a:rPr sz="1350" b="0">
+                <a:solidFill>
+                  <a:srgbClr val="52635B"/>
+                </a:solidFill>
+                <a:latin typeface="Arial"/>
+                <a:ea typeface="Arial"/>
+                <a:cs typeface="Arial"/>
+              </a:rPr>
+              <a:t>Type /quit to return to the menu. Each conversation uses the earlier turns.</a:t>
             </a:r>
           </a:p>
         </p:txBody>
@@ -2667,7 +3757,7 @@
           <p:cNvPr id="4" name="">
             <a:extLst xmlns:a="http://schemas.openxmlformats.org/drawingml/2006/main">
               <a:ext uri="{FF2B5EF4-FFF2-40B4-BE49-F238E27FC236}">
-                <a16:creationId xmlns:a16="http://schemas.microsoft.com/office/drawing/2014/main" id="{3484334D-D40C-4DDE-8FCE-E3D0F6148023}"/>
+                <a16:creationId xmlns:a16="http://schemas.microsoft.com/office/drawing/2014/main" id="{D951B7C6-896E-445F-883B-194538FD62BD}"/>
               </a:ext>
             </a:extLst>
           </p:cNvPr>
@@ -2678,8 +3768,8 @@
         </p:nvSpPr>
         <p:spPr>
           <a:xfrm xmlns:a="http://schemas.openxmlformats.org/drawingml/2006/main">
-            <a:off x="685800" y="2990850"/>
-            <a:ext cx="10810875" cy="571500"/>
+            <a:off x="11182350" y="6200775"/>
+            <a:ext cx="523875" cy="333375"/>
           </a:xfrm>
           <a:prstGeom xmlns:a="http://schemas.openxmlformats.org/drawingml/2006/main" prst="rect">
             <a:avLst/>
@@ -2696,25 +3786,25 @@
           <a:lstStyle xmlns:a="http://schemas.openxmlformats.org/drawingml/2006/main"/>
           <a:p xmlns:a="http://schemas.openxmlformats.org/drawingml/2006/main">
             <a:pPr>
-              <a:defRPr sz="2100" b="0">
-                <a:solidFill>
-                  <a:srgbClr val="F2F7FB"/>
-                </a:solidFill>
-                <a:latin typeface="Arial"/>
-                <a:ea typeface="Arial"/>
-                <a:cs typeface="Arial"/>
-              </a:defRPr>
-            </a:pPr>
-            <a:r>
-              <a:rPr sz="2100" b="0">
-                <a:solidFill>
-                  <a:srgbClr val="F2F7FB"/>
-                </a:solidFill>
-                <a:latin typeface="Arial"/>
-                <a:ea typeface="Arial"/>
-                <a:cs typeface="Arial"/>
-              </a:rPr>
-              <a:t>Experiment 16: Document Detective: Answers with Evidence</a:t>
+              <a:defRPr sz="1350" b="1">
+                <a:solidFill>
+                  <a:srgbClr val="397718"/>
+                </a:solidFill>
+                <a:latin typeface="Arial"/>
+                <a:ea typeface="Arial"/>
+                <a:cs typeface="Arial"/>
+              </a:defRPr>
+            </a:pPr>
+            <a:r>
+              <a:rPr sz="1350" b="1">
+                <a:solidFill>
+                  <a:srgbClr val="397718"/>
+                </a:solidFill>
+                <a:latin typeface="Arial"/>
+                <a:ea typeface="Arial"/>
+                <a:cs typeface="Arial"/>
+              </a:rPr>
+              <a:t>03</a:t>
             </a:r>
           </a:p>
         </p:txBody>
@@ -2724,7 +3814,7 @@
           <p:cNvPr id="5" name="">
             <a:extLst xmlns:a="http://schemas.openxmlformats.org/drawingml/2006/main">
               <a:ext uri="{FF2B5EF4-FFF2-40B4-BE49-F238E27FC236}">
-                <a16:creationId xmlns:a16="http://schemas.microsoft.com/office/drawing/2014/main" id="{FB31F3D1-913A-4F7E-A15C-5FAF6F0631DD}"/>
+                <a16:creationId xmlns:a16="http://schemas.microsoft.com/office/drawing/2014/main" id="{457974C2-9E85-4C7E-B2F1-6294349D8F0C}"/>
               </a:ext>
             </a:extLst>
           </p:cNvPr>
@@ -2735,8 +3825,8 @@
         </p:nvSpPr>
         <p:spPr>
           <a:xfrm xmlns:a="http://schemas.openxmlformats.org/drawingml/2006/main">
-            <a:off x="685800" y="3657600"/>
-            <a:ext cx="10810875" cy="571500"/>
+            <a:off x="714375" y="2133600"/>
+            <a:ext cx="4857750" cy="381000"/>
           </a:xfrm>
           <a:prstGeom xmlns:a="http://schemas.openxmlformats.org/drawingml/2006/main" prst="rect">
             <a:avLst/>
@@ -2753,25 +3843,25 @@
           <a:lstStyle xmlns:a="http://schemas.openxmlformats.org/drawingml/2006/main"/>
           <a:p xmlns:a="http://schemas.openxmlformats.org/drawingml/2006/main">
             <a:pPr>
-              <a:defRPr sz="2100" b="0">
-                <a:solidFill>
-                  <a:srgbClr val="F2F7FB"/>
-                </a:solidFill>
-                <a:latin typeface="Arial"/>
-                <a:ea typeface="Arial"/>
-                <a:cs typeface="Arial"/>
-              </a:defRPr>
-            </a:pPr>
-            <a:r>
-              <a:rPr sz="2100" b="0">
-                <a:solidFill>
-                  <a:srgbClr val="F2F7FB"/>
-                </a:solidFill>
-                <a:latin typeface="Arial"/>
-                <a:ea typeface="Arial"/>
-                <a:cs typeface="Arial"/>
-              </a:rPr>
-              <a:t>Experiment 9: Persistent Memory Assistant</a:t>
+              <a:defRPr sz="1650" b="1">
+                <a:solidFill>
+                  <a:srgbClr val="397718"/>
+                </a:solidFill>
+                <a:latin typeface="Arial"/>
+                <a:ea typeface="Arial"/>
+                <a:cs typeface="Arial"/>
+              </a:defRPr>
+            </a:pPr>
+            <a:r>
+              <a:rPr sz="1650" b="1">
+                <a:solidFill>
+                  <a:srgbClr val="397718"/>
+                </a:solidFill>
+                <a:latin typeface="Arial"/>
+                <a:ea typeface="Arial"/>
+                <a:cs typeface="Arial"/>
+              </a:rPr>
+              <a:t>Experiment 29</a:t>
             </a:r>
           </a:p>
         </p:txBody>
@@ -2781,7 +3871,7 @@
           <p:cNvPr id="6" name="">
             <a:extLst xmlns:a="http://schemas.openxmlformats.org/drawingml/2006/main">
               <a:ext uri="{FF2B5EF4-FFF2-40B4-BE49-F238E27FC236}">
-                <a16:creationId xmlns:a16="http://schemas.microsoft.com/office/drawing/2014/main" id="{E5BB118E-F399-4CF4-A858-8EF4E77E7EC5}"/>
+                <a16:creationId xmlns:a16="http://schemas.microsoft.com/office/drawing/2014/main" id="{BAC11B37-8E08-4BDC-981F-A44250A289D1}"/>
               </a:ext>
             </a:extLst>
           </p:cNvPr>
@@ -2792,8 +3882,8 @@
         </p:nvSpPr>
         <p:spPr>
           <a:xfrm xmlns:a="http://schemas.openxmlformats.org/drawingml/2006/main">
-            <a:off x="685800" y="4324350"/>
-            <a:ext cx="10810875" cy="571500"/>
+            <a:off x="714375" y="2686050"/>
+            <a:ext cx="5095875" cy="904875"/>
           </a:xfrm>
           <a:prstGeom xmlns:a="http://schemas.openxmlformats.org/drawingml/2006/main" prst="rect">
             <a:avLst/>
@@ -2810,25 +3900,25 @@
           <a:lstStyle xmlns:a="http://schemas.openxmlformats.org/drawingml/2006/main"/>
           <a:p xmlns:a="http://schemas.openxmlformats.org/drawingml/2006/main">
             <a:pPr>
-              <a:defRPr sz="2100" b="0">
-                <a:solidFill>
-                  <a:srgbClr val="F2F7FB"/>
-                </a:solidFill>
-                <a:latin typeface="Arial"/>
-                <a:ea typeface="Arial"/>
-                <a:cs typeface="Arial"/>
-              </a:defRPr>
-            </a:pPr>
-            <a:r>
-              <a:rPr sz="2100" b="0">
-                <a:solidFill>
-                  <a:srgbClr val="F2F7FB"/>
-                </a:solidFill>
-                <a:latin typeface="Arial"/>
-                <a:ea typeface="Arial"/>
-                <a:cs typeface="Arial"/>
-              </a:rPr>
-              <a:t>Experiment 8: Class Notes Retrieval and Grounded Answers</a:t>
+              <a:defRPr sz="2850" b="1">
+                <a:solidFill>
+                  <a:srgbClr val="19332A"/>
+                </a:solidFill>
+                <a:latin typeface="Arial"/>
+                <a:ea typeface="Arial"/>
+                <a:cs typeface="Arial"/>
+              </a:defRPr>
+            </a:pPr>
+            <a:r>
+              <a:rPr sz="2850" b="1">
+                <a:solidFill>
+                  <a:srgbClr val="19332A"/>
+                </a:solidFill>
+                <a:latin typeface="Arial"/>
+                <a:ea typeface="Arial"/>
+                <a:cs typeface="Arial"/>
+              </a:rPr>
+              <a:t>Socratic Study Partner</a:t>
             </a:r>
           </a:p>
         </p:txBody>
@@ -2838,7 +3928,7 @@
           <p:cNvPr id="7" name="">
             <a:extLst xmlns:a="http://schemas.openxmlformats.org/drawingml/2006/main">
               <a:ext uri="{FF2B5EF4-FFF2-40B4-BE49-F238E27FC236}">
-                <a16:creationId xmlns:a16="http://schemas.microsoft.com/office/drawing/2014/main" id="{810C397F-8E62-4FC1-9050-9E46DD9C81DD}"/>
+                <a16:creationId xmlns:a16="http://schemas.microsoft.com/office/drawing/2014/main" id="{C380692F-1154-4B3C-A589-3D70670AD934}"/>
               </a:ext>
             </a:extLst>
           </p:cNvPr>
@@ -2849,8 +3939,8 @@
         </p:nvSpPr>
         <p:spPr>
           <a:xfrm xmlns:a="http://schemas.openxmlformats.org/drawingml/2006/main">
-            <a:off x="685800" y="4991100"/>
-            <a:ext cx="10810875" cy="571500"/>
+            <a:off x="742950" y="3743325"/>
+            <a:ext cx="4905375" cy="1285875"/>
           </a:xfrm>
           <a:prstGeom xmlns:a="http://schemas.openxmlformats.org/drawingml/2006/main" prst="rect">
             <a:avLst/>
@@ -2869,7 +3959,7 @@
             <a:pPr>
               <a:defRPr sz="2100" b="0">
                 <a:solidFill>
-                  <a:srgbClr val="F2F7FB"/>
+                  <a:srgbClr val="52635B"/>
                 </a:solidFill>
                 <a:latin typeface="Arial"/>
                 <a:ea typeface="Arial"/>
@@ -2879,13 +3969,59 @@
             <a:r>
               <a:rPr sz="2100" b="0">
                 <a:solidFill>
-                  <a:srgbClr val="F2F7FB"/>
-                </a:solidFill>
-                <a:latin typeface="Arial"/>
-                <a:ea typeface="Arial"/>
-                <a:cs typeface="Arial"/>
-              </a:rPr>
-              <a:t>Experiment 3: Offline Conversation Assistant</a:t>
+                  <a:srgbClr val="52635B"/>
+                </a:solidFill>
+                <a:latin typeface="Arial"/>
+                <a:ea typeface="Arial"/>
+                <a:cs typeface="Arial"/>
+              </a:rPr>
+              <a:t>Choose a topic. Answer one guiding</a:t>
+            </a:r>
+          </a:p>
+          <a:p xmlns:a="http://schemas.openxmlformats.org/drawingml/2006/main">
+            <a:pPr>
+              <a:defRPr sz="2100" b="0">
+                <a:solidFill>
+                  <a:srgbClr val="52635B"/>
+                </a:solidFill>
+                <a:latin typeface="Arial"/>
+                <a:ea typeface="Arial"/>
+                <a:cs typeface="Arial"/>
+              </a:defRPr>
+            </a:pPr>
+            <a:r>
+              <a:rPr sz="2100" b="0">
+                <a:solidFill>
+                  <a:srgbClr val="52635B"/>
+                </a:solidFill>
+                <a:latin typeface="Arial"/>
+                <a:ea typeface="Arial"/>
+                <a:cs typeface="Arial"/>
+              </a:rPr>
+              <a:t>question at a time and explain</a:t>
+            </a:r>
+          </a:p>
+          <a:p xmlns:a="http://schemas.openxmlformats.org/drawingml/2006/main">
+            <a:pPr>
+              <a:defRPr sz="2100" b="0">
+                <a:solidFill>
+                  <a:srgbClr val="52635B"/>
+                </a:solidFill>
+                <a:latin typeface="Arial"/>
+                <a:ea typeface="Arial"/>
+                <a:cs typeface="Arial"/>
+              </a:defRPr>
+            </a:pPr>
+            <a:r>
+              <a:rPr sz="2100" b="0">
+                <a:solidFill>
+                  <a:srgbClr val="52635B"/>
+                </a:solidFill>
+                <a:latin typeface="Arial"/>
+                <a:ea typeface="Arial"/>
+                <a:cs typeface="Arial"/>
+              </a:rPr>
+              <a:t>your reasoning.</a:t>
             </a:r>
           </a:p>
         </p:txBody>
@@ -2895,7 +4031,7 @@
           <p:cNvPr id="8" name="">
             <a:extLst xmlns:a="http://schemas.openxmlformats.org/drawingml/2006/main">
               <a:ext uri="{FF2B5EF4-FFF2-40B4-BE49-F238E27FC236}">
-                <a16:creationId xmlns:a16="http://schemas.microsoft.com/office/drawing/2014/main" id="{092BC163-79B7-4215-8191-CE83014D0DD6}"/>
+                <a16:creationId xmlns:a16="http://schemas.microsoft.com/office/drawing/2014/main" id="{304F5F94-9507-4599-A6F8-BA11F7F51092}"/>
               </a:ext>
             </a:extLst>
           </p:cNvPr>
@@ -2906,8 +4042,8 @@
         </p:nvSpPr>
         <p:spPr>
           <a:xfrm xmlns:a="http://schemas.openxmlformats.org/drawingml/2006/main">
-            <a:off x="647700" y="6229350"/>
-            <a:ext cx="10572750" cy="428625"/>
+            <a:off x="742950" y="5353050"/>
+            <a:ext cx="4953000" cy="476250"/>
           </a:xfrm>
           <a:prstGeom xmlns:a="http://schemas.openxmlformats.org/drawingml/2006/main" prst="rect">
             <a:avLst/>
@@ -2924,25 +4060,322 @@
           <a:lstStyle xmlns:a="http://schemas.openxmlformats.org/drawingml/2006/main"/>
           <a:p xmlns:a="http://schemas.openxmlformats.org/drawingml/2006/main">
             <a:pPr>
-              <a:defRPr sz="1425" b="0">
-                <a:solidFill>
-                  <a:srgbClr val="B6C6D5"/>
-                </a:solidFill>
-                <a:latin typeface="Arial"/>
-                <a:ea typeface="Arial"/>
-                <a:cs typeface="Arial"/>
-              </a:defRPr>
-            </a:pPr>
-            <a:r>
-              <a:rPr sz="1425" b="0">
-                <a:solidFill>
-                  <a:srgbClr val="B6C6D5"/>
-                </a:solidFill>
-                <a:latin typeface="Arial"/>
-                <a:ea typeface="Arial"/>
-                <a:cs typeface="Arial"/>
-              </a:rPr>
-              <a:t>Tools are read-only and validated. Memory stores explicit local facts. Retrieval uses lexical BM25.</a:t>
+              <a:defRPr sz="1875" b="1">
+                <a:solidFill>
+                  <a:srgbClr val="397718"/>
+                </a:solidFill>
+                <a:latin typeface="Arial"/>
+                <a:ea typeface="Arial"/>
+                <a:cs typeface="Arial"/>
+              </a:defRPr>
+            </a:pPr>
+            <a:r>
+              <a:rPr sz="1875" b="1">
+                <a:solidFill>
+                  <a:srgbClr val="397718"/>
+                </a:solidFill>
+                <a:latin typeface="Arial"/>
+                <a:ea typeface="Arial"/>
+                <a:cs typeface="Arial"/>
+              </a:rPr>
+              <a:t>Try: Why do objects float?</a:t>
+            </a:r>
+          </a:p>
+        </p:txBody>
+      </p:sp>
+      <p:sp>
+        <p:nvSpPr>
+          <p:cNvPr id="9" name="">
+            <a:extLst xmlns:a="http://schemas.openxmlformats.org/drawingml/2006/main">
+              <a:ext uri="{FF2B5EF4-FFF2-40B4-BE49-F238E27FC236}">
+                <a16:creationId xmlns:a16="http://schemas.microsoft.com/office/drawing/2014/main" id="{123D050F-184F-4014-895D-4A5E890F68C9}"/>
+              </a:ext>
+            </a:extLst>
+          </p:cNvPr>
+          <p:cNvSpPr>
+            <a:spLocks xmlns:a="http://schemas.openxmlformats.org/drawingml/2006/main" noGrp="1"/>
+          </p:cNvSpPr>
+          <p:nvPr/>
+        </p:nvSpPr>
+        <p:spPr>
+          <a:xfrm xmlns:a="http://schemas.openxmlformats.org/drawingml/2006/main">
+            <a:off x="6629400" y="2133600"/>
+            <a:ext cx="4857750" cy="381000"/>
+          </a:xfrm>
+          <a:prstGeom xmlns:a="http://schemas.openxmlformats.org/drawingml/2006/main" prst="rect">
+            <a:avLst/>
+          </a:prstGeom>
+          <a:noFill xmlns:a="http://schemas.openxmlformats.org/drawingml/2006/main"/>
+          <a:ln xmlns:a="http://schemas.openxmlformats.org/drawingml/2006/main" w="0">
+            <a:noFill/>
+          </a:ln>
+        </p:spPr>
+        <p:txBody>
+          <a:bodyPr xmlns:a="http://schemas.openxmlformats.org/drawingml/2006/main">
+            <a:noAutofit/>
+          </a:bodyPr>
+          <a:lstStyle xmlns:a="http://schemas.openxmlformats.org/drawingml/2006/main"/>
+          <a:p xmlns:a="http://schemas.openxmlformats.org/drawingml/2006/main">
+            <a:pPr>
+              <a:defRPr sz="1650" b="1">
+                <a:solidFill>
+                  <a:srgbClr val="397718"/>
+                </a:solidFill>
+                <a:latin typeface="Arial"/>
+                <a:ea typeface="Arial"/>
+                <a:cs typeface="Arial"/>
+              </a:defRPr>
+            </a:pPr>
+            <a:r>
+              <a:rPr sz="1650" b="1">
+                <a:solidFill>
+                  <a:srgbClr val="397718"/>
+                </a:solidFill>
+                <a:latin typeface="Arial"/>
+                <a:ea typeface="Arial"/>
+                <a:cs typeface="Arial"/>
+              </a:rPr>
+              <a:t>Experiment 30</a:t>
+            </a:r>
+          </a:p>
+        </p:txBody>
+      </p:sp>
+      <p:sp>
+        <p:nvSpPr>
+          <p:cNvPr id="10" name="">
+            <a:extLst xmlns:a="http://schemas.openxmlformats.org/drawingml/2006/main">
+              <a:ext uri="{FF2B5EF4-FFF2-40B4-BE49-F238E27FC236}">
+                <a16:creationId xmlns:a16="http://schemas.microsoft.com/office/drawing/2014/main" id="{AC41D485-7B2D-4A2C-B4D9-D0AD381F3642}"/>
+              </a:ext>
+            </a:extLst>
+          </p:cNvPr>
+          <p:cNvSpPr>
+            <a:spLocks xmlns:a="http://schemas.openxmlformats.org/drawingml/2006/main" noGrp="1"/>
+          </p:cNvSpPr>
+          <p:nvPr/>
+        </p:nvSpPr>
+        <p:spPr>
+          <a:xfrm xmlns:a="http://schemas.openxmlformats.org/drawingml/2006/main">
+            <a:off x="6629400" y="2686050"/>
+            <a:ext cx="4857750" cy="952500"/>
+          </a:xfrm>
+          <a:prstGeom xmlns:a="http://schemas.openxmlformats.org/drawingml/2006/main" prst="rect">
+            <a:avLst/>
+          </a:prstGeom>
+          <a:noFill xmlns:a="http://schemas.openxmlformats.org/drawingml/2006/main"/>
+          <a:ln xmlns:a="http://schemas.openxmlformats.org/drawingml/2006/main" w="0">
+            <a:noFill/>
+          </a:ln>
+        </p:spPr>
+        <p:txBody>
+          <a:bodyPr xmlns:a="http://schemas.openxmlformats.org/drawingml/2006/main">
+            <a:noAutofit/>
+          </a:bodyPr>
+          <a:lstStyle xmlns:a="http://schemas.openxmlformats.org/drawingml/2006/main"/>
+          <a:p xmlns:a="http://schemas.openxmlformats.org/drawingml/2006/main">
+            <a:pPr>
+              <a:defRPr sz="2850" b="1">
+                <a:solidFill>
+                  <a:srgbClr val="19332A"/>
+                </a:solidFill>
+                <a:latin typeface="Arial"/>
+                <a:ea typeface="Arial"/>
+                <a:cs typeface="Arial"/>
+              </a:defRPr>
+            </a:pPr>
+            <a:r>
+              <a:rPr sz="2850" b="1">
+                <a:solidFill>
+                  <a:srgbClr val="19332A"/>
+                </a:solidFill>
+                <a:latin typeface="Arial"/>
+                <a:ea typeface="Arial"/>
+                <a:cs typeface="Arial"/>
+              </a:rPr>
+              <a:t>Mystery Character</a:t>
+            </a:r>
+          </a:p>
+          <a:p xmlns:a="http://schemas.openxmlformats.org/drawingml/2006/main">
+            <a:pPr>
+              <a:defRPr sz="2850" b="1">
+                <a:solidFill>
+                  <a:srgbClr val="19332A"/>
+                </a:solidFill>
+                <a:latin typeface="Arial"/>
+                <a:ea typeface="Arial"/>
+                <a:cs typeface="Arial"/>
+              </a:defRPr>
+            </a:pPr>
+            <a:r>
+              <a:rPr sz="2850" b="1">
+                <a:solidFill>
+                  <a:srgbClr val="19332A"/>
+                </a:solidFill>
+                <a:latin typeface="Arial"/>
+                <a:ea typeface="Arial"/>
+                <a:cs typeface="Arial"/>
+              </a:rPr>
+              <a:t>Interview</a:t>
+            </a:r>
+          </a:p>
+        </p:txBody>
+      </p:sp>
+      <p:sp>
+        <p:nvSpPr>
+          <p:cNvPr id="11" name="">
+            <a:extLst xmlns:a="http://schemas.openxmlformats.org/drawingml/2006/main">
+              <a:ext uri="{FF2B5EF4-FFF2-40B4-BE49-F238E27FC236}">
+                <a16:creationId xmlns:a16="http://schemas.microsoft.com/office/drawing/2014/main" id="{F0862BC0-C5D8-4535-822C-534EF85EC51C}"/>
+              </a:ext>
+            </a:extLst>
+          </p:cNvPr>
+          <p:cNvSpPr>
+            <a:spLocks xmlns:a="http://schemas.openxmlformats.org/drawingml/2006/main" noGrp="1"/>
+          </p:cNvSpPr>
+          <p:nvPr/>
+        </p:nvSpPr>
+        <p:spPr>
+          <a:xfrm xmlns:a="http://schemas.openxmlformats.org/drawingml/2006/main">
+            <a:off x="6657975" y="3895725"/>
+            <a:ext cx="4857750" cy="1209675"/>
+          </a:xfrm>
+          <a:prstGeom xmlns:a="http://schemas.openxmlformats.org/drawingml/2006/main" prst="rect">
+            <a:avLst/>
+          </a:prstGeom>
+          <a:noFill xmlns:a="http://schemas.openxmlformats.org/drawingml/2006/main"/>
+          <a:ln xmlns:a="http://schemas.openxmlformats.org/drawingml/2006/main" w="0">
+            <a:noFill/>
+          </a:ln>
+        </p:spPr>
+        <p:txBody>
+          <a:bodyPr xmlns:a="http://schemas.openxmlformats.org/drawingml/2006/main">
+            <a:noAutofit/>
+          </a:bodyPr>
+          <a:lstStyle xmlns:a="http://schemas.openxmlformats.org/drawingml/2006/main"/>
+          <a:p xmlns:a="http://schemas.openxmlformats.org/drawingml/2006/main">
+            <a:pPr>
+              <a:defRPr sz="2100" b="0">
+                <a:solidFill>
+                  <a:srgbClr val="52635B"/>
+                </a:solidFill>
+                <a:latin typeface="Arial"/>
+                <a:ea typeface="Arial"/>
+                <a:cs typeface="Arial"/>
+              </a:defRPr>
+            </a:pPr>
+            <a:r>
+              <a:rPr sz="2100" b="0">
+                <a:solidFill>
+                  <a:srgbClr val="52635B"/>
+                </a:solidFill>
+                <a:latin typeface="Arial"/>
+                <a:ea typeface="Arial"/>
+                <a:cs typeface="Arial"/>
+              </a:rPr>
+              <a:t>Interview a fictional character.</a:t>
+            </a:r>
+          </a:p>
+          <a:p xmlns:a="http://schemas.openxmlformats.org/drawingml/2006/main">
+            <a:pPr>
+              <a:defRPr sz="2100" b="0">
+                <a:solidFill>
+                  <a:srgbClr val="52635B"/>
+                </a:solidFill>
+                <a:latin typeface="Arial"/>
+                <a:ea typeface="Arial"/>
+                <a:cs typeface="Arial"/>
+              </a:defRPr>
+            </a:pPr>
+            <a:r>
+              <a:rPr sz="2100" b="0">
+                <a:solidFill>
+                  <a:srgbClr val="52635B"/>
+                </a:solidFill>
+                <a:latin typeface="Arial"/>
+                <a:ea typeface="Arial"/>
+                <a:cs typeface="Arial"/>
+              </a:rPr>
+              <a:t>Collect clues, then guess</a:t>
+            </a:r>
+          </a:p>
+          <a:p xmlns:a="http://schemas.openxmlformats.org/drawingml/2006/main">
+            <a:pPr>
+              <a:defRPr sz="2100" b="0">
+                <a:solidFill>
+                  <a:srgbClr val="52635B"/>
+                </a:solidFill>
+                <a:latin typeface="Arial"/>
+                <a:ea typeface="Arial"/>
+                <a:cs typeface="Arial"/>
+              </a:defRPr>
+            </a:pPr>
+            <a:r>
+              <a:rPr sz="2100" b="0">
+                <a:solidFill>
+                  <a:srgbClr val="52635B"/>
+                </a:solidFill>
+                <a:latin typeface="Arial"/>
+                <a:ea typeface="Arial"/>
+                <a:cs typeface="Arial"/>
+              </a:rPr>
+              <a:t>their profession.</a:t>
+            </a:r>
+          </a:p>
+        </p:txBody>
+      </p:sp>
+      <p:sp>
+        <p:nvSpPr>
+          <p:cNvPr id="12" name="">
+            <a:extLst xmlns:a="http://schemas.openxmlformats.org/drawingml/2006/main">
+              <a:ext uri="{FF2B5EF4-FFF2-40B4-BE49-F238E27FC236}">
+                <a16:creationId xmlns:a16="http://schemas.microsoft.com/office/drawing/2014/main" id="{52C5A8BD-BFA7-4E3D-90D8-6C0B0FBDF60E}"/>
+              </a:ext>
+            </a:extLst>
+          </p:cNvPr>
+          <p:cNvSpPr>
+            <a:spLocks xmlns:a="http://schemas.openxmlformats.org/drawingml/2006/main" noGrp="1"/>
+          </p:cNvSpPr>
+          <p:nvPr/>
+        </p:nvSpPr>
+        <p:spPr>
+          <a:xfrm xmlns:a="http://schemas.openxmlformats.org/drawingml/2006/main">
+            <a:off x="6657975" y="5353050"/>
+            <a:ext cx="4762500" cy="571500"/>
+          </a:xfrm>
+          <a:prstGeom xmlns:a="http://schemas.openxmlformats.org/drawingml/2006/main" prst="rect">
+            <a:avLst/>
+          </a:prstGeom>
+          <a:noFill xmlns:a="http://schemas.openxmlformats.org/drawingml/2006/main"/>
+          <a:ln xmlns:a="http://schemas.openxmlformats.org/drawingml/2006/main" w="0">
+            <a:noFill/>
+          </a:ln>
+        </p:spPr>
+        <p:txBody>
+          <a:bodyPr xmlns:a="http://schemas.openxmlformats.org/drawingml/2006/main">
+            <a:noAutofit/>
+          </a:bodyPr>
+          <a:lstStyle xmlns:a="http://schemas.openxmlformats.org/drawingml/2006/main"/>
+          <a:p xmlns:a="http://schemas.openxmlformats.org/drawingml/2006/main">
+            <a:pPr>
+              <a:defRPr sz="1875" b="1">
+                <a:solidFill>
+                  <a:srgbClr val="397718"/>
+                </a:solidFill>
+                <a:latin typeface="Arial"/>
+                <a:ea typeface="Arial"/>
+                <a:cs typeface="Arial"/>
+              </a:defRPr>
+            </a:pPr>
+            <a:r>
+              <a:rPr sz="1875" b="1">
+                <a:solidFill>
+                  <a:srgbClr val="397718"/>
+                </a:solidFill>
+                <a:latin typeface="Arial"/>
+                <a:ea typeface="Arial"/>
+                <a:cs typeface="Arial"/>
+              </a:rPr>
+              <a:t>Use /guess followed by your answer.</a:t>
             </a:r>
           </a:p>
         </p:txBody>
@@ -2950,7 +4383,7 @@
     </p:spTree>
     <p:extLst>
       <p:ext uri="{BB962C8B-B14F-4D97-AF65-F5344CB8AC3E}">
-        <p14:creationId xmlns:p14="http://schemas.microsoft.com/office/powerpoint/2010/main" val="1864202047"/>
+        <p14:creationId xmlns:p14="http://schemas.microsoft.com/office/powerpoint/2010/main" val="1879518823"/>
       </p:ext>
     </p:extLst>
   </p:cSld>
@@ -2963,7 +4396,7 @@
     <p:bg>
       <p:bgPr>
         <a:solidFill xmlns:a="http://schemas.openxmlformats.org/drawingml/2006/main">
-          <a:srgbClr val="0C1825"/>
+          <a:srgbClr val="FFFFFF"/>
         </a:solidFill>
       </p:bgPr>
     </p:bg>
@@ -2978,10 +4411,10 @@
       </p:grpSpPr>
       <p:sp>
         <p:nvSpPr>
-          <p:cNvPr id="10" name="">
+          <p:cNvPr id="6" name="">
             <a:extLst xmlns:a="http://schemas.openxmlformats.org/drawingml/2006/main">
               <a:ext uri="{FF2B5EF4-FFF2-40B4-BE49-F238E27FC236}">
-                <a16:creationId xmlns:a16="http://schemas.microsoft.com/office/drawing/2014/main" id="{3C12DDDD-0EA3-453A-8260-4D689F363E5D}"/>
+                <a16:creationId xmlns:a16="http://schemas.microsoft.com/office/drawing/2014/main" id="{876B20AC-5C7D-4C7F-92F9-18CFC195FDD2}"/>
               </a:ext>
             </a:extLst>
           </p:cNvPr>
@@ -2992,8 +4425,8 @@
         </p:nvSpPr>
         <p:spPr>
           <a:xfrm xmlns:a="http://schemas.openxmlformats.org/drawingml/2006/main">
-            <a:off x="609600" y="438150"/>
-            <a:ext cx="10934700" cy="857250"/>
+            <a:off x="628650" y="457200"/>
+            <a:ext cx="10953750" cy="762000"/>
           </a:xfrm>
           <a:prstGeom xmlns:a="http://schemas.openxmlformats.org/drawingml/2006/main" prst="rect">
             <a:avLst/>
@@ -3010,25 +4443,25 @@
           <a:lstStyle xmlns:a="http://schemas.openxmlformats.org/drawingml/2006/main"/>
           <a:p xmlns:a="http://schemas.openxmlformats.org/drawingml/2006/main">
             <a:pPr>
-              <a:defRPr sz="3750" b="1">
-                <a:solidFill>
-                  <a:srgbClr val="F2F7FB"/>
-                </a:solidFill>
-                <a:latin typeface="Arial"/>
-                <a:ea typeface="Arial"/>
-                <a:cs typeface="Arial"/>
-              </a:defRPr>
-            </a:pPr>
-            <a:r>
-              <a:rPr sz="3750" b="1">
-                <a:solidFill>
-                  <a:srgbClr val="F2F7FB"/>
-                </a:solidFill>
-                <a:latin typeface="Arial"/>
-                <a:ea typeface="Arial"/>
-                <a:cs typeface="Arial"/>
-              </a:rPr>
-              <a:t>Language under the microscope</a:t>
+              <a:defRPr sz="3600" b="1">
+                <a:solidFill>
+                  <a:srgbClr val="19332A"/>
+                </a:solidFill>
+                <a:latin typeface="Arial"/>
+                <a:ea typeface="Arial"/>
+                <a:cs typeface="Arial"/>
+              </a:defRPr>
+            </a:pPr>
+            <a:r>
+              <a:rPr sz="3600" b="1">
+                <a:solidFill>
+                  <a:srgbClr val="19332A"/>
+                </a:solidFill>
+                <a:latin typeface="Arial"/>
+                <a:ea typeface="Arial"/>
+                <a:cs typeface="Arial"/>
+              </a:rPr>
+              <a:t>Assistants with visible evidence</a:t>
             </a:r>
           </a:p>
         </p:txBody>
@@ -3038,7 +4471,7 @@
           <p:cNvPr id="2" name="">
             <a:extLst xmlns:a="http://schemas.openxmlformats.org/drawingml/2006/main">
               <a:ext uri="{FF2B5EF4-FFF2-40B4-BE49-F238E27FC236}">
-                <a16:creationId xmlns:a16="http://schemas.microsoft.com/office/drawing/2014/main" id="{BF3F6BEE-EE02-4A1A-83FB-EE0C8FD10820}"/>
+                <a16:creationId xmlns:a16="http://schemas.microsoft.com/office/drawing/2014/main" id="{7FCA11F6-C36A-447C-8D79-E1F7CFF49C50}"/>
               </a:ext>
             </a:extLst>
           </p:cNvPr>
@@ -3049,8 +4482,8 @@
         </p:nvSpPr>
         <p:spPr>
           <a:xfrm xmlns:a="http://schemas.openxmlformats.org/drawingml/2006/main">
-            <a:off x="647700" y="1362075"/>
-            <a:ext cx="10763250" cy="857250"/>
+            <a:off x="666750" y="1333500"/>
+            <a:ext cx="10858500" cy="619125"/>
           </a:xfrm>
           <a:prstGeom xmlns:a="http://schemas.openxmlformats.org/drawingml/2006/main" prst="rect">
             <a:avLst/>
@@ -3067,25 +4500,25 @@
           <a:lstStyle xmlns:a="http://schemas.openxmlformats.org/drawingml/2006/main"/>
           <a:p xmlns:a="http://schemas.openxmlformats.org/drawingml/2006/main">
             <a:pPr>
-              <a:defRPr sz="2100" b="0">
-                <a:solidFill>
-                  <a:srgbClr val="76DAC7"/>
-                </a:solidFill>
-                <a:latin typeface="Arial"/>
-                <a:ea typeface="Arial"/>
-                <a:cs typeface="Arial"/>
-              </a:defRPr>
-            </a:pPr>
-            <a:r>
-              <a:rPr sz="2100" b="0">
-                <a:solidFill>
-                  <a:srgbClr val="76DAC7"/>
-                </a:solidFill>
-                <a:latin typeface="Arial"/>
-                <a:ea typeface="Arial"/>
-                <a:cs typeface="Arial"/>
-              </a:rPr>
-              <a:t>Change one input and compare the actual model outputs</a:t>
+              <a:defRPr sz="1950" b="0">
+                <a:solidFill>
+                  <a:srgbClr val="52635B"/>
+                </a:solidFill>
+                <a:latin typeface="Arial"/>
+                <a:ea typeface="Arial"/>
+                <a:cs typeface="Arial"/>
+              </a:defRPr>
+            </a:pPr>
+            <a:r>
+              <a:rPr sz="1950" b="0">
+                <a:solidFill>
+                  <a:srgbClr val="52635B"/>
+                </a:solidFill>
+                <a:latin typeface="Arial"/>
+                <a:ea typeface="Arial"/>
+                <a:cs typeface="Arial"/>
+              </a:rPr>
+              <a:t>Inspect what the model knows, retrieves and calls.</a:t>
             </a:r>
           </a:p>
         </p:txBody>
@@ -3095,7 +4528,7 @@
           <p:cNvPr id="3" name="">
             <a:extLst xmlns:a="http://schemas.openxmlformats.org/drawingml/2006/main">
               <a:ext uri="{FF2B5EF4-FFF2-40B4-BE49-F238E27FC236}">
-                <a16:creationId xmlns:a16="http://schemas.microsoft.com/office/drawing/2014/main" id="{436B7130-F831-4360-8CEE-7F781CF5DB60}"/>
+                <a16:creationId xmlns:a16="http://schemas.microsoft.com/office/drawing/2014/main" id="{7FD4D6CD-BCCF-4117-86AA-F5841D2DB4EB}"/>
               </a:ext>
             </a:extLst>
           </p:cNvPr>
@@ -3106,8 +4539,8 @@
         </p:nvSpPr>
         <p:spPr>
           <a:xfrm xmlns:a="http://schemas.openxmlformats.org/drawingml/2006/main">
-            <a:off x="685800" y="2324100"/>
-            <a:ext cx="10810875" cy="571500"/>
+            <a:off x="666750" y="6191250"/>
+            <a:ext cx="10287000" cy="419100"/>
           </a:xfrm>
           <a:prstGeom xmlns:a="http://schemas.openxmlformats.org/drawingml/2006/main" prst="rect">
             <a:avLst/>
@@ -3124,25 +4557,25 @@
           <a:lstStyle xmlns:a="http://schemas.openxmlformats.org/drawingml/2006/main"/>
           <a:p xmlns:a="http://schemas.openxmlformats.org/drawingml/2006/main">
             <a:pPr>
-              <a:defRPr sz="2100" b="0">
-                <a:solidFill>
-                  <a:srgbClr val="F2F7FB"/>
-                </a:solidFill>
-                <a:latin typeface="Arial"/>
-                <a:ea typeface="Arial"/>
-                <a:cs typeface="Arial"/>
-              </a:defRPr>
-            </a:pPr>
-            <a:r>
-              <a:rPr sz="2100" b="0">
-                <a:solidFill>
-                  <a:srgbClr val="F2F7FB"/>
-                </a:solidFill>
-                <a:latin typeface="Arial"/>
-                <a:ea typeface="Arial"/>
-                <a:cs typeface="Arial"/>
-              </a:rPr>
-              <a:t>Experiment 4: Ask the Local Language Model</a:t>
+              <a:defRPr sz="1350" b="0">
+                <a:solidFill>
+                  <a:srgbClr val="52635B"/>
+                </a:solidFill>
+                <a:latin typeface="Arial"/>
+                <a:ea typeface="Arial"/>
+                <a:cs typeface="Arial"/>
+              </a:defRPr>
+            </a:pPr>
+            <a:r>
+              <a:rPr sz="1350" b="0">
+                <a:solidFill>
+                  <a:srgbClr val="52635B"/>
+                </a:solidFill>
+                <a:latin typeface="Arial"/>
+                <a:ea typeface="Arial"/>
+                <a:cs typeface="Arial"/>
+              </a:rPr>
+              <a:t>Read-only tools. Explicit local memory. BM25 retrieval over your own documents.</a:t>
             </a:r>
           </a:p>
         </p:txBody>
@@ -3152,7 +4585,7 @@
           <p:cNvPr id="4" name="">
             <a:extLst xmlns:a="http://schemas.openxmlformats.org/drawingml/2006/main">
               <a:ext uri="{FF2B5EF4-FFF2-40B4-BE49-F238E27FC236}">
-                <a16:creationId xmlns:a16="http://schemas.microsoft.com/office/drawing/2014/main" id="{554AEF59-93E7-425C-8DC3-9D5313DC2AEB}"/>
+                <a16:creationId xmlns:a16="http://schemas.microsoft.com/office/drawing/2014/main" id="{431F1BC3-6AD8-48B9-B4AC-CAF1DB19ACF0}"/>
               </a:ext>
             </a:extLst>
           </p:cNvPr>
@@ -3163,8 +4596,8 @@
         </p:nvSpPr>
         <p:spPr>
           <a:xfrm xmlns:a="http://schemas.openxmlformats.org/drawingml/2006/main">
-            <a:off x="685800" y="2905125"/>
-            <a:ext cx="10810875" cy="571500"/>
+            <a:off x="11182350" y="6200775"/>
+            <a:ext cx="523875" cy="333375"/>
           </a:xfrm>
           <a:prstGeom xmlns:a="http://schemas.openxmlformats.org/drawingml/2006/main" prst="rect">
             <a:avLst/>
@@ -3181,318 +4614,536 @@
           <a:lstStyle xmlns:a="http://schemas.openxmlformats.org/drawingml/2006/main"/>
           <a:p xmlns:a="http://schemas.openxmlformats.org/drawingml/2006/main">
             <a:pPr>
-              <a:defRPr sz="2100" b="0">
-                <a:solidFill>
-                  <a:srgbClr val="F2F7FB"/>
-                </a:solidFill>
-                <a:latin typeface="Arial"/>
-                <a:ea typeface="Arial"/>
-                <a:cs typeface="Arial"/>
-              </a:defRPr>
-            </a:pPr>
-            <a:r>
-              <a:rPr sz="2100" b="0">
-                <a:solidFill>
-                  <a:srgbClr val="F2F7FB"/>
-                </a:solidFill>
-                <a:latin typeface="Arial"/>
-                <a:ea typeface="Arial"/>
-                <a:cs typeface="Arial"/>
-              </a:rPr>
-              <a:t>Experiment 5: Tokenization Microscope</a:t>
-            </a:r>
-          </a:p>
-        </p:txBody>
-      </p:sp>
-      <p:sp>
-        <p:nvSpPr>
-          <p:cNvPr id="5" name="">
-            <a:extLst xmlns:a="http://schemas.openxmlformats.org/drawingml/2006/main">
-              <a:ext uri="{FF2B5EF4-FFF2-40B4-BE49-F238E27FC236}">
-                <a16:creationId xmlns:a16="http://schemas.microsoft.com/office/drawing/2014/main" id="{D069822B-5DF4-456E-B917-6282EB947287}"/>
-              </a:ext>
-            </a:extLst>
-          </p:cNvPr>
-          <p:cNvSpPr>
-            <a:spLocks xmlns:a="http://schemas.openxmlformats.org/drawingml/2006/main" noGrp="1"/>
-          </p:cNvSpPr>
+              <a:defRPr sz="1350" b="1">
+                <a:solidFill>
+                  <a:srgbClr val="397718"/>
+                </a:solidFill>
+                <a:latin typeface="Arial"/>
+                <a:ea typeface="Arial"/>
+                <a:cs typeface="Arial"/>
+              </a:defRPr>
+            </a:pPr>
+            <a:r>
+              <a:rPr sz="1350" b="1">
+                <a:solidFill>
+                  <a:srgbClr val="397718"/>
+                </a:solidFill>
+                <a:latin typeface="Arial"/>
+                <a:ea typeface="Arial"/>
+                <a:cs typeface="Arial"/>
+              </a:rPr>
+              <a:t>04</a:t>
+            </a:r>
+          </a:p>
+        </p:txBody>
+      </p:sp>
+      <p:graphicFrame>
+        <p:nvGraphicFramePr>
+          <p:cNvPr id="10" name=""/>
+          <p:cNvGraphicFramePr/>
           <p:nvPr/>
-        </p:nvSpPr>
-        <p:spPr>
-          <a:xfrm xmlns:a="http://schemas.openxmlformats.org/drawingml/2006/main">
-            <a:off x="685800" y="3486150"/>
-            <a:ext cx="10810875" cy="571500"/>
-          </a:xfrm>
-          <a:prstGeom xmlns:a="http://schemas.openxmlformats.org/drawingml/2006/main" prst="rect">
-            <a:avLst/>
-          </a:prstGeom>
-          <a:noFill xmlns:a="http://schemas.openxmlformats.org/drawingml/2006/main"/>
-          <a:ln xmlns:a="http://schemas.openxmlformats.org/drawingml/2006/main" w="0">
-            <a:noFill/>
-          </a:ln>
-        </p:spPr>
-        <p:txBody>
-          <a:bodyPr xmlns:a="http://schemas.openxmlformats.org/drawingml/2006/main">
-            <a:noAutofit/>
-          </a:bodyPr>
-          <a:lstStyle xmlns:a="http://schemas.openxmlformats.org/drawingml/2006/main"/>
-          <a:p xmlns:a="http://schemas.openxmlformats.org/drawingml/2006/main">
-            <a:pPr>
-              <a:defRPr sz="2100" b="0">
-                <a:solidFill>
-                  <a:srgbClr val="F2F7FB"/>
-                </a:solidFill>
-                <a:latin typeface="Arial"/>
-                <a:ea typeface="Arial"/>
-                <a:cs typeface="Arial"/>
-              </a:defRPr>
-            </a:pPr>
-            <a:r>
-              <a:rPr sz="2100" b="0">
-                <a:solidFill>
-                  <a:srgbClr val="F2F7FB"/>
-                </a:solidFill>
-                <a:latin typeface="Arial"/>
-                <a:ea typeface="Arial"/>
-                <a:cs typeface="Arial"/>
-              </a:rPr>
-              <a:t>Experiment 6: Structured Information Extraction</a:t>
-            </a:r>
-          </a:p>
-        </p:txBody>
-      </p:sp>
-      <p:sp>
-        <p:nvSpPr>
-          <p:cNvPr id="6" name="">
-            <a:extLst xmlns:a="http://schemas.openxmlformats.org/drawingml/2006/main">
-              <a:ext uri="{FF2B5EF4-FFF2-40B4-BE49-F238E27FC236}">
-                <a16:creationId xmlns:a16="http://schemas.microsoft.com/office/drawing/2014/main" id="{3E85D428-236E-4CF4-A8C8-B389D1E162EF}"/>
-              </a:ext>
-            </a:extLst>
-          </p:cNvPr>
-          <p:cNvSpPr>
-            <a:spLocks xmlns:a="http://schemas.openxmlformats.org/drawingml/2006/main" noGrp="1"/>
-          </p:cNvSpPr>
-          <p:nvPr/>
-        </p:nvSpPr>
-        <p:spPr>
-          <a:xfrm xmlns:a="http://schemas.openxmlformats.org/drawingml/2006/main">
-            <a:off x="685800" y="4067175"/>
-            <a:ext cx="10810875" cy="571500"/>
-          </a:xfrm>
-          <a:prstGeom xmlns:a="http://schemas.openxmlformats.org/drawingml/2006/main" prst="rect">
-            <a:avLst/>
-          </a:prstGeom>
-          <a:noFill xmlns:a="http://schemas.openxmlformats.org/drawingml/2006/main"/>
-          <a:ln xmlns:a="http://schemas.openxmlformats.org/drawingml/2006/main" w="0">
-            <a:noFill/>
-          </a:ln>
-        </p:spPr>
-        <p:txBody>
-          <a:bodyPr xmlns:a="http://schemas.openxmlformats.org/drawingml/2006/main">
-            <a:noAutofit/>
-          </a:bodyPr>
-          <a:lstStyle xmlns:a="http://schemas.openxmlformats.org/drawingml/2006/main"/>
-          <a:p xmlns:a="http://schemas.openxmlformats.org/drawingml/2006/main">
-            <a:pPr>
-              <a:defRPr sz="2100" b="0">
-                <a:solidFill>
-                  <a:srgbClr val="F2F7FB"/>
-                </a:solidFill>
-                <a:latin typeface="Arial"/>
-                <a:ea typeface="Arial"/>
-                <a:cs typeface="Arial"/>
-              </a:defRPr>
-            </a:pPr>
-            <a:r>
-              <a:rPr sz="2100" b="0">
-                <a:solidFill>
-                  <a:srgbClr val="F2F7FB"/>
-                </a:solidFill>
-                <a:latin typeface="Arial"/>
-                <a:ea typeface="Arial"/>
-                <a:cs typeface="Arial"/>
-              </a:rPr>
-              <a:t>Experiment 14: Sampling Playground</a:t>
-            </a:r>
-          </a:p>
-        </p:txBody>
-      </p:sp>
-      <p:sp>
-        <p:nvSpPr>
-          <p:cNvPr id="7" name="">
-            <a:extLst xmlns:a="http://schemas.openxmlformats.org/drawingml/2006/main">
-              <a:ext uri="{FF2B5EF4-FFF2-40B4-BE49-F238E27FC236}">
-                <a16:creationId xmlns:a16="http://schemas.microsoft.com/office/drawing/2014/main" id="{92D7A2D7-406A-4CEC-AE57-B1A8F291A1EE}"/>
-              </a:ext>
-            </a:extLst>
-          </p:cNvPr>
-          <p:cNvSpPr>
-            <a:spLocks xmlns:a="http://schemas.openxmlformats.org/drawingml/2006/main" noGrp="1"/>
-          </p:cNvSpPr>
-          <p:nvPr/>
-        </p:nvSpPr>
-        <p:spPr>
-          <a:xfrm xmlns:a="http://schemas.openxmlformats.org/drawingml/2006/main">
-            <a:off x="685800" y="4648200"/>
-            <a:ext cx="10810875" cy="571500"/>
-          </a:xfrm>
-          <a:prstGeom xmlns:a="http://schemas.openxmlformats.org/drawingml/2006/main" prst="rect">
-            <a:avLst/>
-          </a:prstGeom>
-          <a:noFill xmlns:a="http://schemas.openxmlformats.org/drawingml/2006/main"/>
-          <a:ln xmlns:a="http://schemas.openxmlformats.org/drawingml/2006/main" w="0">
-            <a:noFill/>
-          </a:ln>
-        </p:spPr>
-        <p:txBody>
-          <a:bodyPr xmlns:a="http://schemas.openxmlformats.org/drawingml/2006/main">
-            <a:noAutofit/>
-          </a:bodyPr>
-          <a:lstStyle xmlns:a="http://schemas.openxmlformats.org/drawingml/2006/main"/>
-          <a:p xmlns:a="http://schemas.openxmlformats.org/drawingml/2006/main">
-            <a:pPr>
-              <a:defRPr sz="2100" b="0">
-                <a:solidFill>
-                  <a:srgbClr val="F2F7FB"/>
-                </a:solidFill>
-                <a:latin typeface="Arial"/>
-                <a:ea typeface="Arial"/>
-                <a:cs typeface="Arial"/>
-              </a:defRPr>
-            </a:pPr>
-            <a:r>
-              <a:rPr sz="2100" b="0">
-                <a:solidFill>
-                  <a:srgbClr val="F2F7FB"/>
-                </a:solidFill>
-                <a:latin typeface="Arial"/>
-                <a:ea typeface="Arial"/>
-                <a:cs typeface="Arial"/>
-              </a:rPr>
-              <a:t>Experiment 22: Prompt Design Studio</a:t>
-            </a:r>
-          </a:p>
-        </p:txBody>
-      </p:sp>
-      <p:sp>
-        <p:nvSpPr>
-          <p:cNvPr id="8" name="">
-            <a:extLst xmlns:a="http://schemas.openxmlformats.org/drawingml/2006/main">
-              <a:ext uri="{FF2B5EF4-FFF2-40B4-BE49-F238E27FC236}">
-                <a16:creationId xmlns:a16="http://schemas.microsoft.com/office/drawing/2014/main" id="{927B350D-DA16-4341-840C-65E289C1E310}"/>
-              </a:ext>
-            </a:extLst>
-          </p:cNvPr>
-          <p:cNvSpPr>
-            <a:spLocks xmlns:a="http://schemas.openxmlformats.org/drawingml/2006/main" noGrp="1"/>
-          </p:cNvSpPr>
-          <p:nvPr/>
-        </p:nvSpPr>
-        <p:spPr>
-          <a:xfrm xmlns:a="http://schemas.openxmlformats.org/drawingml/2006/main">
-            <a:off x="685800" y="5229225"/>
-            <a:ext cx="10810875" cy="571500"/>
-          </a:xfrm>
-          <a:prstGeom xmlns:a="http://schemas.openxmlformats.org/drawingml/2006/main" prst="rect">
-            <a:avLst/>
-          </a:prstGeom>
-          <a:noFill xmlns:a="http://schemas.openxmlformats.org/drawingml/2006/main"/>
-          <a:ln xmlns:a="http://schemas.openxmlformats.org/drawingml/2006/main" w="0">
-            <a:noFill/>
-          </a:ln>
-        </p:spPr>
-        <p:txBody>
-          <a:bodyPr xmlns:a="http://schemas.openxmlformats.org/drawingml/2006/main">
-            <a:noAutofit/>
-          </a:bodyPr>
-          <a:lstStyle xmlns:a="http://schemas.openxmlformats.org/drawingml/2006/main"/>
-          <a:p xmlns:a="http://schemas.openxmlformats.org/drawingml/2006/main">
-            <a:pPr>
-              <a:defRPr sz="2100" b="0">
-                <a:solidFill>
-                  <a:srgbClr val="F2F7FB"/>
-                </a:solidFill>
-                <a:latin typeface="Arial"/>
-                <a:ea typeface="Arial"/>
-                <a:cs typeface="Arial"/>
-              </a:defRPr>
-            </a:pPr>
-            <a:r>
-              <a:rPr sz="2100" b="0">
-                <a:solidFill>
-                  <a:srgbClr val="F2F7FB"/>
-                </a:solidFill>
-                <a:latin typeface="Arial"/>
-                <a:ea typeface="Arial"/>
-                <a:cs typeface="Arial"/>
-              </a:rPr>
-              <a:t>Experiment 23: Few-Shot Pattern Learner</a:t>
-            </a:r>
-          </a:p>
-        </p:txBody>
-      </p:sp>
-      <p:sp>
-        <p:nvSpPr>
-          <p:cNvPr id="9" name="">
-            <a:extLst xmlns:a="http://schemas.openxmlformats.org/drawingml/2006/main">
-              <a:ext uri="{FF2B5EF4-FFF2-40B4-BE49-F238E27FC236}">
-                <a16:creationId xmlns:a16="http://schemas.microsoft.com/office/drawing/2014/main" id="{020C35D0-086E-48FD-91C2-3FED3511A65C}"/>
-              </a:ext>
-            </a:extLst>
-          </p:cNvPr>
-          <p:cNvSpPr>
-            <a:spLocks xmlns:a="http://schemas.openxmlformats.org/drawingml/2006/main" noGrp="1"/>
-          </p:cNvSpPr>
-          <p:nvPr/>
-        </p:nvSpPr>
-        <p:spPr>
-          <a:xfrm xmlns:a="http://schemas.openxmlformats.org/drawingml/2006/main">
-            <a:off x="647700" y="6229350"/>
-            <a:ext cx="10572750" cy="428625"/>
-          </a:xfrm>
-          <a:prstGeom xmlns:a="http://schemas.openxmlformats.org/drawingml/2006/main" prst="rect">
-            <a:avLst/>
-          </a:prstGeom>
-          <a:noFill xmlns:a="http://schemas.openxmlformats.org/drawingml/2006/main"/>
-          <a:ln xmlns:a="http://schemas.openxmlformats.org/drawingml/2006/main" w="0">
-            <a:noFill/>
-          </a:ln>
-        </p:spPr>
-        <p:txBody>
-          <a:bodyPr xmlns:a="http://schemas.openxmlformats.org/drawingml/2006/main">
-            <a:noAutofit/>
-          </a:bodyPr>
-          <a:lstStyle xmlns:a="http://schemas.openxmlformats.org/drawingml/2006/main"/>
-          <a:p xmlns:a="http://schemas.openxmlformats.org/drawingml/2006/main">
-            <a:pPr>
-              <a:defRPr sz="1425" b="0">
-                <a:solidFill>
-                  <a:srgbClr val="B6C6D5"/>
-                </a:solidFill>
-                <a:latin typeface="Arial"/>
-                <a:ea typeface="Arial"/>
-                <a:cs typeface="Arial"/>
-              </a:defRPr>
-            </a:pPr>
-            <a:r>
-              <a:rPr sz="1425" b="0">
-                <a:solidFill>
-                  <a:srgbClr val="B6C6D5"/>
-                </a:solidFill>
-                <a:latin typeface="Arial"/>
-                <a:ea typeface="Arial"/>
-                <a:cs typeface="Arial"/>
-              </a:rPr>
-              <a:t>Small models make mistakes. Outputs demonstrate behavior; they are not evidence of general accuracy.</a:t>
-            </a:r>
-          </a:p>
-        </p:txBody>
-      </p:sp>
+        </p:nvGraphicFramePr>
+        <p:xfrm>
+          <a:off xmlns:a="http://schemas.openxmlformats.org/drawingml/2006/main" x="666750" y="2038350"/>
+          <a:ext xmlns:a="http://schemas.openxmlformats.org/drawingml/2006/main" cx="10858500" cy="3857625"/>
+        </p:xfrm>
+        <a:graphic xmlns:a="http://schemas.openxmlformats.org/drawingml/2006/main">
+          <a:graphicData uri="http://schemas.openxmlformats.org/drawingml/2006/table">
+            <a:tbl>
+              <a:tblPr firstRow="0" bandRow="0"/>
+              <a:tblGrid>
+                <a:gridCol w="809625"/>
+                <a:gridCol w="4286250"/>
+                <a:gridCol w="5762625"/>
+              </a:tblGrid>
+              <a:tr h="400050">
+                <a:tc>
+                  <a:txBody>
+                    <a:bodyPr>
+                      <a:noAutofit/>
+                    </a:bodyPr>
+                    <a:lstStyle/>
+                    <a:p>
+                      <a:r>
+                        <a:rPr sz="1350" b="1">
+                          <a:solidFill>
+                            <a:srgbClr val="397718"/>
+                          </a:solidFill>
+                          <a:latin typeface="Arial"/>
+                          <a:ea typeface="Arial"/>
+                          <a:cs typeface="Arial"/>
+                        </a:rPr>
+                        <a:t>MENU</a:t>
+                      </a:r>
+                    </a:p>
+                  </a:txBody>
+                  <a:tcPr marL="95250" marR="95250" marT="38100" marB="38100">
+                    <a:solidFill>
+                      <a:srgbClr val="EFF6E9"/>
+                    </a:solidFill>
+                  </a:tcPr>
+                </a:tc>
+                <a:tc>
+                  <a:txBody>
+                    <a:bodyPr>
+                      <a:noAutofit/>
+                    </a:bodyPr>
+                    <a:lstStyle/>
+                    <a:p>
+                      <a:r>
+                        <a:rPr sz="1350" b="1">
+                          <a:solidFill>
+                            <a:srgbClr val="19332A"/>
+                          </a:solidFill>
+                          <a:latin typeface="Arial"/>
+                          <a:ea typeface="Arial"/>
+                          <a:cs typeface="Arial"/>
+                        </a:rPr>
+                        <a:t>EXPERIMENT</a:t>
+                      </a:r>
+                    </a:p>
+                  </a:txBody>
+                  <a:tcPr marL="95250" marR="95250" marT="38100" marB="38100">
+                    <a:solidFill>
+                      <a:srgbClr val="EFF6E9"/>
+                    </a:solidFill>
+                  </a:tcPr>
+                </a:tc>
+                <a:tc>
+                  <a:txBody>
+                    <a:bodyPr>
+                      <a:noAutofit/>
+                    </a:bodyPr>
+                    <a:lstStyle/>
+                    <a:p>
+                      <a:r>
+                        <a:rPr sz="1350" b="1">
+                          <a:solidFill>
+                            <a:srgbClr val="19332A"/>
+                          </a:solidFill>
+                          <a:latin typeface="Arial"/>
+                          <a:ea typeface="Arial"/>
+                          <a:cs typeface="Arial"/>
+                        </a:rPr>
+                        <a:t>WHAT STUDENTS DO</a:t>
+                      </a:r>
+                    </a:p>
+                  </a:txBody>
+                  <a:tcPr marL="95250" marR="95250" marT="38100" marB="38100">
+                    <a:solidFill>
+                      <a:srgbClr val="EFF6E9"/>
+                    </a:solidFill>
+                  </a:tcPr>
+                </a:tc>
+              </a:tr>
+              <a:tr h="691515">
+                <a:tc>
+                  <a:txBody>
+                    <a:bodyPr>
+                      <a:noAutofit/>
+                    </a:bodyPr>
+                    <a:lstStyle/>
+                    <a:p>
+                      <a:r>
+                        <a:rPr sz="1725" b="1">
+                          <a:solidFill>
+                            <a:srgbClr val="397718"/>
+                          </a:solidFill>
+                          <a:latin typeface="Arial"/>
+                          <a:ea typeface="Arial"/>
+                          <a:cs typeface="Arial"/>
+                        </a:rPr>
+                        <a:t>15</a:t>
+                      </a:r>
+                    </a:p>
+                  </a:txBody>
+                  <a:tcPr marL="95250" marR="95250" marT="38100" marB="38100">
+                    <a:solidFill>
+                      <a:srgbClr val="FFFFFF"/>
+                    </a:solidFill>
+                  </a:tcPr>
+                </a:tc>
+                <a:tc>
+                  <a:txBody>
+                    <a:bodyPr>
+                      <a:noAutofit/>
+                    </a:bodyPr>
+                    <a:lstStyle/>
+                    <a:p>
+                      <a:r>
+                        <a:rPr sz="1725" b="0">
+                          <a:solidFill>
+                            <a:srgbClr val="19332A"/>
+                          </a:solidFill>
+                          <a:latin typeface="Arial"/>
+                          <a:ea typeface="Arial"/>
+                          <a:cs typeface="Arial"/>
+                        </a:rPr>
+                        <a:t>Mission Control: Tool-Planning Assistant</a:t>
+                      </a:r>
+                    </a:p>
+                  </a:txBody>
+                  <a:tcPr marL="95250" marR="95250" marT="38100" marB="38100">
+                    <a:solidFill>
+                      <a:srgbClr val="FFFFFF"/>
+                    </a:solidFill>
+                  </a:tcPr>
+                </a:tc>
+                <a:tc>
+                  <a:txBody>
+                    <a:bodyPr>
+                      <a:noAutofit/>
+                    </a:bodyPr>
+                    <a:lstStyle/>
+                    <a:p>
+                      <a:r>
+                        <a:rPr sz="1725" b="0">
+                          <a:solidFill>
+                            <a:srgbClr val="19332A"/>
+                          </a:solidFill>
+                          <a:latin typeface="Arial"/>
+                          <a:ea typeface="Arial"/>
+                          <a:cs typeface="Arial"/>
+                        </a:rPr>
+                        <a:t>Give a mission, inspect its tool plan, then check the evidence.</a:t>
+                      </a:r>
+                    </a:p>
+                  </a:txBody>
+                  <a:tcPr marL="95250" marR="95250" marT="38100" marB="38100">
+                    <a:solidFill>
+                      <a:srgbClr val="FFFFFF"/>
+                    </a:solidFill>
+                  </a:tcPr>
+                </a:tc>
+              </a:tr>
+              <a:tr h="691515">
+                <a:tc>
+                  <a:txBody>
+                    <a:bodyPr>
+                      <a:noAutofit/>
+                    </a:bodyPr>
+                    <a:lstStyle/>
+                    <a:p>
+                      <a:r>
+                        <a:rPr sz="1725" b="1">
+                          <a:solidFill>
+                            <a:srgbClr val="397718"/>
+                          </a:solidFill>
+                          <a:latin typeface="Arial"/>
+                          <a:ea typeface="Arial"/>
+                          <a:cs typeface="Arial"/>
+                        </a:rPr>
+                        <a:t>16</a:t>
+                      </a:r>
+                    </a:p>
+                  </a:txBody>
+                  <a:tcPr marL="95250" marR="95250" marT="38100" marB="38100">
+                    <a:solidFill>
+                      <a:srgbClr val="FFFFFF"/>
+                    </a:solidFill>
+                  </a:tcPr>
+                </a:tc>
+                <a:tc>
+                  <a:txBody>
+                    <a:bodyPr>
+                      <a:noAutofit/>
+                    </a:bodyPr>
+                    <a:lstStyle/>
+                    <a:p>
+                      <a:r>
+                        <a:rPr sz="1725" b="0">
+                          <a:solidFill>
+                            <a:srgbClr val="19332A"/>
+                          </a:solidFill>
+                          <a:latin typeface="Arial"/>
+                          <a:ea typeface="Arial"/>
+                          <a:cs typeface="Arial"/>
+                        </a:rPr>
+                        <a:t>Document Detective: Answers with Evidence</a:t>
+                      </a:r>
+                    </a:p>
+                  </a:txBody>
+                  <a:tcPr marL="95250" marR="95250" marT="38100" marB="38100">
+                    <a:solidFill>
+                      <a:srgbClr val="FFFFFF"/>
+                    </a:solidFill>
+                  </a:tcPr>
+                </a:tc>
+                <a:tc>
+                  <a:txBody>
+                    <a:bodyPr>
+                      <a:noAutofit/>
+                    </a:bodyPr>
+                    <a:lstStyle/>
+                    <a:p>
+                      <a:r>
+                        <a:rPr sz="1725" b="0">
+                          <a:solidFill>
+                            <a:srgbClr val="19332A"/>
+                          </a:solidFill>
+                          <a:latin typeface="Arial"/>
+                          <a:ea typeface="Arial"/>
+                          <a:cs typeface="Arial"/>
+                        </a:rPr>
+                        <a:t>Ask the exhibit brief a question and inspect source passages.</a:t>
+                      </a:r>
+                    </a:p>
+                  </a:txBody>
+                  <a:tcPr marL="95250" marR="95250" marT="38100" marB="38100">
+                    <a:solidFill>
+                      <a:srgbClr val="FFFFFF"/>
+                    </a:solidFill>
+                  </a:tcPr>
+                </a:tc>
+              </a:tr>
+              <a:tr h="691515">
+                <a:tc>
+                  <a:txBody>
+                    <a:bodyPr>
+                      <a:noAutofit/>
+                    </a:bodyPr>
+                    <a:lstStyle/>
+                    <a:p>
+                      <a:r>
+                        <a:rPr sz="1725" b="1">
+                          <a:solidFill>
+                            <a:srgbClr val="397718"/>
+                          </a:solidFill>
+                          <a:latin typeface="Arial"/>
+                          <a:ea typeface="Arial"/>
+                          <a:cs typeface="Arial"/>
+                        </a:rPr>
+                        <a:t>9</a:t>
+                      </a:r>
+                    </a:p>
+                  </a:txBody>
+                  <a:tcPr marL="95250" marR="95250" marT="38100" marB="38100">
+                    <a:solidFill>
+                      <a:srgbClr val="FFFFFF"/>
+                    </a:solidFill>
+                  </a:tcPr>
+                </a:tc>
+                <a:tc>
+                  <a:txBody>
+                    <a:bodyPr>
+                      <a:noAutofit/>
+                    </a:bodyPr>
+                    <a:lstStyle/>
+                    <a:p>
+                      <a:r>
+                        <a:rPr sz="1725" b="0">
+                          <a:solidFill>
+                            <a:srgbClr val="19332A"/>
+                          </a:solidFill>
+                          <a:latin typeface="Arial"/>
+                          <a:ea typeface="Arial"/>
+                          <a:cs typeface="Arial"/>
+                        </a:rPr>
+                        <a:t>Persistent Memory Assistant</a:t>
+                      </a:r>
+                    </a:p>
+                  </a:txBody>
+                  <a:tcPr marL="95250" marR="95250" marT="38100" marB="38100">
+                    <a:solidFill>
+                      <a:srgbClr val="FFFFFF"/>
+                    </a:solidFill>
+                  </a:tcPr>
+                </a:tc>
+                <a:tc>
+                  <a:txBody>
+                    <a:bodyPr>
+                      <a:noAutofit/>
+                    </a:bodyPr>
+                    <a:lstStyle/>
+                    <a:p>
+                      <a:r>
+                        <a:rPr sz="1725" b="0">
+                          <a:solidFill>
+                            <a:srgbClr val="19332A"/>
+                          </a:solidFill>
+                          <a:latin typeface="Arial"/>
+                          <a:ea typeface="Arial"/>
+                          <a:cs typeface="Arial"/>
+                        </a:rPr>
+                        <a:t>Store a fictional preference and reuse it in a later session.</a:t>
+                      </a:r>
+                    </a:p>
+                  </a:txBody>
+                  <a:tcPr marL="95250" marR="95250" marT="38100" marB="38100">
+                    <a:solidFill>
+                      <a:srgbClr val="FFFFFF"/>
+                    </a:solidFill>
+                  </a:tcPr>
+                </a:tc>
+              </a:tr>
+              <a:tr h="691515">
+                <a:tc>
+                  <a:txBody>
+                    <a:bodyPr>
+                      <a:noAutofit/>
+                    </a:bodyPr>
+                    <a:lstStyle/>
+                    <a:p>
+                      <a:r>
+                        <a:rPr sz="1725" b="1">
+                          <a:solidFill>
+                            <a:srgbClr val="397718"/>
+                          </a:solidFill>
+                          <a:latin typeface="Arial"/>
+                          <a:ea typeface="Arial"/>
+                          <a:cs typeface="Arial"/>
+                        </a:rPr>
+                        <a:t>8</a:t>
+                      </a:r>
+                    </a:p>
+                  </a:txBody>
+                  <a:tcPr marL="95250" marR="95250" marT="38100" marB="38100">
+                    <a:solidFill>
+                      <a:srgbClr val="FFFFFF"/>
+                    </a:solidFill>
+                  </a:tcPr>
+                </a:tc>
+                <a:tc>
+                  <a:txBody>
+                    <a:bodyPr>
+                      <a:noAutofit/>
+                    </a:bodyPr>
+                    <a:lstStyle/>
+                    <a:p>
+                      <a:r>
+                        <a:rPr sz="1725" b="0">
+                          <a:solidFill>
+                            <a:srgbClr val="19332A"/>
+                          </a:solidFill>
+                          <a:latin typeface="Arial"/>
+                          <a:ea typeface="Arial"/>
+                          <a:cs typeface="Arial"/>
+                        </a:rPr>
+                        <a:t>Class Notes Retrieval and Grounded Answers</a:t>
+                      </a:r>
+                    </a:p>
+                  </a:txBody>
+                  <a:tcPr marL="95250" marR="95250" marT="38100" marB="38100">
+                    <a:solidFill>
+                      <a:srgbClr val="FFFFFF"/>
+                    </a:solidFill>
+                  </a:tcPr>
+                </a:tc>
+                <a:tc>
+                  <a:txBody>
+                    <a:bodyPr>
+                      <a:noAutofit/>
+                    </a:bodyPr>
+                    <a:lstStyle/>
+                    <a:p>
+                      <a:r>
+                        <a:rPr sz="1725" b="0">
+                          <a:solidFill>
+                            <a:srgbClr val="19332A"/>
+                          </a:solidFill>
+                          <a:latin typeface="Arial"/>
+                          <a:ea typeface="Arial"/>
+                          <a:cs typeface="Arial"/>
+                        </a:rPr>
+                        <a:t>Index notes, retrieve passages and question the answer.</a:t>
+                      </a:r>
+                    </a:p>
+                  </a:txBody>
+                  <a:tcPr marL="95250" marR="95250" marT="38100" marB="38100">
+                    <a:solidFill>
+                      <a:srgbClr val="FFFFFF"/>
+                    </a:solidFill>
+                  </a:tcPr>
+                </a:tc>
+              </a:tr>
+              <a:tr h="691515">
+                <a:tc>
+                  <a:txBody>
+                    <a:bodyPr>
+                      <a:noAutofit/>
+                    </a:bodyPr>
+                    <a:lstStyle/>
+                    <a:p>
+                      <a:r>
+                        <a:rPr sz="1725" b="1">
+                          <a:solidFill>
+                            <a:srgbClr val="397718"/>
+                          </a:solidFill>
+                          <a:latin typeface="Arial"/>
+                          <a:ea typeface="Arial"/>
+                          <a:cs typeface="Arial"/>
+                        </a:rPr>
+                        <a:t>3</a:t>
+                      </a:r>
+                    </a:p>
+                  </a:txBody>
+                  <a:tcPr marL="95250" marR="95250" marT="38100" marB="38100">
+                    <a:solidFill>
+                      <a:srgbClr val="FFFFFF"/>
+                    </a:solidFill>
+                  </a:tcPr>
+                </a:tc>
+                <a:tc>
+                  <a:txBody>
+                    <a:bodyPr>
+                      <a:noAutofit/>
+                    </a:bodyPr>
+                    <a:lstStyle/>
+                    <a:p>
+                      <a:r>
+                        <a:rPr sz="1725" b="0">
+                          <a:solidFill>
+                            <a:srgbClr val="19332A"/>
+                          </a:solidFill>
+                          <a:latin typeface="Arial"/>
+                          <a:ea typeface="Arial"/>
+                          <a:cs typeface="Arial"/>
+                        </a:rPr>
+                        <a:t>Offline Conversation Assistant</a:t>
+                      </a:r>
+                    </a:p>
+                  </a:txBody>
+                  <a:tcPr marL="95250" marR="95250" marT="38100" marB="38100">
+                    <a:solidFill>
+                      <a:srgbClr val="FFFFFF"/>
+                    </a:solidFill>
+                  </a:tcPr>
+                </a:tc>
+                <a:tc>
+                  <a:txBody>
+                    <a:bodyPr>
+                      <a:noAutofit/>
+                    </a:bodyPr>
+                    <a:lstStyle/>
+                    <a:p>
+                      <a:r>
+                        <a:rPr sz="1725" b="0">
+                          <a:solidFill>
+                            <a:srgbClr val="19332A"/>
+                          </a:solidFill>
+                          <a:latin typeface="Arial"/>
+                          <a:ea typeface="Arial"/>
+                          <a:cs typeface="Arial"/>
+                        </a:rPr>
+                        <a:t>Hold a short local conversation and inspect its memory.</a:t>
+                      </a:r>
+                    </a:p>
+                  </a:txBody>
+                  <a:tcPr marL="95250" marR="95250" marT="38100" marB="38100">
+                    <a:solidFill>
+                      <a:srgbClr val="FFFFFF"/>
+                    </a:solidFill>
+                  </a:tcPr>
+                </a:tc>
+              </a:tr>
+            </a:tbl>
+          </a:graphicData>
+        </a:graphic>
+      </p:graphicFrame>
     </p:spTree>
     <p:extLst>
       <p:ext uri="{BB962C8B-B14F-4D97-AF65-F5344CB8AC3E}">
-        <p14:creationId xmlns:p14="http://schemas.microsoft.com/office/powerpoint/2010/main" val="1190414753"/>
+        <p14:creationId xmlns:p14="http://schemas.microsoft.com/office/powerpoint/2010/main" val="854286553"/>
       </p:ext>
     </p:extLst>
   </p:cSld>
@@ -3505,7 +5156,7 @@
     <p:bg>
       <p:bgPr>
         <a:solidFill xmlns:a="http://schemas.openxmlformats.org/drawingml/2006/main">
-          <a:srgbClr val="0C1825"/>
+          <a:srgbClr val="FFFFFF"/>
         </a:solidFill>
       </p:bgPr>
     </p:bg>
@@ -3520,10 +5171,10 @@
       </p:grpSpPr>
       <p:sp>
         <p:nvSpPr>
-          <p:cNvPr id="9" name="">
+          <p:cNvPr id="6" name="">
             <a:extLst xmlns:a="http://schemas.openxmlformats.org/drawingml/2006/main">
               <a:ext uri="{FF2B5EF4-FFF2-40B4-BE49-F238E27FC236}">
-                <a16:creationId xmlns:a16="http://schemas.microsoft.com/office/drawing/2014/main" id="{2B4A4233-4D52-43B2-BA1B-CB31428CE284}"/>
+                <a16:creationId xmlns:a16="http://schemas.microsoft.com/office/drawing/2014/main" id="{6052940C-26EA-4A18-BD62-3107ECA14A20}"/>
               </a:ext>
             </a:extLst>
           </p:cNvPr>
@@ -3534,8 +5185,8 @@
         </p:nvSpPr>
         <p:spPr>
           <a:xfrm xmlns:a="http://schemas.openxmlformats.org/drawingml/2006/main">
-            <a:off x="609600" y="438150"/>
-            <a:ext cx="10934700" cy="857250"/>
+            <a:off x="628650" y="457200"/>
+            <a:ext cx="10953750" cy="762000"/>
           </a:xfrm>
           <a:prstGeom xmlns:a="http://schemas.openxmlformats.org/drawingml/2006/main" prst="rect">
             <a:avLst/>
@@ -3552,25 +5203,25 @@
           <a:lstStyle xmlns:a="http://schemas.openxmlformats.org/drawingml/2006/main"/>
           <a:p xmlns:a="http://schemas.openxmlformats.org/drawingml/2006/main">
             <a:pPr>
-              <a:defRPr sz="3750" b="1">
-                <a:solidFill>
-                  <a:srgbClr val="F2F7FB"/>
-                </a:solidFill>
-                <a:latin typeface="Arial"/>
-                <a:ea typeface="Arial"/>
-                <a:cs typeface="Arial"/>
-              </a:defRPr>
-            </a:pPr>
-            <a:r>
-              <a:rPr sz="3750" b="1">
-                <a:solidFill>
-                  <a:srgbClr val="F2F7FB"/>
-                </a:solidFill>
-                <a:latin typeface="Arial"/>
-                <a:ea typeface="Arial"/>
-                <a:cs typeface="Arial"/>
-              </a:rPr>
-              <a:t>Creativity and useful text tasks</a:t>
+              <a:defRPr sz="3600" b="1">
+                <a:solidFill>
+                  <a:srgbClr val="19332A"/>
+                </a:solidFill>
+                <a:latin typeface="Arial"/>
+                <a:ea typeface="Arial"/>
+                <a:cs typeface="Arial"/>
+              </a:defRPr>
+            </a:pPr>
+            <a:r>
+              <a:rPr sz="3600" b="1">
+                <a:solidFill>
+                  <a:srgbClr val="19332A"/>
+                </a:solidFill>
+                <a:latin typeface="Arial"/>
+                <a:ea typeface="Arial"/>
+                <a:cs typeface="Arial"/>
+              </a:rPr>
+              <a:t>Language under the microscope</a:t>
             </a:r>
           </a:p>
         </p:txBody>
@@ -3580,7 +5231,7 @@
           <p:cNvPr id="2" name="">
             <a:extLst xmlns:a="http://schemas.openxmlformats.org/drawingml/2006/main">
               <a:ext uri="{FF2B5EF4-FFF2-40B4-BE49-F238E27FC236}">
-                <a16:creationId xmlns:a16="http://schemas.microsoft.com/office/drawing/2014/main" id="{37623512-D5A8-4DBE-832C-80E827C3FE28}"/>
+                <a16:creationId xmlns:a16="http://schemas.microsoft.com/office/drawing/2014/main" id="{2A128034-1918-4072-92C7-3CE823D95D79}"/>
               </a:ext>
             </a:extLst>
           </p:cNvPr>
@@ -3591,8 +5242,8 @@
         </p:nvSpPr>
         <p:spPr>
           <a:xfrm xmlns:a="http://schemas.openxmlformats.org/drawingml/2006/main">
-            <a:off x="647700" y="1362075"/>
-            <a:ext cx="10763250" cy="857250"/>
+            <a:off x="666750" y="1333500"/>
+            <a:ext cx="10858500" cy="619125"/>
           </a:xfrm>
           <a:prstGeom xmlns:a="http://schemas.openxmlformats.org/drawingml/2006/main" prst="rect">
             <a:avLst/>
@@ -3609,25 +5260,25 @@
           <a:lstStyle xmlns:a="http://schemas.openxmlformats.org/drawingml/2006/main"/>
           <a:p xmlns:a="http://schemas.openxmlformats.org/drawingml/2006/main">
             <a:pPr>
-              <a:defRPr sz="2100" b="0">
-                <a:solidFill>
-                  <a:srgbClr val="76DAC7"/>
-                </a:solidFill>
-                <a:latin typeface="Arial"/>
-                <a:ea typeface="Arial"/>
-                <a:cs typeface="Arial"/>
-              </a:defRPr>
-            </a:pPr>
-            <a:r>
-              <a:rPr sz="2100" b="0">
-                <a:solidFill>
-                  <a:srgbClr val="76DAC7"/>
-                </a:solidFill>
-                <a:latin typeface="Arial"/>
-                <a:ea typeface="Arial"/>
-                <a:cs typeface="Arial"/>
-              </a:rPr>
-              <a:t>The audience controls the input</a:t>
+              <a:defRPr sz="1950" b="0">
+                <a:solidFill>
+                  <a:srgbClr val="52635B"/>
+                </a:solidFill>
+                <a:latin typeface="Arial"/>
+                <a:ea typeface="Arial"/>
+                <a:cs typeface="Arial"/>
+              </a:defRPr>
+            </a:pPr>
+            <a:r>
+              <a:rPr sz="1950" b="0">
+                <a:solidFill>
+                  <a:srgbClr val="52635B"/>
+                </a:solidFill>
+                <a:latin typeface="Arial"/>
+                <a:ea typeface="Arial"/>
+                <a:cs typeface="Arial"/>
+              </a:rPr>
+              <a:t>Change the input or decoding settings and compare the response.</a:t>
             </a:r>
           </a:p>
         </p:txBody>
@@ -3637,7 +5288,7 @@
           <p:cNvPr id="3" name="">
             <a:extLst xmlns:a="http://schemas.openxmlformats.org/drawingml/2006/main">
               <a:ext uri="{FF2B5EF4-FFF2-40B4-BE49-F238E27FC236}">
-                <a16:creationId xmlns:a16="http://schemas.microsoft.com/office/drawing/2014/main" id="{9136A9FB-9E84-44B1-A952-EC4F91661896}"/>
+                <a16:creationId xmlns:a16="http://schemas.microsoft.com/office/drawing/2014/main" id="{DC00DC30-E760-4F3A-BD5A-A88F6F597602}"/>
               </a:ext>
             </a:extLst>
           </p:cNvPr>
@@ -3648,8 +5299,8 @@
         </p:nvSpPr>
         <p:spPr>
           <a:xfrm xmlns:a="http://schemas.openxmlformats.org/drawingml/2006/main">
-            <a:off x="685800" y="2324100"/>
-            <a:ext cx="10810875" cy="571500"/>
+            <a:off x="666750" y="6191250"/>
+            <a:ext cx="10287000" cy="419100"/>
           </a:xfrm>
           <a:prstGeom xmlns:a="http://schemas.openxmlformats.org/drawingml/2006/main" prst="rect">
             <a:avLst/>
@@ -3666,25 +5317,25 @@
           <a:lstStyle xmlns:a="http://schemas.openxmlformats.org/drawingml/2006/main"/>
           <a:p xmlns:a="http://schemas.openxmlformats.org/drawingml/2006/main">
             <a:pPr>
-              <a:defRPr sz="2100" b="0">
-                <a:solidFill>
-                  <a:srgbClr val="F2F7FB"/>
-                </a:solidFill>
-                <a:latin typeface="Arial"/>
-                <a:ea typeface="Arial"/>
-                <a:cs typeface="Arial"/>
-              </a:defRPr>
-            </a:pPr>
-            <a:r>
-              <a:rPr sz="2100" b="0">
-                <a:solidFill>
-                  <a:srgbClr val="F2F7FB"/>
-                </a:solidFill>
-                <a:latin typeface="Arial"/>
-                <a:ea typeface="Arial"/>
-                <a:cs typeface="Arial"/>
-              </a:rPr>
-              <a:t>Experiment 17: Story Director: Audience-Controlled Fiction</a:t>
+              <a:defRPr sz="1350" b="0">
+                <a:solidFill>
+                  <a:srgbClr val="52635B"/>
+                </a:solidFill>
+                <a:latin typeface="Arial"/>
+                <a:ea typeface="Arial"/>
+                <a:cs typeface="Arial"/>
+              </a:defRPr>
+            </a:pPr>
+            <a:r>
+              <a:rPr sz="1350" b="0">
+                <a:solidFill>
+                  <a:srgbClr val="52635B"/>
+                </a:solidFill>
+                <a:latin typeface="Arial"/>
+                <a:ea typeface="Arial"/>
+                <a:cs typeface="Arial"/>
+              </a:rPr>
+              <a:t>Ask the class to predict how each change will affect the answer.</a:t>
             </a:r>
           </a:p>
         </p:txBody>
@@ -3694,7 +5345,7 @@
           <p:cNvPr id="4" name="">
             <a:extLst xmlns:a="http://schemas.openxmlformats.org/drawingml/2006/main">
               <a:ext uri="{FF2B5EF4-FFF2-40B4-BE49-F238E27FC236}">
-                <a16:creationId xmlns:a16="http://schemas.microsoft.com/office/drawing/2014/main" id="{2DDC253E-B7F5-4401-B9EE-B595B2BED13F}"/>
+                <a16:creationId xmlns:a16="http://schemas.microsoft.com/office/drawing/2014/main" id="{512D35F5-0B15-486C-AD63-C23DAA1F968D}"/>
               </a:ext>
             </a:extLst>
           </p:cNvPr>
@@ -3705,8 +5356,8 @@
         </p:nvSpPr>
         <p:spPr>
           <a:xfrm xmlns:a="http://schemas.openxmlformats.org/drawingml/2006/main">
-            <a:off x="685800" y="2990850"/>
-            <a:ext cx="10810875" cy="571500"/>
+            <a:off x="11182350" y="6200775"/>
+            <a:ext cx="523875" cy="333375"/>
           </a:xfrm>
           <a:prstGeom xmlns:a="http://schemas.openxmlformats.org/drawingml/2006/main" prst="rect">
             <a:avLst/>
@@ -3723,261 +5374,616 @@
           <a:lstStyle xmlns:a="http://schemas.openxmlformats.org/drawingml/2006/main"/>
           <a:p xmlns:a="http://schemas.openxmlformats.org/drawingml/2006/main">
             <a:pPr>
-              <a:defRPr sz="2100" b="0">
-                <a:solidFill>
-                  <a:srgbClr val="F2F7FB"/>
-                </a:solidFill>
-                <a:latin typeface="Arial"/>
-                <a:ea typeface="Arial"/>
-                <a:cs typeface="Arial"/>
-              </a:defRPr>
-            </a:pPr>
-            <a:r>
-              <a:rPr sz="2100" b="0">
-                <a:solidFill>
-                  <a:srgbClr val="F2F7FB"/>
-                </a:solidFill>
-                <a:latin typeface="Arial"/>
-                <a:ea typeface="Arial"/>
-                <a:cs typeface="Arial"/>
-              </a:rPr>
-              <a:t>Experiment 10: TinyStories Generator</a:t>
-            </a:r>
-          </a:p>
-        </p:txBody>
-      </p:sp>
-      <p:sp>
-        <p:nvSpPr>
-          <p:cNvPr id="5" name="">
-            <a:extLst xmlns:a="http://schemas.openxmlformats.org/drawingml/2006/main">
-              <a:ext uri="{FF2B5EF4-FFF2-40B4-BE49-F238E27FC236}">
-                <a16:creationId xmlns:a16="http://schemas.microsoft.com/office/drawing/2014/main" id="{FD028C2E-ED96-4D4D-B53C-C4B27F24740A}"/>
-              </a:ext>
-            </a:extLst>
-          </p:cNvPr>
-          <p:cNvSpPr>
-            <a:spLocks xmlns:a="http://schemas.openxmlformats.org/drawingml/2006/main" noGrp="1"/>
-          </p:cNvSpPr>
+              <a:defRPr sz="1350" b="1">
+                <a:solidFill>
+                  <a:srgbClr val="397718"/>
+                </a:solidFill>
+                <a:latin typeface="Arial"/>
+                <a:ea typeface="Arial"/>
+                <a:cs typeface="Arial"/>
+              </a:defRPr>
+            </a:pPr>
+            <a:r>
+              <a:rPr sz="1350" b="1">
+                <a:solidFill>
+                  <a:srgbClr val="397718"/>
+                </a:solidFill>
+                <a:latin typeface="Arial"/>
+                <a:ea typeface="Arial"/>
+                <a:cs typeface="Arial"/>
+              </a:rPr>
+              <a:t>05</a:t>
+            </a:r>
+          </a:p>
+        </p:txBody>
+      </p:sp>
+      <p:graphicFrame>
+        <p:nvGraphicFramePr>
+          <p:cNvPr id="10" name=""/>
+          <p:cNvGraphicFramePr/>
           <p:nvPr/>
-        </p:nvSpPr>
-        <p:spPr>
-          <a:xfrm xmlns:a="http://schemas.openxmlformats.org/drawingml/2006/main">
-            <a:off x="685800" y="3657600"/>
-            <a:ext cx="10810875" cy="571500"/>
-          </a:xfrm>
-          <a:prstGeom xmlns:a="http://schemas.openxmlformats.org/drawingml/2006/main" prst="rect">
-            <a:avLst/>
-          </a:prstGeom>
-          <a:noFill xmlns:a="http://schemas.openxmlformats.org/drawingml/2006/main"/>
-          <a:ln xmlns:a="http://schemas.openxmlformats.org/drawingml/2006/main" w="0">
-            <a:noFill/>
-          </a:ln>
-        </p:spPr>
-        <p:txBody>
-          <a:bodyPr xmlns:a="http://schemas.openxmlformats.org/drawingml/2006/main">
-            <a:noAutofit/>
-          </a:bodyPr>
-          <a:lstStyle xmlns:a="http://schemas.openxmlformats.org/drawingml/2006/main"/>
-          <a:p xmlns:a="http://schemas.openxmlformats.org/drawingml/2006/main">
-            <a:pPr>
-              <a:defRPr sz="2100" b="0">
-                <a:solidFill>
-                  <a:srgbClr val="F2F7FB"/>
-                </a:solidFill>
-                <a:latin typeface="Arial"/>
-                <a:ea typeface="Arial"/>
-                <a:cs typeface="Arial"/>
-              </a:defRPr>
-            </a:pPr>
-            <a:r>
-              <a:rPr sz="2100" b="0">
-                <a:solidFill>
-                  <a:srgbClr val="F2F7FB"/>
-                </a:solidFill>
-                <a:latin typeface="Arial"/>
-                <a:ea typeface="Arial"/>
-                <a:cs typeface="Arial"/>
-              </a:rPr>
-              <a:t>Experiment 24: Message Triage Desk: Validated JSON Routing</a:t>
-            </a:r>
-          </a:p>
-        </p:txBody>
-      </p:sp>
-      <p:sp>
-        <p:nvSpPr>
-          <p:cNvPr id="6" name="">
-            <a:extLst xmlns:a="http://schemas.openxmlformats.org/drawingml/2006/main">
-              <a:ext uri="{FF2B5EF4-FFF2-40B4-BE49-F238E27FC236}">
-                <a16:creationId xmlns:a16="http://schemas.microsoft.com/office/drawing/2014/main" id="{DEA79C02-BA7E-41CB-9F38-76D72ACD6756}"/>
-              </a:ext>
-            </a:extLst>
-          </p:cNvPr>
-          <p:cNvSpPr>
-            <a:spLocks xmlns:a="http://schemas.openxmlformats.org/drawingml/2006/main" noGrp="1"/>
-          </p:cNvSpPr>
-          <p:nvPr/>
-        </p:nvSpPr>
-        <p:spPr>
-          <a:xfrm xmlns:a="http://schemas.openxmlformats.org/drawingml/2006/main">
-            <a:off x="685800" y="4324350"/>
-            <a:ext cx="10810875" cy="571500"/>
-          </a:xfrm>
-          <a:prstGeom xmlns:a="http://schemas.openxmlformats.org/drawingml/2006/main" prst="rect">
-            <a:avLst/>
-          </a:prstGeom>
-          <a:noFill xmlns:a="http://schemas.openxmlformats.org/drawingml/2006/main"/>
-          <a:ln xmlns:a="http://schemas.openxmlformats.org/drawingml/2006/main" w="0">
-            <a:noFill/>
-          </a:ln>
-        </p:spPr>
-        <p:txBody>
-          <a:bodyPr xmlns:a="http://schemas.openxmlformats.org/drawingml/2006/main">
-            <a:noAutofit/>
-          </a:bodyPr>
-          <a:lstStyle xmlns:a="http://schemas.openxmlformats.org/drawingml/2006/main"/>
-          <a:p xmlns:a="http://schemas.openxmlformats.org/drawingml/2006/main">
-            <a:pPr>
-              <a:defRPr sz="2100" b="0">
-                <a:solidFill>
-                  <a:srgbClr val="F2F7FB"/>
-                </a:solidFill>
-                <a:latin typeface="Arial"/>
-                <a:ea typeface="Arial"/>
-                <a:cs typeface="Arial"/>
-              </a:defRPr>
-            </a:pPr>
-            <a:r>
-              <a:rPr sz="2100" b="0">
-                <a:solidFill>
-                  <a:srgbClr val="F2F7FB"/>
-                </a:solidFill>
-                <a:latin typeface="Arial"/>
-                <a:ea typeface="Arial"/>
-                <a:cs typeface="Arial"/>
-              </a:rPr>
-              <a:t>Experiment 25: Summary Fact Checker</a:t>
-            </a:r>
-          </a:p>
-        </p:txBody>
-      </p:sp>
-      <p:sp>
-        <p:nvSpPr>
-          <p:cNvPr id="7" name="">
-            <a:extLst xmlns:a="http://schemas.openxmlformats.org/drawingml/2006/main">
-              <a:ext uri="{FF2B5EF4-FFF2-40B4-BE49-F238E27FC236}">
-                <a16:creationId xmlns:a16="http://schemas.microsoft.com/office/drawing/2014/main" id="{37D8C19C-A22B-432A-900A-71FE3A61B2D8}"/>
-              </a:ext>
-            </a:extLst>
-          </p:cNvPr>
-          <p:cNvSpPr>
-            <a:spLocks xmlns:a="http://schemas.openxmlformats.org/drawingml/2006/main" noGrp="1"/>
-          </p:cNvSpPr>
-          <p:nvPr/>
-        </p:nvSpPr>
-        <p:spPr>
-          <a:xfrm xmlns:a="http://schemas.openxmlformats.org/drawingml/2006/main">
-            <a:off x="685800" y="4991100"/>
-            <a:ext cx="10810875" cy="571500"/>
-          </a:xfrm>
-          <a:prstGeom xmlns:a="http://schemas.openxmlformats.org/drawingml/2006/main" prst="rect">
-            <a:avLst/>
-          </a:prstGeom>
-          <a:noFill xmlns:a="http://schemas.openxmlformats.org/drawingml/2006/main"/>
-          <a:ln xmlns:a="http://schemas.openxmlformats.org/drawingml/2006/main" w="0">
-            <a:noFill/>
-          </a:ln>
-        </p:spPr>
-        <p:txBody>
-          <a:bodyPr xmlns:a="http://schemas.openxmlformats.org/drawingml/2006/main">
-            <a:noAutofit/>
-          </a:bodyPr>
-          <a:lstStyle xmlns:a="http://schemas.openxmlformats.org/drawingml/2006/main"/>
-          <a:p xmlns:a="http://schemas.openxmlformats.org/drawingml/2006/main">
-            <a:pPr>
-              <a:defRPr sz="2100" b="0">
-                <a:solidFill>
-                  <a:srgbClr val="F2F7FB"/>
-                </a:solidFill>
-                <a:latin typeface="Arial"/>
-                <a:ea typeface="Arial"/>
-                <a:cs typeface="Arial"/>
-              </a:defRPr>
-            </a:pPr>
-            <a:r>
-              <a:rPr sz="2100" b="0">
-                <a:solidFill>
-                  <a:srgbClr val="F2F7FB"/>
-                </a:solidFill>
-                <a:latin typeface="Arial"/>
-                <a:ea typeface="Arial"/>
-                <a:cs typeface="Arial"/>
-              </a:rPr>
-              <a:t>Experiment 7: Calculator Tool Assistant</a:t>
-            </a:r>
-          </a:p>
-        </p:txBody>
-      </p:sp>
-      <p:sp>
-        <p:nvSpPr>
-          <p:cNvPr id="8" name="">
-            <a:extLst xmlns:a="http://schemas.openxmlformats.org/drawingml/2006/main">
-              <a:ext uri="{FF2B5EF4-FFF2-40B4-BE49-F238E27FC236}">
-                <a16:creationId xmlns:a16="http://schemas.microsoft.com/office/drawing/2014/main" id="{BFB3200C-7D8C-4D13-82D7-C53168850B41}"/>
-              </a:ext>
-            </a:extLst>
-          </p:cNvPr>
-          <p:cNvSpPr>
-            <a:spLocks xmlns:a="http://schemas.openxmlformats.org/drawingml/2006/main" noGrp="1"/>
-          </p:cNvSpPr>
-          <p:nvPr/>
-        </p:nvSpPr>
-        <p:spPr>
-          <a:xfrm xmlns:a="http://schemas.openxmlformats.org/drawingml/2006/main">
-            <a:off x="647700" y="6229350"/>
-            <a:ext cx="10572750" cy="428625"/>
-          </a:xfrm>
-          <a:prstGeom xmlns:a="http://schemas.openxmlformats.org/drawingml/2006/main" prst="rect">
-            <a:avLst/>
-          </a:prstGeom>
-          <a:noFill xmlns:a="http://schemas.openxmlformats.org/drawingml/2006/main"/>
-          <a:ln xmlns:a="http://schemas.openxmlformats.org/drawingml/2006/main" w="0">
-            <a:noFill/>
-          </a:ln>
-        </p:spPr>
-        <p:txBody>
-          <a:bodyPr xmlns:a="http://schemas.openxmlformats.org/drawingml/2006/main">
-            <a:noAutofit/>
-          </a:bodyPr>
-          <a:lstStyle xmlns:a="http://schemas.openxmlformats.org/drawingml/2006/main"/>
-          <a:p xmlns:a="http://schemas.openxmlformats.org/drawingml/2006/main">
-            <a:pPr>
-              <a:defRPr sz="1425" b="0">
-                <a:solidFill>
-                  <a:srgbClr val="B6C6D5"/>
-                </a:solidFill>
-                <a:latin typeface="Arial"/>
-                <a:ea typeface="Arial"/>
-                <a:cs typeface="Arial"/>
-              </a:defRPr>
-            </a:pPr>
-            <a:r>
-              <a:rPr sz="1425" b="0">
-                <a:solidFill>
-                  <a:srgbClr val="B6C6D5"/>
-                </a:solidFill>
-                <a:latin typeface="Arial"/>
-                <a:ea typeface="Arial"/>
-                <a:cs typeface="Arial"/>
-              </a:rPr>
-              <a:t>The summary critique is another model response, not a factual guarantee. Triage sends no messages.</a:t>
-            </a:r>
-          </a:p>
-        </p:txBody>
-      </p:sp>
+        </p:nvGraphicFramePr>
+        <p:xfrm>
+          <a:off xmlns:a="http://schemas.openxmlformats.org/drawingml/2006/main" x="666750" y="1962150"/>
+          <a:ext xmlns:a="http://schemas.openxmlformats.org/drawingml/2006/main" cx="10858500" cy="4019550"/>
+        </p:xfrm>
+        <a:graphic xmlns:a="http://schemas.openxmlformats.org/drawingml/2006/main">
+          <a:graphicData uri="http://schemas.openxmlformats.org/drawingml/2006/table">
+            <a:tbl>
+              <a:tblPr firstRow="0" bandRow="0"/>
+              <a:tblGrid>
+                <a:gridCol w="809625"/>
+                <a:gridCol w="4286250"/>
+                <a:gridCol w="5762625"/>
+              </a:tblGrid>
+              <a:tr h="400050">
+                <a:tc>
+                  <a:txBody>
+                    <a:bodyPr>
+                      <a:noAutofit/>
+                    </a:bodyPr>
+                    <a:lstStyle/>
+                    <a:p>
+                      <a:r>
+                        <a:rPr sz="1350" b="1">
+                          <a:solidFill>
+                            <a:srgbClr val="397718"/>
+                          </a:solidFill>
+                          <a:latin typeface="Arial"/>
+                          <a:ea typeface="Arial"/>
+                          <a:cs typeface="Arial"/>
+                        </a:rPr>
+                        <a:t>MENU</a:t>
+                      </a:r>
+                    </a:p>
+                  </a:txBody>
+                  <a:tcPr marL="95250" marR="95250" marT="38100" marB="38100">
+                    <a:solidFill>
+                      <a:srgbClr val="EFF6E9"/>
+                    </a:solidFill>
+                  </a:tcPr>
+                </a:tc>
+                <a:tc>
+                  <a:txBody>
+                    <a:bodyPr>
+                      <a:noAutofit/>
+                    </a:bodyPr>
+                    <a:lstStyle/>
+                    <a:p>
+                      <a:r>
+                        <a:rPr sz="1350" b="1">
+                          <a:solidFill>
+                            <a:srgbClr val="19332A"/>
+                          </a:solidFill>
+                          <a:latin typeface="Arial"/>
+                          <a:ea typeface="Arial"/>
+                          <a:cs typeface="Arial"/>
+                        </a:rPr>
+                        <a:t>EXPERIMENT</a:t>
+                      </a:r>
+                    </a:p>
+                  </a:txBody>
+                  <a:tcPr marL="95250" marR="95250" marT="38100" marB="38100">
+                    <a:solidFill>
+                      <a:srgbClr val="EFF6E9"/>
+                    </a:solidFill>
+                  </a:tcPr>
+                </a:tc>
+                <a:tc>
+                  <a:txBody>
+                    <a:bodyPr>
+                      <a:noAutofit/>
+                    </a:bodyPr>
+                    <a:lstStyle/>
+                    <a:p>
+                      <a:r>
+                        <a:rPr sz="1350" b="1">
+                          <a:solidFill>
+                            <a:srgbClr val="19332A"/>
+                          </a:solidFill>
+                          <a:latin typeface="Arial"/>
+                          <a:ea typeface="Arial"/>
+                          <a:cs typeface="Arial"/>
+                        </a:rPr>
+                        <a:t>WHAT STUDENTS DO</a:t>
+                      </a:r>
+                    </a:p>
+                  </a:txBody>
+                  <a:tcPr marL="95250" marR="95250" marT="38100" marB="38100">
+                    <a:solidFill>
+                      <a:srgbClr val="EFF6E9"/>
+                    </a:solidFill>
+                  </a:tcPr>
+                </a:tc>
+              </a:tr>
+              <a:tr h="603250">
+                <a:tc>
+                  <a:txBody>
+                    <a:bodyPr>
+                      <a:noAutofit/>
+                    </a:bodyPr>
+                    <a:lstStyle/>
+                    <a:p>
+                      <a:r>
+                        <a:rPr sz="1725" b="1">
+                          <a:solidFill>
+                            <a:srgbClr val="397718"/>
+                          </a:solidFill>
+                          <a:latin typeface="Arial"/>
+                          <a:ea typeface="Arial"/>
+                          <a:cs typeface="Arial"/>
+                        </a:rPr>
+                        <a:t>4</a:t>
+                      </a:r>
+                    </a:p>
+                  </a:txBody>
+                  <a:tcPr marL="95250" marR="95250" marT="38100" marB="38100">
+                    <a:solidFill>
+                      <a:srgbClr val="FFFFFF"/>
+                    </a:solidFill>
+                  </a:tcPr>
+                </a:tc>
+                <a:tc>
+                  <a:txBody>
+                    <a:bodyPr>
+                      <a:noAutofit/>
+                    </a:bodyPr>
+                    <a:lstStyle/>
+                    <a:p>
+                      <a:r>
+                        <a:rPr sz="1725" b="0">
+                          <a:solidFill>
+                            <a:srgbClr val="19332A"/>
+                          </a:solidFill>
+                          <a:latin typeface="Arial"/>
+                          <a:ea typeface="Arial"/>
+                          <a:cs typeface="Arial"/>
+                        </a:rPr>
+                        <a:t>Ask the Local Language Model</a:t>
+                      </a:r>
+                    </a:p>
+                  </a:txBody>
+                  <a:tcPr marL="95250" marR="95250" marT="38100" marB="38100">
+                    <a:solidFill>
+                      <a:srgbClr val="FFFFFF"/>
+                    </a:solidFill>
+                  </a:tcPr>
+                </a:tc>
+                <a:tc>
+                  <a:txBody>
+                    <a:bodyPr>
+                      <a:noAutofit/>
+                    </a:bodyPr>
+                    <a:lstStyle/>
+                    <a:p>
+                      <a:r>
+                        <a:rPr sz="1725" b="0">
+                          <a:solidFill>
+                            <a:srgbClr val="19332A"/>
+                          </a:solidFill>
+                          <a:latin typeface="Arial"/>
+                          <a:ea typeface="Arial"/>
+                          <a:cs typeface="Arial"/>
+                        </a:rPr>
+                        <a:t>Test a short question with the configured small model.</a:t>
+                      </a:r>
+                    </a:p>
+                  </a:txBody>
+                  <a:tcPr marL="95250" marR="95250" marT="38100" marB="38100">
+                    <a:solidFill>
+                      <a:srgbClr val="FFFFFF"/>
+                    </a:solidFill>
+                  </a:tcPr>
+                </a:tc>
+              </a:tr>
+              <a:tr h="603250">
+                <a:tc>
+                  <a:txBody>
+                    <a:bodyPr>
+                      <a:noAutofit/>
+                    </a:bodyPr>
+                    <a:lstStyle/>
+                    <a:p>
+                      <a:r>
+                        <a:rPr sz="1725" b="1">
+                          <a:solidFill>
+                            <a:srgbClr val="397718"/>
+                          </a:solidFill>
+                          <a:latin typeface="Arial"/>
+                          <a:ea typeface="Arial"/>
+                          <a:cs typeface="Arial"/>
+                        </a:rPr>
+                        <a:t>5</a:t>
+                      </a:r>
+                    </a:p>
+                  </a:txBody>
+                  <a:tcPr marL="95250" marR="95250" marT="38100" marB="38100">
+                    <a:solidFill>
+                      <a:srgbClr val="FFFFFF"/>
+                    </a:solidFill>
+                  </a:tcPr>
+                </a:tc>
+                <a:tc>
+                  <a:txBody>
+                    <a:bodyPr>
+                      <a:noAutofit/>
+                    </a:bodyPr>
+                    <a:lstStyle/>
+                    <a:p>
+                      <a:r>
+                        <a:rPr sz="1725" b="0">
+                          <a:solidFill>
+                            <a:srgbClr val="19332A"/>
+                          </a:solidFill>
+                          <a:latin typeface="Arial"/>
+                          <a:ea typeface="Arial"/>
+                          <a:cs typeface="Arial"/>
+                        </a:rPr>
+                        <a:t>Tokenization Microscope</a:t>
+                      </a:r>
+                    </a:p>
+                  </a:txBody>
+                  <a:tcPr marL="95250" marR="95250" marT="38100" marB="38100">
+                    <a:solidFill>
+                      <a:srgbClr val="FFFFFF"/>
+                    </a:solidFill>
+                  </a:tcPr>
+                </a:tc>
+                <a:tc>
+                  <a:txBody>
+                    <a:bodyPr>
+                      <a:noAutofit/>
+                    </a:bodyPr>
+                    <a:lstStyle/>
+                    <a:p>
+                      <a:r>
+                        <a:rPr sz="1725" b="0">
+                          <a:solidFill>
+                            <a:srgbClr val="19332A"/>
+                          </a:solidFill>
+                          <a:latin typeface="Arial"/>
+                          <a:ea typeface="Arial"/>
+                          <a:cs typeface="Arial"/>
+                        </a:rPr>
+                        <a:t>Compare how words, code and symbols split into tokens.</a:t>
+                      </a:r>
+                    </a:p>
+                  </a:txBody>
+                  <a:tcPr marL="95250" marR="95250" marT="38100" marB="38100">
+                    <a:solidFill>
+                      <a:srgbClr val="FFFFFF"/>
+                    </a:solidFill>
+                  </a:tcPr>
+                </a:tc>
+              </a:tr>
+              <a:tr h="603250">
+                <a:tc>
+                  <a:txBody>
+                    <a:bodyPr>
+                      <a:noAutofit/>
+                    </a:bodyPr>
+                    <a:lstStyle/>
+                    <a:p>
+                      <a:r>
+                        <a:rPr sz="1725" b="1">
+                          <a:solidFill>
+                            <a:srgbClr val="397718"/>
+                          </a:solidFill>
+                          <a:latin typeface="Arial"/>
+                          <a:ea typeface="Arial"/>
+                          <a:cs typeface="Arial"/>
+                        </a:rPr>
+                        <a:t>6</a:t>
+                      </a:r>
+                    </a:p>
+                  </a:txBody>
+                  <a:tcPr marL="95250" marR="95250" marT="38100" marB="38100">
+                    <a:solidFill>
+                      <a:srgbClr val="FFFFFF"/>
+                    </a:solidFill>
+                  </a:tcPr>
+                </a:tc>
+                <a:tc>
+                  <a:txBody>
+                    <a:bodyPr>
+                      <a:noAutofit/>
+                    </a:bodyPr>
+                    <a:lstStyle/>
+                    <a:p>
+                      <a:r>
+                        <a:rPr sz="1725" b="0">
+                          <a:solidFill>
+                            <a:srgbClr val="19332A"/>
+                          </a:solidFill>
+                          <a:latin typeface="Arial"/>
+                          <a:ea typeface="Arial"/>
+                          <a:cs typeface="Arial"/>
+                        </a:rPr>
+                        <a:t>Structured Information Extraction</a:t>
+                      </a:r>
+                    </a:p>
+                  </a:txBody>
+                  <a:tcPr marL="95250" marR="95250" marT="38100" marB="38100">
+                    <a:solidFill>
+                      <a:srgbClr val="FFFFFF"/>
+                    </a:solidFill>
+                  </a:tcPr>
+                </a:tc>
+                <a:tc>
+                  <a:txBody>
+                    <a:bodyPr>
+                      <a:noAutofit/>
+                    </a:bodyPr>
+                    <a:lstStyle/>
+                    <a:p>
+                      <a:r>
+                        <a:rPr sz="1725" b="0">
+                          <a:solidFill>
+                            <a:srgbClr val="19332A"/>
+                          </a:solidFill>
+                          <a:latin typeface="Arial"/>
+                          <a:ea typeface="Arial"/>
+                          <a:cs typeface="Arial"/>
+                        </a:rPr>
+                        <a:t>Turn text into constrained JSON fields.</a:t>
+                      </a:r>
+                    </a:p>
+                  </a:txBody>
+                  <a:tcPr marL="95250" marR="95250" marT="38100" marB="38100">
+                    <a:solidFill>
+                      <a:srgbClr val="FFFFFF"/>
+                    </a:solidFill>
+                  </a:tcPr>
+                </a:tc>
+              </a:tr>
+              <a:tr h="603250">
+                <a:tc>
+                  <a:txBody>
+                    <a:bodyPr>
+                      <a:noAutofit/>
+                    </a:bodyPr>
+                    <a:lstStyle/>
+                    <a:p>
+                      <a:r>
+                        <a:rPr sz="1725" b="1">
+                          <a:solidFill>
+                            <a:srgbClr val="397718"/>
+                          </a:solidFill>
+                          <a:latin typeface="Arial"/>
+                          <a:ea typeface="Arial"/>
+                          <a:cs typeface="Arial"/>
+                        </a:rPr>
+                        <a:t>14</a:t>
+                      </a:r>
+                    </a:p>
+                  </a:txBody>
+                  <a:tcPr marL="95250" marR="95250" marT="38100" marB="38100">
+                    <a:solidFill>
+                      <a:srgbClr val="FFFFFF"/>
+                    </a:solidFill>
+                  </a:tcPr>
+                </a:tc>
+                <a:tc>
+                  <a:txBody>
+                    <a:bodyPr>
+                      <a:noAutofit/>
+                    </a:bodyPr>
+                    <a:lstStyle/>
+                    <a:p>
+                      <a:r>
+                        <a:rPr sz="1725" b="0">
+                          <a:solidFill>
+                            <a:srgbClr val="19332A"/>
+                          </a:solidFill>
+                          <a:latin typeface="Arial"/>
+                          <a:ea typeface="Arial"/>
+                          <a:cs typeface="Arial"/>
+                        </a:rPr>
+                        <a:t>Sampling Playground</a:t>
+                      </a:r>
+                    </a:p>
+                  </a:txBody>
+                  <a:tcPr marL="95250" marR="95250" marT="38100" marB="38100">
+                    <a:solidFill>
+                      <a:srgbClr val="FFFFFF"/>
+                    </a:solidFill>
+                  </a:tcPr>
+                </a:tc>
+                <a:tc>
+                  <a:txBody>
+                    <a:bodyPr>
+                      <a:noAutofit/>
+                    </a:bodyPr>
+                    <a:lstStyle/>
+                    <a:p>
+                      <a:r>
+                        <a:rPr sz="1725" b="0">
+                          <a:solidFill>
+                            <a:srgbClr val="19332A"/>
+                          </a:solidFill>
+                          <a:latin typeface="Arial"/>
+                          <a:ea typeface="Arial"/>
+                          <a:cs typeface="Arial"/>
+                        </a:rPr>
+                        <a:t>Compare greedy output with two seeded creative samples.</a:t>
+                      </a:r>
+                    </a:p>
+                  </a:txBody>
+                  <a:tcPr marL="95250" marR="95250" marT="38100" marB="38100">
+                    <a:solidFill>
+                      <a:srgbClr val="FFFFFF"/>
+                    </a:solidFill>
+                  </a:tcPr>
+                </a:tc>
+              </a:tr>
+              <a:tr h="603250">
+                <a:tc>
+                  <a:txBody>
+                    <a:bodyPr>
+                      <a:noAutofit/>
+                    </a:bodyPr>
+                    <a:lstStyle/>
+                    <a:p>
+                      <a:r>
+                        <a:rPr sz="1725" b="1">
+                          <a:solidFill>
+                            <a:srgbClr val="397718"/>
+                          </a:solidFill>
+                          <a:latin typeface="Arial"/>
+                          <a:ea typeface="Arial"/>
+                          <a:cs typeface="Arial"/>
+                        </a:rPr>
+                        <a:t>22</a:t>
+                      </a:r>
+                    </a:p>
+                  </a:txBody>
+                  <a:tcPr marL="95250" marR="95250" marT="38100" marB="38100">
+                    <a:solidFill>
+                      <a:srgbClr val="FFFFFF"/>
+                    </a:solidFill>
+                  </a:tcPr>
+                </a:tc>
+                <a:tc>
+                  <a:txBody>
+                    <a:bodyPr>
+                      <a:noAutofit/>
+                    </a:bodyPr>
+                    <a:lstStyle/>
+                    <a:p>
+                      <a:r>
+                        <a:rPr sz="1725" b="0">
+                          <a:solidFill>
+                            <a:srgbClr val="19332A"/>
+                          </a:solidFill>
+                          <a:latin typeface="Arial"/>
+                          <a:ea typeface="Arial"/>
+                          <a:cs typeface="Arial"/>
+                        </a:rPr>
+                        <a:t>Prompt Design Studio</a:t>
+                      </a:r>
+                    </a:p>
+                  </a:txBody>
+                  <a:tcPr marL="95250" marR="95250" marT="38100" marB="38100">
+                    <a:solidFill>
+                      <a:srgbClr val="FFFFFF"/>
+                    </a:solidFill>
+                  </a:tcPr>
+                </a:tc>
+                <a:tc>
+                  <a:txBody>
+                    <a:bodyPr>
+                      <a:noAutofit/>
+                    </a:bodyPr>
+                    <a:lstStyle/>
+                    <a:p>
+                      <a:r>
+                        <a:rPr sz="1725" b="0">
+                          <a:solidFill>
+                            <a:srgbClr val="19332A"/>
+                          </a:solidFill>
+                          <a:latin typeface="Arial"/>
+                          <a:ea typeface="Arial"/>
+                          <a:cs typeface="Arial"/>
+                        </a:rPr>
+                        <a:t>Compare a minimal prompt with explicit audience instructions.</a:t>
+                      </a:r>
+                    </a:p>
+                  </a:txBody>
+                  <a:tcPr marL="95250" marR="95250" marT="38100" marB="38100">
+                    <a:solidFill>
+                      <a:srgbClr val="FFFFFF"/>
+                    </a:solidFill>
+                  </a:tcPr>
+                </a:tc>
+              </a:tr>
+              <a:tr h="603250">
+                <a:tc>
+                  <a:txBody>
+                    <a:bodyPr>
+                      <a:noAutofit/>
+                    </a:bodyPr>
+                    <a:lstStyle/>
+                    <a:p>
+                      <a:r>
+                        <a:rPr sz="1725" b="1">
+                          <a:solidFill>
+                            <a:srgbClr val="397718"/>
+                          </a:solidFill>
+                          <a:latin typeface="Arial"/>
+                          <a:ea typeface="Arial"/>
+                          <a:cs typeface="Arial"/>
+                        </a:rPr>
+                        <a:t>23</a:t>
+                      </a:r>
+                    </a:p>
+                  </a:txBody>
+                  <a:tcPr marL="95250" marR="95250" marT="38100" marB="38100">
+                    <a:solidFill>
+                      <a:srgbClr val="FFFFFF"/>
+                    </a:solidFill>
+                  </a:tcPr>
+                </a:tc>
+                <a:tc>
+                  <a:txBody>
+                    <a:bodyPr>
+                      <a:noAutofit/>
+                    </a:bodyPr>
+                    <a:lstStyle/>
+                    <a:p>
+                      <a:r>
+                        <a:rPr sz="1725" b="0">
+                          <a:solidFill>
+                            <a:srgbClr val="19332A"/>
+                          </a:solidFill>
+                          <a:latin typeface="Arial"/>
+                          <a:ea typeface="Arial"/>
+                          <a:cs typeface="Arial"/>
+                        </a:rPr>
+                        <a:t>Few-Shot Pattern Learner</a:t>
+                      </a:r>
+                    </a:p>
+                  </a:txBody>
+                  <a:tcPr marL="95250" marR="95250" marT="38100" marB="38100">
+                    <a:solidFill>
+                      <a:srgbClr val="FFFFFF"/>
+                    </a:solidFill>
+                  </a:tcPr>
+                </a:tc>
+                <a:tc>
+                  <a:txBody>
+                    <a:bodyPr>
+                      <a:noAutofit/>
+                    </a:bodyPr>
+                    <a:lstStyle/>
+                    <a:p>
+                      <a:r>
+                        <a:rPr sz="1725" b="0">
+                          <a:solidFill>
+                            <a:srgbClr val="19332A"/>
+                          </a:solidFill>
+                          <a:latin typeface="Arial"/>
+                          <a:ea typeface="Arial"/>
+                          <a:cs typeface="Arial"/>
+                        </a:rPr>
+                        <a:t>Compare classification with zero examples and four examples.</a:t>
+                      </a:r>
+                    </a:p>
+                  </a:txBody>
+                  <a:tcPr marL="95250" marR="95250" marT="38100" marB="38100">
+                    <a:solidFill>
+                      <a:srgbClr val="FFFFFF"/>
+                    </a:solidFill>
+                  </a:tcPr>
+                </a:tc>
+              </a:tr>
+            </a:tbl>
+          </a:graphicData>
+        </a:graphic>
+      </p:graphicFrame>
     </p:spTree>
     <p:extLst>
       <p:ext uri="{BB962C8B-B14F-4D97-AF65-F5344CB8AC3E}">
-        <p14:creationId xmlns:p14="http://schemas.microsoft.com/office/powerpoint/2010/main" val="620037913"/>
+        <p14:creationId xmlns:p14="http://schemas.microsoft.com/office/powerpoint/2010/main" val="264836762"/>
       </p:ext>
     </p:extLst>
   </p:cSld>
@@ -3990,7 +5996,7 @@
     <p:bg>
       <p:bgPr>
         <a:solidFill xmlns:a="http://schemas.openxmlformats.org/drawingml/2006/main">
-          <a:srgbClr val="0C1825"/>
+          <a:srgbClr val="FFFFFF"/>
         </a:solidFill>
       </p:bgPr>
     </p:bg>
@@ -4005,10 +6011,10 @@
       </p:grpSpPr>
       <p:sp>
         <p:nvSpPr>
-          <p:cNvPr id="9" name="">
+          <p:cNvPr id="6" name="">
             <a:extLst xmlns:a="http://schemas.openxmlformats.org/drawingml/2006/main">
               <a:ext uri="{FF2B5EF4-FFF2-40B4-BE49-F238E27FC236}">
-                <a16:creationId xmlns:a16="http://schemas.microsoft.com/office/drawing/2014/main" id="{570AB3BB-04D9-4959-B178-9DA889BE655E}"/>
+                <a16:creationId xmlns:a16="http://schemas.microsoft.com/office/drawing/2014/main" id="{C4A515BD-39B8-44A1-8641-8D94B5DF303B}"/>
               </a:ext>
             </a:extLst>
           </p:cNvPr>
@@ -4019,8 +6025,8 @@
         </p:nvSpPr>
         <p:spPr>
           <a:xfrm xmlns:a="http://schemas.openxmlformats.org/drawingml/2006/main">
-            <a:off x="609600" y="438150"/>
-            <a:ext cx="10934700" cy="857250"/>
+            <a:off x="628650" y="457200"/>
+            <a:ext cx="10953750" cy="762000"/>
           </a:xfrm>
           <a:prstGeom xmlns:a="http://schemas.openxmlformats.org/drawingml/2006/main" prst="rect">
             <a:avLst/>
@@ -4037,25 +6043,25 @@
           <a:lstStyle xmlns:a="http://schemas.openxmlformats.org/drawingml/2006/main"/>
           <a:p xmlns:a="http://schemas.openxmlformats.org/drawingml/2006/main">
             <a:pPr>
-              <a:defRPr sz="3750" b="1">
-                <a:solidFill>
-                  <a:srgbClr val="F2F7FB"/>
-                </a:solidFill>
-                <a:latin typeface="Arial"/>
-                <a:ea typeface="Arial"/>
-                <a:cs typeface="Arial"/>
-              </a:defRPr>
-            </a:pPr>
-            <a:r>
-              <a:rPr sz="3750" b="1">
-                <a:solidFill>
-                  <a:srgbClr val="F2F7FB"/>
-                </a:solidFill>
-                <a:latin typeface="Arial"/>
-                <a:ea typeface="Arial"/>
-                <a:cs typeface="Arial"/>
-              </a:rPr>
-              <a:t>Memory, uncertainty and trust</a:t>
+              <a:defRPr sz="3600" b="1">
+                <a:solidFill>
+                  <a:srgbClr val="19332A"/>
+                </a:solidFill>
+                <a:latin typeface="Arial"/>
+                <a:ea typeface="Arial"/>
+                <a:cs typeface="Arial"/>
+              </a:defRPr>
+            </a:pPr>
+            <a:r>
+              <a:rPr sz="3600" b="1">
+                <a:solidFill>
+                  <a:srgbClr val="19332A"/>
+                </a:solidFill>
+                <a:latin typeface="Arial"/>
+                <a:ea typeface="Arial"/>
+                <a:cs typeface="Arial"/>
+              </a:rPr>
+              <a:t>Creativity and practical text tasks</a:t>
             </a:r>
           </a:p>
         </p:txBody>
@@ -4065,7 +6071,7 @@
           <p:cNvPr id="2" name="">
             <a:extLst xmlns:a="http://schemas.openxmlformats.org/drawingml/2006/main">
               <a:ext uri="{FF2B5EF4-FFF2-40B4-BE49-F238E27FC236}">
-                <a16:creationId xmlns:a16="http://schemas.microsoft.com/office/drawing/2014/main" id="{56EBAB5C-BCCE-4697-B588-A2050CCAAD5C}"/>
+                <a16:creationId xmlns:a16="http://schemas.microsoft.com/office/drawing/2014/main" id="{DA383EA6-2759-4F79-BA73-1381A7BE2E4C}"/>
               </a:ext>
             </a:extLst>
           </p:cNvPr>
@@ -4076,8 +6082,8 @@
         </p:nvSpPr>
         <p:spPr>
           <a:xfrm xmlns:a="http://schemas.openxmlformats.org/drawingml/2006/main">
-            <a:off x="647700" y="1362075"/>
-            <a:ext cx="10763250" cy="857250"/>
+            <a:off x="666750" y="1333500"/>
+            <a:ext cx="10858500" cy="619125"/>
           </a:xfrm>
           <a:prstGeom xmlns:a="http://schemas.openxmlformats.org/drawingml/2006/main" prst="rect">
             <a:avLst/>
@@ -4094,25 +6100,25 @@
           <a:lstStyle xmlns:a="http://schemas.openxmlformats.org/drawingml/2006/main"/>
           <a:p xmlns:a="http://schemas.openxmlformats.org/drawingml/2006/main">
             <a:pPr>
-              <a:defRPr sz="2100" b="0">
-                <a:solidFill>
-                  <a:srgbClr val="76DAC7"/>
-                </a:solidFill>
-                <a:latin typeface="Arial"/>
-                <a:ea typeface="Arial"/>
-                <a:cs typeface="Arial"/>
-              </a:defRPr>
-            </a:pPr>
-            <a:r>
-              <a:rPr sz="2100" b="0">
-                <a:solidFill>
-                  <a:srgbClr val="76DAC7"/>
-                </a:solidFill>
-                <a:latin typeface="Arial"/>
-                <a:ea typeface="Arial"/>
-                <a:cs typeface="Arial"/>
-              </a:rPr>
-              <a:t>A wrong answer can become the most useful teaching moment</a:t>
+              <a:defRPr sz="1950" b="0">
+                <a:solidFill>
+                  <a:srgbClr val="52635B"/>
+                </a:solidFill>
+                <a:latin typeface="Arial"/>
+                <a:ea typeface="Arial"/>
+                <a:cs typeface="Arial"/>
+              </a:defRPr>
+            </a:pPr>
+            <a:r>
+              <a:rPr sz="1950" b="0">
+                <a:solidFill>
+                  <a:srgbClr val="52635B"/>
+                </a:solidFill>
+                <a:latin typeface="Arial"/>
+                <a:ea typeface="Arial"/>
+                <a:cs typeface="Arial"/>
+              </a:rPr>
+              <a:t>Let students supply a twist, a message or a passage.</a:t>
             </a:r>
           </a:p>
         </p:txBody>
@@ -4122,7 +6128,7 @@
           <p:cNvPr id="3" name="">
             <a:extLst xmlns:a="http://schemas.openxmlformats.org/drawingml/2006/main">
               <a:ext uri="{FF2B5EF4-FFF2-40B4-BE49-F238E27FC236}">
-                <a16:creationId xmlns:a16="http://schemas.microsoft.com/office/drawing/2014/main" id="{DCF566B6-ED9E-4220-A825-9902C092BC16}"/>
+                <a16:creationId xmlns:a16="http://schemas.microsoft.com/office/drawing/2014/main" id="{AF8ED5C8-C3FA-4354-B52C-35EDBE6B0206}"/>
               </a:ext>
             </a:extLst>
           </p:cNvPr>
@@ -4133,8 +6139,8 @@
         </p:nvSpPr>
         <p:spPr>
           <a:xfrm xmlns:a="http://schemas.openxmlformats.org/drawingml/2006/main">
-            <a:off x="685800" y="2324100"/>
-            <a:ext cx="10810875" cy="571500"/>
+            <a:off x="666750" y="6191250"/>
+            <a:ext cx="10287000" cy="419100"/>
           </a:xfrm>
           <a:prstGeom xmlns:a="http://schemas.openxmlformats.org/drawingml/2006/main" prst="rect">
             <a:avLst/>
@@ -4151,25 +6157,25 @@
           <a:lstStyle xmlns:a="http://schemas.openxmlformats.org/drawingml/2006/main"/>
           <a:p xmlns:a="http://schemas.openxmlformats.org/drawingml/2006/main">
             <a:pPr>
-              <a:defRPr sz="2100" b="0">
-                <a:solidFill>
-                  <a:srgbClr val="F2F7FB"/>
-                </a:solidFill>
-                <a:latin typeface="Arial"/>
-                <a:ea typeface="Arial"/>
-                <a:cs typeface="Arial"/>
-              </a:defRPr>
-            </a:pPr>
-            <a:r>
-              <a:rPr sz="2100" b="0">
-                <a:solidFill>
-                  <a:srgbClr val="F2F7FB"/>
-                </a:solidFill>
-                <a:latin typeface="Arial"/>
-                <a:ea typeface="Arial"/>
-                <a:cs typeface="Arial"/>
-              </a:rPr>
-              <a:t>Experiment 26: Prompt Injection Defense Lab</a:t>
+              <a:defRPr sz="1350" b="0">
+                <a:solidFill>
+                  <a:srgbClr val="52635B"/>
+                </a:solidFill>
+                <a:latin typeface="Arial"/>
+                <a:ea typeface="Arial"/>
+                <a:cs typeface="Arial"/>
+              </a:defRPr>
+            </a:pPr>
+            <a:r>
+              <a:rPr sz="1350" b="0">
+                <a:solidFill>
+                  <a:srgbClr val="52635B"/>
+                </a:solidFill>
+                <a:latin typeface="Arial"/>
+                <a:ea typeface="Arial"/>
+                <a:cs typeface="Arial"/>
+              </a:rPr>
+              <a:t>Invite students to bring a story twist, a classroom message or a short passage.</a:t>
             </a:r>
           </a:p>
         </p:txBody>
@@ -4179,7 +6185,7 @@
           <p:cNvPr id="4" name="">
             <a:extLst xmlns:a="http://schemas.openxmlformats.org/drawingml/2006/main">
               <a:ext uri="{FF2B5EF4-FFF2-40B4-BE49-F238E27FC236}">
-                <a16:creationId xmlns:a16="http://schemas.microsoft.com/office/drawing/2014/main" id="{C52E9AE4-1A58-468C-8F03-74BBC77046D4}"/>
+                <a16:creationId xmlns:a16="http://schemas.microsoft.com/office/drawing/2014/main" id="{04B1D60E-820B-4C93-BBC9-4E36F9BF9211}"/>
               </a:ext>
             </a:extLst>
           </p:cNvPr>
@@ -4190,8 +6196,8 @@
         </p:nvSpPr>
         <p:spPr>
           <a:xfrm xmlns:a="http://schemas.openxmlformats.org/drawingml/2006/main">
-            <a:off x="685800" y="2990850"/>
-            <a:ext cx="10810875" cy="571500"/>
+            <a:off x="11182350" y="6200775"/>
+            <a:ext cx="523875" cy="333375"/>
           </a:xfrm>
           <a:prstGeom xmlns:a="http://schemas.openxmlformats.org/drawingml/2006/main" prst="rect">
             <a:avLst/>
@@ -4208,261 +6214,536 @@
           <a:lstStyle xmlns:a="http://schemas.openxmlformats.org/drawingml/2006/main"/>
           <a:p xmlns:a="http://schemas.openxmlformats.org/drawingml/2006/main">
             <a:pPr>
-              <a:defRPr sz="2100" b="0">
-                <a:solidFill>
-                  <a:srgbClr val="F2F7FB"/>
-                </a:solidFill>
-                <a:latin typeface="Arial"/>
-                <a:ea typeface="Arial"/>
-                <a:cs typeface="Arial"/>
-              </a:defRPr>
-            </a:pPr>
-            <a:r>
-              <a:rPr sz="2100" b="0">
-                <a:solidFill>
-                  <a:srgbClr val="F2F7FB"/>
-                </a:solidFill>
-                <a:latin typeface="Arial"/>
-                <a:ea typeface="Arial"/>
-                <a:cs typeface="Arial"/>
-              </a:rPr>
-              <a:t>Experiment 27: Answer or Abstain: Hallucination Challenge</a:t>
-            </a:r>
-          </a:p>
-        </p:txBody>
-      </p:sp>
-      <p:sp>
-        <p:nvSpPr>
-          <p:cNvPr id="5" name="">
-            <a:extLst xmlns:a="http://schemas.openxmlformats.org/drawingml/2006/main">
-              <a:ext uri="{FF2B5EF4-FFF2-40B4-BE49-F238E27FC236}">
-                <a16:creationId xmlns:a16="http://schemas.microsoft.com/office/drawing/2014/main" id="{1A8C1B98-F08B-44F9-8127-F4C05A99F7C7}"/>
-              </a:ext>
-            </a:extLst>
-          </p:cNvPr>
-          <p:cNvSpPr>
-            <a:spLocks xmlns:a="http://schemas.openxmlformats.org/drawingml/2006/main" noGrp="1"/>
-          </p:cNvSpPr>
+              <a:defRPr sz="1350" b="1">
+                <a:solidFill>
+                  <a:srgbClr val="397718"/>
+                </a:solidFill>
+                <a:latin typeface="Arial"/>
+                <a:ea typeface="Arial"/>
+                <a:cs typeface="Arial"/>
+              </a:defRPr>
+            </a:pPr>
+            <a:r>
+              <a:rPr sz="1350" b="1">
+                <a:solidFill>
+                  <a:srgbClr val="397718"/>
+                </a:solidFill>
+                <a:latin typeface="Arial"/>
+                <a:ea typeface="Arial"/>
+                <a:cs typeface="Arial"/>
+              </a:rPr>
+              <a:t>06</a:t>
+            </a:r>
+          </a:p>
+        </p:txBody>
+      </p:sp>
+      <p:graphicFrame>
+        <p:nvGraphicFramePr>
+          <p:cNvPr id="10" name=""/>
+          <p:cNvGraphicFramePr/>
           <p:nvPr/>
-        </p:nvSpPr>
-        <p:spPr>
-          <a:xfrm xmlns:a="http://schemas.openxmlformats.org/drawingml/2006/main">
-            <a:off x="685800" y="3657600"/>
-            <a:ext cx="10810875" cy="571500"/>
-          </a:xfrm>
-          <a:prstGeom xmlns:a="http://schemas.openxmlformats.org/drawingml/2006/main" prst="rect">
-            <a:avLst/>
-          </a:prstGeom>
-          <a:noFill xmlns:a="http://schemas.openxmlformats.org/drawingml/2006/main"/>
-          <a:ln xmlns:a="http://schemas.openxmlformats.org/drawingml/2006/main" w="0">
-            <a:noFill/>
-          </a:ln>
-        </p:spPr>
-        <p:txBody>
-          <a:bodyPr xmlns:a="http://schemas.openxmlformats.org/drawingml/2006/main">
-            <a:noAutofit/>
-          </a:bodyPr>
-          <a:lstStyle xmlns:a="http://schemas.openxmlformats.org/drawingml/2006/main"/>
-          <a:p xmlns:a="http://schemas.openxmlformats.org/drawingml/2006/main">
-            <a:pPr>
-              <a:defRPr sz="2100" b="0">
-                <a:solidFill>
-                  <a:srgbClr val="F2F7FB"/>
-                </a:solidFill>
-                <a:latin typeface="Arial"/>
-                <a:ea typeface="Arial"/>
-                <a:cs typeface="Arial"/>
-              </a:defRPr>
-            </a:pPr>
-            <a:r>
-              <a:rPr sz="2100" b="0">
-                <a:solidFill>
-                  <a:srgbClr val="F2F7FB"/>
-                </a:solidFill>
-                <a:latin typeface="Arial"/>
-                <a:ea typeface="Arial"/>
-                <a:cs typeface="Arial"/>
-              </a:rPr>
-              <a:t>Experiment 28: Context Memory Challenge</a:t>
-            </a:r>
-          </a:p>
-        </p:txBody>
-      </p:sp>
-      <p:sp>
-        <p:nvSpPr>
-          <p:cNvPr id="6" name="">
-            <a:extLst xmlns:a="http://schemas.openxmlformats.org/drawingml/2006/main">
-              <a:ext uri="{FF2B5EF4-FFF2-40B4-BE49-F238E27FC236}">
-                <a16:creationId xmlns:a16="http://schemas.microsoft.com/office/drawing/2014/main" id="{67AF6694-05B0-4C61-BF91-8B59241C7D7D}"/>
-              </a:ext>
-            </a:extLst>
-          </p:cNvPr>
-          <p:cNvSpPr>
-            <a:spLocks xmlns:a="http://schemas.openxmlformats.org/drawingml/2006/main" noGrp="1"/>
-          </p:cNvSpPr>
-          <p:nvPr/>
-        </p:nvSpPr>
-        <p:spPr>
-          <a:xfrm xmlns:a="http://schemas.openxmlformats.org/drawingml/2006/main">
-            <a:off x="685800" y="4324350"/>
-            <a:ext cx="10810875" cy="571500"/>
-          </a:xfrm>
-          <a:prstGeom xmlns:a="http://schemas.openxmlformats.org/drawingml/2006/main" prst="rect">
-            <a:avLst/>
-          </a:prstGeom>
-          <a:noFill xmlns:a="http://schemas.openxmlformats.org/drawingml/2006/main"/>
-          <a:ln xmlns:a="http://schemas.openxmlformats.org/drawingml/2006/main" w="0">
-            <a:noFill/>
-          </a:ln>
-        </p:spPr>
-        <p:txBody>
-          <a:bodyPr xmlns:a="http://schemas.openxmlformats.org/drawingml/2006/main">
-            <a:noAutofit/>
-          </a:bodyPr>
-          <a:lstStyle xmlns:a="http://schemas.openxmlformats.org/drawingml/2006/main"/>
-          <a:p xmlns:a="http://schemas.openxmlformats.org/drawingml/2006/main">
-            <a:pPr>
-              <a:defRPr sz="2100" b="0">
-                <a:solidFill>
-                  <a:srgbClr val="F2F7FB"/>
-                </a:solidFill>
-                <a:latin typeface="Arial"/>
-                <a:ea typeface="Arial"/>
-                <a:cs typeface="Arial"/>
-              </a:defRPr>
-            </a:pPr>
-            <a:r>
-              <a:rPr sz="2100" b="0">
-                <a:solidFill>
-                  <a:srgbClr val="F2F7FB"/>
-                </a:solidFill>
-                <a:latin typeface="Arial"/>
-                <a:ea typeface="Arial"/>
-                <a:cs typeface="Arial"/>
-              </a:rPr>
-              <a:t>Compare unprotected and separated instructions</a:t>
-            </a:r>
-          </a:p>
-        </p:txBody>
-      </p:sp>
-      <p:sp>
-        <p:nvSpPr>
-          <p:cNvPr id="7" name="">
-            <a:extLst xmlns:a="http://schemas.openxmlformats.org/drawingml/2006/main">
-              <a:ext uri="{FF2B5EF4-FFF2-40B4-BE49-F238E27FC236}">
-                <a16:creationId xmlns:a16="http://schemas.microsoft.com/office/drawing/2014/main" id="{7358E72E-2FF7-4A49-B575-1DCD4A805405}"/>
-              </a:ext>
-            </a:extLst>
-          </p:cNvPr>
-          <p:cNvSpPr>
-            <a:spLocks xmlns:a="http://schemas.openxmlformats.org/drawingml/2006/main" noGrp="1"/>
-          </p:cNvSpPr>
-          <p:nvPr/>
-        </p:nvSpPr>
-        <p:spPr>
-          <a:xfrm xmlns:a="http://schemas.openxmlformats.org/drawingml/2006/main">
-            <a:off x="685800" y="4991100"/>
-            <a:ext cx="10810875" cy="571500"/>
-          </a:xfrm>
-          <a:prstGeom xmlns:a="http://schemas.openxmlformats.org/drawingml/2006/main" prst="rect">
-            <a:avLst/>
-          </a:prstGeom>
-          <a:noFill xmlns:a="http://schemas.openxmlformats.org/drawingml/2006/main"/>
-          <a:ln xmlns:a="http://schemas.openxmlformats.org/drawingml/2006/main" w="0">
-            <a:noFill/>
-          </a:ln>
-        </p:spPr>
-        <p:txBody>
-          <a:bodyPr xmlns:a="http://schemas.openxmlformats.org/drawingml/2006/main">
-            <a:noAutofit/>
-          </a:bodyPr>
-          <a:lstStyle xmlns:a="http://schemas.openxmlformats.org/drawingml/2006/main"/>
-          <a:p xmlns:a="http://schemas.openxmlformats.org/drawingml/2006/main">
-            <a:pPr>
-              <a:defRPr sz="2100" b="0">
-                <a:solidFill>
-                  <a:srgbClr val="F2F7FB"/>
-                </a:solidFill>
-                <a:latin typeface="Arial"/>
-                <a:ea typeface="Arial"/>
-                <a:cs typeface="Arial"/>
-              </a:defRPr>
-            </a:pPr>
-            <a:r>
-              <a:rPr sz="2100" b="0">
-                <a:solidFill>
-                  <a:srgbClr val="F2F7FB"/>
-                </a:solidFill>
-                <a:latin typeface="Arial"/>
-                <a:ea typeface="Arial"/>
-                <a:cs typeface="Arial"/>
-              </a:rPr>
-              <a:t>Check recalled facts and missing-evidence responses</a:t>
-            </a:r>
-          </a:p>
-        </p:txBody>
-      </p:sp>
-      <p:sp>
-        <p:nvSpPr>
-          <p:cNvPr id="8" name="">
-            <a:extLst xmlns:a="http://schemas.openxmlformats.org/drawingml/2006/main">
-              <a:ext uri="{FF2B5EF4-FFF2-40B4-BE49-F238E27FC236}">
-                <a16:creationId xmlns:a16="http://schemas.microsoft.com/office/drawing/2014/main" id="{3E76A0DD-B757-41D2-AA90-4A8826954529}"/>
-              </a:ext>
-            </a:extLst>
-          </p:cNvPr>
-          <p:cNvSpPr>
-            <a:spLocks xmlns:a="http://schemas.openxmlformats.org/drawingml/2006/main" noGrp="1"/>
-          </p:cNvSpPr>
-          <p:nvPr/>
-        </p:nvSpPr>
-        <p:spPr>
-          <a:xfrm xmlns:a="http://schemas.openxmlformats.org/drawingml/2006/main">
-            <a:off x="647700" y="6229350"/>
-            <a:ext cx="10572750" cy="428625"/>
-          </a:xfrm>
-          <a:prstGeom xmlns:a="http://schemas.openxmlformats.org/drawingml/2006/main" prst="rect">
-            <a:avLst/>
-          </a:prstGeom>
-          <a:noFill xmlns:a="http://schemas.openxmlformats.org/drawingml/2006/main"/>
-          <a:ln xmlns:a="http://schemas.openxmlformats.org/drawingml/2006/main" w="0">
-            <a:noFill/>
-          </a:ln>
-        </p:spPr>
-        <p:txBody>
-          <a:bodyPr xmlns:a="http://schemas.openxmlformats.org/drawingml/2006/main">
-            <a:noAutofit/>
-          </a:bodyPr>
-          <a:lstStyle xmlns:a="http://schemas.openxmlformats.org/drawingml/2006/main"/>
-          <a:p xmlns:a="http://schemas.openxmlformats.org/drawingml/2006/main">
-            <a:pPr>
-              <a:defRPr sz="1425" b="0">
-                <a:solidFill>
-                  <a:srgbClr val="B6C6D5"/>
-                </a:solidFill>
-                <a:latin typeface="Arial"/>
-                <a:ea typeface="Arial"/>
-                <a:cs typeface="Arial"/>
-              </a:defRPr>
-            </a:pPr>
-            <a:r>
-              <a:rPr sz="1425" b="0">
-                <a:solidFill>
-                  <a:srgbClr val="B6C6D5"/>
-                </a:solidFill>
-                <a:latin typeface="Arial"/>
-                <a:ea typeface="Arial"/>
-                <a:cs typeface="Arial"/>
-              </a:rPr>
-              <a:t>Prompt separation is a demonstration, not a security guarantee. Reference facts are visible.</a:t>
-            </a:r>
-          </a:p>
-        </p:txBody>
-      </p:sp>
+        </p:nvGraphicFramePr>
+        <p:xfrm>
+          <a:off xmlns:a="http://schemas.openxmlformats.org/drawingml/2006/main" x="666750" y="2038350"/>
+          <a:ext xmlns:a="http://schemas.openxmlformats.org/drawingml/2006/main" cx="10858500" cy="3857625"/>
+        </p:xfrm>
+        <a:graphic xmlns:a="http://schemas.openxmlformats.org/drawingml/2006/main">
+          <a:graphicData uri="http://schemas.openxmlformats.org/drawingml/2006/table">
+            <a:tbl>
+              <a:tblPr firstRow="0" bandRow="0"/>
+              <a:tblGrid>
+                <a:gridCol w="809625"/>
+                <a:gridCol w="4286250"/>
+                <a:gridCol w="5762625"/>
+              </a:tblGrid>
+              <a:tr h="400050">
+                <a:tc>
+                  <a:txBody>
+                    <a:bodyPr>
+                      <a:noAutofit/>
+                    </a:bodyPr>
+                    <a:lstStyle/>
+                    <a:p>
+                      <a:r>
+                        <a:rPr sz="1350" b="1">
+                          <a:solidFill>
+                            <a:srgbClr val="397718"/>
+                          </a:solidFill>
+                          <a:latin typeface="Arial"/>
+                          <a:ea typeface="Arial"/>
+                          <a:cs typeface="Arial"/>
+                        </a:rPr>
+                        <a:t>MENU</a:t>
+                      </a:r>
+                    </a:p>
+                  </a:txBody>
+                  <a:tcPr marL="95250" marR="95250" marT="38100" marB="38100">
+                    <a:solidFill>
+                      <a:srgbClr val="EFF6E9"/>
+                    </a:solidFill>
+                  </a:tcPr>
+                </a:tc>
+                <a:tc>
+                  <a:txBody>
+                    <a:bodyPr>
+                      <a:noAutofit/>
+                    </a:bodyPr>
+                    <a:lstStyle/>
+                    <a:p>
+                      <a:r>
+                        <a:rPr sz="1350" b="1">
+                          <a:solidFill>
+                            <a:srgbClr val="19332A"/>
+                          </a:solidFill>
+                          <a:latin typeface="Arial"/>
+                          <a:ea typeface="Arial"/>
+                          <a:cs typeface="Arial"/>
+                        </a:rPr>
+                        <a:t>EXPERIMENT</a:t>
+                      </a:r>
+                    </a:p>
+                  </a:txBody>
+                  <a:tcPr marL="95250" marR="95250" marT="38100" marB="38100">
+                    <a:solidFill>
+                      <a:srgbClr val="EFF6E9"/>
+                    </a:solidFill>
+                  </a:tcPr>
+                </a:tc>
+                <a:tc>
+                  <a:txBody>
+                    <a:bodyPr>
+                      <a:noAutofit/>
+                    </a:bodyPr>
+                    <a:lstStyle/>
+                    <a:p>
+                      <a:r>
+                        <a:rPr sz="1350" b="1">
+                          <a:solidFill>
+                            <a:srgbClr val="19332A"/>
+                          </a:solidFill>
+                          <a:latin typeface="Arial"/>
+                          <a:ea typeface="Arial"/>
+                          <a:cs typeface="Arial"/>
+                        </a:rPr>
+                        <a:t>WHAT STUDENTS DO</a:t>
+                      </a:r>
+                    </a:p>
+                  </a:txBody>
+                  <a:tcPr marL="95250" marR="95250" marT="38100" marB="38100">
+                    <a:solidFill>
+                      <a:srgbClr val="EFF6E9"/>
+                    </a:solidFill>
+                  </a:tcPr>
+                </a:tc>
+              </a:tr>
+              <a:tr h="691515">
+                <a:tc>
+                  <a:txBody>
+                    <a:bodyPr>
+                      <a:noAutofit/>
+                    </a:bodyPr>
+                    <a:lstStyle/>
+                    <a:p>
+                      <a:r>
+                        <a:rPr sz="1725" b="1">
+                          <a:solidFill>
+                            <a:srgbClr val="397718"/>
+                          </a:solidFill>
+                          <a:latin typeface="Arial"/>
+                          <a:ea typeface="Arial"/>
+                          <a:cs typeface="Arial"/>
+                        </a:rPr>
+                        <a:t>17</a:t>
+                      </a:r>
+                    </a:p>
+                  </a:txBody>
+                  <a:tcPr marL="95250" marR="95250" marT="38100" marB="38100">
+                    <a:solidFill>
+                      <a:srgbClr val="FFFFFF"/>
+                    </a:solidFill>
+                  </a:tcPr>
+                </a:tc>
+                <a:tc>
+                  <a:txBody>
+                    <a:bodyPr>
+                      <a:noAutofit/>
+                    </a:bodyPr>
+                    <a:lstStyle/>
+                    <a:p>
+                      <a:r>
+                        <a:rPr sz="1725" b="0">
+                          <a:solidFill>
+                            <a:srgbClr val="19332A"/>
+                          </a:solidFill>
+                          <a:latin typeface="Arial"/>
+                          <a:ea typeface="Arial"/>
+                          <a:cs typeface="Arial"/>
+                        </a:rPr>
+                        <a:t>Story Director: Audience-Controlled Fiction</a:t>
+                      </a:r>
+                    </a:p>
+                  </a:txBody>
+                  <a:tcPr marL="95250" marR="95250" marT="38100" marB="38100">
+                    <a:solidFill>
+                      <a:srgbClr val="FFFFFF"/>
+                    </a:solidFill>
+                  </a:tcPr>
+                </a:tc>
+                <a:tc>
+                  <a:txBody>
+                    <a:bodyPr>
+                      <a:noAutofit/>
+                    </a:bodyPr>
+                    <a:lstStyle/>
+                    <a:p>
+                      <a:r>
+                        <a:rPr sz="1725" b="0">
+                          <a:solidFill>
+                            <a:srgbClr val="19332A"/>
+                          </a:solidFill>
+                          <a:latin typeface="Arial"/>
+                          <a:ea typeface="Arial"/>
+                          <a:cs typeface="Arial"/>
+                        </a:rPr>
+                        <a:t>Choose a setting, then change the generated story with a twist.</a:t>
+                      </a:r>
+                    </a:p>
+                  </a:txBody>
+                  <a:tcPr marL="95250" marR="95250" marT="38100" marB="38100">
+                    <a:solidFill>
+                      <a:srgbClr val="FFFFFF"/>
+                    </a:solidFill>
+                  </a:tcPr>
+                </a:tc>
+              </a:tr>
+              <a:tr h="691515">
+                <a:tc>
+                  <a:txBody>
+                    <a:bodyPr>
+                      <a:noAutofit/>
+                    </a:bodyPr>
+                    <a:lstStyle/>
+                    <a:p>
+                      <a:r>
+                        <a:rPr sz="1725" b="1">
+                          <a:solidFill>
+                            <a:srgbClr val="397718"/>
+                          </a:solidFill>
+                          <a:latin typeface="Arial"/>
+                          <a:ea typeface="Arial"/>
+                          <a:cs typeface="Arial"/>
+                        </a:rPr>
+                        <a:t>10</a:t>
+                      </a:r>
+                    </a:p>
+                  </a:txBody>
+                  <a:tcPr marL="95250" marR="95250" marT="38100" marB="38100">
+                    <a:solidFill>
+                      <a:srgbClr val="FFFFFF"/>
+                    </a:solidFill>
+                  </a:tcPr>
+                </a:tc>
+                <a:tc>
+                  <a:txBody>
+                    <a:bodyPr>
+                      <a:noAutofit/>
+                    </a:bodyPr>
+                    <a:lstStyle/>
+                    <a:p>
+                      <a:r>
+                        <a:rPr sz="1725" b="0">
+                          <a:solidFill>
+                            <a:srgbClr val="19332A"/>
+                          </a:solidFill>
+                          <a:latin typeface="Arial"/>
+                          <a:ea typeface="Arial"/>
+                          <a:cs typeface="Arial"/>
+                        </a:rPr>
+                        <a:t>TinyStories Generator</a:t>
+                      </a:r>
+                    </a:p>
+                  </a:txBody>
+                  <a:tcPr marL="95250" marR="95250" marT="38100" marB="38100">
+                    <a:solidFill>
+                      <a:srgbClr val="FFFFFF"/>
+                    </a:solidFill>
+                  </a:tcPr>
+                </a:tc>
+                <a:tc>
+                  <a:txBody>
+                    <a:bodyPr>
+                      <a:noAutofit/>
+                    </a:bodyPr>
+                    <a:lstStyle/>
+                    <a:p>
+                      <a:r>
+                        <a:rPr sz="1725" b="0">
+                          <a:solidFill>
+                            <a:srgbClr val="19332A"/>
+                          </a:solidFill>
+                          <a:latin typeface="Arial"/>
+                          <a:ea typeface="Arial"/>
+                          <a:cs typeface="Arial"/>
+                        </a:rPr>
+                        <a:t>Continue a story with a small dedicated language model.</a:t>
+                      </a:r>
+                    </a:p>
+                  </a:txBody>
+                  <a:tcPr marL="95250" marR="95250" marT="38100" marB="38100">
+                    <a:solidFill>
+                      <a:srgbClr val="FFFFFF"/>
+                    </a:solidFill>
+                  </a:tcPr>
+                </a:tc>
+              </a:tr>
+              <a:tr h="691515">
+                <a:tc>
+                  <a:txBody>
+                    <a:bodyPr>
+                      <a:noAutofit/>
+                    </a:bodyPr>
+                    <a:lstStyle/>
+                    <a:p>
+                      <a:r>
+                        <a:rPr sz="1725" b="1">
+                          <a:solidFill>
+                            <a:srgbClr val="397718"/>
+                          </a:solidFill>
+                          <a:latin typeface="Arial"/>
+                          <a:ea typeface="Arial"/>
+                          <a:cs typeface="Arial"/>
+                        </a:rPr>
+                        <a:t>24</a:t>
+                      </a:r>
+                    </a:p>
+                  </a:txBody>
+                  <a:tcPr marL="95250" marR="95250" marT="38100" marB="38100">
+                    <a:solidFill>
+                      <a:srgbClr val="FFFFFF"/>
+                    </a:solidFill>
+                  </a:tcPr>
+                </a:tc>
+                <a:tc>
+                  <a:txBody>
+                    <a:bodyPr>
+                      <a:noAutofit/>
+                    </a:bodyPr>
+                    <a:lstStyle/>
+                    <a:p>
+                      <a:r>
+                        <a:rPr sz="1725" b="0">
+                          <a:solidFill>
+                            <a:srgbClr val="19332A"/>
+                          </a:solidFill>
+                          <a:latin typeface="Arial"/>
+                          <a:ea typeface="Arial"/>
+                          <a:cs typeface="Arial"/>
+                        </a:rPr>
+                        <a:t>Message Triage Desk</a:t>
+                      </a:r>
+                    </a:p>
+                  </a:txBody>
+                  <a:tcPr marL="95250" marR="95250" marT="38100" marB="38100">
+                    <a:solidFill>
+                      <a:srgbClr val="FFFFFF"/>
+                    </a:solidFill>
+                  </a:tcPr>
+                </a:tc>
+                <a:tc>
+                  <a:txBody>
+                    <a:bodyPr>
+                      <a:noAutofit/>
+                    </a:bodyPr>
+                    <a:lstStyle/>
+                    <a:p>
+                      <a:r>
+                        <a:rPr sz="1725" b="0">
+                          <a:solidFill>
+                            <a:srgbClr val="19332A"/>
+                          </a:solidFill>
+                          <a:latin typeface="Arial"/>
+                          <a:ea typeface="Arial"/>
+                          <a:cs typeface="Arial"/>
+                        </a:rPr>
+                        <a:t>Validate a model-proposed category before routing.</a:t>
+                      </a:r>
+                    </a:p>
+                  </a:txBody>
+                  <a:tcPr marL="95250" marR="95250" marT="38100" marB="38100">
+                    <a:solidFill>
+                      <a:srgbClr val="FFFFFF"/>
+                    </a:solidFill>
+                  </a:tcPr>
+                </a:tc>
+              </a:tr>
+              <a:tr h="691515">
+                <a:tc>
+                  <a:txBody>
+                    <a:bodyPr>
+                      <a:noAutofit/>
+                    </a:bodyPr>
+                    <a:lstStyle/>
+                    <a:p>
+                      <a:r>
+                        <a:rPr sz="1725" b="1">
+                          <a:solidFill>
+                            <a:srgbClr val="397718"/>
+                          </a:solidFill>
+                          <a:latin typeface="Arial"/>
+                          <a:ea typeface="Arial"/>
+                          <a:cs typeface="Arial"/>
+                        </a:rPr>
+                        <a:t>25</a:t>
+                      </a:r>
+                    </a:p>
+                  </a:txBody>
+                  <a:tcPr marL="95250" marR="95250" marT="38100" marB="38100">
+                    <a:solidFill>
+                      <a:srgbClr val="FFFFFF"/>
+                    </a:solidFill>
+                  </a:tcPr>
+                </a:tc>
+                <a:tc>
+                  <a:txBody>
+                    <a:bodyPr>
+                      <a:noAutofit/>
+                    </a:bodyPr>
+                    <a:lstStyle/>
+                    <a:p>
+                      <a:r>
+                        <a:rPr sz="1725" b="0">
+                          <a:solidFill>
+                            <a:srgbClr val="19332A"/>
+                          </a:solidFill>
+                          <a:latin typeface="Arial"/>
+                          <a:ea typeface="Arial"/>
+                          <a:cs typeface="Arial"/>
+                        </a:rPr>
+                        <a:t>Summary Fact Checker</a:t>
+                      </a:r>
+                    </a:p>
+                  </a:txBody>
+                  <a:tcPr marL="95250" marR="95250" marT="38100" marB="38100">
+                    <a:solidFill>
+                      <a:srgbClr val="FFFFFF"/>
+                    </a:solidFill>
+                  </a:tcPr>
+                </a:tc>
+                <a:tc>
+                  <a:txBody>
+                    <a:bodyPr>
+                      <a:noAutofit/>
+                    </a:bodyPr>
+                    <a:lstStyle/>
+                    <a:p>
+                      <a:r>
+                        <a:rPr sz="1725" b="0">
+                          <a:solidFill>
+                            <a:srgbClr val="19332A"/>
+                          </a:solidFill>
+                          <a:latin typeface="Arial"/>
+                          <a:ea typeface="Arial"/>
+                          <a:cs typeface="Arial"/>
+                        </a:rPr>
+                        <a:t>Read the source, summary and separate model critique.</a:t>
+                      </a:r>
+                    </a:p>
+                  </a:txBody>
+                  <a:tcPr marL="95250" marR="95250" marT="38100" marB="38100">
+                    <a:solidFill>
+                      <a:srgbClr val="FFFFFF"/>
+                    </a:solidFill>
+                  </a:tcPr>
+                </a:tc>
+              </a:tr>
+              <a:tr h="691515">
+                <a:tc>
+                  <a:txBody>
+                    <a:bodyPr>
+                      <a:noAutofit/>
+                    </a:bodyPr>
+                    <a:lstStyle/>
+                    <a:p>
+                      <a:r>
+                        <a:rPr sz="1725" b="1">
+                          <a:solidFill>
+                            <a:srgbClr val="397718"/>
+                          </a:solidFill>
+                          <a:latin typeface="Arial"/>
+                          <a:ea typeface="Arial"/>
+                          <a:cs typeface="Arial"/>
+                        </a:rPr>
+                        <a:t>7</a:t>
+                      </a:r>
+                    </a:p>
+                  </a:txBody>
+                  <a:tcPr marL="95250" marR="95250" marT="38100" marB="38100">
+                    <a:solidFill>
+                      <a:srgbClr val="FFFFFF"/>
+                    </a:solidFill>
+                  </a:tcPr>
+                </a:tc>
+                <a:tc>
+                  <a:txBody>
+                    <a:bodyPr>
+                      <a:noAutofit/>
+                    </a:bodyPr>
+                    <a:lstStyle/>
+                    <a:p>
+                      <a:r>
+                        <a:rPr sz="1725" b="0">
+                          <a:solidFill>
+                            <a:srgbClr val="19332A"/>
+                          </a:solidFill>
+                          <a:latin typeface="Arial"/>
+                          <a:ea typeface="Arial"/>
+                          <a:cs typeface="Arial"/>
+                        </a:rPr>
+                        <a:t>Calculator Tool Assistant</a:t>
+                      </a:r>
+                    </a:p>
+                  </a:txBody>
+                  <a:tcPr marL="95250" marR="95250" marT="38100" marB="38100">
+                    <a:solidFill>
+                      <a:srgbClr val="FFFFFF"/>
+                    </a:solidFill>
+                  </a:tcPr>
+                </a:tc>
+                <a:tc>
+                  <a:txBody>
+                    <a:bodyPr>
+                      <a:noAutofit/>
+                    </a:bodyPr>
+                    <a:lstStyle/>
+                    <a:p>
+                      <a:r>
+                        <a:rPr sz="1725" b="0">
+                          <a:solidFill>
+                            <a:srgbClr val="19332A"/>
+                          </a:solidFill>
+                          <a:latin typeface="Arial"/>
+                          <a:ea typeface="Arial"/>
+                          <a:cs typeface="Arial"/>
+                        </a:rPr>
+                        <a:t>Inspect how a tool performs arithmetic for a language model.</a:t>
+                      </a:r>
+                    </a:p>
+                  </a:txBody>
+                  <a:tcPr marL="95250" marR="95250" marT="38100" marB="38100">
+                    <a:solidFill>
+                      <a:srgbClr val="FFFFFF"/>
+                    </a:solidFill>
+                  </a:tcPr>
+                </a:tc>
+              </a:tr>
+            </a:tbl>
+          </a:graphicData>
+        </a:graphic>
+      </p:graphicFrame>
     </p:spTree>
     <p:extLst>
       <p:ext uri="{BB962C8B-B14F-4D97-AF65-F5344CB8AC3E}">
-        <p14:creationId xmlns:p14="http://schemas.microsoft.com/office/powerpoint/2010/main" val="633951375"/>
+        <p14:creationId xmlns:p14="http://schemas.microsoft.com/office/powerpoint/2010/main" val="726683948"/>
       </p:ext>
     </p:extLst>
   </p:cSld>
@@ -4475,7 +6756,7 @@
     <p:bg>
       <p:bgPr>
         <a:solidFill xmlns:a="http://schemas.openxmlformats.org/drawingml/2006/main">
-          <a:srgbClr val="0C1825"/>
+          <a:srgbClr val="FFFFFF"/>
         </a:solidFill>
       </p:bgPr>
     </p:bg>
@@ -4490,10 +6771,10 @@
       </p:grpSpPr>
       <p:sp>
         <p:nvSpPr>
-          <p:cNvPr id="9" name="">
+          <p:cNvPr id="13" name="">
             <a:extLst xmlns:a="http://schemas.openxmlformats.org/drawingml/2006/main">
               <a:ext uri="{FF2B5EF4-FFF2-40B4-BE49-F238E27FC236}">
-                <a16:creationId xmlns:a16="http://schemas.microsoft.com/office/drawing/2014/main" id="{AC6F85FE-B50E-4C85-94A9-2D5119EB40F4}"/>
+                <a16:creationId xmlns:a16="http://schemas.microsoft.com/office/drawing/2014/main" id="{1ED31DCA-7B77-4825-9E1D-AE42344DB9AB}"/>
               </a:ext>
             </a:extLst>
           </p:cNvPr>
@@ -4504,8 +6785,8 @@
         </p:nvSpPr>
         <p:spPr>
           <a:xfrm xmlns:a="http://schemas.openxmlformats.org/drawingml/2006/main">
-            <a:off x="609600" y="438150"/>
-            <a:ext cx="10934700" cy="857250"/>
+            <a:off x="628650" y="457200"/>
+            <a:ext cx="10953750" cy="762000"/>
           </a:xfrm>
           <a:prstGeom xmlns:a="http://schemas.openxmlformats.org/drawingml/2006/main" prst="rect">
             <a:avLst/>
@@ -4522,25 +6803,25 @@
           <a:lstStyle xmlns:a="http://schemas.openxmlformats.org/drawingml/2006/main"/>
           <a:p xmlns:a="http://schemas.openxmlformats.org/drawingml/2006/main">
             <a:pPr>
-              <a:defRPr sz="3750" b="1">
-                <a:solidFill>
-                  <a:srgbClr val="F2F7FB"/>
-                </a:solidFill>
-                <a:latin typeface="Arial"/>
-                <a:ea typeface="Arial"/>
-                <a:cs typeface="Arial"/>
-              </a:defRPr>
-            </a:pPr>
-            <a:r>
-              <a:rPr sz="3750" b="1">
-                <a:solidFill>
-                  <a:srgbClr val="F2F7FB"/>
-                </a:solidFill>
-                <a:latin typeface="Arial"/>
-                <a:ea typeface="Arial"/>
-                <a:cs typeface="Arial"/>
-              </a:rPr>
-              <a:t>Camera projects beyond detection</a:t>
+              <a:defRPr sz="3600" b="1">
+                <a:solidFill>
+                  <a:srgbClr val="19332A"/>
+                </a:solidFill>
+                <a:latin typeface="Arial"/>
+                <a:ea typeface="Arial"/>
+                <a:cs typeface="Arial"/>
+              </a:defRPr>
+            </a:pPr>
+            <a:r>
+              <a:rPr sz="3600" b="1">
+                <a:solidFill>
+                  <a:srgbClr val="19332A"/>
+                </a:solidFill>
+                <a:latin typeface="Arial"/>
+                <a:ea typeface="Arial"/>
+                <a:cs typeface="Arial"/>
+              </a:rPr>
+              <a:t>Memory, uncertainty and trust</a:t>
             </a:r>
           </a:p>
         </p:txBody>
@@ -4550,7 +6831,7 @@
           <p:cNvPr id="2" name="">
             <a:extLst xmlns:a="http://schemas.openxmlformats.org/drawingml/2006/main">
               <a:ext uri="{FF2B5EF4-FFF2-40B4-BE49-F238E27FC236}">
-                <a16:creationId xmlns:a16="http://schemas.microsoft.com/office/drawing/2014/main" id="{40C83477-A56A-4D2A-8820-8C9DA1DA5068}"/>
+                <a16:creationId xmlns:a16="http://schemas.microsoft.com/office/drawing/2014/main" id="{2F895C9B-E7DB-497D-BB53-C018B77DC6A6}"/>
               </a:ext>
             </a:extLst>
           </p:cNvPr>
@@ -4561,8 +6842,8 @@
         </p:nvSpPr>
         <p:spPr>
           <a:xfrm xmlns:a="http://schemas.openxmlformats.org/drawingml/2006/main">
-            <a:off x="647700" y="1362075"/>
-            <a:ext cx="10763250" cy="857250"/>
+            <a:off x="666750" y="1333500"/>
+            <a:ext cx="10858500" cy="619125"/>
           </a:xfrm>
           <a:prstGeom xmlns:a="http://schemas.openxmlformats.org/drawingml/2006/main" prst="rect">
             <a:avLst/>
@@ -4579,25 +6860,25 @@
           <a:lstStyle xmlns:a="http://schemas.openxmlformats.org/drawingml/2006/main"/>
           <a:p xmlns:a="http://schemas.openxmlformats.org/drawingml/2006/main">
             <a:pPr>
-              <a:defRPr sz="2100" b="0">
-                <a:solidFill>
-                  <a:srgbClr val="76DAC7"/>
-                </a:solidFill>
-                <a:latin typeface="Arial"/>
-                <a:ea typeface="Arial"/>
-                <a:cs typeface="Arial"/>
-              </a:defRPr>
-            </a:pPr>
-            <a:r>
-              <a:rPr sz="2100" b="0">
-                <a:solidFill>
-                  <a:srgbClr val="76DAC7"/>
-                </a:solidFill>
-                <a:latin typeface="Arial"/>
-                <a:ea typeface="Arial"/>
-                <a:cs typeface="Arial"/>
-              </a:rPr>
-              <a:t>Keep the camera fixed; move ordinary objects in the scene</a:t>
+              <a:defRPr sz="1950" b="0">
+                <a:solidFill>
+                  <a:srgbClr val="52635B"/>
+                </a:solidFill>
+                <a:latin typeface="Arial"/>
+                <a:ea typeface="Arial"/>
+                <a:cs typeface="Arial"/>
+              </a:defRPr>
+            </a:pPr>
+            <a:r>
+              <a:rPr sz="1950" b="0">
+                <a:solidFill>
+                  <a:srgbClr val="52635B"/>
+                </a:solidFill>
+                <a:latin typeface="Arial"/>
+                <a:ea typeface="Arial"/>
+                <a:cs typeface="Arial"/>
+              </a:rPr>
+              <a:t>Explore how an assistant handles instructions, missing facts and memory.</a:t>
             </a:r>
           </a:p>
         </p:txBody>
@@ -4607,7 +6888,7 @@
           <p:cNvPr id="3" name="">
             <a:extLst xmlns:a="http://schemas.openxmlformats.org/drawingml/2006/main">
               <a:ext uri="{FF2B5EF4-FFF2-40B4-BE49-F238E27FC236}">
-                <a16:creationId xmlns:a16="http://schemas.microsoft.com/office/drawing/2014/main" id="{63CE41C8-237C-410D-AAE8-48A014A362C8}"/>
+                <a16:creationId xmlns:a16="http://schemas.microsoft.com/office/drawing/2014/main" id="{C7F8F860-EBC3-4E4D-B814-86B521E27433}"/>
               </a:ext>
             </a:extLst>
           </p:cNvPr>
@@ -4618,8 +6899,8 @@
         </p:nvSpPr>
         <p:spPr>
           <a:xfrm xmlns:a="http://schemas.openxmlformats.org/drawingml/2006/main">
-            <a:off x="685800" y="2324100"/>
-            <a:ext cx="10810875" cy="571500"/>
+            <a:off x="666750" y="6191250"/>
+            <a:ext cx="10287000" cy="419100"/>
           </a:xfrm>
           <a:prstGeom xmlns:a="http://schemas.openxmlformats.org/drawingml/2006/main" prst="rect">
             <a:avLst/>
@@ -4636,25 +6917,25 @@
           <a:lstStyle xmlns:a="http://schemas.openxmlformats.org/drawingml/2006/main"/>
           <a:p xmlns:a="http://schemas.openxmlformats.org/drawingml/2006/main">
             <a:pPr>
-              <a:defRPr sz="2100" b="0">
-                <a:solidFill>
-                  <a:srgbClr val="F2F7FB"/>
-                </a:solidFill>
-                <a:latin typeface="Arial"/>
-                <a:ea typeface="Arial"/>
-                <a:cs typeface="Arial"/>
-              </a:defRPr>
-            </a:pPr>
-            <a:r>
-              <a:rPr sz="2100" b="0">
-                <a:solidFill>
-                  <a:srgbClr val="F2F7FB"/>
-                </a:solidFill>
-                <a:latin typeface="Arial"/>
-                <a:ea typeface="Arial"/>
-                <a:cs typeface="Arial"/>
-              </a:rPr>
-              <a:t>Experiment 18: Scene Memory Detective</a:t>
+              <a:defRPr sz="1350" b="0">
+                <a:solidFill>
+                  <a:srgbClr val="52635B"/>
+                </a:solidFill>
+                <a:latin typeface="Arial"/>
+                <a:ea typeface="Arial"/>
+                <a:cs typeface="Arial"/>
+              </a:defRPr>
+            </a:pPr>
+            <a:r>
+              <a:rPr sz="1350" b="0">
+                <a:solidFill>
+                  <a:srgbClr val="52635B"/>
+                </a:solidFill>
+                <a:latin typeface="Arial"/>
+                <a:ea typeface="Arial"/>
+                <a:cs typeface="Arial"/>
+              </a:rPr>
+              <a:t>Challenge the assistant, inspect its answer, and compare it with the source facts.</a:t>
             </a:r>
           </a:p>
         </p:txBody>
@@ -4664,7 +6945,7 @@
           <p:cNvPr id="4" name="">
             <a:extLst xmlns:a="http://schemas.openxmlformats.org/drawingml/2006/main">
               <a:ext uri="{FF2B5EF4-FFF2-40B4-BE49-F238E27FC236}">
-                <a16:creationId xmlns:a16="http://schemas.microsoft.com/office/drawing/2014/main" id="{410DB879-959E-43A2-963D-6054A8A117B2}"/>
+                <a16:creationId xmlns:a16="http://schemas.microsoft.com/office/drawing/2014/main" id="{C90618C9-7B1C-4471-BB85-3FDF9BAC3FA6}"/>
               </a:ext>
             </a:extLst>
           </p:cNvPr>
@@ -4675,8 +6956,8 @@
         </p:nvSpPr>
         <p:spPr>
           <a:xfrm xmlns:a="http://schemas.openxmlformats.org/drawingml/2006/main">
-            <a:off x="685800" y="2990850"/>
-            <a:ext cx="10810875" cy="571500"/>
+            <a:off x="11182350" y="6200775"/>
+            <a:ext cx="523875" cy="333375"/>
           </a:xfrm>
           <a:prstGeom xmlns:a="http://schemas.openxmlformats.org/drawingml/2006/main" prst="rect">
             <a:avLst/>
@@ -4693,25 +6974,25 @@
           <a:lstStyle xmlns:a="http://schemas.openxmlformats.org/drawingml/2006/main"/>
           <a:p xmlns:a="http://schemas.openxmlformats.org/drawingml/2006/main">
             <a:pPr>
-              <a:defRPr sz="2100" b="0">
-                <a:solidFill>
-                  <a:srgbClr val="F2F7FB"/>
-                </a:solidFill>
-                <a:latin typeface="Arial"/>
-                <a:ea typeface="Arial"/>
-                <a:cs typeface="Arial"/>
-              </a:defRPr>
-            </a:pPr>
-            <a:r>
-              <a:rPr sz="2100" b="0">
-                <a:solidFill>
-                  <a:srgbClr val="F2F7FB"/>
-                </a:solidFill>
-                <a:latin typeface="Arial"/>
-                <a:ea typeface="Arial"/>
-                <a:cs typeface="Arial"/>
-              </a:rPr>
-              <a:t>Experiment 19: AI Visual Scavenger Hunt</a:t>
+              <a:defRPr sz="1350" b="1">
+                <a:solidFill>
+                  <a:srgbClr val="397718"/>
+                </a:solidFill>
+                <a:latin typeface="Arial"/>
+                <a:ea typeface="Arial"/>
+                <a:cs typeface="Arial"/>
+              </a:defRPr>
+            </a:pPr>
+            <a:r>
+              <a:rPr sz="1350" b="1">
+                <a:solidFill>
+                  <a:srgbClr val="397718"/>
+                </a:solidFill>
+                <a:latin typeface="Arial"/>
+                <a:ea typeface="Arial"/>
+                <a:cs typeface="Arial"/>
+              </a:rPr>
+              <a:t>07</a:t>
             </a:r>
           </a:p>
         </p:txBody>
@@ -4721,7 +7002,7 @@
           <p:cNvPr id="5" name="">
             <a:extLst xmlns:a="http://schemas.openxmlformats.org/drawingml/2006/main">
               <a:ext uri="{FF2B5EF4-FFF2-40B4-BE49-F238E27FC236}">
-                <a16:creationId xmlns:a16="http://schemas.microsoft.com/office/drawing/2014/main" id="{49E45FEF-E62E-41FB-A098-668A77CD2EBC}"/>
+                <a16:creationId xmlns:a16="http://schemas.microsoft.com/office/drawing/2014/main" id="{726D0ED5-DED1-419A-8A1A-4FB4811F6603}"/>
               </a:ext>
             </a:extLst>
           </p:cNvPr>
@@ -4732,8 +7013,8 @@
         </p:nvSpPr>
         <p:spPr>
           <a:xfrm xmlns:a="http://schemas.openxmlformats.org/drawingml/2006/main">
-            <a:off x="685800" y="3657600"/>
-            <a:ext cx="10810875" cy="571500"/>
+            <a:off x="704850" y="2133600"/>
+            <a:ext cx="2476500" cy="333375"/>
           </a:xfrm>
           <a:prstGeom xmlns:a="http://schemas.openxmlformats.org/drawingml/2006/main" prst="rect">
             <a:avLst/>
@@ -4750,25 +7031,25 @@
           <a:lstStyle xmlns:a="http://schemas.openxmlformats.org/drawingml/2006/main"/>
           <a:p xmlns:a="http://schemas.openxmlformats.org/drawingml/2006/main">
             <a:pPr>
-              <a:defRPr sz="2100" b="0">
-                <a:solidFill>
-                  <a:srgbClr val="F2F7FB"/>
-                </a:solidFill>
-                <a:latin typeface="Arial"/>
-                <a:ea typeface="Arial"/>
-                <a:cs typeface="Arial"/>
-              </a:defRPr>
-            </a:pPr>
-            <a:r>
-              <a:rPr sz="2100" b="0">
-                <a:solidFill>
-                  <a:srgbClr val="F2F7FB"/>
-                </a:solidFill>
-                <a:latin typeface="Arial"/>
-                <a:ea typeface="Arial"/>
-                <a:cs typeface="Arial"/>
-              </a:rPr>
-              <a:t>Experiment 20: Camera Change Journal</a:t>
+              <a:defRPr sz="1575" b="1">
+                <a:solidFill>
+                  <a:srgbClr val="397718"/>
+                </a:solidFill>
+                <a:latin typeface="Arial"/>
+                <a:ea typeface="Arial"/>
+                <a:cs typeface="Arial"/>
+              </a:defRPr>
+            </a:pPr>
+            <a:r>
+              <a:rPr sz="1575" b="1">
+                <a:solidFill>
+                  <a:srgbClr val="397718"/>
+                </a:solidFill>
+                <a:latin typeface="Arial"/>
+                <a:ea typeface="Arial"/>
+                <a:cs typeface="Arial"/>
+              </a:rPr>
+              <a:t>Experiment 26</a:t>
             </a:r>
           </a:p>
         </p:txBody>
@@ -4778,7 +7059,7 @@
           <p:cNvPr id="6" name="">
             <a:extLst xmlns:a="http://schemas.openxmlformats.org/drawingml/2006/main">
               <a:ext uri="{FF2B5EF4-FFF2-40B4-BE49-F238E27FC236}">
-                <a16:creationId xmlns:a16="http://schemas.microsoft.com/office/drawing/2014/main" id="{7EC0CAD5-305C-458C-9EE1-E42C18EB0EC5}"/>
+                <a16:creationId xmlns:a16="http://schemas.microsoft.com/office/drawing/2014/main" id="{29F17C53-8140-40A4-9E48-911159DCEF2E}"/>
               </a:ext>
             </a:extLst>
           </p:cNvPr>
@@ -4789,8 +7070,8 @@
         </p:nvSpPr>
         <p:spPr>
           <a:xfrm xmlns:a="http://schemas.openxmlformats.org/drawingml/2006/main">
-            <a:off x="685800" y="4324350"/>
-            <a:ext cx="10810875" cy="571500"/>
+            <a:off x="704850" y="2533650"/>
+            <a:ext cx="10429875" cy="466725"/>
           </a:xfrm>
           <a:prstGeom xmlns:a="http://schemas.openxmlformats.org/drawingml/2006/main" prst="rect">
             <a:avLst/>
@@ -4807,25 +7088,25 @@
           <a:lstStyle xmlns:a="http://schemas.openxmlformats.org/drawingml/2006/main"/>
           <a:p xmlns:a="http://schemas.openxmlformats.org/drawingml/2006/main">
             <a:pPr>
-              <a:defRPr sz="2100" b="0">
-                <a:solidFill>
-                  <a:srgbClr val="F2F7FB"/>
-                </a:solidFill>
-                <a:latin typeface="Arial"/>
-                <a:ea typeface="Arial"/>
-                <a:cs typeface="Arial"/>
-              </a:defRPr>
-            </a:pPr>
-            <a:r>
-              <a:rPr sz="2100" b="0">
-                <a:solidFill>
-                  <a:srgbClr val="F2F7FB"/>
-                </a:solidFill>
-                <a:latin typeface="Arial"/>
-                <a:ea typeface="Arial"/>
-                <a:cs typeface="Arial"/>
-              </a:rPr>
-              <a:t>Experiment 13: Camera Perception Lab and Installation</a:t>
+              <a:defRPr sz="2550" b="1">
+                <a:solidFill>
+                  <a:srgbClr val="19332A"/>
+                </a:solidFill>
+                <a:latin typeface="Arial"/>
+                <a:ea typeface="Arial"/>
+                <a:cs typeface="Arial"/>
+              </a:defRPr>
+            </a:pPr>
+            <a:r>
+              <a:rPr sz="2550" b="1">
+                <a:solidFill>
+                  <a:srgbClr val="19332A"/>
+                </a:solidFill>
+                <a:latin typeface="Arial"/>
+                <a:ea typeface="Arial"/>
+                <a:cs typeface="Arial"/>
+              </a:rPr>
+              <a:t>Prompt Injection Defense Lab</a:t>
             </a:r>
           </a:p>
         </p:txBody>
@@ -4835,7 +7116,7 @@
           <p:cNvPr id="7" name="">
             <a:extLst xmlns:a="http://schemas.openxmlformats.org/drawingml/2006/main">
               <a:ext uri="{FF2B5EF4-FFF2-40B4-BE49-F238E27FC236}">
-                <a16:creationId xmlns:a16="http://schemas.microsoft.com/office/drawing/2014/main" id="{6CE0A776-CE14-40FD-9C69-38C3D7E34B60}"/>
+                <a16:creationId xmlns:a16="http://schemas.microsoft.com/office/drawing/2014/main" id="{1641CA58-E882-47C6-ADFC-6E417F941C55}"/>
               </a:ext>
             </a:extLst>
           </p:cNvPr>
@@ -4846,8 +7127,8 @@
         </p:nvSpPr>
         <p:spPr>
           <a:xfrm xmlns:a="http://schemas.openxmlformats.org/drawingml/2006/main">
-            <a:off x="685800" y="4991100"/>
-            <a:ext cx="10810875" cy="571500"/>
+            <a:off x="733425" y="3028950"/>
+            <a:ext cx="10668000" cy="476250"/>
           </a:xfrm>
           <a:prstGeom xmlns:a="http://schemas.openxmlformats.org/drawingml/2006/main" prst="rect">
             <a:avLst/>
@@ -4864,25 +7145,25 @@
           <a:lstStyle xmlns:a="http://schemas.openxmlformats.org/drawingml/2006/main"/>
           <a:p xmlns:a="http://schemas.openxmlformats.org/drawingml/2006/main">
             <a:pPr>
-              <a:defRPr sz="2100" b="0">
-                <a:solidFill>
-                  <a:srgbClr val="F2F7FB"/>
-                </a:solidFill>
-                <a:latin typeface="Arial"/>
-                <a:ea typeface="Arial"/>
-                <a:cs typeface="Arial"/>
-              </a:defRPr>
-            </a:pPr>
-            <a:r>
-              <a:rPr sz="2100" b="0">
-                <a:solidFill>
-                  <a:srgbClr val="F2F7FB"/>
-                </a:solidFill>
-                <a:latin typeface="Arial"/>
-                <a:ea typeface="Arial"/>
-                <a:cs typeface="Arial"/>
-              </a:rPr>
-              <a:t>Perception modes: detection, classification, pose, segmentation</a:t>
+              <a:defRPr sz="1875" b="0">
+                <a:solidFill>
+                  <a:srgbClr val="52635B"/>
+                </a:solidFill>
+                <a:latin typeface="Arial"/>
+                <a:ea typeface="Arial"/>
+                <a:cs typeface="Arial"/>
+              </a:defRPr>
+            </a:pPr>
+            <a:r>
+              <a:rPr sz="1875" b="0">
+                <a:solidFill>
+                  <a:srgbClr val="52635B"/>
+                </a:solidFill>
+                <a:latin typeface="Arial"/>
+                <a:ea typeface="Arial"/>
+                <a:cs typeface="Arial"/>
+              </a:rPr>
+              <a:t>Compare an injected document with and without instruction separation.</a:t>
             </a:r>
           </a:p>
         </p:txBody>
@@ -4892,7 +7173,7 @@
           <p:cNvPr id="8" name="">
             <a:extLst xmlns:a="http://schemas.openxmlformats.org/drawingml/2006/main">
               <a:ext uri="{FF2B5EF4-FFF2-40B4-BE49-F238E27FC236}">
-                <a16:creationId xmlns:a16="http://schemas.microsoft.com/office/drawing/2014/main" id="{0A41FB87-F35F-45C3-B84F-7954BF54AD8E}"/>
+                <a16:creationId xmlns:a16="http://schemas.microsoft.com/office/drawing/2014/main" id="{816BB589-333A-4134-B91D-2DD85B53AB8C}"/>
               </a:ext>
             </a:extLst>
           </p:cNvPr>
@@ -4903,8 +7184,8 @@
         </p:nvSpPr>
         <p:spPr>
           <a:xfrm xmlns:a="http://schemas.openxmlformats.org/drawingml/2006/main">
-            <a:off x="647700" y="6229350"/>
-            <a:ext cx="10572750" cy="428625"/>
+            <a:off x="704850" y="3743325"/>
+            <a:ext cx="2476500" cy="333375"/>
           </a:xfrm>
           <a:prstGeom xmlns:a="http://schemas.openxmlformats.org/drawingml/2006/main" prst="rect">
             <a:avLst/>
@@ -4921,25 +7202,253 @@
           <a:lstStyle xmlns:a="http://schemas.openxmlformats.org/drawingml/2006/main"/>
           <a:p xmlns:a="http://schemas.openxmlformats.org/drawingml/2006/main">
             <a:pPr>
-              <a:defRPr sz="1425" b="0">
-                <a:solidFill>
-                  <a:srgbClr val="B6C6D5"/>
-                </a:solidFill>
-                <a:latin typeface="Arial"/>
-                <a:ea typeface="Arial"/>
-                <a:cs typeface="Arial"/>
-              </a:defRPr>
-            </a:pPr>
-            <a:r>
-              <a:rPr sz="1425" b="0">
-                <a:solidFill>
-                  <a:srgbClr val="B6C6D5"/>
-                </a:solidFill>
-                <a:latin typeface="Arial"/>
-                <a:ea typeface="Arial"/>
-                <a:cs typeface="Arial"/>
-              </a:rPr>
-              <a:t>Vision exits before the language model starts. These projects use detections, not a vision-language model.</a:t>
+              <a:defRPr sz="1575" b="1">
+                <a:solidFill>
+                  <a:srgbClr val="397718"/>
+                </a:solidFill>
+                <a:latin typeface="Arial"/>
+                <a:ea typeface="Arial"/>
+                <a:cs typeface="Arial"/>
+              </a:defRPr>
+            </a:pPr>
+            <a:r>
+              <a:rPr sz="1575" b="1">
+                <a:solidFill>
+                  <a:srgbClr val="397718"/>
+                </a:solidFill>
+                <a:latin typeface="Arial"/>
+                <a:ea typeface="Arial"/>
+                <a:cs typeface="Arial"/>
+              </a:rPr>
+              <a:t>Experiment 27</a:t>
+            </a:r>
+          </a:p>
+        </p:txBody>
+      </p:sp>
+      <p:sp>
+        <p:nvSpPr>
+          <p:cNvPr id="9" name="">
+            <a:extLst xmlns:a="http://schemas.openxmlformats.org/drawingml/2006/main">
+              <a:ext uri="{FF2B5EF4-FFF2-40B4-BE49-F238E27FC236}">
+                <a16:creationId xmlns:a16="http://schemas.microsoft.com/office/drawing/2014/main" id="{B8FF8D72-B20B-4049-9B2C-BA505BBDAC07}"/>
+              </a:ext>
+            </a:extLst>
+          </p:cNvPr>
+          <p:cNvSpPr>
+            <a:spLocks xmlns:a="http://schemas.openxmlformats.org/drawingml/2006/main" noGrp="1"/>
+          </p:cNvSpPr>
+          <p:nvPr/>
+        </p:nvSpPr>
+        <p:spPr>
+          <a:xfrm xmlns:a="http://schemas.openxmlformats.org/drawingml/2006/main">
+            <a:off x="704850" y="4124325"/>
+            <a:ext cx="10477500" cy="466725"/>
+          </a:xfrm>
+          <a:prstGeom xmlns:a="http://schemas.openxmlformats.org/drawingml/2006/main" prst="rect">
+            <a:avLst/>
+          </a:prstGeom>
+          <a:noFill xmlns:a="http://schemas.openxmlformats.org/drawingml/2006/main"/>
+          <a:ln xmlns:a="http://schemas.openxmlformats.org/drawingml/2006/main" w="0">
+            <a:noFill/>
+          </a:ln>
+        </p:spPr>
+        <p:txBody>
+          <a:bodyPr xmlns:a="http://schemas.openxmlformats.org/drawingml/2006/main">
+            <a:noAutofit/>
+          </a:bodyPr>
+          <a:lstStyle xmlns:a="http://schemas.openxmlformats.org/drawingml/2006/main"/>
+          <a:p xmlns:a="http://schemas.openxmlformats.org/drawingml/2006/main">
+            <a:pPr>
+              <a:defRPr sz="2550" b="1">
+                <a:solidFill>
+                  <a:srgbClr val="19332A"/>
+                </a:solidFill>
+                <a:latin typeface="Arial"/>
+                <a:ea typeface="Arial"/>
+                <a:cs typeface="Arial"/>
+              </a:defRPr>
+            </a:pPr>
+            <a:r>
+              <a:rPr sz="2550" b="1">
+                <a:solidFill>
+                  <a:srgbClr val="19332A"/>
+                </a:solidFill>
+                <a:latin typeface="Arial"/>
+                <a:ea typeface="Arial"/>
+                <a:cs typeface="Arial"/>
+              </a:rPr>
+              <a:t>Answer or Abstain: Hallucination Challenge</a:t>
+            </a:r>
+          </a:p>
+        </p:txBody>
+      </p:sp>
+      <p:sp>
+        <p:nvSpPr>
+          <p:cNvPr id="10" name="">
+            <a:extLst xmlns:a="http://schemas.openxmlformats.org/drawingml/2006/main">
+              <a:ext uri="{FF2B5EF4-FFF2-40B4-BE49-F238E27FC236}">
+                <a16:creationId xmlns:a16="http://schemas.microsoft.com/office/drawing/2014/main" id="{F660FA5B-DDCF-429D-8A5F-F42901D36035}"/>
+              </a:ext>
+            </a:extLst>
+          </p:cNvPr>
+          <p:cNvSpPr>
+            <a:spLocks xmlns:a="http://schemas.openxmlformats.org/drawingml/2006/main" noGrp="1"/>
+          </p:cNvSpPr>
+          <p:nvPr/>
+        </p:nvSpPr>
+        <p:spPr>
+          <a:xfrm xmlns:a="http://schemas.openxmlformats.org/drawingml/2006/main">
+            <a:off x="733425" y="4610100"/>
+            <a:ext cx="10668000" cy="476250"/>
+          </a:xfrm>
+          <a:prstGeom xmlns:a="http://schemas.openxmlformats.org/drawingml/2006/main" prst="rect">
+            <a:avLst/>
+          </a:prstGeom>
+          <a:noFill xmlns:a="http://schemas.openxmlformats.org/drawingml/2006/main"/>
+          <a:ln xmlns:a="http://schemas.openxmlformats.org/drawingml/2006/main" w="0">
+            <a:noFill/>
+          </a:ln>
+        </p:spPr>
+        <p:txBody>
+          <a:bodyPr xmlns:a="http://schemas.openxmlformats.org/drawingml/2006/main">
+            <a:noAutofit/>
+          </a:bodyPr>
+          <a:lstStyle xmlns:a="http://schemas.openxmlformats.org/drawingml/2006/main"/>
+          <a:p xmlns:a="http://schemas.openxmlformats.org/drawingml/2006/main">
+            <a:pPr>
+              <a:defRPr sz="1875" b="0">
+                <a:solidFill>
+                  <a:srgbClr val="52635B"/>
+                </a:solidFill>
+                <a:latin typeface="Arial"/>
+                <a:ea typeface="Arial"/>
+                <a:cs typeface="Arial"/>
+              </a:defRPr>
+            </a:pPr>
+            <a:r>
+              <a:rPr sz="1875" b="0">
+                <a:solidFill>
+                  <a:srgbClr val="52635B"/>
+                </a:solidFill>
+                <a:latin typeface="Arial"/>
+                <a:ea typeface="Arial"/>
+                <a:cs typeface="Arial"/>
+              </a:rPr>
+              <a:t>Ask one answerable question and one whose answer is deliberately missing.</a:t>
+            </a:r>
+          </a:p>
+        </p:txBody>
+      </p:sp>
+      <p:sp>
+        <p:nvSpPr>
+          <p:cNvPr id="11" name="">
+            <a:extLst xmlns:a="http://schemas.openxmlformats.org/drawingml/2006/main">
+              <a:ext uri="{FF2B5EF4-FFF2-40B4-BE49-F238E27FC236}">
+                <a16:creationId xmlns:a16="http://schemas.microsoft.com/office/drawing/2014/main" id="{E9693CC6-F79E-4E52-B2C6-BE5CDD345D36}"/>
+              </a:ext>
+            </a:extLst>
+          </p:cNvPr>
+          <p:cNvSpPr>
+            <a:spLocks xmlns:a="http://schemas.openxmlformats.org/drawingml/2006/main" noGrp="1"/>
+          </p:cNvSpPr>
+          <p:nvPr/>
+        </p:nvSpPr>
+        <p:spPr>
+          <a:xfrm xmlns:a="http://schemas.openxmlformats.org/drawingml/2006/main">
+            <a:off x="714375" y="5381625"/>
+            <a:ext cx="10477500" cy="457200"/>
+          </a:xfrm>
+          <a:prstGeom xmlns:a="http://schemas.openxmlformats.org/drawingml/2006/main" prst="rect">
+            <a:avLst/>
+          </a:prstGeom>
+          <a:noFill xmlns:a="http://schemas.openxmlformats.org/drawingml/2006/main"/>
+          <a:ln xmlns:a="http://schemas.openxmlformats.org/drawingml/2006/main" w="0">
+            <a:noFill/>
+          </a:ln>
+        </p:spPr>
+        <p:txBody>
+          <a:bodyPr xmlns:a="http://schemas.openxmlformats.org/drawingml/2006/main">
+            <a:noAutofit/>
+          </a:bodyPr>
+          <a:lstStyle xmlns:a="http://schemas.openxmlformats.org/drawingml/2006/main"/>
+          <a:p xmlns:a="http://schemas.openxmlformats.org/drawingml/2006/main">
+            <a:pPr>
+              <a:defRPr sz="2100" b="1">
+                <a:solidFill>
+                  <a:srgbClr val="19332A"/>
+                </a:solidFill>
+                <a:latin typeface="Arial"/>
+                <a:ea typeface="Arial"/>
+                <a:cs typeface="Arial"/>
+              </a:defRPr>
+            </a:pPr>
+            <a:r>
+              <a:rPr sz="2100" b="1">
+                <a:solidFill>
+                  <a:srgbClr val="19332A"/>
+                </a:solidFill>
+                <a:latin typeface="Arial"/>
+                <a:ea typeface="Arial"/>
+                <a:cs typeface="Arial"/>
+              </a:rPr>
+              <a:t>Experiment 28: Context Memory Challenge</a:t>
+            </a:r>
+          </a:p>
+        </p:txBody>
+      </p:sp>
+      <p:sp>
+        <p:nvSpPr>
+          <p:cNvPr id="12" name="">
+            <a:extLst xmlns:a="http://schemas.openxmlformats.org/drawingml/2006/main">
+              <a:ext uri="{FF2B5EF4-FFF2-40B4-BE49-F238E27FC236}">
+                <a16:creationId xmlns:a16="http://schemas.microsoft.com/office/drawing/2014/main" id="{9AB07230-0B47-43BB-9BBE-DEED6BAD8E58}"/>
+              </a:ext>
+            </a:extLst>
+          </p:cNvPr>
+          <p:cNvSpPr>
+            <a:spLocks xmlns:a="http://schemas.openxmlformats.org/drawingml/2006/main" noGrp="1"/>
+          </p:cNvSpPr>
+          <p:nvPr/>
+        </p:nvSpPr>
+        <p:spPr>
+          <a:xfrm xmlns:a="http://schemas.openxmlformats.org/drawingml/2006/main">
+            <a:off x="733425" y="5791200"/>
+            <a:ext cx="10001250" cy="333375"/>
+          </a:xfrm>
+          <a:prstGeom xmlns:a="http://schemas.openxmlformats.org/drawingml/2006/main" prst="rect">
+            <a:avLst/>
+          </a:prstGeom>
+          <a:noFill xmlns:a="http://schemas.openxmlformats.org/drawingml/2006/main"/>
+          <a:ln xmlns:a="http://schemas.openxmlformats.org/drawingml/2006/main" w="0">
+            <a:noFill/>
+          </a:ln>
+        </p:spPr>
+        <p:txBody>
+          <a:bodyPr xmlns:a="http://schemas.openxmlformats.org/drawingml/2006/main">
+            <a:noAutofit/>
+          </a:bodyPr>
+          <a:lstStyle xmlns:a="http://schemas.openxmlformats.org/drawingml/2006/main"/>
+          <a:p xmlns:a="http://schemas.openxmlformats.org/drawingml/2006/main">
+            <a:pPr>
+              <a:defRPr sz="1725" b="0">
+                <a:solidFill>
+                  <a:srgbClr val="52635B"/>
+                </a:solidFill>
+                <a:latin typeface="Arial"/>
+                <a:ea typeface="Arial"/>
+                <a:cs typeface="Arial"/>
+              </a:defRPr>
+            </a:pPr>
+            <a:r>
+              <a:rPr sz="1725" b="0">
+                <a:solidFill>
+                  <a:srgbClr val="52635B"/>
+                </a:solidFill>
+                <a:latin typeface="Arial"/>
+                <a:ea typeface="Arial"/>
+                <a:cs typeface="Arial"/>
+              </a:rPr>
+              <a:t>Recall the same fact as irrelevant context grows.</a:t>
             </a:r>
           </a:p>
         </p:txBody>
@@ -4947,7 +7456,7 @@
     </p:spTree>
     <p:extLst>
       <p:ext uri="{BB962C8B-B14F-4D97-AF65-F5344CB8AC3E}">
-        <p14:creationId xmlns:p14="http://schemas.microsoft.com/office/powerpoint/2010/main" val="122855180"/>
+        <p14:creationId xmlns:p14="http://schemas.microsoft.com/office/powerpoint/2010/main" val="37995341"/>
       </p:ext>
     </p:extLst>
   </p:cSld>
@@ -4960,7 +7469,7 @@
     <p:bg>
       <p:bgPr>
         <a:solidFill xmlns:a="http://schemas.openxmlformats.org/drawingml/2006/main">
-          <a:srgbClr val="0C1825"/>
+          <a:srgbClr val="FFFFFF"/>
         </a:solidFill>
       </p:bgPr>
     </p:bg>
@@ -4975,10 +7484,10 @@
       </p:grpSpPr>
       <p:sp>
         <p:nvSpPr>
-          <p:cNvPr id="8" name="">
+          <p:cNvPr id="7" name="">
             <a:extLst xmlns:a="http://schemas.openxmlformats.org/drawingml/2006/main">
               <a:ext uri="{FF2B5EF4-FFF2-40B4-BE49-F238E27FC236}">
-                <a16:creationId xmlns:a16="http://schemas.microsoft.com/office/drawing/2014/main" id="{7CD10F2C-C110-4DB5-9FC7-9DD94C588608}"/>
+                <a16:creationId xmlns:a16="http://schemas.microsoft.com/office/drawing/2014/main" id="{843E3006-0661-4D69-AF3C-EAB1C8E49FF4}"/>
               </a:ext>
             </a:extLst>
           </p:cNvPr>
@@ -4989,8 +7498,8 @@
         </p:nvSpPr>
         <p:spPr>
           <a:xfrm xmlns:a="http://schemas.openxmlformats.org/drawingml/2006/main">
-            <a:off x="609600" y="438150"/>
-            <a:ext cx="10934700" cy="857250"/>
+            <a:off x="628650" y="457200"/>
+            <a:ext cx="10953750" cy="762000"/>
           </a:xfrm>
           <a:prstGeom xmlns:a="http://schemas.openxmlformats.org/drawingml/2006/main" prst="rect">
             <a:avLst/>
@@ -5007,25 +7516,25 @@
           <a:lstStyle xmlns:a="http://schemas.openxmlformats.org/drawingml/2006/main"/>
           <a:p xmlns:a="http://schemas.openxmlformats.org/drawingml/2006/main">
             <a:pPr>
-              <a:defRPr sz="3750" b="1">
-                <a:solidFill>
-                  <a:srgbClr val="F2F7FB"/>
-                </a:solidFill>
-                <a:latin typeface="Arial"/>
-                <a:ea typeface="Arial"/>
-                <a:cs typeface="Arial"/>
-              </a:defRPr>
-            </a:pPr>
-            <a:r>
-              <a:rPr sz="3750" b="1">
-                <a:solidFill>
-                  <a:srgbClr val="F2F7FB"/>
-                </a:solidFill>
-                <a:latin typeface="Arial"/>
-                <a:ea typeface="Arial"/>
-                <a:cs typeface="Arial"/>
-              </a:rPr>
-              <a:t>Performance and evaluation</a:t>
+              <a:defRPr sz="3600" b="1">
+                <a:solidFill>
+                  <a:srgbClr val="19332A"/>
+                </a:solidFill>
+                <a:latin typeface="Arial"/>
+                <a:ea typeface="Arial"/>
+                <a:cs typeface="Arial"/>
+              </a:defRPr>
+            </a:pPr>
+            <a:r>
+              <a:rPr sz="3600" b="1">
+                <a:solidFill>
+                  <a:srgbClr val="19332A"/>
+                </a:solidFill>
+                <a:latin typeface="Arial"/>
+                <a:ea typeface="Arial"/>
+                <a:cs typeface="Arial"/>
+              </a:rPr>
+              <a:t>Camera projects beyond detection</a:t>
             </a:r>
           </a:p>
         </p:txBody>
@@ -5035,7 +7544,7 @@
           <p:cNvPr id="2" name="">
             <a:extLst xmlns:a="http://schemas.openxmlformats.org/drawingml/2006/main">
               <a:ext uri="{FF2B5EF4-FFF2-40B4-BE49-F238E27FC236}">
-                <a16:creationId xmlns:a16="http://schemas.microsoft.com/office/drawing/2014/main" id="{8E2CBB8E-95A5-48F2-9AC0-5285039E5569}"/>
+                <a16:creationId xmlns:a16="http://schemas.microsoft.com/office/drawing/2014/main" id="{3FB96AED-A273-40D8-8882-1FCB199807ED}"/>
               </a:ext>
             </a:extLst>
           </p:cNvPr>
@@ -5046,8 +7555,8 @@
         </p:nvSpPr>
         <p:spPr>
           <a:xfrm xmlns:a="http://schemas.openxmlformats.org/drawingml/2006/main">
-            <a:off x="647700" y="1362075"/>
-            <a:ext cx="10763250" cy="857250"/>
+            <a:off x="666750" y="1333500"/>
+            <a:ext cx="10858500" cy="619125"/>
           </a:xfrm>
           <a:prstGeom xmlns:a="http://schemas.openxmlformats.org/drawingml/2006/main" prst="rect">
             <a:avLst/>
@@ -5064,25 +7573,25 @@
           <a:lstStyle xmlns:a="http://schemas.openxmlformats.org/drawingml/2006/main"/>
           <a:p xmlns:a="http://schemas.openxmlformats.org/drawingml/2006/main">
             <a:pPr>
-              <a:defRPr sz="2100" b="0">
-                <a:solidFill>
-                  <a:srgbClr val="76DAC7"/>
-                </a:solidFill>
-                <a:latin typeface="Arial"/>
-                <a:ea typeface="Arial"/>
-                <a:cs typeface="Arial"/>
-              </a:defRPr>
-            </a:pPr>
-            <a:r>
-              <a:rPr sz="2100" b="0">
-                <a:solidFill>
-                  <a:srgbClr val="76DAC7"/>
-                </a:solidFill>
-                <a:latin typeface="Arial"/>
-                <a:ea typeface="Arial"/>
-                <a:cs typeface="Arial"/>
-              </a:rPr>
-              <a:t>Measure the actual workload on the actual board</a:t>
+              <a:defRPr sz="1950" b="0">
+                <a:solidFill>
+                  <a:srgbClr val="52635B"/>
+                </a:solidFill>
+                <a:latin typeface="Arial"/>
+                <a:ea typeface="Arial"/>
+                <a:cs typeface="Arial"/>
+              </a:defRPr>
+            </a:pPr>
+            <a:r>
+              <a:rPr sz="1950" b="0">
+                <a:solidFill>
+                  <a:srgbClr val="52635B"/>
+                </a:solidFill>
+                <a:latin typeface="Arial"/>
+                <a:ea typeface="Arial"/>
+                <a:cs typeface="Arial"/>
+              </a:rPr>
+              <a:t>Keep the camera fixed. Move ordinary objects in the scene.</a:t>
             </a:r>
           </a:p>
         </p:txBody>
@@ -5092,7 +7601,7 @@
           <p:cNvPr id="3" name="">
             <a:extLst xmlns:a="http://schemas.openxmlformats.org/drawingml/2006/main">
               <a:ext uri="{FF2B5EF4-FFF2-40B4-BE49-F238E27FC236}">
-                <a16:creationId xmlns:a16="http://schemas.microsoft.com/office/drawing/2014/main" id="{EC1051F9-BE51-4B57-86FE-03F045DE374E}"/>
+                <a16:creationId xmlns:a16="http://schemas.microsoft.com/office/drawing/2014/main" id="{EFCB9428-03D2-4401-9CEB-C144681BF218}"/>
               </a:ext>
             </a:extLst>
           </p:cNvPr>
@@ -5103,8 +7612,8 @@
         </p:nvSpPr>
         <p:spPr>
           <a:xfrm xmlns:a="http://schemas.openxmlformats.org/drawingml/2006/main">
-            <a:off x="685800" y="2324100"/>
-            <a:ext cx="10810875" cy="571500"/>
+            <a:off x="666750" y="6191250"/>
+            <a:ext cx="10287000" cy="419100"/>
           </a:xfrm>
           <a:prstGeom xmlns:a="http://schemas.openxmlformats.org/drawingml/2006/main" prst="rect">
             <a:avLst/>
@@ -5121,25 +7630,25 @@
           <a:lstStyle xmlns:a="http://schemas.openxmlformats.org/drawingml/2006/main"/>
           <a:p xmlns:a="http://schemas.openxmlformats.org/drawingml/2006/main">
             <a:pPr>
-              <a:defRPr sz="2100" b="0">
-                <a:solidFill>
-                  <a:srgbClr val="F2F7FB"/>
-                </a:solidFill>
-                <a:latin typeface="Arial"/>
-                <a:ea typeface="Arial"/>
-                <a:cs typeface="Arial"/>
-              </a:defRPr>
-            </a:pPr>
-            <a:r>
-              <a:rPr sz="2100" b="0">
-                <a:solidFill>
-                  <a:srgbClr val="F2F7FB"/>
-                </a:solidFill>
-                <a:latin typeface="Arial"/>
-                <a:ea typeface="Arial"/>
-                <a:cs typeface="Arial"/>
-              </a:rPr>
-              <a:t>Experiment 11: Language Model Performance Benchmark</a:t>
+              <a:defRPr sz="1350" b="0">
+                <a:solidFill>
+                  <a:srgbClr val="52635B"/>
+                </a:solidFill>
+                <a:latin typeface="Arial"/>
+                <a:ea typeface="Arial"/>
+                <a:cs typeface="Arial"/>
+              </a:defRPr>
+            </a:pPr>
+            <a:r>
+              <a:rPr sz="1350" b="0">
+                <a:solidFill>
+                  <a:srgbClr val="52635B"/>
+                </a:solidFill>
+                <a:latin typeface="Arial"/>
+                <a:ea typeface="Arial"/>
+                <a:cs typeface="Arial"/>
+              </a:rPr>
+              <a:t>Run 13 → install and rehearse detection first. Vision and the language model run sequentially.</a:t>
             </a:r>
           </a:p>
         </p:txBody>
@@ -5149,7 +7658,7 @@
           <p:cNvPr id="4" name="">
             <a:extLst xmlns:a="http://schemas.openxmlformats.org/drawingml/2006/main">
               <a:ext uri="{FF2B5EF4-FFF2-40B4-BE49-F238E27FC236}">
-                <a16:creationId xmlns:a16="http://schemas.microsoft.com/office/drawing/2014/main" id="{2D4C767B-6371-40EB-8F3E-CD4F1C225C40}"/>
+                <a16:creationId xmlns:a16="http://schemas.microsoft.com/office/drawing/2014/main" id="{9405CB78-00D6-4411-8237-50AFDDE894FC}"/>
               </a:ext>
             </a:extLst>
           </p:cNvPr>
@@ -5160,8 +7669,8 @@
         </p:nvSpPr>
         <p:spPr>
           <a:xfrm xmlns:a="http://schemas.openxmlformats.org/drawingml/2006/main">
-            <a:off x="685800" y="2990850"/>
-            <a:ext cx="10810875" cy="571500"/>
+            <a:off x="11182350" y="6200775"/>
+            <a:ext cx="523875" cy="333375"/>
           </a:xfrm>
           <a:prstGeom xmlns:a="http://schemas.openxmlformats.org/drawingml/2006/main" prst="rect">
             <a:avLst/>
@@ -5178,35 +7687,458 @@
           <a:lstStyle xmlns:a="http://schemas.openxmlformats.org/drawingml/2006/main"/>
           <a:p xmlns:a="http://schemas.openxmlformats.org/drawingml/2006/main">
             <a:pPr>
-              <a:defRPr sz="2100" b="0">
-                <a:solidFill>
-                  <a:srgbClr val="F2F7FB"/>
-                </a:solidFill>
-                <a:latin typeface="Arial"/>
-                <a:ea typeface="Arial"/>
-                <a:cs typeface="Arial"/>
-              </a:defRPr>
-            </a:pPr>
-            <a:r>
-              <a:rPr sz="2100" b="0">
-                <a:solidFill>
-                  <a:srgbClr val="F2F7FB"/>
-                </a:solidFill>
-                <a:latin typeface="Arial"/>
-                <a:ea typeface="Arial"/>
-                <a:cs typeface="Arial"/>
-              </a:rPr>
-              <a:t>Experiment 12: Reproducible Prompt Evaluation</a:t>
-            </a:r>
-          </a:p>
-        </p:txBody>
-      </p:sp>
-      <p:sp>
-        <p:nvSpPr>
-          <p:cNvPr id="5" name="">
+              <a:defRPr sz="1350" b="1">
+                <a:solidFill>
+                  <a:srgbClr val="397718"/>
+                </a:solidFill>
+                <a:latin typeface="Arial"/>
+                <a:ea typeface="Arial"/>
+                <a:cs typeface="Arial"/>
+              </a:defRPr>
+            </a:pPr>
+            <a:r>
+              <a:rPr sz="1350" b="1">
+                <a:solidFill>
+                  <a:srgbClr val="397718"/>
+                </a:solidFill>
+                <a:latin typeface="Arial"/>
+                <a:ea typeface="Arial"/>
+                <a:cs typeface="Arial"/>
+              </a:rPr>
+              <a:t>08</a:t>
+            </a:r>
+          </a:p>
+        </p:txBody>
+      </p:sp>
+      <p:graphicFrame>
+        <p:nvGraphicFramePr>
+          <p:cNvPr id="11" name=""/>
+          <p:cNvGraphicFramePr/>
+          <p:nvPr/>
+        </p:nvGraphicFramePr>
+        <p:xfrm>
+          <a:off xmlns:a="http://schemas.openxmlformats.org/drawingml/2006/main" x="666750" y="2114550"/>
+          <a:ext xmlns:a="http://schemas.openxmlformats.org/drawingml/2006/main" cx="10858500" cy="3314700"/>
+        </p:xfrm>
+        <a:graphic xmlns:a="http://schemas.openxmlformats.org/drawingml/2006/main">
+          <a:graphicData uri="http://schemas.openxmlformats.org/drawingml/2006/table">
+            <a:tbl>
+              <a:tblPr firstRow="0" bandRow="0"/>
+              <a:tblGrid>
+                <a:gridCol w="809625"/>
+                <a:gridCol w="4286250"/>
+                <a:gridCol w="5762625"/>
+              </a:tblGrid>
+              <a:tr h="400050">
+                <a:tc>
+                  <a:txBody>
+                    <a:bodyPr>
+                      <a:noAutofit/>
+                    </a:bodyPr>
+                    <a:lstStyle/>
+                    <a:p>
+                      <a:r>
+                        <a:rPr sz="1350" b="1">
+                          <a:solidFill>
+                            <a:srgbClr val="397718"/>
+                          </a:solidFill>
+                          <a:latin typeface="Arial"/>
+                          <a:ea typeface="Arial"/>
+                          <a:cs typeface="Arial"/>
+                        </a:rPr>
+                        <a:t>MENU</a:t>
+                      </a:r>
+                    </a:p>
+                  </a:txBody>
+                  <a:tcPr marL="95250" marR="95250" marT="38100" marB="38100">
+                    <a:solidFill>
+                      <a:srgbClr val="EFF6E9"/>
+                    </a:solidFill>
+                  </a:tcPr>
+                </a:tc>
+                <a:tc>
+                  <a:txBody>
+                    <a:bodyPr>
+                      <a:noAutofit/>
+                    </a:bodyPr>
+                    <a:lstStyle/>
+                    <a:p>
+                      <a:r>
+                        <a:rPr sz="1350" b="1">
+                          <a:solidFill>
+                            <a:srgbClr val="19332A"/>
+                          </a:solidFill>
+                          <a:latin typeface="Arial"/>
+                          <a:ea typeface="Arial"/>
+                          <a:cs typeface="Arial"/>
+                        </a:rPr>
+                        <a:t>EXPERIMENT</a:t>
+                      </a:r>
+                    </a:p>
+                  </a:txBody>
+                  <a:tcPr marL="95250" marR="95250" marT="38100" marB="38100">
+                    <a:solidFill>
+                      <a:srgbClr val="EFF6E9"/>
+                    </a:solidFill>
+                  </a:tcPr>
+                </a:tc>
+                <a:tc>
+                  <a:txBody>
+                    <a:bodyPr>
+                      <a:noAutofit/>
+                    </a:bodyPr>
+                    <a:lstStyle/>
+                    <a:p>
+                      <a:r>
+                        <a:rPr sz="1350" b="1">
+                          <a:solidFill>
+                            <a:srgbClr val="19332A"/>
+                          </a:solidFill>
+                          <a:latin typeface="Arial"/>
+                          <a:ea typeface="Arial"/>
+                          <a:cs typeface="Arial"/>
+                        </a:rPr>
+                        <a:t>WHAT STUDENTS DO</a:t>
+                      </a:r>
+                    </a:p>
+                  </a:txBody>
+                  <a:tcPr marL="95250" marR="95250" marT="38100" marB="38100">
+                    <a:solidFill>
+                      <a:srgbClr val="EFF6E9"/>
+                    </a:solidFill>
+                  </a:tcPr>
+                </a:tc>
+              </a:tr>
+              <a:tr h="728663">
+                <a:tc>
+                  <a:txBody>
+                    <a:bodyPr>
+                      <a:noAutofit/>
+                    </a:bodyPr>
+                    <a:lstStyle/>
+                    <a:p>
+                      <a:r>
+                        <a:rPr sz="1725" b="1">
+                          <a:solidFill>
+                            <a:srgbClr val="397718"/>
+                          </a:solidFill>
+                          <a:latin typeface="Arial"/>
+                          <a:ea typeface="Arial"/>
+                          <a:cs typeface="Arial"/>
+                        </a:rPr>
+                        <a:t>18</a:t>
+                      </a:r>
+                    </a:p>
+                  </a:txBody>
+                  <a:tcPr marL="95250" marR="95250" marT="38100" marB="38100">
+                    <a:solidFill>
+                      <a:srgbClr val="FFFFFF"/>
+                    </a:solidFill>
+                  </a:tcPr>
+                </a:tc>
+                <a:tc>
+                  <a:txBody>
+                    <a:bodyPr>
+                      <a:noAutofit/>
+                    </a:bodyPr>
+                    <a:lstStyle/>
+                    <a:p>
+                      <a:r>
+                        <a:rPr sz="1725" b="0">
+                          <a:solidFill>
+                            <a:srgbClr val="19332A"/>
+                          </a:solidFill>
+                          <a:latin typeface="Arial"/>
+                          <a:ea typeface="Arial"/>
+                          <a:cs typeface="Arial"/>
+                        </a:rPr>
+                        <a:t>Scene Memory Detective</a:t>
+                      </a:r>
+                    </a:p>
+                  </a:txBody>
+                  <a:tcPr marL="95250" marR="95250" marT="38100" marB="38100">
+                    <a:solidFill>
+                      <a:srgbClr val="FFFFFF"/>
+                    </a:solidFill>
+                  </a:tcPr>
+                </a:tc>
+                <a:tc>
+                  <a:txBody>
+                    <a:bodyPr>
+                      <a:noAutofit/>
+                    </a:bodyPr>
+                    <a:lstStyle/>
+                    <a:p>
+                      <a:r>
+                        <a:rPr sz="1725" b="0">
+                          <a:solidFill>
+                            <a:srgbClr val="19332A"/>
+                          </a:solidFill>
+                          <a:latin typeface="Arial"/>
+                          <a:ea typeface="Arial"/>
+                          <a:cs typeface="Arial"/>
+                        </a:rPr>
+                        <a:t>Observe the desk, change something, then explain the measured difference.</a:t>
+                      </a:r>
+                    </a:p>
+                  </a:txBody>
+                  <a:tcPr marL="95250" marR="95250" marT="38100" marB="38100">
+                    <a:solidFill>
+                      <a:srgbClr val="FFFFFF"/>
+                    </a:solidFill>
+                  </a:tcPr>
+                </a:tc>
+              </a:tr>
+              <a:tr h="728663">
+                <a:tc>
+                  <a:txBody>
+                    <a:bodyPr>
+                      <a:noAutofit/>
+                    </a:bodyPr>
+                    <a:lstStyle/>
+                    <a:p>
+                      <a:r>
+                        <a:rPr sz="1725" b="1">
+                          <a:solidFill>
+                            <a:srgbClr val="397718"/>
+                          </a:solidFill>
+                          <a:latin typeface="Arial"/>
+                          <a:ea typeface="Arial"/>
+                          <a:cs typeface="Arial"/>
+                        </a:rPr>
+                        <a:t>19</a:t>
+                      </a:r>
+                    </a:p>
+                  </a:txBody>
+                  <a:tcPr marL="95250" marR="95250" marT="38100" marB="38100">
+                    <a:solidFill>
+                      <a:srgbClr val="FFFFFF"/>
+                    </a:solidFill>
+                  </a:tcPr>
+                </a:tc>
+                <a:tc>
+                  <a:txBody>
+                    <a:bodyPr>
+                      <a:noAutofit/>
+                    </a:bodyPr>
+                    <a:lstStyle/>
+                    <a:p>
+                      <a:r>
+                        <a:rPr sz="1725" b="0">
+                          <a:solidFill>
+                            <a:srgbClr val="19332A"/>
+                          </a:solidFill>
+                          <a:latin typeface="Arial"/>
+                          <a:ea typeface="Arial"/>
+                          <a:cs typeface="Arial"/>
+                        </a:rPr>
+                        <a:t>AI Visual Scavenger Hunt</a:t>
+                      </a:r>
+                    </a:p>
+                  </a:txBody>
+                  <a:tcPr marL="95250" marR="95250" marT="38100" marB="38100">
+                    <a:solidFill>
+                      <a:srgbClr val="FFFFFF"/>
+                    </a:solidFill>
+                  </a:tcPr>
+                </a:tc>
+                <a:tc>
+                  <a:txBody>
+                    <a:bodyPr>
+                      <a:noAutofit/>
+                    </a:bodyPr>
+                    <a:lstStyle/>
+                    <a:p>
+                      <a:r>
+                        <a:rPr sz="1725" b="0">
+                          <a:solidFill>
+                            <a:srgbClr val="19332A"/>
+                          </a:solidFill>
+                          <a:latin typeface="Arial"/>
+                          <a:ea typeface="Arial"/>
+                          <a:cs typeface="Arial"/>
+                        </a:rPr>
+                        <a:t>Arrange objects for an AI-generated quest; detector evidence determines the score.</a:t>
+                      </a:r>
+                    </a:p>
+                  </a:txBody>
+                  <a:tcPr marL="95250" marR="95250" marT="38100" marB="38100">
+                    <a:solidFill>
+                      <a:srgbClr val="FFFFFF"/>
+                    </a:solidFill>
+                  </a:tcPr>
+                </a:tc>
+              </a:tr>
+              <a:tr h="728663">
+                <a:tc>
+                  <a:txBody>
+                    <a:bodyPr>
+                      <a:noAutofit/>
+                    </a:bodyPr>
+                    <a:lstStyle/>
+                    <a:p>
+                      <a:r>
+                        <a:rPr sz="1725" b="1">
+                          <a:solidFill>
+                            <a:srgbClr val="397718"/>
+                          </a:solidFill>
+                          <a:latin typeface="Arial"/>
+                          <a:ea typeface="Arial"/>
+                          <a:cs typeface="Arial"/>
+                        </a:rPr>
+                        <a:t>20</a:t>
+                      </a:r>
+                    </a:p>
+                  </a:txBody>
+                  <a:tcPr marL="95250" marR="95250" marT="38100" marB="38100">
+                    <a:solidFill>
+                      <a:srgbClr val="FFFFFF"/>
+                    </a:solidFill>
+                  </a:tcPr>
+                </a:tc>
+                <a:tc>
+                  <a:txBody>
+                    <a:bodyPr>
+                      <a:noAutofit/>
+                    </a:bodyPr>
+                    <a:lstStyle/>
+                    <a:p>
+                      <a:r>
+                        <a:rPr sz="1725" b="0">
+                          <a:solidFill>
+                            <a:srgbClr val="19332A"/>
+                          </a:solidFill>
+                          <a:latin typeface="Arial"/>
+                          <a:ea typeface="Arial"/>
+                          <a:cs typeface="Arial"/>
+                        </a:rPr>
+                        <a:t>Camera Change Journal</a:t>
+                      </a:r>
+                    </a:p>
+                  </a:txBody>
+                  <a:tcPr marL="95250" marR="95250" marT="38100" marB="38100">
+                    <a:solidFill>
+                      <a:srgbClr val="FFFFFF"/>
+                    </a:solidFill>
+                  </a:tcPr>
+                </a:tc>
+                <a:tc>
+                  <a:txBody>
+                    <a:bodyPr>
+                      <a:noAutofit/>
+                    </a:bodyPr>
+                    <a:lstStyle/>
+                    <a:p>
+                      <a:r>
+                        <a:rPr sz="1725" b="0">
+                          <a:solidFill>
+                            <a:srgbClr val="19332A"/>
+                          </a:solidFill>
+                          <a:latin typeface="Arial"/>
+                          <a:ea typeface="Arial"/>
+                          <a:cs typeface="Arial"/>
+                        </a:rPr>
+                        <a:t>Capture three observations and summarize the recorded changes.</a:t>
+                      </a:r>
+                    </a:p>
+                  </a:txBody>
+                  <a:tcPr marL="95250" marR="95250" marT="38100" marB="38100">
+                    <a:solidFill>
+                      <a:srgbClr val="FFFFFF"/>
+                    </a:solidFill>
+                  </a:tcPr>
+                </a:tc>
+              </a:tr>
+              <a:tr h="728663">
+                <a:tc>
+                  <a:txBody>
+                    <a:bodyPr>
+                      <a:noAutofit/>
+                    </a:bodyPr>
+                    <a:lstStyle/>
+                    <a:p>
+                      <a:r>
+                        <a:rPr sz="1725" b="1">
+                          <a:solidFill>
+                            <a:srgbClr val="397718"/>
+                          </a:solidFill>
+                          <a:latin typeface="Arial"/>
+                          <a:ea typeface="Arial"/>
+                          <a:cs typeface="Arial"/>
+                        </a:rPr>
+                        <a:t>13</a:t>
+                      </a:r>
+                    </a:p>
+                  </a:txBody>
+                  <a:tcPr marL="95250" marR="95250" marT="38100" marB="38100">
+                    <a:solidFill>
+                      <a:srgbClr val="FFFFFF"/>
+                    </a:solidFill>
+                  </a:tcPr>
+                </a:tc>
+                <a:tc>
+                  <a:txBody>
+                    <a:bodyPr>
+                      <a:noAutofit/>
+                    </a:bodyPr>
+                    <a:lstStyle/>
+                    <a:p>
+                      <a:r>
+                        <a:rPr sz="1725" b="0">
+                          <a:solidFill>
+                            <a:srgbClr val="19332A"/>
+                          </a:solidFill>
+                          <a:latin typeface="Arial"/>
+                          <a:ea typeface="Arial"/>
+                          <a:cs typeface="Arial"/>
+                        </a:rPr>
+                        <a:t>Camera Perception Lab</a:t>
+                      </a:r>
+                    </a:p>
+                  </a:txBody>
+                  <a:tcPr marL="95250" marR="95250" marT="38100" marB="38100">
+                    <a:solidFill>
+                      <a:srgbClr val="FFFFFF"/>
+                    </a:solidFill>
+                  </a:tcPr>
+                </a:tc>
+                <a:tc>
+                  <a:txBody>
+                    <a:bodyPr>
+                      <a:noAutofit/>
+                    </a:bodyPr>
+                    <a:lstStyle/>
+                    <a:p>
+                      <a:r>
+                        <a:rPr sz="1725" b="0">
+                          <a:solidFill>
+                            <a:srgbClr val="19332A"/>
+                          </a:solidFill>
+                          <a:latin typeface="Arial"/>
+                          <a:ea typeface="Arial"/>
+                          <a:cs typeface="Arial"/>
+                        </a:rPr>
+                        <a:t>Explore detection, classification, pose or segmentation.</a:t>
+                      </a:r>
+                    </a:p>
+                  </a:txBody>
+                  <a:tcPr marL="95250" marR="95250" marT="38100" marB="38100">
+                    <a:solidFill>
+                      <a:srgbClr val="FFFFFF"/>
+                    </a:solidFill>
+                  </a:tcPr>
+                </a:tc>
+              </a:tr>
+            </a:tbl>
+          </a:graphicData>
+        </a:graphic>
+      </p:graphicFrame>
+      <p:sp>
+        <p:nvSpPr>
+          <p:cNvPr id="6" name="">
             <a:extLst xmlns:a="http://schemas.openxmlformats.org/drawingml/2006/main">
               <a:ext uri="{FF2B5EF4-FFF2-40B4-BE49-F238E27FC236}">
-                <a16:creationId xmlns:a16="http://schemas.microsoft.com/office/drawing/2014/main" id="{D6FC07AD-BE2C-48A4-8590-24A0425A547C}"/>
+                <a16:creationId xmlns:a16="http://schemas.microsoft.com/office/drawing/2014/main" id="{9BF8FC52-3999-4277-9CDF-D3F54FE2ECD4}"/>
               </a:ext>
             </a:extLst>
           </p:cNvPr>
@@ -5217,8 +8149,8 @@
         </p:nvSpPr>
         <p:spPr>
           <a:xfrm xmlns:a="http://schemas.openxmlformats.org/drawingml/2006/main">
-            <a:off x="685800" y="3657600"/>
-            <a:ext cx="10810875" cy="571500"/>
+            <a:off x="723900" y="5591175"/>
+            <a:ext cx="10382250" cy="457200"/>
           </a:xfrm>
           <a:prstGeom xmlns:a="http://schemas.openxmlformats.org/drawingml/2006/main" prst="rect">
             <a:avLst/>
@@ -5235,139 +8167,25 @@
           <a:lstStyle xmlns:a="http://schemas.openxmlformats.org/drawingml/2006/main"/>
           <a:p xmlns:a="http://schemas.openxmlformats.org/drawingml/2006/main">
             <a:pPr>
-              <a:defRPr sz="2100" b="0">
-                <a:solidFill>
-                  <a:srgbClr val="F2F7FB"/>
-                </a:solidFill>
-                <a:latin typeface="Arial"/>
-                <a:ea typeface="Arial"/>
-                <a:cs typeface="Arial"/>
-              </a:defRPr>
-            </a:pPr>
-            <a:r>
-              <a:rPr sz="2100" b="0">
-                <a:solidFill>
-                  <a:srgbClr val="F2F7FB"/>
-                </a:solidFill>
-                <a:latin typeface="Arial"/>
-                <a:ea typeface="Arial"/>
-                <a:cs typeface="Arial"/>
-              </a:rPr>
-              <a:t>Use your own JSONL questions and reference answers</a:t>
-            </a:r>
-          </a:p>
-        </p:txBody>
-      </p:sp>
-      <p:sp>
-        <p:nvSpPr>
-          <p:cNvPr id="6" name="">
-            <a:extLst xmlns:a="http://schemas.openxmlformats.org/drawingml/2006/main">
-              <a:ext uri="{FF2B5EF4-FFF2-40B4-BE49-F238E27FC236}">
-                <a16:creationId xmlns:a16="http://schemas.microsoft.com/office/drawing/2014/main" id="{F3742CA7-22E3-4CF5-8108-D01ED7B0A209}"/>
-              </a:ext>
-            </a:extLst>
-          </p:cNvPr>
-          <p:cNvSpPr>
-            <a:spLocks xmlns:a="http://schemas.openxmlformats.org/drawingml/2006/main" noGrp="1"/>
-          </p:cNvSpPr>
-          <p:nvPr/>
-        </p:nvSpPr>
-        <p:spPr>
-          <a:xfrm xmlns:a="http://schemas.openxmlformats.org/drawingml/2006/main">
-            <a:off x="685800" y="4324350"/>
-            <a:ext cx="10810875" cy="571500"/>
-          </a:xfrm>
-          <a:prstGeom xmlns:a="http://schemas.openxmlformats.org/drawingml/2006/main" prst="rect">
-            <a:avLst/>
-          </a:prstGeom>
-          <a:noFill xmlns:a="http://schemas.openxmlformats.org/drawingml/2006/main"/>
-          <a:ln xmlns:a="http://schemas.openxmlformats.org/drawingml/2006/main" w="0">
-            <a:noFill/>
-          </a:ln>
-        </p:spPr>
-        <p:txBody>
-          <a:bodyPr xmlns:a="http://schemas.openxmlformats.org/drawingml/2006/main">
-            <a:noAutofit/>
-          </a:bodyPr>
-          <a:lstStyle xmlns:a="http://schemas.openxmlformats.org/drawingml/2006/main"/>
-          <a:p xmlns:a="http://schemas.openxmlformats.org/drawingml/2006/main">
-            <a:pPr>
-              <a:defRPr sz="2100" b="0">
-                <a:solidFill>
-                  <a:srgbClr val="F2F7FB"/>
-                </a:solidFill>
-                <a:latin typeface="Arial"/>
-                <a:ea typeface="Arial"/>
-                <a:cs typeface="Arial"/>
-              </a:defRPr>
-            </a:pPr>
-            <a:r>
-              <a:rPr sz="2100" b="0">
-                <a:solidFill>
-                  <a:srgbClr val="F2F7FB"/>
-                </a:solidFill>
-                <a:latin typeface="Arial"/>
-                <a:ea typeface="Arial"/>
-                <a:cs typeface="Arial"/>
-              </a:rPr>
-              <a:t>Inspect model output, latency and saved logs</a:t>
-            </a:r>
-          </a:p>
-        </p:txBody>
-      </p:sp>
-      <p:sp>
-        <p:nvSpPr>
-          <p:cNvPr id="7" name="">
-            <a:extLst xmlns:a="http://schemas.openxmlformats.org/drawingml/2006/main">
-              <a:ext uri="{FF2B5EF4-FFF2-40B4-BE49-F238E27FC236}">
-                <a16:creationId xmlns:a16="http://schemas.microsoft.com/office/drawing/2014/main" id="{8A9AF718-1572-4A85-8BF7-F4D7698055F8}"/>
-              </a:ext>
-            </a:extLst>
-          </p:cNvPr>
-          <p:cNvSpPr>
-            <a:spLocks xmlns:a="http://schemas.openxmlformats.org/drawingml/2006/main" noGrp="1"/>
-          </p:cNvSpPr>
-          <p:nvPr/>
-        </p:nvSpPr>
-        <p:spPr>
-          <a:xfrm xmlns:a="http://schemas.openxmlformats.org/drawingml/2006/main">
-            <a:off x="647700" y="6229350"/>
-            <a:ext cx="10572750" cy="428625"/>
-          </a:xfrm>
-          <a:prstGeom xmlns:a="http://schemas.openxmlformats.org/drawingml/2006/main" prst="rect">
-            <a:avLst/>
-          </a:prstGeom>
-          <a:noFill xmlns:a="http://schemas.openxmlformats.org/drawingml/2006/main"/>
-          <a:ln xmlns:a="http://schemas.openxmlformats.org/drawingml/2006/main" w="0">
-            <a:noFill/>
-          </a:ln>
-        </p:spPr>
-        <p:txBody>
-          <a:bodyPr xmlns:a="http://schemas.openxmlformats.org/drawingml/2006/main">
-            <a:noAutofit/>
-          </a:bodyPr>
-          <a:lstStyle xmlns:a="http://schemas.openxmlformats.org/drawingml/2006/main"/>
-          <a:p xmlns:a="http://schemas.openxmlformats.org/drawingml/2006/main">
-            <a:pPr>
-              <a:defRPr sz="1425" b="0">
-                <a:solidFill>
-                  <a:srgbClr val="B6C6D5"/>
-                </a:solidFill>
-                <a:latin typeface="Arial"/>
-                <a:ea typeface="Arial"/>
-                <a:cs typeface="Arial"/>
-              </a:defRPr>
-            </a:pPr>
-            <a:r>
-              <a:rPr sz="1425" b="0">
-                <a:solidFill>
-                  <a:srgbClr val="B6C6D5"/>
-                </a:solidFill>
-                <a:latin typeface="Arial"/>
-                <a:ea typeface="Arial"/>
-                <a:cs typeface="Arial"/>
-              </a:rPr>
-              <a:t>No Nano performance or accuracy results are claimed. Software tests use mocks and dummy processes.</a:t>
+              <a:defRPr sz="2250" b="1">
+                <a:solidFill>
+                  <a:srgbClr val="397718"/>
+                </a:solidFill>
+                <a:latin typeface="Arial"/>
+                <a:ea typeface="Arial"/>
+                <a:cs typeface="Arial"/>
+              </a:defRPr>
+            </a:pPr>
+            <a:r>
+              <a:rPr sz="2250" b="1">
+                <a:solidFill>
+                  <a:srgbClr val="397718"/>
+                </a:solidFill>
+                <a:latin typeface="Arial"/>
+                <a:ea typeface="Arial"/>
+                <a:cs typeface="Arial"/>
+              </a:rPr>
+              <a:t>Try it with a cup, a book or a bottle.</a:t>
             </a:r>
           </a:p>
         </p:txBody>
@@ -5375,7 +8193,7 @@
     </p:spTree>
     <p:extLst>
       <p:ext uri="{BB962C8B-B14F-4D97-AF65-F5344CB8AC3E}">
-        <p14:creationId xmlns:p14="http://schemas.microsoft.com/office/powerpoint/2010/main" val="1117265343"/>
+        <p14:creationId xmlns:p14="http://schemas.microsoft.com/office/powerpoint/2010/main" val="1211632577"/>
       </p:ext>
     </p:extLst>
   </p:cSld>
@@ -5388,7 +8206,7 @@
     <p:bg>
       <p:bgPr>
         <a:solidFill xmlns:a="http://schemas.openxmlformats.org/drawingml/2006/main">
-          <a:srgbClr val="0C1825"/>
+          <a:srgbClr val="FFFFFF"/>
         </a:solidFill>
       </p:bgPr>
     </p:bg>
@@ -5403,10 +8221,10 @@
       </p:grpSpPr>
       <p:sp>
         <p:nvSpPr>
-          <p:cNvPr id="9" name="">
+          <p:cNvPr id="11" name="">
             <a:extLst xmlns:a="http://schemas.openxmlformats.org/drawingml/2006/main">
               <a:ext uri="{FF2B5EF4-FFF2-40B4-BE49-F238E27FC236}">
-                <a16:creationId xmlns:a16="http://schemas.microsoft.com/office/drawing/2014/main" id="{6C080B6B-798C-4A45-A7C7-1D81DCC569AB}"/>
+                <a16:creationId xmlns:a16="http://schemas.microsoft.com/office/drawing/2014/main" id="{04B9A307-1337-42F5-A365-DD34E580A834}"/>
               </a:ext>
             </a:extLst>
           </p:cNvPr>
@@ -5417,8 +8235,8 @@
         </p:nvSpPr>
         <p:spPr>
           <a:xfrm xmlns:a="http://schemas.openxmlformats.org/drawingml/2006/main">
-            <a:off x="609600" y="438150"/>
-            <a:ext cx="10934700" cy="857250"/>
+            <a:off x="628650" y="457200"/>
+            <a:ext cx="10953750" cy="762000"/>
           </a:xfrm>
           <a:prstGeom xmlns:a="http://schemas.openxmlformats.org/drawingml/2006/main" prst="rect">
             <a:avLst/>
@@ -5435,25 +8253,25 @@
           <a:lstStyle xmlns:a="http://schemas.openxmlformats.org/drawingml/2006/main"/>
           <a:p xmlns:a="http://schemas.openxmlformats.org/drawingml/2006/main">
             <a:pPr>
-              <a:defRPr sz="3750" b="1">
-                <a:solidFill>
-                  <a:srgbClr val="F2F7FB"/>
-                </a:solidFill>
-                <a:latin typeface="Arial"/>
-                <a:ea typeface="Arial"/>
-                <a:cs typeface="Arial"/>
-              </a:defRPr>
-            </a:pPr>
-            <a:r>
-              <a:rPr sz="3750" b="1">
-                <a:solidFill>
-                  <a:srgbClr val="F2F7FB"/>
-                </a:solidFill>
-                <a:latin typeface="Arial"/>
-                <a:ea typeface="Arial"/>
-                <a:cs typeface="Arial"/>
-              </a:rPr>
-              <a:t>Presentation flow and recovery</a:t>
+              <a:defRPr sz="3600" b="1">
+                <a:solidFill>
+                  <a:srgbClr val="19332A"/>
+                </a:solidFill>
+                <a:latin typeface="Arial"/>
+                <a:ea typeface="Arial"/>
+                <a:cs typeface="Arial"/>
+              </a:defRPr>
+            </a:pPr>
+            <a:r>
+              <a:rPr sz="3600" b="1">
+                <a:solidFill>
+                  <a:srgbClr val="19332A"/>
+                </a:solidFill>
+                <a:latin typeface="Arial"/>
+                <a:ea typeface="Arial"/>
+                <a:cs typeface="Arial"/>
+              </a:rPr>
+              <a:t>Model performance and evaluation</a:t>
             </a:r>
           </a:p>
         </p:txBody>
@@ -5463,7 +8281,7 @@
           <p:cNvPr id="2" name="">
             <a:extLst xmlns:a="http://schemas.openxmlformats.org/drawingml/2006/main">
               <a:ext uri="{FF2B5EF4-FFF2-40B4-BE49-F238E27FC236}">
-                <a16:creationId xmlns:a16="http://schemas.microsoft.com/office/drawing/2014/main" id="{C63E0E5D-B407-4E00-AA8B-C4EE66C9E687}"/>
+                <a16:creationId xmlns:a16="http://schemas.microsoft.com/office/drawing/2014/main" id="{31D1AC7E-64C6-4ADD-AAF5-BFDBF1F2A22E}"/>
               </a:ext>
             </a:extLst>
           </p:cNvPr>
@@ -5474,8 +8292,8 @@
         </p:nvSpPr>
         <p:spPr>
           <a:xfrm xmlns:a="http://schemas.openxmlformats.org/drawingml/2006/main">
-            <a:off x="647700" y="1362075"/>
-            <a:ext cx="10763250" cy="857250"/>
+            <a:off x="666750" y="1333500"/>
+            <a:ext cx="10858500" cy="619125"/>
           </a:xfrm>
           <a:prstGeom xmlns:a="http://schemas.openxmlformats.org/drawingml/2006/main" prst="rect">
             <a:avLst/>
@@ -5492,25 +8310,25 @@
           <a:lstStyle xmlns:a="http://schemas.openxmlformats.org/drawingml/2006/main"/>
           <a:p xmlns:a="http://schemas.openxmlformats.org/drawingml/2006/main">
             <a:pPr>
-              <a:defRPr sz="2100" b="0">
-                <a:solidFill>
-                  <a:srgbClr val="76DAC7"/>
-                </a:solidFill>
-                <a:latin typeface="Arial"/>
-                <a:ea typeface="Arial"/>
-                <a:cs typeface="Arial"/>
-              </a:defRPr>
-            </a:pPr>
-            <a:r>
-              <a:rPr sz="2100" b="0">
-                <a:solidFill>
-                  <a:srgbClr val="76DAC7"/>
-                </a:solidFill>
-                <a:latin typeface="Arial"/>
-                <a:ea typeface="Arial"/>
-                <a:cs typeface="Arial"/>
-              </a:rPr>
-              <a:t>Prepare and rehearse before the audience arrives</a:t>
+              <a:defRPr sz="1950" b="0">
+                <a:solidFill>
+                  <a:srgbClr val="52635B"/>
+                </a:solidFill>
+                <a:latin typeface="Arial"/>
+                <a:ea typeface="Arial"/>
+                <a:cs typeface="Arial"/>
+              </a:defRPr>
+            </a:pPr>
+            <a:r>
+              <a:rPr sz="1950" b="0">
+                <a:solidFill>
+                  <a:srgbClr val="52635B"/>
+                </a:solidFill>
+                <a:latin typeface="Arial"/>
+                <a:ea typeface="Arial"/>
+                <a:cs typeface="Arial"/>
+              </a:rPr>
+              <a:t>Inspect model responses and measure runtime.</a:t>
             </a:r>
           </a:p>
         </p:txBody>
@@ -5520,7 +8338,7 @@
           <p:cNvPr id="3" name="">
             <a:extLst xmlns:a="http://schemas.openxmlformats.org/drawingml/2006/main">
               <a:ext uri="{FF2B5EF4-FFF2-40B4-BE49-F238E27FC236}">
-                <a16:creationId xmlns:a16="http://schemas.microsoft.com/office/drawing/2014/main" id="{77D2F8A8-A5EC-4831-807D-58EB1310D19F}"/>
+                <a16:creationId xmlns:a16="http://schemas.microsoft.com/office/drawing/2014/main" id="{339E4887-0413-4C00-8B76-96765999C083}"/>
               </a:ext>
             </a:extLst>
           </p:cNvPr>
@@ -5531,8 +8349,8 @@
         </p:nvSpPr>
         <p:spPr>
           <a:xfrm xmlns:a="http://schemas.openxmlformats.org/drawingml/2006/main">
-            <a:off x="685800" y="2324100"/>
-            <a:ext cx="10810875" cy="571500"/>
+            <a:off x="666750" y="6191250"/>
+            <a:ext cx="10287000" cy="419100"/>
           </a:xfrm>
           <a:prstGeom xmlns:a="http://schemas.openxmlformats.org/drawingml/2006/main" prst="rect">
             <a:avLst/>
@@ -5549,25 +8367,25 @@
           <a:lstStyle xmlns:a="http://schemas.openxmlformats.org/drawingml/2006/main"/>
           <a:p xmlns:a="http://schemas.openxmlformats.org/drawingml/2006/main">
             <a:pPr>
-              <a:defRPr sz="2100" b="0">
-                <a:solidFill>
-                  <a:srgbClr val="F2F7FB"/>
-                </a:solidFill>
-                <a:latin typeface="Arial"/>
-                <a:ea typeface="Arial"/>
-                <a:cs typeface="Arial"/>
-              </a:defRPr>
-            </a:pPr>
-            <a:r>
-              <a:rPr sz="2100" b="0">
-                <a:solidFill>
-                  <a:srgbClr val="F2F7FB"/>
-                </a:solidFill>
-                <a:latin typeface="Arial"/>
-                <a:ea typeface="Arial"/>
-                <a:cs typeface="Arial"/>
-              </a:rPr>
-              <a:t>Start with 15 Mission Control or 17 Story Director</a:t>
+              <a:defRPr sz="1350" b="0">
+                <a:solidFill>
+                  <a:srgbClr val="52635B"/>
+                </a:solidFill>
+                <a:latin typeface="Arial"/>
+                <a:ea typeface="Arial"/>
+                <a:cs typeface="Arial"/>
+              </a:defRPr>
+            </a:pPr>
+            <a:r>
+              <a:rPr sz="1350" b="0">
+                <a:solidFill>
+                  <a:srgbClr val="52635B"/>
+                </a:solidFill>
+                <a:latin typeface="Arial"/>
+                <a:ea typeface="Arial"/>
+                <a:cs typeface="Arial"/>
+              </a:rPr>
+              <a:t>Compare the saved outputs and timings from your chosen workload.</a:t>
             </a:r>
           </a:p>
         </p:txBody>
@@ -5577,7 +8395,7 @@
           <p:cNvPr id="4" name="">
             <a:extLst xmlns:a="http://schemas.openxmlformats.org/drawingml/2006/main">
               <a:ext uri="{FF2B5EF4-FFF2-40B4-BE49-F238E27FC236}">
-                <a16:creationId xmlns:a16="http://schemas.microsoft.com/office/drawing/2014/main" id="{2469AED8-9F11-48C6-83CF-6C976A080C5A}"/>
+                <a16:creationId xmlns:a16="http://schemas.microsoft.com/office/drawing/2014/main" id="{64DA0A4E-9FB7-412C-8E78-DD5B5E930959}"/>
               </a:ext>
             </a:extLst>
           </p:cNvPr>
@@ -5588,8 +8406,8 @@
         </p:nvSpPr>
         <p:spPr>
           <a:xfrm xmlns:a="http://schemas.openxmlformats.org/drawingml/2006/main">
-            <a:off x="685800" y="2990850"/>
-            <a:ext cx="10810875" cy="571500"/>
+            <a:off x="11182350" y="6200775"/>
+            <a:ext cx="523875" cy="333375"/>
           </a:xfrm>
           <a:prstGeom xmlns:a="http://schemas.openxmlformats.org/drawingml/2006/main" prst="rect">
             <a:avLst/>
@@ -5606,25 +8424,25 @@
           <a:lstStyle xmlns:a="http://schemas.openxmlformats.org/drawingml/2006/main"/>
           <a:p xmlns:a="http://schemas.openxmlformats.org/drawingml/2006/main">
             <a:pPr>
-              <a:defRPr sz="2100" b="0">
-                <a:solidFill>
-                  <a:srgbClr val="F2F7FB"/>
-                </a:solidFill>
-                <a:latin typeface="Arial"/>
-                <a:ea typeface="Arial"/>
-                <a:cs typeface="Arial"/>
-              </a:defRPr>
-            </a:pPr>
-            <a:r>
-              <a:rPr sz="2100" b="0">
-                <a:solidFill>
-                  <a:srgbClr val="F2F7FB"/>
-                </a:solidFill>
-                <a:latin typeface="Arial"/>
-                <a:ea typeface="Arial"/>
-                <a:cs typeface="Arial"/>
-              </a:rPr>
-              <a:t>Try 18 Scene Memory with the camera prepared</a:t>
+              <a:defRPr sz="1350" b="1">
+                <a:solidFill>
+                  <a:srgbClr val="397718"/>
+                </a:solidFill>
+                <a:latin typeface="Arial"/>
+                <a:ea typeface="Arial"/>
+                <a:cs typeface="Arial"/>
+              </a:defRPr>
+            </a:pPr>
+            <a:r>
+              <a:rPr sz="1350" b="1">
+                <a:solidFill>
+                  <a:srgbClr val="397718"/>
+                </a:solidFill>
+                <a:latin typeface="Arial"/>
+                <a:ea typeface="Arial"/>
+                <a:cs typeface="Arial"/>
+              </a:rPr>
+              <a:t>09</a:t>
             </a:r>
           </a:p>
         </p:txBody>
@@ -5634,7 +8452,7 @@
           <p:cNvPr id="5" name="">
             <a:extLst xmlns:a="http://schemas.openxmlformats.org/drawingml/2006/main">
               <a:ext uri="{FF2B5EF4-FFF2-40B4-BE49-F238E27FC236}">
-                <a16:creationId xmlns:a16="http://schemas.microsoft.com/office/drawing/2014/main" id="{6A7DE707-83C8-4817-8640-4D5E2534AEF0}"/>
+                <a16:creationId xmlns:a16="http://schemas.microsoft.com/office/drawing/2014/main" id="{B1F58E43-C718-4831-9023-A1C37FD3DB98}"/>
               </a:ext>
             </a:extLst>
           </p:cNvPr>
@@ -5645,8 +8463,8 @@
         </p:nvSpPr>
         <p:spPr>
           <a:xfrm xmlns:a="http://schemas.openxmlformats.org/drawingml/2006/main">
-            <a:off x="685800" y="3657600"/>
-            <a:ext cx="10810875" cy="571500"/>
+            <a:off x="714375" y="2219325"/>
+            <a:ext cx="3238500" cy="333375"/>
           </a:xfrm>
           <a:prstGeom xmlns:a="http://schemas.openxmlformats.org/drawingml/2006/main" prst="rect">
             <a:avLst/>
@@ -5663,25 +8481,25 @@
           <a:lstStyle xmlns:a="http://schemas.openxmlformats.org/drawingml/2006/main"/>
           <a:p xmlns:a="http://schemas.openxmlformats.org/drawingml/2006/main">
             <a:pPr>
-              <a:defRPr sz="2100" b="0">
-                <a:solidFill>
-                  <a:srgbClr val="F2F7FB"/>
-                </a:solidFill>
-                <a:latin typeface="Arial"/>
-                <a:ea typeface="Arial"/>
-                <a:cs typeface="Arial"/>
-              </a:defRPr>
-            </a:pPr>
-            <a:r>
-              <a:rPr sz="2100" b="0">
-                <a:solidFill>
-                  <a:srgbClr val="F2F7FB"/>
-                </a:solidFill>
-                <a:latin typeface="Arial"/>
-                <a:ea typeface="Arial"/>
-                <a:cs typeface="Arial"/>
-              </a:rPr>
-              <a:t>Choose any named experiment directly</a:t>
+              <a:defRPr sz="1650" b="1">
+                <a:solidFill>
+                  <a:srgbClr val="397718"/>
+                </a:solidFill>
+                <a:latin typeface="Arial"/>
+                <a:ea typeface="Arial"/>
+                <a:cs typeface="Arial"/>
+              </a:defRPr>
+            </a:pPr>
+            <a:r>
+              <a:rPr sz="1650" b="1">
+                <a:solidFill>
+                  <a:srgbClr val="397718"/>
+                </a:solidFill>
+                <a:latin typeface="Arial"/>
+                <a:ea typeface="Arial"/>
+                <a:cs typeface="Arial"/>
+              </a:rPr>
+              <a:t>Experiment 11</a:t>
             </a:r>
           </a:p>
         </p:txBody>
@@ -5691,7 +8509,7 @@
           <p:cNvPr id="6" name="">
             <a:extLst xmlns:a="http://schemas.openxmlformats.org/drawingml/2006/main">
               <a:ext uri="{FF2B5EF4-FFF2-40B4-BE49-F238E27FC236}">
-                <a16:creationId xmlns:a16="http://schemas.microsoft.com/office/drawing/2014/main" id="{8C4C9A4E-02BC-43BA-8CE4-069381017E7B}"/>
+                <a16:creationId xmlns:a16="http://schemas.microsoft.com/office/drawing/2014/main" id="{993F2EA9-FD58-496A-AE58-8858A5F0B2B9}"/>
               </a:ext>
             </a:extLst>
           </p:cNvPr>
@@ -5702,8 +8520,8 @@
         </p:nvSpPr>
         <p:spPr>
           <a:xfrm xmlns:a="http://schemas.openxmlformats.org/drawingml/2006/main">
-            <a:off x="685800" y="4324350"/>
-            <a:ext cx="10810875" cy="571500"/>
+            <a:off x="714375" y="2714625"/>
+            <a:ext cx="5143500" cy="952500"/>
           </a:xfrm>
           <a:prstGeom xmlns:a="http://schemas.openxmlformats.org/drawingml/2006/main" prst="rect">
             <a:avLst/>
@@ -5720,25 +8538,48 @@
           <a:lstStyle xmlns:a="http://schemas.openxmlformats.org/drawingml/2006/main"/>
           <a:p xmlns:a="http://schemas.openxmlformats.org/drawingml/2006/main">
             <a:pPr>
-              <a:defRPr sz="2100" b="0">
-                <a:solidFill>
-                  <a:srgbClr val="F2F7FB"/>
-                </a:solidFill>
-                <a:latin typeface="Arial"/>
-                <a:ea typeface="Arial"/>
-                <a:cs typeface="Arial"/>
-              </a:defRPr>
-            </a:pPr>
-            <a:r>
-              <a:rPr sz="2100" b="0">
-                <a:solidFill>
-                  <a:srgbClr val="F2F7FB"/>
-                </a:solidFill>
-                <a:latin typeface="Arial"/>
-                <a:ea typeface="Arial"/>
-                <a:cs typeface="Arial"/>
-              </a:rPr>
-              <a:t>Ctrl+C returns from a supervised demo; 0 exits</a:t>
+              <a:defRPr sz="2625" b="1">
+                <a:solidFill>
+                  <a:srgbClr val="19332A"/>
+                </a:solidFill>
+                <a:latin typeface="Arial"/>
+                <a:ea typeface="Arial"/>
+                <a:cs typeface="Arial"/>
+              </a:defRPr>
+            </a:pPr>
+            <a:r>
+              <a:rPr sz="2625" b="1">
+                <a:solidFill>
+                  <a:srgbClr val="19332A"/>
+                </a:solidFill>
+                <a:latin typeface="Arial"/>
+                <a:ea typeface="Arial"/>
+                <a:cs typeface="Arial"/>
+              </a:rPr>
+              <a:t>Language Model</a:t>
+            </a:r>
+          </a:p>
+          <a:p xmlns:a="http://schemas.openxmlformats.org/drawingml/2006/main">
+            <a:pPr>
+              <a:defRPr sz="2625" b="1">
+                <a:solidFill>
+                  <a:srgbClr val="19332A"/>
+                </a:solidFill>
+                <a:latin typeface="Arial"/>
+                <a:ea typeface="Arial"/>
+                <a:cs typeface="Arial"/>
+              </a:defRPr>
+            </a:pPr>
+            <a:r>
+              <a:rPr sz="2625" b="1">
+                <a:solidFill>
+                  <a:srgbClr val="19332A"/>
+                </a:solidFill>
+                <a:latin typeface="Arial"/>
+                <a:ea typeface="Arial"/>
+                <a:cs typeface="Arial"/>
+              </a:rPr>
+              <a:t>Performance Benchmark</a:t>
             </a:r>
           </a:p>
         </p:txBody>
@@ -5748,7 +8589,7 @@
           <p:cNvPr id="7" name="">
             <a:extLst xmlns:a="http://schemas.openxmlformats.org/drawingml/2006/main">
               <a:ext uri="{FF2B5EF4-FFF2-40B4-BE49-F238E27FC236}">
-                <a16:creationId xmlns:a16="http://schemas.microsoft.com/office/drawing/2014/main" id="{0111C368-E7B9-4BC7-AB81-D0AB4343A14C}"/>
+                <a16:creationId xmlns:a16="http://schemas.microsoft.com/office/drawing/2014/main" id="{594E3212-F208-4853-9E2A-FBF32107D80A}"/>
               </a:ext>
             </a:extLst>
           </p:cNvPr>
@@ -5759,8 +8600,8 @@
         </p:nvSpPr>
         <p:spPr>
           <a:xfrm xmlns:a="http://schemas.openxmlformats.org/drawingml/2006/main">
-            <a:off x="685800" y="4991100"/>
-            <a:ext cx="10810875" cy="571500"/>
+            <a:off x="733425" y="4038600"/>
+            <a:ext cx="4857750" cy="952500"/>
           </a:xfrm>
           <a:prstGeom xmlns:a="http://schemas.openxmlformats.org/drawingml/2006/main" prst="rect">
             <a:avLst/>
@@ -5777,25 +8618,48 @@
           <a:lstStyle xmlns:a="http://schemas.openxmlformats.org/drawingml/2006/main"/>
           <a:p xmlns:a="http://schemas.openxmlformats.org/drawingml/2006/main">
             <a:pPr>
-              <a:defRPr sz="2100" b="0">
-                <a:solidFill>
-                  <a:srgbClr val="F2F7FB"/>
-                </a:solidFill>
-                <a:latin typeface="Arial"/>
-                <a:ea typeface="Arial"/>
-                <a:cs typeface="Arial"/>
-              </a:defRPr>
-            </a:pPr>
-            <a:r>
-              <a:rPr sz="2100" b="0">
-                <a:solidFill>
-                  <a:srgbClr val="F2F7FB"/>
-                </a:solidFill>
-                <a:latin typeface="Arial"/>
-                <a:ea typeface="Arial"/>
-                <a:cs typeface="Arial"/>
-              </a:rPr>
-              <a:t>Experiment 21: runs the optional prepared sequence</a:t>
+              <a:defRPr sz="2025" b="0">
+                <a:solidFill>
+                  <a:srgbClr val="52635B"/>
+                </a:solidFill>
+                <a:latin typeface="Arial"/>
+                <a:ea typeface="Arial"/>
+                <a:cs typeface="Arial"/>
+              </a:defRPr>
+            </a:pPr>
+            <a:r>
+              <a:rPr sz="2025" b="0">
+                <a:solidFill>
+                  <a:srgbClr val="52635B"/>
+                </a:solidFill>
+                <a:latin typeface="Arial"/>
+                <a:ea typeface="Arial"/>
+                <a:cs typeface="Arial"/>
+              </a:rPr>
+              <a:t>Run the upstream model benchmark</a:t>
+            </a:r>
+          </a:p>
+          <a:p xmlns:a="http://schemas.openxmlformats.org/drawingml/2006/main">
+            <a:pPr>
+              <a:defRPr sz="2025" b="0">
+                <a:solidFill>
+                  <a:srgbClr val="52635B"/>
+                </a:solidFill>
+                <a:latin typeface="Arial"/>
+                <a:ea typeface="Arial"/>
+                <a:cs typeface="Arial"/>
+              </a:defRPr>
+            </a:pPr>
+            <a:r>
+              <a:rPr sz="2025" b="0">
+                <a:solidFill>
+                  <a:srgbClr val="52635B"/>
+                </a:solidFill>
+                <a:latin typeface="Arial"/>
+                <a:ea typeface="Arial"/>
+                <a:cs typeface="Arial"/>
+              </a:rPr>
+              <a:t>and inspect its saved measurements.</a:t>
             </a:r>
           </a:p>
         </p:txBody>
@@ -5805,7 +8669,7 @@
           <p:cNvPr id="8" name="">
             <a:extLst xmlns:a="http://schemas.openxmlformats.org/drawingml/2006/main">
               <a:ext uri="{FF2B5EF4-FFF2-40B4-BE49-F238E27FC236}">
-                <a16:creationId xmlns:a16="http://schemas.microsoft.com/office/drawing/2014/main" id="{CE34FDF0-654D-4A56-A288-5E6F6856D6FC}"/>
+                <a16:creationId xmlns:a16="http://schemas.microsoft.com/office/drawing/2014/main" id="{5F482AFA-9BA7-4C71-B211-EA2A60C3B0A3}"/>
               </a:ext>
             </a:extLst>
           </p:cNvPr>
@@ -5816,8 +8680,8 @@
         </p:nvSpPr>
         <p:spPr>
           <a:xfrm xmlns:a="http://schemas.openxmlformats.org/drawingml/2006/main">
-            <a:off x="647700" y="6229350"/>
-            <a:ext cx="10572750" cy="428625"/>
+            <a:off x="6572250" y="2219325"/>
+            <a:ext cx="3714750" cy="333375"/>
           </a:xfrm>
           <a:prstGeom xmlns:a="http://schemas.openxmlformats.org/drawingml/2006/main" prst="rect">
             <a:avLst/>
@@ -5834,25 +8698,208 @@
           <a:lstStyle xmlns:a="http://schemas.openxmlformats.org/drawingml/2006/main"/>
           <a:p xmlns:a="http://schemas.openxmlformats.org/drawingml/2006/main">
             <a:pPr>
-              <a:defRPr sz="1425" b="0">
-                <a:solidFill>
-                  <a:srgbClr val="B6C6D5"/>
-                </a:solidFill>
-                <a:latin typeface="Arial"/>
-                <a:ea typeface="Arial"/>
-                <a:cs typeface="Arial"/>
-              </a:defRPr>
-            </a:pPr>
-            <a:r>
-              <a:rPr sz="1425" b="0">
-                <a:solidFill>
-                  <a:srgbClr val="B6C6D5"/>
-                </a:solidFill>
-                <a:latin typeface="Arial"/>
-                <a:ea typeface="Arial"/>
-                <a:cs typeface="Arial"/>
-              </a:rPr>
-              <a:t>RAM, disk, heat and timeout checks reduce risk. Physical-board rehearsal remains required.</a:t>
+              <a:defRPr sz="1650" b="1">
+                <a:solidFill>
+                  <a:srgbClr val="397718"/>
+                </a:solidFill>
+                <a:latin typeface="Arial"/>
+                <a:ea typeface="Arial"/>
+                <a:cs typeface="Arial"/>
+              </a:defRPr>
+            </a:pPr>
+            <a:r>
+              <a:rPr sz="1650" b="1">
+                <a:solidFill>
+                  <a:srgbClr val="397718"/>
+                </a:solidFill>
+                <a:latin typeface="Arial"/>
+                <a:ea typeface="Arial"/>
+                <a:cs typeface="Arial"/>
+              </a:rPr>
+              <a:t>Experiment 12</a:t>
+            </a:r>
+          </a:p>
+        </p:txBody>
+      </p:sp>
+      <p:sp>
+        <p:nvSpPr>
+          <p:cNvPr id="9" name="">
+            <a:extLst xmlns:a="http://schemas.openxmlformats.org/drawingml/2006/main">
+              <a:ext uri="{FF2B5EF4-FFF2-40B4-BE49-F238E27FC236}">
+                <a16:creationId xmlns:a16="http://schemas.microsoft.com/office/drawing/2014/main" id="{1355499E-AEF7-42A5-8D38-1C6222DBD1C0}"/>
+              </a:ext>
+            </a:extLst>
+          </p:cNvPr>
+          <p:cNvSpPr>
+            <a:spLocks xmlns:a="http://schemas.openxmlformats.org/drawingml/2006/main" noGrp="1"/>
+          </p:cNvSpPr>
+          <p:nvPr/>
+        </p:nvSpPr>
+        <p:spPr>
+          <a:xfrm xmlns:a="http://schemas.openxmlformats.org/drawingml/2006/main">
+            <a:off x="6572250" y="2714625"/>
+            <a:ext cx="4857750" cy="952500"/>
+          </a:xfrm>
+          <a:prstGeom xmlns:a="http://schemas.openxmlformats.org/drawingml/2006/main" prst="rect">
+            <a:avLst/>
+          </a:prstGeom>
+          <a:noFill xmlns:a="http://schemas.openxmlformats.org/drawingml/2006/main"/>
+          <a:ln xmlns:a="http://schemas.openxmlformats.org/drawingml/2006/main" w="0">
+            <a:noFill/>
+          </a:ln>
+        </p:spPr>
+        <p:txBody>
+          <a:bodyPr xmlns:a="http://schemas.openxmlformats.org/drawingml/2006/main">
+            <a:noAutofit/>
+          </a:bodyPr>
+          <a:lstStyle xmlns:a="http://schemas.openxmlformats.org/drawingml/2006/main"/>
+          <a:p xmlns:a="http://schemas.openxmlformats.org/drawingml/2006/main">
+            <a:pPr>
+              <a:defRPr sz="2625" b="1">
+                <a:solidFill>
+                  <a:srgbClr val="19332A"/>
+                </a:solidFill>
+                <a:latin typeface="Arial"/>
+                <a:ea typeface="Arial"/>
+                <a:cs typeface="Arial"/>
+              </a:defRPr>
+            </a:pPr>
+            <a:r>
+              <a:rPr sz="2625" b="1">
+                <a:solidFill>
+                  <a:srgbClr val="19332A"/>
+                </a:solidFill>
+                <a:latin typeface="Arial"/>
+                <a:ea typeface="Arial"/>
+                <a:cs typeface="Arial"/>
+              </a:rPr>
+              <a:t>Reproducible</a:t>
+            </a:r>
+          </a:p>
+          <a:p xmlns:a="http://schemas.openxmlformats.org/drawingml/2006/main">
+            <a:pPr>
+              <a:defRPr sz="2625" b="1">
+                <a:solidFill>
+                  <a:srgbClr val="19332A"/>
+                </a:solidFill>
+                <a:latin typeface="Arial"/>
+                <a:ea typeface="Arial"/>
+                <a:cs typeface="Arial"/>
+              </a:defRPr>
+            </a:pPr>
+            <a:r>
+              <a:rPr sz="2625" b="1">
+                <a:solidFill>
+                  <a:srgbClr val="19332A"/>
+                </a:solidFill>
+                <a:latin typeface="Arial"/>
+                <a:ea typeface="Arial"/>
+                <a:cs typeface="Arial"/>
+              </a:rPr>
+              <a:t>Prompt Evaluation</a:t>
+            </a:r>
+          </a:p>
+        </p:txBody>
+      </p:sp>
+      <p:sp>
+        <p:nvSpPr>
+          <p:cNvPr id="10" name="">
+            <a:extLst xmlns:a="http://schemas.openxmlformats.org/drawingml/2006/main">
+              <a:ext uri="{FF2B5EF4-FFF2-40B4-BE49-F238E27FC236}">
+                <a16:creationId xmlns:a16="http://schemas.microsoft.com/office/drawing/2014/main" id="{82C63AC1-1523-4EBB-B3ED-876F489F3169}"/>
+              </a:ext>
+            </a:extLst>
+          </p:cNvPr>
+          <p:cNvSpPr>
+            <a:spLocks xmlns:a="http://schemas.openxmlformats.org/drawingml/2006/main" noGrp="1"/>
+          </p:cNvSpPr>
+          <p:nvPr/>
+        </p:nvSpPr>
+        <p:spPr>
+          <a:xfrm xmlns:a="http://schemas.openxmlformats.org/drawingml/2006/main">
+            <a:off x="6591300" y="4038600"/>
+            <a:ext cx="4762500" cy="1238250"/>
+          </a:xfrm>
+          <a:prstGeom xmlns:a="http://schemas.openxmlformats.org/drawingml/2006/main" prst="rect">
+            <a:avLst/>
+          </a:prstGeom>
+          <a:noFill xmlns:a="http://schemas.openxmlformats.org/drawingml/2006/main"/>
+          <a:ln xmlns:a="http://schemas.openxmlformats.org/drawingml/2006/main" w="0">
+            <a:noFill/>
+          </a:ln>
+        </p:spPr>
+        <p:txBody>
+          <a:bodyPr xmlns:a="http://schemas.openxmlformats.org/drawingml/2006/main">
+            <a:noAutofit/>
+          </a:bodyPr>
+          <a:lstStyle xmlns:a="http://schemas.openxmlformats.org/drawingml/2006/main"/>
+          <a:p xmlns:a="http://schemas.openxmlformats.org/drawingml/2006/main">
+            <a:pPr>
+              <a:defRPr sz="2025" b="0">
+                <a:solidFill>
+                  <a:srgbClr val="52635B"/>
+                </a:solidFill>
+                <a:latin typeface="Arial"/>
+                <a:ea typeface="Arial"/>
+                <a:cs typeface="Arial"/>
+              </a:defRPr>
+            </a:pPr>
+            <a:r>
+              <a:rPr sz="2025" b="0">
+                <a:solidFill>
+                  <a:srgbClr val="52635B"/>
+                </a:solidFill>
+                <a:latin typeface="Arial"/>
+                <a:ea typeface="Arial"/>
+                <a:cs typeface="Arial"/>
+              </a:rPr>
+              <a:t>Supply JSONL questions and reference</a:t>
+            </a:r>
+          </a:p>
+          <a:p xmlns:a="http://schemas.openxmlformats.org/drawingml/2006/main">
+            <a:pPr>
+              <a:defRPr sz="2025" b="0">
+                <a:solidFill>
+                  <a:srgbClr val="52635B"/>
+                </a:solidFill>
+                <a:latin typeface="Arial"/>
+                <a:ea typeface="Arial"/>
+                <a:cs typeface="Arial"/>
+              </a:defRPr>
+            </a:pPr>
+            <a:r>
+              <a:rPr sz="2025" b="0">
+                <a:solidFill>
+                  <a:srgbClr val="52635B"/>
+                </a:solidFill>
+                <a:latin typeface="Arial"/>
+                <a:ea typeface="Arial"/>
+                <a:cs typeface="Arial"/>
+              </a:rPr>
+              <a:t>answers. Inspect exact matches,</a:t>
+            </a:r>
+          </a:p>
+          <a:p xmlns:a="http://schemas.openxmlformats.org/drawingml/2006/main">
+            <a:pPr>
+              <a:defRPr sz="2025" b="0">
+                <a:solidFill>
+                  <a:srgbClr val="52635B"/>
+                </a:solidFill>
+                <a:latin typeface="Arial"/>
+                <a:ea typeface="Arial"/>
+                <a:cs typeface="Arial"/>
+              </a:defRPr>
+            </a:pPr>
+            <a:r>
+              <a:rPr sz="2025" b="0">
+                <a:solidFill>
+                  <a:srgbClr val="52635B"/>
+                </a:solidFill>
+                <a:latin typeface="Arial"/>
+                <a:ea typeface="Arial"/>
+                <a:cs typeface="Arial"/>
+              </a:rPr>
+              <a:t>responses and latency.</a:t>
             </a:r>
           </a:p>
         </p:txBody>
@@ -5860,7 +8907,7 @@
     </p:spTree>
     <p:extLst>
       <p:ext uri="{BB962C8B-B14F-4D97-AF65-F5344CB8AC3E}">
-        <p14:creationId xmlns:p14="http://schemas.microsoft.com/office/powerpoint/2010/main" val="544442059"/>
+        <p14:creationId xmlns:p14="http://schemas.microsoft.com/office/powerpoint/2010/main" val="1855397704"/>
       </p:ext>
     </p:extLst>
   </p:cSld>

--- a/docs/Jetson_Nano_Local_AI_Experiments.pptx
+++ b/docs/Jetson_Nano_Local_AI_Experiments.pptx
@@ -2,22 +2,22 @@
 <file path=ppt/presentation.xml><?xml version="1.0" encoding="utf-8"?>
 <p:presentation xmlns:p="http://schemas.openxmlformats.org/presentationml/2006/main">
   <p:sldMasterIdLst>
-    <p:sldMasterId xmlns:r="http://schemas.openxmlformats.org/officeDocument/2006/relationships" id="2147483648" r:id="R63c9e2d4bc2d42ee"/>
+    <p:sldMasterId xmlns:r="http://schemas.openxmlformats.org/officeDocument/2006/relationships" id="2147483648" r:id="R61318e96a7424672"/>
   </p:sldMasterIdLst>
   <p:notesMasterIdLst>
-    <p:notesMasterId xmlns:r="http://schemas.openxmlformats.org/officeDocument/2006/relationships" r:id="R243c1052c57c4d20"/>
+    <p:notesMasterId xmlns:r="http://schemas.openxmlformats.org/officeDocument/2006/relationships" r:id="Rc520d7186cd54fdc"/>
   </p:notesMasterIdLst>
   <p:sldIdLst>
-    <p:sldId xmlns:r="http://schemas.openxmlformats.org/officeDocument/2006/relationships" id="256" r:id="Rd35f6f33c2764035"/>
-    <p:sldId xmlns:r="http://schemas.openxmlformats.org/officeDocument/2006/relationships" id="257" r:id="Rb967bbbd29db421c"/>
-    <p:sldId xmlns:r="http://schemas.openxmlformats.org/officeDocument/2006/relationships" id="258" r:id="Rb5647ad114b34648"/>
-    <p:sldId xmlns:r="http://schemas.openxmlformats.org/officeDocument/2006/relationships" id="259" r:id="R15b1ff74641a4d9b"/>
-    <p:sldId xmlns:r="http://schemas.openxmlformats.org/officeDocument/2006/relationships" id="260" r:id="R528cdc9c1af34cc4"/>
-    <p:sldId xmlns:r="http://schemas.openxmlformats.org/officeDocument/2006/relationships" id="261" r:id="R9258778ac5e146f8"/>
-    <p:sldId xmlns:r="http://schemas.openxmlformats.org/officeDocument/2006/relationships" id="262" r:id="R6fd447b9efe14302"/>
-    <p:sldId xmlns:r="http://schemas.openxmlformats.org/officeDocument/2006/relationships" id="263" r:id="Ree3d3b135f6c4e66"/>
-    <p:sldId xmlns:r="http://schemas.openxmlformats.org/officeDocument/2006/relationships" id="264" r:id="R3aaa7acc11774167"/>
-    <p:sldId xmlns:r="http://schemas.openxmlformats.org/officeDocument/2006/relationships" id="265" r:id="R8bf70701525b47ff"/>
+    <p:sldId xmlns:r="http://schemas.openxmlformats.org/officeDocument/2006/relationships" id="256" r:id="R080aaf2cef074074"/>
+    <p:sldId xmlns:r="http://schemas.openxmlformats.org/officeDocument/2006/relationships" id="257" r:id="R9842083640644bb7"/>
+    <p:sldId xmlns:r="http://schemas.openxmlformats.org/officeDocument/2006/relationships" id="258" r:id="Rf1d9287b809c4093"/>
+    <p:sldId xmlns:r="http://schemas.openxmlformats.org/officeDocument/2006/relationships" id="259" r:id="R4dd05ad61c1f4839"/>
+    <p:sldId xmlns:r="http://schemas.openxmlformats.org/officeDocument/2006/relationships" id="260" r:id="Ra5aea37353e54db0"/>
+    <p:sldId xmlns:r="http://schemas.openxmlformats.org/officeDocument/2006/relationships" id="261" r:id="Rceaa78151687443c"/>
+    <p:sldId xmlns:r="http://schemas.openxmlformats.org/officeDocument/2006/relationships" id="262" r:id="Rb92dbb3a577b4d2c"/>
+    <p:sldId xmlns:r="http://schemas.openxmlformats.org/officeDocument/2006/relationships" id="263" r:id="R59dddf2f9aa84e53"/>
+    <p:sldId xmlns:r="http://schemas.openxmlformats.org/officeDocument/2006/relationships" id="264" r:id="R8518f4595e6a4d0b"/>
+    <p:sldId xmlns:r="http://schemas.openxmlformats.org/officeDocument/2006/relationships" id="265" r:id="R574953dfd6c046df"/>
   </p:sldIdLst>
   <p:sldSz cx="12192000" cy="6858000"/>
   <p:notesSz cx="6858000" cy="9144000"/>
@@ -1204,7 +1204,7 @@
   </p:cSld>
   <p:clrMap bg1="lt1" tx1="dk1" bg2="lt2" tx2="dk2" accent1="accent1" accent2="accent2" accent3="accent3" accent4="accent4" accent5="accent5" accent6="accent6" hlink="hlink" folHlink="folHlink"/>
   <p:sldLayoutIdLst>
-    <p:sldLayoutId xmlns:r="http://schemas.openxmlformats.org/officeDocument/2006/relationships" id="2147483649" r:id="Ra5c741f6d8f742c9"/>
+    <p:sldLayoutId xmlns:r="http://schemas.openxmlformats.org/officeDocument/2006/relationships" id="2147483649" r:id="R5c5f1502f4ad4b8b"/>
   </p:sldLayoutIdLst>
   <p:txStyles>
     <p:titleStyle>
@@ -1752,10 +1752,10 @@
       </p:grpSpPr>
       <p:sp>
         <p:nvSpPr>
-          <p:cNvPr id="8" name="">
+          <p:cNvPr id="4" name="">
             <a:extLst xmlns:a="http://schemas.openxmlformats.org/drawingml/2006/main">
               <a:ext uri="{FF2B5EF4-FFF2-40B4-BE49-F238E27FC236}">
-                <a16:creationId xmlns:a16="http://schemas.microsoft.com/office/drawing/2014/main" id="{652D6817-1018-499B-AE97-27ECF4A92967}"/>
+                <a16:creationId xmlns:a16="http://schemas.microsoft.com/office/drawing/2014/main" id="{1106B75C-3A80-46EF-AA96-1B07B61AFF18}"/>
               </a:ext>
             </a:extLst>
           </p:cNvPr>
@@ -1766,8 +1766,8 @@
         </p:nvSpPr>
         <p:spPr>
           <a:xfrm xmlns:a="http://schemas.openxmlformats.org/drawingml/2006/main">
-            <a:off x="685800" y="647700"/>
-            <a:ext cx="10668000" cy="381000"/>
+            <a:off x="666750" y="1809750"/>
+            <a:ext cx="6191250" cy="1809750"/>
           </a:xfrm>
           <a:prstGeom xmlns:a="http://schemas.openxmlformats.org/drawingml/2006/main" prst="rect">
             <a:avLst/>
@@ -1784,9 +1784,9 @@
           <a:lstStyle xmlns:a="http://schemas.openxmlformats.org/drawingml/2006/main"/>
           <a:p xmlns:a="http://schemas.openxmlformats.org/drawingml/2006/main">
             <a:pPr>
-              <a:defRPr sz="1575" b="1">
-                <a:solidFill>
-                  <a:srgbClr val="397718"/>
+              <a:defRPr sz="4950" b="1">
+                <a:solidFill>
+                  <a:srgbClr val="19332A"/>
                 </a:solidFill>
                 <a:latin typeface="Arial"/>
                 <a:ea typeface="Arial"/>
@@ -1794,54 +1794,20 @@
               </a:defRPr>
             </a:pPr>
             <a:r>
-              <a:rPr sz="1575" b="1">
-                <a:solidFill>
-                  <a:srgbClr val="397718"/>
+              <a:rPr sz="4950" b="1">
+                <a:solidFill>
+                  <a:srgbClr val="19332A"/>
                 </a:solidFill>
                 <a:latin typeface="Arial"/>
                 <a:ea typeface="Arial"/>
                 <a:cs typeface="Arial"/>
               </a:rPr>
-              <a:t>LOCAL AI / CLASSROOM EXPERIMENTS</a:t>
-            </a:r>
-          </a:p>
-        </p:txBody>
-      </p:sp>
-      <p:sp>
-        <p:nvSpPr>
-          <p:cNvPr id="2" name="">
-            <a:extLst xmlns:a="http://schemas.openxmlformats.org/drawingml/2006/main">
-              <a:ext uri="{FF2B5EF4-FFF2-40B4-BE49-F238E27FC236}">
-                <a16:creationId xmlns:a16="http://schemas.microsoft.com/office/drawing/2014/main" id="{AB77F809-9AE7-42B4-B2C8-57DC9D6D7116}"/>
-              </a:ext>
-            </a:extLst>
-          </p:cNvPr>
-          <p:cNvSpPr>
-            <a:spLocks xmlns:a="http://schemas.openxmlformats.org/drawingml/2006/main" noGrp="1"/>
-          </p:cNvSpPr>
-          <p:nvPr/>
-        </p:nvSpPr>
-        <p:spPr>
-          <a:xfrm xmlns:a="http://schemas.openxmlformats.org/drawingml/2006/main">
-            <a:off x="666750" y="1638300"/>
-            <a:ext cx="6000750" cy="1809750"/>
-          </a:xfrm>
-          <a:prstGeom xmlns:a="http://schemas.openxmlformats.org/drawingml/2006/main" prst="rect">
-            <a:avLst/>
-          </a:prstGeom>
-          <a:noFill xmlns:a="http://schemas.openxmlformats.org/drawingml/2006/main"/>
-          <a:ln xmlns:a="http://schemas.openxmlformats.org/drawingml/2006/main" w="0">
-            <a:noFill/>
-          </a:ln>
-        </p:spPr>
-        <p:txBody>
-          <a:bodyPr xmlns:a="http://schemas.openxmlformats.org/drawingml/2006/main">
-            <a:noAutofit/>
-          </a:bodyPr>
-          <a:lstStyle xmlns:a="http://schemas.openxmlformats.org/drawingml/2006/main"/>
+              <a:t>Language Models</a:t>
+            </a:r>
+          </a:p>
           <a:p xmlns:a="http://schemas.openxmlformats.org/drawingml/2006/main">
             <a:pPr>
-              <a:defRPr sz="5700" b="1">
+              <a:defRPr sz="4950" b="1">
                 <a:solidFill>
                   <a:srgbClr val="19332A"/>
                 </a:solidFill>
@@ -1851,7 +1817,7 @@
               </a:defRPr>
             </a:pPr>
             <a:r>
-              <a:rPr sz="5700" b="1">
+              <a:rPr sz="4950" b="1">
                 <a:solidFill>
                   <a:srgbClr val="19332A"/>
                 </a:solidFill>
@@ -1859,261 +1825,21 @@
                 <a:ea typeface="Arial"/>
                 <a:cs typeface="Arial"/>
               </a:rPr>
-              <a:t>Local AI on</a:t>
-            </a:r>
-          </a:p>
-          <a:p xmlns:a="http://schemas.openxmlformats.org/drawingml/2006/main">
-            <a:pPr>
-              <a:defRPr sz="5700" b="1">
-                <a:solidFill>
-                  <a:srgbClr val="19332A"/>
-                </a:solidFill>
-                <a:latin typeface="Arial"/>
-                <a:ea typeface="Arial"/>
-                <a:cs typeface="Arial"/>
-              </a:defRPr>
-            </a:pPr>
-            <a:r>
-              <a:rPr sz="5700" b="1">
-                <a:solidFill>
-                  <a:srgbClr val="19332A"/>
-                </a:solidFill>
-                <a:latin typeface="Arial"/>
-                <a:ea typeface="Arial"/>
-                <a:cs typeface="Arial"/>
-              </a:rPr>
-              <a:t>Jetson Nano</a:t>
-            </a:r>
-          </a:p>
-        </p:txBody>
-      </p:sp>
-      <p:sp>
-        <p:nvSpPr>
-          <p:cNvPr id="3" name="">
-            <a:extLst xmlns:a="http://schemas.openxmlformats.org/drawingml/2006/main">
-              <a:ext uri="{FF2B5EF4-FFF2-40B4-BE49-F238E27FC236}">
-                <a16:creationId xmlns:a16="http://schemas.microsoft.com/office/drawing/2014/main" id="{B6BA6D0A-27ED-4EE6-A6FC-13751BB7F949}"/>
-              </a:ext>
-            </a:extLst>
-          </p:cNvPr>
-          <p:cNvSpPr>
-            <a:spLocks xmlns:a="http://schemas.openxmlformats.org/drawingml/2006/main" noGrp="1"/>
-          </p:cNvSpPr>
-          <p:nvPr/>
-        </p:nvSpPr>
-        <p:spPr>
-          <a:xfrm xmlns:a="http://schemas.openxmlformats.org/drawingml/2006/main">
-            <a:off x="723900" y="3714750"/>
-            <a:ext cx="5429250" cy="895350"/>
-          </a:xfrm>
-          <a:prstGeom xmlns:a="http://schemas.openxmlformats.org/drawingml/2006/main" prst="rect">
-            <a:avLst/>
-          </a:prstGeom>
-          <a:noFill xmlns:a="http://schemas.openxmlformats.org/drawingml/2006/main"/>
-          <a:ln xmlns:a="http://schemas.openxmlformats.org/drawingml/2006/main" w="0">
-            <a:noFill/>
-          </a:ln>
-        </p:spPr>
-        <p:txBody>
-          <a:bodyPr xmlns:a="http://schemas.openxmlformats.org/drawingml/2006/main">
-            <a:noAutofit/>
-          </a:bodyPr>
-          <a:lstStyle xmlns:a="http://schemas.openxmlformats.org/drawingml/2006/main"/>
-          <a:p xmlns:a="http://schemas.openxmlformats.org/drawingml/2006/main">
-            <a:pPr>
-              <a:defRPr sz="2175" b="0">
-                <a:solidFill>
-                  <a:srgbClr val="52635B"/>
-                </a:solidFill>
-                <a:latin typeface="Arial"/>
-                <a:ea typeface="Arial"/>
-                <a:cs typeface="Arial"/>
-              </a:defRPr>
-            </a:pPr>
-            <a:r>
-              <a:rPr sz="2175" b="0">
-                <a:solidFill>
-                  <a:srgbClr val="52635B"/>
-                </a:solidFill>
-                <a:latin typeface="Arial"/>
-                <a:ea typeface="Arial"/>
-                <a:cs typeface="Arial"/>
-              </a:rPr>
-              <a:t>Explore language, memory and vision</a:t>
-            </a:r>
-          </a:p>
-          <a:p xmlns:a="http://schemas.openxmlformats.org/drawingml/2006/main">
-            <a:pPr>
-              <a:defRPr sz="2175" b="0">
-                <a:solidFill>
-                  <a:srgbClr val="52635B"/>
-                </a:solidFill>
-                <a:latin typeface="Arial"/>
-                <a:ea typeface="Arial"/>
-                <a:cs typeface="Arial"/>
-              </a:defRPr>
-            </a:pPr>
-            <a:r>
-              <a:rPr sz="2175" b="0">
-                <a:solidFill>
-                  <a:srgbClr val="52635B"/>
-                </a:solidFill>
-                <a:latin typeface="Arial"/>
-                <a:ea typeface="Arial"/>
-                <a:cs typeface="Arial"/>
-              </a:rPr>
-              <a:t>with local models and a camera.</a:t>
-            </a:r>
-          </a:p>
-        </p:txBody>
-      </p:sp>
-      <p:sp>
-        <p:nvSpPr>
-          <p:cNvPr id="4" name="">
-            <a:extLst xmlns:a="http://schemas.openxmlformats.org/drawingml/2006/main">
-              <a:ext uri="{FF2B5EF4-FFF2-40B4-BE49-F238E27FC236}">
-                <a16:creationId xmlns:a16="http://schemas.microsoft.com/office/drawing/2014/main" id="{B6AB0054-8BC7-4A8B-9D6C-82710923E27E}"/>
-              </a:ext>
-            </a:extLst>
-          </p:cNvPr>
-          <p:cNvSpPr>
-            <a:spLocks xmlns:a="http://schemas.openxmlformats.org/drawingml/2006/main" noGrp="1"/>
-          </p:cNvSpPr>
-          <p:nvPr/>
-        </p:nvSpPr>
-        <p:spPr>
-          <a:xfrm xmlns:a="http://schemas.openxmlformats.org/drawingml/2006/main">
-            <a:off x="685800" y="4972050"/>
-            <a:ext cx="1428750" cy="952500"/>
-          </a:xfrm>
-          <a:prstGeom xmlns:a="http://schemas.openxmlformats.org/drawingml/2006/main" prst="rect">
-            <a:avLst/>
-          </a:prstGeom>
-          <a:noFill xmlns:a="http://schemas.openxmlformats.org/drawingml/2006/main"/>
-          <a:ln xmlns:a="http://schemas.openxmlformats.org/drawingml/2006/main" w="0">
-            <a:noFill/>
-          </a:ln>
-        </p:spPr>
-        <p:txBody>
-          <a:bodyPr xmlns:a="http://schemas.openxmlformats.org/drawingml/2006/main">
-            <a:noAutofit/>
-          </a:bodyPr>
-          <a:lstStyle xmlns:a="http://schemas.openxmlformats.org/drawingml/2006/main"/>
-          <a:p xmlns:a="http://schemas.openxmlformats.org/drawingml/2006/main">
-            <a:pPr>
-              <a:defRPr sz="6000" b="1">
-                <a:solidFill>
-                  <a:srgbClr val="397718"/>
-                </a:solidFill>
-                <a:latin typeface="Arial"/>
-                <a:ea typeface="Arial"/>
-                <a:cs typeface="Arial"/>
-              </a:defRPr>
-            </a:pPr>
-            <a:r>
-              <a:rPr sz="6000" b="1">
-                <a:solidFill>
-                  <a:srgbClr val="397718"/>
-                </a:solidFill>
-                <a:latin typeface="Arial"/>
-                <a:ea typeface="Arial"/>
-                <a:cs typeface="Arial"/>
-              </a:rPr>
-              <a:t>27</a:t>
-            </a:r>
-          </a:p>
-        </p:txBody>
-      </p:sp>
-      <p:sp>
-        <p:nvSpPr>
-          <p:cNvPr id="5" name="">
-            <a:extLst xmlns:a="http://schemas.openxmlformats.org/drawingml/2006/main">
-              <a:ext uri="{FF2B5EF4-FFF2-40B4-BE49-F238E27FC236}">
-                <a16:creationId xmlns:a16="http://schemas.microsoft.com/office/drawing/2014/main" id="{00AD9E32-303F-4F9D-B29E-4536B52A5CE5}"/>
-              </a:ext>
-            </a:extLst>
-          </p:cNvPr>
-          <p:cNvSpPr>
-            <a:spLocks xmlns:a="http://schemas.openxmlformats.org/drawingml/2006/main" noGrp="1"/>
-          </p:cNvSpPr>
-          <p:nvPr/>
-        </p:nvSpPr>
-        <p:spPr>
-          <a:xfrm xmlns:a="http://schemas.openxmlformats.org/drawingml/2006/main">
-            <a:off x="2171700" y="5181600"/>
-            <a:ext cx="3429000" cy="762000"/>
-          </a:xfrm>
-          <a:prstGeom xmlns:a="http://schemas.openxmlformats.org/drawingml/2006/main" prst="rect">
-            <a:avLst/>
-          </a:prstGeom>
-          <a:noFill xmlns:a="http://schemas.openxmlformats.org/drawingml/2006/main"/>
-          <a:ln xmlns:a="http://schemas.openxmlformats.org/drawingml/2006/main" w="0">
-            <a:noFill/>
-          </a:ln>
-        </p:spPr>
-        <p:txBody>
-          <a:bodyPr xmlns:a="http://schemas.openxmlformats.org/drawingml/2006/main">
-            <a:noAutofit/>
-          </a:bodyPr>
-          <a:lstStyle xmlns:a="http://schemas.openxmlformats.org/drawingml/2006/main"/>
-          <a:p xmlns:a="http://schemas.openxmlformats.org/drawingml/2006/main">
-            <a:pPr>
-              <a:defRPr sz="2100" b="0">
-                <a:solidFill>
-                  <a:srgbClr val="19332A"/>
-                </a:solidFill>
-                <a:latin typeface="Arial"/>
-                <a:ea typeface="Arial"/>
-                <a:cs typeface="Arial"/>
-              </a:defRPr>
-            </a:pPr>
-            <a:r>
-              <a:rPr sz="2100" b="0">
-                <a:solidFill>
-                  <a:srgbClr val="19332A"/>
-                </a:solidFill>
-                <a:latin typeface="Arial"/>
-                <a:ea typeface="Arial"/>
-                <a:cs typeface="Arial"/>
-              </a:rPr>
-              <a:t>named experiments</a:t>
-            </a:r>
-          </a:p>
-          <a:p xmlns:a="http://schemas.openxmlformats.org/drawingml/2006/main">
-            <a:pPr>
-              <a:defRPr sz="2100" b="0">
-                <a:solidFill>
-                  <a:srgbClr val="19332A"/>
-                </a:solidFill>
-                <a:latin typeface="Arial"/>
-                <a:ea typeface="Arial"/>
-                <a:cs typeface="Arial"/>
-              </a:defRPr>
-            </a:pPr>
-            <a:r>
-              <a:rPr sz="2100" b="0">
-                <a:solidFill>
-                  <a:srgbClr val="19332A"/>
-                </a:solidFill>
-                <a:latin typeface="Arial"/>
-                <a:ea typeface="Arial"/>
-                <a:cs typeface="Arial"/>
-              </a:rPr>
-              <a:t>one Bash launcher</a:t>
+              <a:t>on Jetson Nano</a:t>
             </a:r>
           </a:p>
         </p:txBody>
       </p:sp>
       <p:pic>
         <p:nvPicPr>
-          <p:cNvPr id="13" name=""/>
+          <p:cNvPr id="5" name=""/>
           <p:cNvPicPr>
             <a:picLocks xmlns:a="http://schemas.openxmlformats.org/drawingml/2006/main" noChangeAspect="1"/>
           </p:cNvPicPr>
           <p:nvPr/>
         </p:nvPicPr>
         <p:blipFill>
-          <a:blip xmlns:r="http://schemas.openxmlformats.org/officeDocument/2006/relationships" xmlns:a="http://schemas.openxmlformats.org/drawingml/2006/main" r:embed="Rc4e22e0fe44447e8"/>
+          <a:blip xmlns:r="http://schemas.openxmlformats.org/officeDocument/2006/relationships" xmlns:a="http://schemas.openxmlformats.org/drawingml/2006/main" r:embed="R49d56913fcad4f70"/>
           <a:stretch xmlns:a="http://schemas.openxmlformats.org/drawingml/2006/main"/>
         </p:blipFill>
         <p:spPr>
@@ -2128,10 +1854,10 @@
       </p:pic>
       <p:sp>
         <p:nvSpPr>
-          <p:cNvPr id="7" name="">
+          <p:cNvPr id="3" name="">
             <a:extLst xmlns:a="http://schemas.openxmlformats.org/drawingml/2006/main">
               <a:ext uri="{FF2B5EF4-FFF2-40B4-BE49-F238E27FC236}">
-                <a16:creationId xmlns:a16="http://schemas.microsoft.com/office/drawing/2014/main" id="{F0BC6F1F-F461-4009-A0E1-F4EF8034499C}"/>
+                <a16:creationId xmlns:a16="http://schemas.microsoft.com/office/drawing/2014/main" id="{15DC085A-C050-42ED-92EA-488CBF23CAAD}"/>
               </a:ext>
             </a:extLst>
           </p:cNvPr>
@@ -2142,8 +1868,8 @@
         </p:nvSpPr>
         <p:spPr>
           <a:xfrm xmlns:a="http://schemas.openxmlformats.org/drawingml/2006/main">
-            <a:off x="714375" y="6286500"/>
-            <a:ext cx="8572500" cy="304800"/>
+            <a:off x="733425" y="4229100"/>
+            <a:ext cx="5048250" cy="1333500"/>
           </a:xfrm>
           <a:prstGeom xmlns:a="http://schemas.openxmlformats.org/drawingml/2006/main" prst="rect">
             <a:avLst/>
@@ -2160,7 +1886,7 @@
           <a:lstStyle xmlns:a="http://schemas.openxmlformats.org/drawingml/2006/main"/>
           <a:p xmlns:a="http://schemas.openxmlformats.org/drawingml/2006/main">
             <a:pPr>
-              <a:defRPr sz="1425" b="0">
+              <a:defRPr sz="1950" b="0">
                 <a:solidFill>
                   <a:srgbClr val="52635B"/>
                 </a:solidFill>
@@ -2170,7 +1896,7 @@
               </a:defRPr>
             </a:pPr>
             <a:r>
-              <a:rPr sz="1425" b="0">
+              <a:rPr sz="1950" b="0">
                 <a:solidFill>
                   <a:srgbClr val="52635B"/>
                 </a:solidFill>
@@ -2178,7 +1904,53 @@
                 <a:ea typeface="Arial"/>
                 <a:cs typeface="Arial"/>
               </a:rPr>
-              <a:t>Original Nano 4GB, JetPack 4, Python 3.6</a:t>
+              <a:t>Jetson Nano 4GB</a:t>
+            </a:r>
+          </a:p>
+          <a:p xmlns:a="http://schemas.openxmlformats.org/drawingml/2006/main">
+            <a:pPr>
+              <a:defRPr sz="1950" b="0">
+                <a:solidFill>
+                  <a:srgbClr val="52635B"/>
+                </a:solidFill>
+                <a:latin typeface="Arial"/>
+                <a:ea typeface="Arial"/>
+                <a:cs typeface="Arial"/>
+              </a:defRPr>
+            </a:pPr>
+            <a:r>
+              <a:rPr sz="1950" b="0">
+                <a:solidFill>
+                  <a:srgbClr val="52635B"/>
+                </a:solidFill>
+                <a:latin typeface="Arial"/>
+                <a:ea typeface="Arial"/>
+                <a:cs typeface="Arial"/>
+              </a:rPr>
+              <a:t>JetPack 4 / Ubuntu 18.04</a:t>
+            </a:r>
+          </a:p>
+          <a:p xmlns:a="http://schemas.openxmlformats.org/drawingml/2006/main">
+            <a:pPr>
+              <a:defRPr sz="1950" b="0">
+                <a:solidFill>
+                  <a:srgbClr val="52635B"/>
+                </a:solidFill>
+                <a:latin typeface="Arial"/>
+                <a:ea typeface="Arial"/>
+                <a:cs typeface="Arial"/>
+              </a:defRPr>
+            </a:pPr>
+            <a:r>
+              <a:rPr sz="1950" b="0">
+                <a:solidFill>
+                  <a:srgbClr val="52635B"/>
+                </a:solidFill>
+                <a:latin typeface="Arial"/>
+                <a:ea typeface="Arial"/>
+                <a:cs typeface="Arial"/>
+              </a:rPr>
+              <a:t>Python 3.6</a:t>
             </a:r>
           </a:p>
         </p:txBody>
@@ -2186,7 +1958,7 @@
     </p:spTree>
     <p:extLst>
       <p:ext uri="{BB962C8B-B14F-4D97-AF65-F5344CB8AC3E}">
-        <p14:creationId xmlns:p14="http://schemas.microsoft.com/office/powerpoint/2010/main" val="1809943120"/>
+        <p14:creationId xmlns:p14="http://schemas.microsoft.com/office/powerpoint/2010/main" val="153984656"/>
       </p:ext>
     </p:extLst>
   </p:cSld>
@@ -2217,7 +1989,7 @@
           <p:cNvPr id="11" name="">
             <a:extLst xmlns:a="http://schemas.openxmlformats.org/drawingml/2006/main">
               <a:ext uri="{FF2B5EF4-FFF2-40B4-BE49-F238E27FC236}">
-                <a16:creationId xmlns:a16="http://schemas.microsoft.com/office/drawing/2014/main" id="{C3952B3D-2EDE-4DF9-A5DD-FEDCD7A65305}"/>
+                <a16:creationId xmlns:a16="http://schemas.microsoft.com/office/drawing/2014/main" id="{194A2950-9D62-4123-A4D0-1EBB216DAEC6}"/>
               </a:ext>
             </a:extLst>
           </p:cNvPr>
@@ -2264,7 +2036,7 @@
                 <a:ea typeface="Arial"/>
                 <a:cs typeface="Arial"/>
               </a:rPr>
-              <a:t>A classroom sequence</a:t>
+              <a:t>Menu Controls</a:t>
             </a:r>
           </a:p>
         </p:txBody>
@@ -2274,121 +2046,7 @@
           <p:cNvPr id="2" name="">
             <a:extLst xmlns:a="http://schemas.openxmlformats.org/drawingml/2006/main">
               <a:ext uri="{FF2B5EF4-FFF2-40B4-BE49-F238E27FC236}">
-                <a16:creationId xmlns:a16="http://schemas.microsoft.com/office/drawing/2014/main" id="{9DF5FB92-DF7E-49B7-A58B-BBA48F3FDD47}"/>
-              </a:ext>
-            </a:extLst>
-          </p:cNvPr>
-          <p:cNvSpPr>
-            <a:spLocks xmlns:a="http://schemas.openxmlformats.org/drawingml/2006/main" noGrp="1"/>
-          </p:cNvSpPr>
-          <p:nvPr/>
-        </p:nvSpPr>
-        <p:spPr>
-          <a:xfrm xmlns:a="http://schemas.openxmlformats.org/drawingml/2006/main">
-            <a:off x="666750" y="1333500"/>
-            <a:ext cx="10858500" cy="619125"/>
-          </a:xfrm>
-          <a:prstGeom xmlns:a="http://schemas.openxmlformats.org/drawingml/2006/main" prst="rect">
-            <a:avLst/>
-          </a:prstGeom>
-          <a:noFill xmlns:a="http://schemas.openxmlformats.org/drawingml/2006/main"/>
-          <a:ln xmlns:a="http://schemas.openxmlformats.org/drawingml/2006/main" w="0">
-            <a:noFill/>
-          </a:ln>
-        </p:spPr>
-        <p:txBody>
-          <a:bodyPr xmlns:a="http://schemas.openxmlformats.org/drawingml/2006/main">
-            <a:noAutofit/>
-          </a:bodyPr>
-          <a:lstStyle xmlns:a="http://schemas.openxmlformats.org/drawingml/2006/main"/>
-          <a:p xmlns:a="http://schemas.openxmlformats.org/drawingml/2006/main">
-            <a:pPr>
-              <a:defRPr sz="1950" b="0">
-                <a:solidFill>
-                  <a:srgbClr val="52635B"/>
-                </a:solidFill>
-                <a:latin typeface="Arial"/>
-                <a:ea typeface="Arial"/>
-                <a:cs typeface="Arial"/>
-              </a:defRPr>
-            </a:pPr>
-            <a:r>
-              <a:rPr sz="1950" b="0">
-                <a:solidFill>
-                  <a:srgbClr val="52635B"/>
-                </a:solidFill>
-                <a:latin typeface="Arial"/>
-                <a:ea typeface="Arial"/>
-                <a:cs typeface="Arial"/>
-              </a:rPr>
-              <a:t>Choose a few experiments and let the audience steer.</a:t>
-            </a:r>
-          </a:p>
-        </p:txBody>
-      </p:sp>
-      <p:sp>
-        <p:nvSpPr>
-          <p:cNvPr id="3" name="">
-            <a:extLst xmlns:a="http://schemas.openxmlformats.org/drawingml/2006/main">
-              <a:ext uri="{FF2B5EF4-FFF2-40B4-BE49-F238E27FC236}">
-                <a16:creationId xmlns:a16="http://schemas.microsoft.com/office/drawing/2014/main" id="{5252BF21-84FC-489F-AFC7-111D58066FAA}"/>
-              </a:ext>
-            </a:extLst>
-          </p:cNvPr>
-          <p:cNvSpPr>
-            <a:spLocks xmlns:a="http://schemas.openxmlformats.org/drawingml/2006/main" noGrp="1"/>
-          </p:cNvSpPr>
-          <p:nvPr/>
-        </p:nvSpPr>
-        <p:spPr>
-          <a:xfrm xmlns:a="http://schemas.openxmlformats.org/drawingml/2006/main">
-            <a:off x="666750" y="6191250"/>
-            <a:ext cx="10287000" cy="419100"/>
-          </a:xfrm>
-          <a:prstGeom xmlns:a="http://schemas.openxmlformats.org/drawingml/2006/main" prst="rect">
-            <a:avLst/>
-          </a:prstGeom>
-          <a:noFill xmlns:a="http://schemas.openxmlformats.org/drawingml/2006/main"/>
-          <a:ln xmlns:a="http://schemas.openxmlformats.org/drawingml/2006/main" w="0">
-            <a:noFill/>
-          </a:ln>
-        </p:spPr>
-        <p:txBody>
-          <a:bodyPr xmlns:a="http://schemas.openxmlformats.org/drawingml/2006/main">
-            <a:noAutofit/>
-          </a:bodyPr>
-          <a:lstStyle xmlns:a="http://schemas.openxmlformats.org/drawingml/2006/main"/>
-          <a:p xmlns:a="http://schemas.openxmlformats.org/drawingml/2006/main">
-            <a:pPr>
-              <a:defRPr sz="1350" b="0">
-                <a:solidFill>
-                  <a:srgbClr val="52635B"/>
-                </a:solidFill>
-                <a:latin typeface="Arial"/>
-                <a:ea typeface="Arial"/>
-                <a:cs typeface="Arial"/>
-              </a:defRPr>
-            </a:pPr>
-            <a:r>
-              <a:rPr sz="1350" b="0">
-                <a:solidFill>
-                  <a:srgbClr val="52635B"/>
-                </a:solidFill>
-                <a:latin typeface="Arial"/>
-                <a:ea typeface="Arial"/>
-                <a:cs typeface="Arial"/>
-              </a:rPr>
-              <a:t>Start with a conversation, invite a plot twist, then bring the camera into the demonstration.</a:t>
-            </a:r>
-          </a:p>
-        </p:txBody>
-      </p:sp>
-      <p:sp>
-        <p:nvSpPr>
-          <p:cNvPr id="4" name="">
-            <a:extLst xmlns:a="http://schemas.openxmlformats.org/drawingml/2006/main">
-              <a:ext uri="{FF2B5EF4-FFF2-40B4-BE49-F238E27FC236}">
-                <a16:creationId xmlns:a16="http://schemas.microsoft.com/office/drawing/2014/main" id="{33A8B963-5181-492D-B70F-032C96C7ECAA}"/>
+                <a16:creationId xmlns:a16="http://schemas.microsoft.com/office/drawing/2014/main" id="{0283958C-2EA1-45A1-88EA-3324D6E9FC44}"/>
               </a:ext>
             </a:extLst>
           </p:cNvPr>
@@ -2442,10 +2100,10 @@
       </p:sp>
       <p:sp>
         <p:nvSpPr>
-          <p:cNvPr id="5" name="">
+          <p:cNvPr id="3" name="">
             <a:extLst xmlns:a="http://schemas.openxmlformats.org/drawingml/2006/main">
               <a:ext uri="{FF2B5EF4-FFF2-40B4-BE49-F238E27FC236}">
-                <a16:creationId xmlns:a16="http://schemas.microsoft.com/office/drawing/2014/main" id="{CBE98558-B21D-48A0-95F9-4E3F561C6AD5}"/>
+                <a16:creationId xmlns:a16="http://schemas.microsoft.com/office/drawing/2014/main" id="{1E710248-A880-459C-B7D8-311EEC2CFC61}"/>
               </a:ext>
             </a:extLst>
           </p:cNvPr>
@@ -2456,8 +2114,8 @@
         </p:nvSpPr>
         <p:spPr>
           <a:xfrm xmlns:a="http://schemas.openxmlformats.org/drawingml/2006/main">
-            <a:off x="714375" y="2181225"/>
-            <a:ext cx="10287000" cy="476250"/>
+            <a:off x="714375" y="2095500"/>
+            <a:ext cx="2667000" cy="476250"/>
           </a:xfrm>
           <a:prstGeom xmlns:a="http://schemas.openxmlformats.org/drawingml/2006/main" prst="rect">
             <a:avLst/>
@@ -2474,7 +2132,7 @@
           <a:lstStyle xmlns:a="http://schemas.openxmlformats.org/drawingml/2006/main"/>
           <a:p xmlns:a="http://schemas.openxmlformats.org/drawingml/2006/main">
             <a:pPr>
-              <a:defRPr sz="2550" b="1">
+              <a:defRPr sz="2400" b="1">
                 <a:solidFill>
                   <a:srgbClr val="19332A"/>
                 </a:solidFill>
@@ -2484,7 +2142,7 @@
               </a:defRPr>
             </a:pPr>
             <a:r>
-              <a:rPr sz="2550" b="1">
+              <a:rPr sz="2400" b="1">
                 <a:solidFill>
                   <a:srgbClr val="19332A"/>
                 </a:solidFill>
@@ -2492,17 +2150,17 @@
                 <a:ea typeface="Arial"/>
                 <a:cs typeface="Arial"/>
               </a:rPr>
-              <a:t>Start with an assistant</a:t>
-            </a:r>
-          </a:p>
-        </p:txBody>
-      </p:sp>
-      <p:sp>
-        <p:nvSpPr>
-          <p:cNvPr id="6" name="">
+              <a:t>Run</a:t>
+            </a:r>
+          </a:p>
+        </p:txBody>
+      </p:sp>
+      <p:sp>
+        <p:nvSpPr>
+          <p:cNvPr id="4" name="">
             <a:extLst xmlns:a="http://schemas.openxmlformats.org/drawingml/2006/main">
               <a:ext uri="{FF2B5EF4-FFF2-40B4-BE49-F238E27FC236}">
-                <a16:creationId xmlns:a16="http://schemas.microsoft.com/office/drawing/2014/main" id="{C3EB005F-47B3-4945-8754-EA440C1DF125}"/>
+                <a16:creationId xmlns:a16="http://schemas.microsoft.com/office/drawing/2014/main" id="{A119ED20-7498-4513-9BFB-F42F2EBF7790}"/>
               </a:ext>
             </a:extLst>
           </p:cNvPr>
@@ -2513,8 +2171,8 @@
         </p:nvSpPr>
         <p:spPr>
           <a:xfrm xmlns:a="http://schemas.openxmlformats.org/drawingml/2006/main">
-            <a:off x="742950" y="2695575"/>
-            <a:ext cx="10668000" cy="476250"/>
+            <a:off x="3429000" y="2114550"/>
+            <a:ext cx="7810500" cy="523875"/>
           </a:xfrm>
           <a:prstGeom xmlns:a="http://schemas.openxmlformats.org/drawingml/2006/main" prst="rect">
             <a:avLst/>
@@ -2531,7 +2189,7 @@
           <a:lstStyle xmlns:a="http://schemas.openxmlformats.org/drawingml/2006/main"/>
           <a:p xmlns:a="http://schemas.openxmlformats.org/drawingml/2006/main">
             <a:pPr>
-              <a:defRPr sz="1950" b="0">
+              <a:defRPr sz="2100" b="0">
                 <a:solidFill>
                   <a:srgbClr val="52635B"/>
                 </a:solidFill>
@@ -2541,7 +2199,7 @@
               </a:defRPr>
             </a:pPr>
             <a:r>
-              <a:rPr sz="1950" b="0">
+              <a:rPr sz="2100" b="0">
                 <a:solidFill>
                   <a:srgbClr val="52635B"/>
                 </a:solidFill>
@@ -2549,17 +2207,17 @@
                 <a:ea typeface="Arial"/>
                 <a:cs typeface="Arial"/>
               </a:rPr>
-              <a:t>15 Mission Control or 17 Story Director gives students a task to direct.</a:t>
-            </a:r>
-          </a:p>
-        </p:txBody>
-      </p:sp>
-      <p:sp>
-        <p:nvSpPr>
-          <p:cNvPr id="7" name="">
+              <a:t>Enter the experiment number.</a:t>
+            </a:r>
+          </a:p>
+        </p:txBody>
+      </p:sp>
+      <p:sp>
+        <p:nvSpPr>
+          <p:cNvPr id="5" name="">
             <a:extLst xmlns:a="http://schemas.openxmlformats.org/drawingml/2006/main">
               <a:ext uri="{FF2B5EF4-FFF2-40B4-BE49-F238E27FC236}">
-                <a16:creationId xmlns:a16="http://schemas.microsoft.com/office/drawing/2014/main" id="{19F3F0B1-2928-46D8-9C61-0C6CB34BB256}"/>
+                <a16:creationId xmlns:a16="http://schemas.microsoft.com/office/drawing/2014/main" id="{F858729D-5EE4-49F9-84A4-499DB83BDC33}"/>
               </a:ext>
             </a:extLst>
           </p:cNvPr>
@@ -2570,8 +2228,8 @@
         </p:nvSpPr>
         <p:spPr>
           <a:xfrm xmlns:a="http://schemas.openxmlformats.org/drawingml/2006/main">
-            <a:off x="714375" y="3457575"/>
-            <a:ext cx="10287000" cy="476250"/>
+            <a:off x="714375" y="3048000"/>
+            <a:ext cx="2667000" cy="476250"/>
           </a:xfrm>
           <a:prstGeom xmlns:a="http://schemas.openxmlformats.org/drawingml/2006/main" prst="rect">
             <a:avLst/>
@@ -2588,7 +2246,7 @@
           <a:lstStyle xmlns:a="http://schemas.openxmlformats.org/drawingml/2006/main"/>
           <a:p xmlns:a="http://schemas.openxmlformats.org/drawingml/2006/main">
             <a:pPr>
-              <a:defRPr sz="2550" b="1">
+              <a:defRPr sz="2400" b="1">
                 <a:solidFill>
                   <a:srgbClr val="19332A"/>
                 </a:solidFill>
@@ -2598,7 +2256,7 @@
               </a:defRPr>
             </a:pPr>
             <a:r>
-              <a:rPr sz="2550" b="1">
+              <a:rPr sz="2400" b="1">
                 <a:solidFill>
                   <a:srgbClr val="19332A"/>
                 </a:solidFill>
@@ -2606,17 +2264,17 @@
                 <a:ea typeface="Arial"/>
                 <a:cs typeface="Arial"/>
               </a:rPr>
-              <a:t>Introduce the camera</a:t>
-            </a:r>
-          </a:p>
-        </p:txBody>
-      </p:sp>
-      <p:sp>
-        <p:nvSpPr>
-          <p:cNvPr id="8" name="">
+              <a:t>Cancel</a:t>
+            </a:r>
+          </a:p>
+        </p:txBody>
+      </p:sp>
+      <p:sp>
+        <p:nvSpPr>
+          <p:cNvPr id="6" name="">
             <a:extLst xmlns:a="http://schemas.openxmlformats.org/drawingml/2006/main">
               <a:ext uri="{FF2B5EF4-FFF2-40B4-BE49-F238E27FC236}">
-                <a16:creationId xmlns:a16="http://schemas.microsoft.com/office/drawing/2014/main" id="{56AA2B63-EDA5-4390-A9E2-188B8DE2A074}"/>
+                <a16:creationId xmlns:a16="http://schemas.microsoft.com/office/drawing/2014/main" id="{4737F967-45C1-4BBD-92B1-56325A80786C}"/>
               </a:ext>
             </a:extLst>
           </p:cNvPr>
@@ -2627,8 +2285,8 @@
         </p:nvSpPr>
         <p:spPr>
           <a:xfrm xmlns:a="http://schemas.openxmlformats.org/drawingml/2006/main">
-            <a:off x="742950" y="3971925"/>
-            <a:ext cx="10668000" cy="476250"/>
+            <a:off x="3429000" y="3067050"/>
+            <a:ext cx="7810500" cy="762000"/>
           </a:xfrm>
           <a:prstGeom xmlns:a="http://schemas.openxmlformats.org/drawingml/2006/main" prst="rect">
             <a:avLst/>
@@ -2645,7 +2303,7 @@
           <a:lstStyle xmlns:a="http://schemas.openxmlformats.org/drawingml/2006/main"/>
           <a:p xmlns:a="http://schemas.openxmlformats.org/drawingml/2006/main">
             <a:pPr>
-              <a:defRPr sz="1950" b="0">
+              <a:defRPr sz="2100" b="0">
                 <a:solidFill>
                   <a:srgbClr val="52635B"/>
                 </a:solidFill>
@@ -2655,7 +2313,7 @@
               </a:defRPr>
             </a:pPr>
             <a:r>
-              <a:rPr sz="1950" b="0">
+              <a:rPr sz="2100" b="0">
                 <a:solidFill>
                   <a:srgbClr val="52635B"/>
                 </a:solidFill>
@@ -2663,17 +2321,17 @@
                 <a:ea typeface="Arial"/>
                 <a:cs typeface="Arial"/>
               </a:rPr>
-              <a:t>18 Scene Memory turns a small change on the desk into evidence to discuss.</a:t>
-            </a:r>
-          </a:p>
-        </p:txBody>
-      </p:sp>
-      <p:sp>
-        <p:nvSpPr>
-          <p:cNvPr id="9" name="">
+              <a:t>Ctrl+C stops the active demo and returns to the menu.</a:t>
+            </a:r>
+          </a:p>
+        </p:txBody>
+      </p:sp>
+      <p:sp>
+        <p:nvSpPr>
+          <p:cNvPr id="7" name="">
             <a:extLst xmlns:a="http://schemas.openxmlformats.org/drawingml/2006/main">
               <a:ext uri="{FF2B5EF4-FFF2-40B4-BE49-F238E27FC236}">
-                <a16:creationId xmlns:a16="http://schemas.microsoft.com/office/drawing/2014/main" id="{2BD6389B-8CBA-4810-B55D-F1D680D06036}"/>
+                <a16:creationId xmlns:a16="http://schemas.microsoft.com/office/drawing/2014/main" id="{08057652-AD49-4ED6-A493-1CCCF21F3D56}"/>
               </a:ext>
             </a:extLst>
           </p:cNvPr>
@@ -2684,8 +2342,8 @@
         </p:nvSpPr>
         <p:spPr>
           <a:xfrm xmlns:a="http://schemas.openxmlformats.org/drawingml/2006/main">
-            <a:off x="714375" y="4733925"/>
-            <a:ext cx="10287000" cy="476250"/>
+            <a:off x="714375" y="4191000"/>
+            <a:ext cx="2667000" cy="476250"/>
           </a:xfrm>
           <a:prstGeom xmlns:a="http://schemas.openxmlformats.org/drawingml/2006/main" prst="rect">
             <a:avLst/>
@@ -2702,7 +2360,7 @@
           <a:lstStyle xmlns:a="http://schemas.openxmlformats.org/drawingml/2006/main"/>
           <a:p xmlns:a="http://schemas.openxmlformats.org/drawingml/2006/main">
             <a:pPr>
-              <a:defRPr sz="2550" b="1">
+              <a:defRPr sz="2400" b="1">
                 <a:solidFill>
                   <a:srgbClr val="19332A"/>
                 </a:solidFill>
@@ -2712,7 +2370,7 @@
               </a:defRPr>
             </a:pPr>
             <a:r>
-              <a:rPr sz="2550" b="1">
+              <a:rPr sz="2400" b="1">
                 <a:solidFill>
                   <a:srgbClr val="19332A"/>
                 </a:solidFill>
@@ -2720,17 +2378,17 @@
                 <a:ea typeface="Arial"/>
                 <a:cs typeface="Arial"/>
               </a:rPr>
-              <a:t>Recover and repeat</a:t>
-            </a:r>
-          </a:p>
-        </p:txBody>
-      </p:sp>
-      <p:sp>
-        <p:nvSpPr>
-          <p:cNvPr id="10" name="">
+              <a:t>Exit</a:t>
+            </a:r>
+          </a:p>
+        </p:txBody>
+      </p:sp>
+      <p:sp>
+        <p:nvSpPr>
+          <p:cNvPr id="8" name="">
             <a:extLst xmlns:a="http://schemas.openxmlformats.org/drawingml/2006/main">
               <a:ext uri="{FF2B5EF4-FFF2-40B4-BE49-F238E27FC236}">
-                <a16:creationId xmlns:a16="http://schemas.microsoft.com/office/drawing/2014/main" id="{C23ED6FD-9E21-4643-A903-79C5821F9CFA}"/>
+                <a16:creationId xmlns:a16="http://schemas.microsoft.com/office/drawing/2014/main" id="{DA73CBB5-5680-4E43-A01B-9B7F20C6A7AA}"/>
               </a:ext>
             </a:extLst>
           </p:cNvPr>
@@ -2741,8 +2399,8 @@
         </p:nvSpPr>
         <p:spPr>
           <a:xfrm xmlns:a="http://schemas.openxmlformats.org/drawingml/2006/main">
-            <a:off x="742950" y="5248275"/>
-            <a:ext cx="10668000" cy="619125"/>
+            <a:off x="3429000" y="4210050"/>
+            <a:ext cx="7810500" cy="523875"/>
           </a:xfrm>
           <a:prstGeom xmlns:a="http://schemas.openxmlformats.org/drawingml/2006/main" prst="rect">
             <a:avLst/>
@@ -2759,7 +2417,7 @@
           <a:lstStyle xmlns:a="http://schemas.openxmlformats.org/drawingml/2006/main"/>
           <a:p xmlns:a="http://schemas.openxmlformats.org/drawingml/2006/main">
             <a:pPr>
-              <a:defRPr sz="1875" b="0">
+              <a:defRPr sz="2100" b="0">
                 <a:solidFill>
                   <a:srgbClr val="52635B"/>
                 </a:solidFill>
@@ -2769,7 +2427,7 @@
               </a:defRPr>
             </a:pPr>
             <a:r>
-              <a:rPr sz="1875" b="0">
+              <a:rPr sz="2100" b="0">
                 <a:solidFill>
                   <a:srgbClr val="52635B"/>
                 </a:solidFill>
@@ -2777,7 +2435,121 @@
                 <a:ea typeface="Arial"/>
                 <a:cs typeface="Arial"/>
               </a:rPr>
-              <a:t>Ctrl+C returns to the menu. 0 exits. 21 runs the prepared demonstration sequence.</a:t>
+              <a:t>Enter 0.</a:t>
+            </a:r>
+          </a:p>
+        </p:txBody>
+      </p:sp>
+      <p:sp>
+        <p:nvSpPr>
+          <p:cNvPr id="9" name="">
+            <a:extLst xmlns:a="http://schemas.openxmlformats.org/drawingml/2006/main">
+              <a:ext uri="{FF2B5EF4-FFF2-40B4-BE49-F238E27FC236}">
+                <a16:creationId xmlns:a16="http://schemas.microsoft.com/office/drawing/2014/main" id="{6E6DAB77-5ED2-47E5-85FF-281BEB12D136}"/>
+              </a:ext>
+            </a:extLst>
+          </p:cNvPr>
+          <p:cNvSpPr>
+            <a:spLocks xmlns:a="http://schemas.openxmlformats.org/drawingml/2006/main" noGrp="1"/>
+          </p:cNvSpPr>
+          <p:nvPr/>
+        </p:nvSpPr>
+        <p:spPr>
+          <a:xfrm xmlns:a="http://schemas.openxmlformats.org/drawingml/2006/main">
+            <a:off x="714375" y="5143500"/>
+            <a:ext cx="2667000" cy="476250"/>
+          </a:xfrm>
+          <a:prstGeom xmlns:a="http://schemas.openxmlformats.org/drawingml/2006/main" prst="rect">
+            <a:avLst/>
+          </a:prstGeom>
+          <a:noFill xmlns:a="http://schemas.openxmlformats.org/drawingml/2006/main"/>
+          <a:ln xmlns:a="http://schemas.openxmlformats.org/drawingml/2006/main" w="0">
+            <a:noFill/>
+          </a:ln>
+        </p:spPr>
+        <p:txBody>
+          <a:bodyPr xmlns:a="http://schemas.openxmlformats.org/drawingml/2006/main">
+            <a:noAutofit/>
+          </a:bodyPr>
+          <a:lstStyle xmlns:a="http://schemas.openxmlformats.org/drawingml/2006/main"/>
+          <a:p xmlns:a="http://schemas.openxmlformats.org/drawingml/2006/main">
+            <a:pPr>
+              <a:defRPr sz="2400" b="1">
+                <a:solidFill>
+                  <a:srgbClr val="19332A"/>
+                </a:solidFill>
+                <a:latin typeface="Arial"/>
+                <a:ea typeface="Arial"/>
+                <a:cs typeface="Arial"/>
+              </a:defRPr>
+            </a:pPr>
+            <a:r>
+              <a:rPr sz="2400" b="1">
+                <a:solidFill>
+                  <a:srgbClr val="19332A"/>
+                </a:solidFill>
+                <a:latin typeface="Arial"/>
+                <a:ea typeface="Arial"/>
+                <a:cs typeface="Arial"/>
+              </a:rPr>
+              <a:t>Sequence</a:t>
+            </a:r>
+          </a:p>
+        </p:txBody>
+      </p:sp>
+      <p:sp>
+        <p:nvSpPr>
+          <p:cNvPr id="10" name="">
+            <a:extLst xmlns:a="http://schemas.openxmlformats.org/drawingml/2006/main">
+              <a:ext uri="{FF2B5EF4-FFF2-40B4-BE49-F238E27FC236}">
+                <a16:creationId xmlns:a16="http://schemas.microsoft.com/office/drawing/2014/main" id="{ADB496BF-27A7-4FA3-A499-A40F905DFB7E}"/>
+              </a:ext>
+            </a:extLst>
+          </p:cNvPr>
+          <p:cNvSpPr>
+            <a:spLocks xmlns:a="http://schemas.openxmlformats.org/drawingml/2006/main" noGrp="1"/>
+          </p:cNvSpPr>
+          <p:nvPr/>
+        </p:nvSpPr>
+        <p:spPr>
+          <a:xfrm xmlns:a="http://schemas.openxmlformats.org/drawingml/2006/main">
+            <a:off x="3429000" y="5162550"/>
+            <a:ext cx="7810500" cy="762000"/>
+          </a:xfrm>
+          <a:prstGeom xmlns:a="http://schemas.openxmlformats.org/drawingml/2006/main" prst="rect">
+            <a:avLst/>
+          </a:prstGeom>
+          <a:noFill xmlns:a="http://schemas.openxmlformats.org/drawingml/2006/main"/>
+          <a:ln xmlns:a="http://schemas.openxmlformats.org/drawingml/2006/main" w="0">
+            <a:noFill/>
+          </a:ln>
+        </p:spPr>
+        <p:txBody>
+          <a:bodyPr xmlns:a="http://schemas.openxmlformats.org/drawingml/2006/main">
+            <a:noAutofit/>
+          </a:bodyPr>
+          <a:lstStyle xmlns:a="http://schemas.openxmlformats.org/drawingml/2006/main"/>
+          <a:p xmlns:a="http://schemas.openxmlformats.org/drawingml/2006/main">
+            <a:pPr>
+              <a:defRPr sz="2100" b="0">
+                <a:solidFill>
+                  <a:srgbClr val="52635B"/>
+                </a:solidFill>
+                <a:latin typeface="Arial"/>
+                <a:ea typeface="Arial"/>
+                <a:cs typeface="Arial"/>
+              </a:defRPr>
+            </a:pPr>
+            <a:r>
+              <a:rPr sz="2100" b="0">
+                <a:solidFill>
+                  <a:srgbClr val="52635B"/>
+                </a:solidFill>
+                <a:latin typeface="Arial"/>
+                <a:ea typeface="Arial"/>
+                <a:cs typeface="Arial"/>
+              </a:rPr>
+              <a:t>Enter 21 to run the prepared demonstrations.</a:t>
             </a:r>
           </a:p>
         </p:txBody>
@@ -2785,7 +2557,7 @@
     </p:spTree>
     <p:extLst>
       <p:ext uri="{BB962C8B-B14F-4D97-AF65-F5344CB8AC3E}">
-        <p14:creationId xmlns:p14="http://schemas.microsoft.com/office/powerpoint/2010/main" val="624355846"/>
+        <p14:creationId xmlns:p14="http://schemas.microsoft.com/office/powerpoint/2010/main" val="751267710"/>
       </p:ext>
     </p:extLst>
   </p:cSld>
@@ -2813,10 +2585,10 @@
       </p:grpSpPr>
       <p:sp>
         <p:nvSpPr>
-          <p:cNvPr id="14" name="">
+          <p:cNvPr id="9" name="">
             <a:extLst xmlns:a="http://schemas.openxmlformats.org/drawingml/2006/main">
               <a:ext uri="{FF2B5EF4-FFF2-40B4-BE49-F238E27FC236}">
-                <a16:creationId xmlns:a16="http://schemas.microsoft.com/office/drawing/2014/main" id="{E249BB3B-3496-4B0F-81C3-033DD8A6921B}"/>
+                <a16:creationId xmlns:a16="http://schemas.microsoft.com/office/drawing/2014/main" id="{1458723E-47F9-4C51-B72D-1C713527F837}"/>
               </a:ext>
             </a:extLst>
           </p:cNvPr>
@@ -2863,7 +2635,7 @@
                 <a:ea typeface="Arial"/>
                 <a:cs typeface="Arial"/>
               </a:rPr>
-              <a:t>Setup and the experiment menu</a:t>
+              <a:t>Setup</a:t>
             </a:r>
           </a:p>
         </p:txBody>
@@ -2873,7 +2645,7 @@
           <p:cNvPr id="2" name="">
             <a:extLst xmlns:a="http://schemas.openxmlformats.org/drawingml/2006/main">
               <a:ext uri="{FF2B5EF4-FFF2-40B4-BE49-F238E27FC236}">
-                <a16:creationId xmlns:a16="http://schemas.microsoft.com/office/drawing/2014/main" id="{7A60ECE8-7FDD-473B-AACA-5C11AB29F4BA}"/>
+                <a16:creationId xmlns:a16="http://schemas.microsoft.com/office/drawing/2014/main" id="{9DEFAD9B-EA9C-49E2-835B-6C8AF6207800}"/>
               </a:ext>
             </a:extLst>
           </p:cNvPr>
@@ -2920,7 +2692,7 @@
                 <a:ea typeface="Arial"/>
                 <a:cs typeface="Arial"/>
               </a:rPr>
-              <a:t>Run these commands in a terminal on the Nano.</a:t>
+              <a:t>Run in a terminal on the Nano.</a:t>
             </a:r>
           </a:p>
         </p:txBody>
@@ -2930,64 +2702,7 @@
           <p:cNvPr id="3" name="">
             <a:extLst xmlns:a="http://schemas.openxmlformats.org/drawingml/2006/main">
               <a:ext uri="{FF2B5EF4-FFF2-40B4-BE49-F238E27FC236}">
-                <a16:creationId xmlns:a16="http://schemas.microsoft.com/office/drawing/2014/main" id="{E1B0C650-546B-4D1D-BE08-6B38301F309C}"/>
-              </a:ext>
-            </a:extLst>
-          </p:cNvPr>
-          <p:cNvSpPr>
-            <a:spLocks xmlns:a="http://schemas.openxmlformats.org/drawingml/2006/main" noGrp="1"/>
-          </p:cNvSpPr>
-          <p:nvPr/>
-        </p:nvSpPr>
-        <p:spPr>
-          <a:xfrm xmlns:a="http://schemas.openxmlformats.org/drawingml/2006/main">
-            <a:off x="666750" y="6191250"/>
-            <a:ext cx="10287000" cy="419100"/>
-          </a:xfrm>
-          <a:prstGeom xmlns:a="http://schemas.openxmlformats.org/drawingml/2006/main" prst="rect">
-            <a:avLst/>
-          </a:prstGeom>
-          <a:noFill xmlns:a="http://schemas.openxmlformats.org/drawingml/2006/main"/>
-          <a:ln xmlns:a="http://schemas.openxmlformats.org/drawingml/2006/main" w="0">
-            <a:noFill/>
-          </a:ln>
-        </p:spPr>
-        <p:txBody>
-          <a:bodyPr xmlns:a="http://schemas.openxmlformats.org/drawingml/2006/main">
-            <a:noAutofit/>
-          </a:bodyPr>
-          <a:lstStyle xmlns:a="http://schemas.openxmlformats.org/drawingml/2006/main"/>
-          <a:p xmlns:a="http://schemas.openxmlformats.org/drawingml/2006/main">
-            <a:pPr>
-              <a:defRPr sz="1350" b="0">
-                <a:solidFill>
-                  <a:srgbClr val="52635B"/>
-                </a:solidFill>
-                <a:latin typeface="Arial"/>
-                <a:ea typeface="Arial"/>
-                <a:cs typeface="Arial"/>
-              </a:defRPr>
-            </a:pPr>
-            <a:r>
-              <a:rPr sz="1350" b="0">
-                <a:solidFill>
-                  <a:srgbClr val="52635B"/>
-                </a:solidFill>
-                <a:latin typeface="Arial"/>
-                <a:ea typeface="Arial"/>
-                <a:cs typeface="Arial"/>
-              </a:rPr>
-              <a:t>Prepare once, then choose a local AI experiment by its menu number.</a:t>
-            </a:r>
-          </a:p>
-        </p:txBody>
-      </p:sp>
-      <p:sp>
-        <p:nvSpPr>
-          <p:cNvPr id="4" name="">
-            <a:extLst xmlns:a="http://schemas.openxmlformats.org/drawingml/2006/main">
-              <a:ext uri="{FF2B5EF4-FFF2-40B4-BE49-F238E27FC236}">
-                <a16:creationId xmlns:a16="http://schemas.microsoft.com/office/drawing/2014/main" id="{C884B7E3-C81E-4A04-A6E7-0C5452ABD5EB}"/>
+                <a16:creationId xmlns:a16="http://schemas.microsoft.com/office/drawing/2014/main" id="{543A3E33-311F-446A-8A07-D593FCD4D5B5}"/>
               </a:ext>
             </a:extLst>
           </p:cNvPr>
@@ -3041,10 +2756,10 @@
       </p:sp>
       <p:sp>
         <p:nvSpPr>
-          <p:cNvPr id="5" name="">
+          <p:cNvPr id="4" name="">
             <a:extLst xmlns:a="http://schemas.openxmlformats.org/drawingml/2006/main">
               <a:ext uri="{FF2B5EF4-FFF2-40B4-BE49-F238E27FC236}">
-                <a16:creationId xmlns:a16="http://schemas.microsoft.com/office/drawing/2014/main" id="{5912FAA5-619F-4479-BF73-44A2DA90D71F}"/>
+                <a16:creationId xmlns:a16="http://schemas.microsoft.com/office/drawing/2014/main" id="{CB735A41-3B9B-4339-B915-BFA2D5364F30}"/>
               </a:ext>
             </a:extLst>
           </p:cNvPr>
@@ -3098,10 +2813,10 @@
       </p:sp>
       <p:sp>
         <p:nvSpPr>
-          <p:cNvPr id="6" name="">
+          <p:cNvPr id="5" name="">
             <a:extLst xmlns:a="http://schemas.openxmlformats.org/drawingml/2006/main">
               <a:ext uri="{FF2B5EF4-FFF2-40B4-BE49-F238E27FC236}">
-                <a16:creationId xmlns:a16="http://schemas.microsoft.com/office/drawing/2014/main" id="{4DC9035A-760C-440B-BB84-4A63280DF73A}"/>
+                <a16:creationId xmlns:a16="http://schemas.microsoft.com/office/drawing/2014/main" id="{F80427A5-033C-4953-9974-A8BDEE4D9D32}"/>
               </a:ext>
             </a:extLst>
           </p:cNvPr>
@@ -3155,10 +2870,10 @@
       </p:sp>
       <p:sp>
         <p:nvSpPr>
-          <p:cNvPr id="7" name="">
+          <p:cNvPr id="6" name="">
             <a:extLst xmlns:a="http://schemas.openxmlformats.org/drawingml/2006/main">
               <a:ext uri="{FF2B5EF4-FFF2-40B4-BE49-F238E27FC236}">
-                <a16:creationId xmlns:a16="http://schemas.microsoft.com/office/drawing/2014/main" id="{BC72FDE0-176F-4EEE-9B6A-926169FE43A2}"/>
+                <a16:creationId xmlns:a16="http://schemas.microsoft.com/office/drawing/2014/main" id="{AC6588DC-384C-42A4-90FF-CDAA751CBC96}"/>
               </a:ext>
             </a:extLst>
           </p:cNvPr>
@@ -3212,10 +2927,10 @@
       </p:sp>
       <p:sp>
         <p:nvSpPr>
-          <p:cNvPr id="8" name="">
+          <p:cNvPr id="7" name="">
             <a:extLst xmlns:a="http://schemas.openxmlformats.org/drawingml/2006/main">
               <a:ext uri="{FF2B5EF4-FFF2-40B4-BE49-F238E27FC236}">
-                <a16:creationId xmlns:a16="http://schemas.microsoft.com/office/drawing/2014/main" id="{602850A4-3540-42D2-A4DE-0053D8690FA1}"/>
+                <a16:creationId xmlns:a16="http://schemas.microsoft.com/office/drawing/2014/main" id="{155AB4B2-33C6-431B-A985-B3B213A08E52}"/>
               </a:ext>
             </a:extLst>
           </p:cNvPr>
@@ -3227,7 +2942,7 @@
         <p:spPr>
           <a:xfrm xmlns:a="http://schemas.openxmlformats.org/drawingml/2006/main">
             <a:off x="742950" y="4762500"/>
-            <a:ext cx="2571750" cy="476250"/>
+            <a:ext cx="10477500" cy="476250"/>
           </a:xfrm>
           <a:prstGeom xmlns:a="http://schemas.openxmlformats.org/drawingml/2006/main" prst="rect">
             <a:avLst/>
@@ -3244,7 +2959,7 @@
           <a:lstStyle xmlns:a="http://schemas.openxmlformats.org/drawingml/2006/main"/>
           <a:p xmlns:a="http://schemas.openxmlformats.org/drawingml/2006/main">
             <a:pPr>
-              <a:defRPr sz="2175" b="1">
+              <a:defRPr sz="2025" b="0">
                 <a:solidFill>
                   <a:srgbClr val="19332A"/>
                 </a:solidFill>
@@ -3254,7 +2969,7 @@
               </a:defRPr>
             </a:pPr>
             <a:r>
-              <a:rPr sz="2175" b="1">
+              <a:rPr sz="2025" b="0">
                 <a:solidFill>
                   <a:srgbClr val="19332A"/>
                 </a:solidFill>
@@ -3262,17 +2977,17 @@
                 <a:ea typeface="Arial"/>
                 <a:cs typeface="Arial"/>
               </a:rPr>
-              <a:t>Prepare</a:t>
-            </a:r>
-          </a:p>
-        </p:txBody>
-      </p:sp>
-      <p:sp>
-        <p:nvSpPr>
-          <p:cNvPr id="9" name="">
+              <a:t>1  Install dependencies and models</a:t>
+            </a:r>
+          </a:p>
+        </p:txBody>
+      </p:sp>
+      <p:sp>
+        <p:nvSpPr>
+          <p:cNvPr id="8" name="">
             <a:extLst xmlns:a="http://schemas.openxmlformats.org/drawingml/2006/main">
               <a:ext uri="{FF2B5EF4-FFF2-40B4-BE49-F238E27FC236}">
-                <a16:creationId xmlns:a16="http://schemas.microsoft.com/office/drawing/2014/main" id="{04DC4B2D-9A69-44D8-B0B8-3F56FFB532DF}"/>
+                <a16:creationId xmlns:a16="http://schemas.microsoft.com/office/drawing/2014/main" id="{00347B2B-E400-49CE-8450-BB1614A664F7}"/>
               </a:ext>
             </a:extLst>
           </p:cNvPr>
@@ -3283,8 +2998,8 @@
         </p:nvSpPr>
         <p:spPr>
           <a:xfrm xmlns:a="http://schemas.openxmlformats.org/drawingml/2006/main">
-            <a:off x="742950" y="5248275"/>
-            <a:ext cx="2857500" cy="514350"/>
+            <a:off x="742950" y="5286375"/>
+            <a:ext cx="10477500" cy="476250"/>
           </a:xfrm>
           <a:prstGeom xmlns:a="http://schemas.openxmlformats.org/drawingml/2006/main" prst="rect">
             <a:avLst/>
@@ -3301,9 +3016,9 @@
           <a:lstStyle xmlns:a="http://schemas.openxmlformats.org/drawingml/2006/main"/>
           <a:p xmlns:a="http://schemas.openxmlformats.org/drawingml/2006/main">
             <a:pPr>
-              <a:defRPr sz="1800" b="0">
-                <a:solidFill>
-                  <a:srgbClr val="52635B"/>
+              <a:defRPr sz="2025" b="0">
+                <a:solidFill>
+                  <a:srgbClr val="19332A"/>
                 </a:solidFill>
                 <a:latin typeface="Arial"/>
                 <a:ea typeface="Arial"/>
@@ -3311,243 +3026,15 @@
               </a:defRPr>
             </a:pPr>
             <a:r>
-              <a:rPr sz="1800" b="0">
-                <a:solidFill>
-                  <a:srgbClr val="52635B"/>
+              <a:rPr sz="2025" b="0">
+                <a:solidFill>
+                  <a:srgbClr val="19332A"/>
                 </a:solidFill>
                 <a:latin typeface="Arial"/>
                 <a:ea typeface="Arial"/>
                 <a:cs typeface="Arial"/>
               </a:rPr>
-              <a:t>Choose 1 before class.</a:t>
-            </a:r>
-          </a:p>
-        </p:txBody>
-      </p:sp>
-      <p:sp>
-        <p:nvSpPr>
-          <p:cNvPr id="10" name="">
-            <a:extLst xmlns:a="http://schemas.openxmlformats.org/drawingml/2006/main">
-              <a:ext uri="{FF2B5EF4-FFF2-40B4-BE49-F238E27FC236}">
-                <a16:creationId xmlns:a16="http://schemas.microsoft.com/office/drawing/2014/main" id="{C2D2093F-4752-4CF0-815C-EB24FDB90871}"/>
-              </a:ext>
-            </a:extLst>
-          </p:cNvPr>
-          <p:cNvSpPr>
-            <a:spLocks xmlns:a="http://schemas.openxmlformats.org/drawingml/2006/main" noGrp="1"/>
-          </p:cNvSpPr>
-          <p:nvPr/>
-        </p:nvSpPr>
-        <p:spPr>
-          <a:xfrm xmlns:a="http://schemas.openxmlformats.org/drawingml/2006/main">
-            <a:off x="4314825" y="4762500"/>
-            <a:ext cx="2571750" cy="476250"/>
-          </a:xfrm>
-          <a:prstGeom xmlns:a="http://schemas.openxmlformats.org/drawingml/2006/main" prst="rect">
-            <a:avLst/>
-          </a:prstGeom>
-          <a:noFill xmlns:a="http://schemas.openxmlformats.org/drawingml/2006/main"/>
-          <a:ln xmlns:a="http://schemas.openxmlformats.org/drawingml/2006/main" w="0">
-            <a:noFill/>
-          </a:ln>
-        </p:spPr>
-        <p:txBody>
-          <a:bodyPr xmlns:a="http://schemas.openxmlformats.org/drawingml/2006/main">
-            <a:noAutofit/>
-          </a:bodyPr>
-          <a:lstStyle xmlns:a="http://schemas.openxmlformats.org/drawingml/2006/main"/>
-          <a:p xmlns:a="http://schemas.openxmlformats.org/drawingml/2006/main">
-            <a:pPr>
-              <a:defRPr sz="2175" b="1">
-                <a:solidFill>
-                  <a:srgbClr val="19332A"/>
-                </a:solidFill>
-                <a:latin typeface="Arial"/>
-                <a:ea typeface="Arial"/>
-                <a:cs typeface="Arial"/>
-              </a:defRPr>
-            </a:pPr>
-            <a:r>
-              <a:rPr sz="2175" b="1">
-                <a:solidFill>
-                  <a:srgbClr val="19332A"/>
-                </a:solidFill>
-                <a:latin typeface="Arial"/>
-                <a:ea typeface="Arial"/>
-                <a:cs typeface="Arial"/>
-              </a:rPr>
-              <a:t>Check</a:t>
-            </a:r>
-          </a:p>
-        </p:txBody>
-      </p:sp>
-      <p:sp>
-        <p:nvSpPr>
-          <p:cNvPr id="11" name="">
-            <a:extLst xmlns:a="http://schemas.openxmlformats.org/drawingml/2006/main">
-              <a:ext uri="{FF2B5EF4-FFF2-40B4-BE49-F238E27FC236}">
-                <a16:creationId xmlns:a16="http://schemas.microsoft.com/office/drawing/2014/main" id="{7668139E-4F1C-4FDB-ACC2-6D2F707743FF}"/>
-              </a:ext>
-            </a:extLst>
-          </p:cNvPr>
-          <p:cNvSpPr>
-            <a:spLocks xmlns:a="http://schemas.openxmlformats.org/drawingml/2006/main" noGrp="1"/>
-          </p:cNvSpPr>
-          <p:nvPr/>
-        </p:nvSpPr>
-        <p:spPr>
-          <a:xfrm xmlns:a="http://schemas.openxmlformats.org/drawingml/2006/main">
-            <a:off x="4314825" y="5248275"/>
-            <a:ext cx="3048000" cy="514350"/>
-          </a:xfrm>
-          <a:prstGeom xmlns:a="http://schemas.openxmlformats.org/drawingml/2006/main" prst="rect">
-            <a:avLst/>
-          </a:prstGeom>
-          <a:noFill xmlns:a="http://schemas.openxmlformats.org/drawingml/2006/main"/>
-          <a:ln xmlns:a="http://schemas.openxmlformats.org/drawingml/2006/main" w="0">
-            <a:noFill/>
-          </a:ln>
-        </p:spPr>
-        <p:txBody>
-          <a:bodyPr xmlns:a="http://schemas.openxmlformats.org/drawingml/2006/main">
-            <a:noAutofit/>
-          </a:bodyPr>
-          <a:lstStyle xmlns:a="http://schemas.openxmlformats.org/drawingml/2006/main"/>
-          <a:p xmlns:a="http://schemas.openxmlformats.org/drawingml/2006/main">
-            <a:pPr>
-              <a:defRPr sz="1800" b="0">
-                <a:solidFill>
-                  <a:srgbClr val="52635B"/>
-                </a:solidFill>
-                <a:latin typeface="Arial"/>
-                <a:ea typeface="Arial"/>
-                <a:cs typeface="Arial"/>
-              </a:defRPr>
-            </a:pPr>
-            <a:r>
-              <a:rPr sz="1800" b="0">
-                <a:solidFill>
-                  <a:srgbClr val="52635B"/>
-                </a:solidFill>
-                <a:latin typeface="Arial"/>
-                <a:ea typeface="Arial"/>
-                <a:cs typeface="Arial"/>
-              </a:rPr>
-              <a:t>Choose 2 for board status.</a:t>
-            </a:r>
-          </a:p>
-        </p:txBody>
-      </p:sp>
-      <p:sp>
-        <p:nvSpPr>
-          <p:cNvPr id="12" name="">
-            <a:extLst xmlns:a="http://schemas.openxmlformats.org/drawingml/2006/main">
-              <a:ext uri="{FF2B5EF4-FFF2-40B4-BE49-F238E27FC236}">
-                <a16:creationId xmlns:a16="http://schemas.microsoft.com/office/drawing/2014/main" id="{EA006D79-F7E9-4330-ADF8-EFA14E2A90F5}"/>
-              </a:ext>
-            </a:extLst>
-          </p:cNvPr>
-          <p:cNvSpPr>
-            <a:spLocks xmlns:a="http://schemas.openxmlformats.org/drawingml/2006/main" noGrp="1"/>
-          </p:cNvSpPr>
-          <p:nvPr/>
-        </p:nvSpPr>
-        <p:spPr>
-          <a:xfrm xmlns:a="http://schemas.openxmlformats.org/drawingml/2006/main">
-            <a:off x="8039100" y="4762500"/>
-            <a:ext cx="3143250" cy="476250"/>
-          </a:xfrm>
-          <a:prstGeom xmlns:a="http://schemas.openxmlformats.org/drawingml/2006/main" prst="rect">
-            <a:avLst/>
-          </a:prstGeom>
-          <a:noFill xmlns:a="http://schemas.openxmlformats.org/drawingml/2006/main"/>
-          <a:ln xmlns:a="http://schemas.openxmlformats.org/drawingml/2006/main" w="0">
-            <a:noFill/>
-          </a:ln>
-        </p:spPr>
-        <p:txBody>
-          <a:bodyPr xmlns:a="http://schemas.openxmlformats.org/drawingml/2006/main">
-            <a:noAutofit/>
-          </a:bodyPr>
-          <a:lstStyle xmlns:a="http://schemas.openxmlformats.org/drawingml/2006/main"/>
-          <a:p xmlns:a="http://schemas.openxmlformats.org/drawingml/2006/main">
-            <a:pPr>
-              <a:defRPr sz="2175" b="1">
-                <a:solidFill>
-                  <a:srgbClr val="19332A"/>
-                </a:solidFill>
-                <a:latin typeface="Arial"/>
-                <a:ea typeface="Arial"/>
-                <a:cs typeface="Arial"/>
-              </a:defRPr>
-            </a:pPr>
-            <a:r>
-              <a:rPr sz="2175" b="1">
-                <a:solidFill>
-                  <a:srgbClr val="19332A"/>
-                </a:solidFill>
-                <a:latin typeface="Arial"/>
-                <a:ea typeface="Arial"/>
-                <a:cs typeface="Arial"/>
-              </a:rPr>
-              <a:t>Explore</a:t>
-            </a:r>
-          </a:p>
-        </p:txBody>
-      </p:sp>
-      <p:sp>
-        <p:nvSpPr>
-          <p:cNvPr id="13" name="">
-            <a:extLst xmlns:a="http://schemas.openxmlformats.org/drawingml/2006/main">
-              <a:ext uri="{FF2B5EF4-FFF2-40B4-BE49-F238E27FC236}">
-                <a16:creationId xmlns:a16="http://schemas.microsoft.com/office/drawing/2014/main" id="{5CD72529-7107-455A-A1DC-6269ABD027E5}"/>
-              </a:ext>
-            </a:extLst>
-          </p:cNvPr>
-          <p:cNvSpPr>
-            <a:spLocks xmlns:a="http://schemas.openxmlformats.org/drawingml/2006/main" noGrp="1"/>
-          </p:cNvSpPr>
-          <p:nvPr/>
-        </p:nvSpPr>
-        <p:spPr>
-          <a:xfrm xmlns:a="http://schemas.openxmlformats.org/drawingml/2006/main">
-            <a:off x="8039100" y="5248275"/>
-            <a:ext cx="3333750" cy="619125"/>
-          </a:xfrm>
-          <a:prstGeom xmlns:a="http://schemas.openxmlformats.org/drawingml/2006/main" prst="rect">
-            <a:avLst/>
-          </a:prstGeom>
-          <a:noFill xmlns:a="http://schemas.openxmlformats.org/drawingml/2006/main"/>
-          <a:ln xmlns:a="http://schemas.openxmlformats.org/drawingml/2006/main" w="0">
-            <a:noFill/>
-          </a:ln>
-        </p:spPr>
-        <p:txBody>
-          <a:bodyPr xmlns:a="http://schemas.openxmlformats.org/drawingml/2006/main">
-            <a:noAutofit/>
-          </a:bodyPr>
-          <a:lstStyle xmlns:a="http://schemas.openxmlformats.org/drawingml/2006/main"/>
-          <a:p xmlns:a="http://schemas.openxmlformats.org/drawingml/2006/main">
-            <a:pPr>
-              <a:defRPr sz="1800" b="0">
-                <a:solidFill>
-                  <a:srgbClr val="52635B"/>
-                </a:solidFill>
-                <a:latin typeface="Arial"/>
-                <a:ea typeface="Arial"/>
-                <a:cs typeface="Arial"/>
-              </a:defRPr>
-            </a:pPr>
-            <a:r>
-              <a:rPr sz="1800" b="0">
-                <a:solidFill>
-                  <a:srgbClr val="52635B"/>
-                </a:solidFill>
-                <a:latin typeface="Arial"/>
-                <a:ea typeface="Arial"/>
-                <a:cs typeface="Arial"/>
-              </a:rPr>
-              <a:t>Select any experiment number.</a:t>
+              <a:t>2  Check board status</a:t>
             </a:r>
           </a:p>
         </p:txBody>
@@ -3555,7 +3042,7 @@
     </p:spTree>
     <p:extLst>
       <p:ext uri="{BB962C8B-B14F-4D97-AF65-F5344CB8AC3E}">
-        <p14:creationId xmlns:p14="http://schemas.microsoft.com/office/powerpoint/2010/main" val="801142662"/>
+        <p14:creationId xmlns:p14="http://schemas.microsoft.com/office/powerpoint/2010/main" val="2007947025"/>
       </p:ext>
     </p:extLst>
   </p:cSld>
@@ -3583,10 +3070,10 @@
       </p:grpSpPr>
       <p:sp>
         <p:nvSpPr>
-          <p:cNvPr id="13" name="">
+          <p:cNvPr id="11" name="">
             <a:extLst xmlns:a="http://schemas.openxmlformats.org/drawingml/2006/main">
               <a:ext uri="{FF2B5EF4-FFF2-40B4-BE49-F238E27FC236}">
-                <a16:creationId xmlns:a16="http://schemas.microsoft.com/office/drawing/2014/main" id="{250E9F42-3427-4566-BB27-DA649C0919D7}"/>
+                <a16:creationId xmlns:a16="http://schemas.microsoft.com/office/drawing/2014/main" id="{4AC87039-7F5B-48EC-9B63-57BCF45BEFBB}"/>
               </a:ext>
             </a:extLst>
           </p:cNvPr>
@@ -3633,7 +3120,7 @@
                 <a:ea typeface="Arial"/>
                 <a:cs typeface="Arial"/>
               </a:rPr>
-              <a:t>Conversations that involve the class</a:t>
+              <a:t>Text Conversations</a:t>
             </a:r>
           </a:p>
         </p:txBody>
@@ -3643,121 +3130,7 @@
           <p:cNvPr id="2" name="">
             <a:extLst xmlns:a="http://schemas.openxmlformats.org/drawingml/2006/main">
               <a:ext uri="{FF2B5EF4-FFF2-40B4-BE49-F238E27FC236}">
-                <a16:creationId xmlns:a16="http://schemas.microsoft.com/office/drawing/2014/main" id="{2D4EA3AB-3FD3-415A-A1CB-102F550EC9A8}"/>
-              </a:ext>
-            </a:extLst>
-          </p:cNvPr>
-          <p:cNvSpPr>
-            <a:spLocks xmlns:a="http://schemas.openxmlformats.org/drawingml/2006/main" noGrp="1"/>
-          </p:cNvSpPr>
-          <p:nvPr/>
-        </p:nvSpPr>
-        <p:spPr>
-          <a:xfrm xmlns:a="http://schemas.openxmlformats.org/drawingml/2006/main">
-            <a:off x="666750" y="1333500"/>
-            <a:ext cx="10858500" cy="619125"/>
-          </a:xfrm>
-          <a:prstGeom xmlns:a="http://schemas.openxmlformats.org/drawingml/2006/main" prst="rect">
-            <a:avLst/>
-          </a:prstGeom>
-          <a:noFill xmlns:a="http://schemas.openxmlformats.org/drawingml/2006/main"/>
-          <a:ln xmlns:a="http://schemas.openxmlformats.org/drawingml/2006/main" w="0">
-            <a:noFill/>
-          </a:ln>
-        </p:spPr>
-        <p:txBody>
-          <a:bodyPr xmlns:a="http://schemas.openxmlformats.org/drawingml/2006/main">
-            <a:noAutofit/>
-          </a:bodyPr>
-          <a:lstStyle xmlns:a="http://schemas.openxmlformats.org/drawingml/2006/main"/>
-          <a:p xmlns:a="http://schemas.openxmlformats.org/drawingml/2006/main">
-            <a:pPr>
-              <a:defRPr sz="1950" b="0">
-                <a:solidFill>
-                  <a:srgbClr val="52635B"/>
-                </a:solidFill>
-                <a:latin typeface="Arial"/>
-                <a:ea typeface="Arial"/>
-                <a:cs typeface="Arial"/>
-              </a:defRPr>
-            </a:pPr>
-            <a:r>
-              <a:rPr sz="1950" b="0">
-                <a:solidFill>
-                  <a:srgbClr val="52635B"/>
-                </a:solidFill>
-                <a:latin typeface="Arial"/>
-                <a:ea typeface="Arial"/>
-                <a:cs typeface="Arial"/>
-              </a:rPr>
-              <a:t>Students take the next turn and shape what happens.</a:t>
-            </a:r>
-          </a:p>
-        </p:txBody>
-      </p:sp>
-      <p:sp>
-        <p:nvSpPr>
-          <p:cNvPr id="3" name="">
-            <a:extLst xmlns:a="http://schemas.openxmlformats.org/drawingml/2006/main">
-              <a:ext uri="{FF2B5EF4-FFF2-40B4-BE49-F238E27FC236}">
-                <a16:creationId xmlns:a16="http://schemas.microsoft.com/office/drawing/2014/main" id="{0D195F22-FDBC-4B14-AD10-B623A09107B5}"/>
-              </a:ext>
-            </a:extLst>
-          </p:cNvPr>
-          <p:cNvSpPr>
-            <a:spLocks xmlns:a="http://schemas.openxmlformats.org/drawingml/2006/main" noGrp="1"/>
-          </p:cNvSpPr>
-          <p:nvPr/>
-        </p:nvSpPr>
-        <p:spPr>
-          <a:xfrm xmlns:a="http://schemas.openxmlformats.org/drawingml/2006/main">
-            <a:off x="666750" y="6191250"/>
-            <a:ext cx="10287000" cy="419100"/>
-          </a:xfrm>
-          <a:prstGeom xmlns:a="http://schemas.openxmlformats.org/drawingml/2006/main" prst="rect">
-            <a:avLst/>
-          </a:prstGeom>
-          <a:noFill xmlns:a="http://schemas.openxmlformats.org/drawingml/2006/main"/>
-          <a:ln xmlns:a="http://schemas.openxmlformats.org/drawingml/2006/main" w="0">
-            <a:noFill/>
-          </a:ln>
-        </p:spPr>
-        <p:txBody>
-          <a:bodyPr xmlns:a="http://schemas.openxmlformats.org/drawingml/2006/main">
-            <a:noAutofit/>
-          </a:bodyPr>
-          <a:lstStyle xmlns:a="http://schemas.openxmlformats.org/drawingml/2006/main"/>
-          <a:p xmlns:a="http://schemas.openxmlformats.org/drawingml/2006/main">
-            <a:pPr>
-              <a:defRPr sz="1350" b="0">
-                <a:solidFill>
-                  <a:srgbClr val="52635B"/>
-                </a:solidFill>
-                <a:latin typeface="Arial"/>
-                <a:ea typeface="Arial"/>
-                <a:cs typeface="Arial"/>
-              </a:defRPr>
-            </a:pPr>
-            <a:r>
-              <a:rPr sz="1350" b="0">
-                <a:solidFill>
-                  <a:srgbClr val="52635B"/>
-                </a:solidFill>
-                <a:latin typeface="Arial"/>
-                <a:ea typeface="Arial"/>
-                <a:cs typeface="Arial"/>
-              </a:rPr>
-              <a:t>Type /quit to return to the menu. Each conversation uses the earlier turns.</a:t>
-            </a:r>
-          </a:p>
-        </p:txBody>
-      </p:sp>
-      <p:sp>
-        <p:nvSpPr>
-          <p:cNvPr id="4" name="">
-            <a:extLst xmlns:a="http://schemas.openxmlformats.org/drawingml/2006/main">
-              <a:ext uri="{FF2B5EF4-FFF2-40B4-BE49-F238E27FC236}">
-                <a16:creationId xmlns:a16="http://schemas.microsoft.com/office/drawing/2014/main" id="{D951B7C6-896E-445F-883B-194538FD62BD}"/>
+                <a16:creationId xmlns:a16="http://schemas.microsoft.com/office/drawing/2014/main" id="{03901629-1E3B-464A-91E5-3B0E2ADCD24F}"/>
               </a:ext>
             </a:extLst>
           </p:cNvPr>
@@ -3811,10 +3184,10 @@
       </p:sp>
       <p:sp>
         <p:nvSpPr>
-          <p:cNvPr id="5" name="">
+          <p:cNvPr id="3" name="">
             <a:extLst xmlns:a="http://schemas.openxmlformats.org/drawingml/2006/main">
               <a:ext uri="{FF2B5EF4-FFF2-40B4-BE49-F238E27FC236}">
-                <a16:creationId xmlns:a16="http://schemas.microsoft.com/office/drawing/2014/main" id="{457974C2-9E85-4C7E-B2F1-6294349D8F0C}"/>
+                <a16:creationId xmlns:a16="http://schemas.microsoft.com/office/drawing/2014/main" id="{6B936980-4351-484B-9DED-4303BE82EDA9}"/>
               </a:ext>
             </a:extLst>
           </p:cNvPr>
@@ -3861,17 +3234,17 @@
                 <a:ea typeface="Arial"/>
                 <a:cs typeface="Arial"/>
               </a:rPr>
-              <a:t>Experiment 29</a:t>
-            </a:r>
-          </a:p>
-        </p:txBody>
-      </p:sp>
-      <p:sp>
-        <p:nvSpPr>
-          <p:cNvPr id="6" name="">
+              <a:t>Menu 29</a:t>
+            </a:r>
+          </a:p>
+        </p:txBody>
+      </p:sp>
+      <p:sp>
+        <p:nvSpPr>
+          <p:cNvPr id="4" name="">
             <a:extLst xmlns:a="http://schemas.openxmlformats.org/drawingml/2006/main">
               <a:ext uri="{FF2B5EF4-FFF2-40B4-BE49-F238E27FC236}">
-                <a16:creationId xmlns:a16="http://schemas.microsoft.com/office/drawing/2014/main" id="{BAC11B37-8E08-4BDC-981F-A44250A289D1}"/>
+                <a16:creationId xmlns:a16="http://schemas.microsoft.com/office/drawing/2014/main" id="{4E06C31A-0732-47E2-AB49-72A490D3D9AB}"/>
               </a:ext>
             </a:extLst>
           </p:cNvPr>
@@ -3925,10 +3298,10 @@
       </p:sp>
       <p:sp>
         <p:nvSpPr>
-          <p:cNvPr id="7" name="">
+          <p:cNvPr id="5" name="">
             <a:extLst xmlns:a="http://schemas.openxmlformats.org/drawingml/2006/main">
               <a:ext uri="{FF2B5EF4-FFF2-40B4-BE49-F238E27FC236}">
-                <a16:creationId xmlns:a16="http://schemas.microsoft.com/office/drawing/2014/main" id="{C380692F-1154-4B3C-A589-3D70670AD934}"/>
+                <a16:creationId xmlns:a16="http://schemas.microsoft.com/office/drawing/2014/main" id="{2C542239-7195-47F7-9ED4-F9634068C055}"/>
               </a:ext>
             </a:extLst>
           </p:cNvPr>
@@ -3975,7 +3348,7 @@
                 <a:ea typeface="Arial"/>
                 <a:cs typeface="Arial"/>
               </a:rPr>
-              <a:t>Choose a topic. Answer one guiding</a:t>
+              <a:t>Discuss a topic through successive</a:t>
             </a:r>
           </a:p>
           <a:p xmlns:a="http://schemas.openxmlformats.org/drawingml/2006/main">
@@ -3998,7 +3371,7 @@
                 <a:ea typeface="Arial"/>
                 <a:cs typeface="Arial"/>
               </a:rPr>
-              <a:t>question at a time and explain</a:t>
+              <a:t>questions. Each reply uses the</a:t>
             </a:r>
           </a:p>
           <a:p xmlns:a="http://schemas.openxmlformats.org/drawingml/2006/main">
@@ -4021,17 +3394,17 @@
                 <a:ea typeface="Arial"/>
                 <a:cs typeface="Arial"/>
               </a:rPr>
-              <a:t>your reasoning.</a:t>
-            </a:r>
-          </a:p>
-        </p:txBody>
-      </p:sp>
-      <p:sp>
-        <p:nvSpPr>
-          <p:cNvPr id="8" name="">
+              <a:t>previous conversation.</a:t>
+            </a:r>
+          </a:p>
+        </p:txBody>
+      </p:sp>
+      <p:sp>
+        <p:nvSpPr>
+          <p:cNvPr id="6" name="">
             <a:extLst xmlns:a="http://schemas.openxmlformats.org/drawingml/2006/main">
               <a:ext uri="{FF2B5EF4-FFF2-40B4-BE49-F238E27FC236}">
-                <a16:creationId xmlns:a16="http://schemas.microsoft.com/office/drawing/2014/main" id="{304F5F94-9507-4599-A6F8-BA11F7F51092}"/>
+                <a16:creationId xmlns:a16="http://schemas.microsoft.com/office/drawing/2014/main" id="{ED401F0E-CF45-413D-A70A-9BF389C8CE3B}"/>
               </a:ext>
             </a:extLst>
           </p:cNvPr>
@@ -4078,17 +3451,17 @@
                 <a:ea typeface="Arial"/>
                 <a:cs typeface="Arial"/>
               </a:rPr>
-              <a:t>Try: Why do objects float?</a:t>
-            </a:r>
-          </a:p>
-        </p:txBody>
-      </p:sp>
-      <p:sp>
-        <p:nvSpPr>
-          <p:cNvPr id="9" name="">
+              <a:t>Example topic: Why do objects float?</a:t>
+            </a:r>
+          </a:p>
+        </p:txBody>
+      </p:sp>
+      <p:sp>
+        <p:nvSpPr>
+          <p:cNvPr id="7" name="">
             <a:extLst xmlns:a="http://schemas.openxmlformats.org/drawingml/2006/main">
               <a:ext uri="{FF2B5EF4-FFF2-40B4-BE49-F238E27FC236}">
-                <a16:creationId xmlns:a16="http://schemas.microsoft.com/office/drawing/2014/main" id="{123D050F-184F-4014-895D-4A5E890F68C9}"/>
+                <a16:creationId xmlns:a16="http://schemas.microsoft.com/office/drawing/2014/main" id="{57D8FDF0-DD92-4EC0-A255-BA1D0129088E}"/>
               </a:ext>
             </a:extLst>
           </p:cNvPr>
@@ -4135,17 +3508,17 @@
                 <a:ea typeface="Arial"/>
                 <a:cs typeface="Arial"/>
               </a:rPr>
-              <a:t>Experiment 30</a:t>
-            </a:r>
-          </a:p>
-        </p:txBody>
-      </p:sp>
-      <p:sp>
-        <p:nvSpPr>
-          <p:cNvPr id="10" name="">
+              <a:t>Menu 30</a:t>
+            </a:r>
+          </a:p>
+        </p:txBody>
+      </p:sp>
+      <p:sp>
+        <p:nvSpPr>
+          <p:cNvPr id="8" name="">
             <a:extLst xmlns:a="http://schemas.openxmlformats.org/drawingml/2006/main">
               <a:ext uri="{FF2B5EF4-FFF2-40B4-BE49-F238E27FC236}">
-                <a16:creationId xmlns:a16="http://schemas.microsoft.com/office/drawing/2014/main" id="{AC41D485-7B2D-4A2C-B4D9-D0AD381F3642}"/>
+                <a16:creationId xmlns:a16="http://schemas.microsoft.com/office/drawing/2014/main" id="{A6C12A4C-6DAF-45CB-9B52-BF958DFF65BC}"/>
               </a:ext>
             </a:extLst>
           </p:cNvPr>
@@ -4222,10 +3595,10 @@
       </p:sp>
       <p:sp>
         <p:nvSpPr>
-          <p:cNvPr id="11" name="">
+          <p:cNvPr id="9" name="">
             <a:extLst xmlns:a="http://schemas.openxmlformats.org/drawingml/2006/main">
               <a:ext uri="{FF2B5EF4-FFF2-40B4-BE49-F238E27FC236}">
-                <a16:creationId xmlns:a16="http://schemas.microsoft.com/office/drawing/2014/main" id="{F0862BC0-C5D8-4535-822C-534EF85EC51C}"/>
+                <a16:creationId xmlns:a16="http://schemas.microsoft.com/office/drawing/2014/main" id="{FAE7DF16-2C10-4EAB-89DC-E4630584C3EC}"/>
               </a:ext>
             </a:extLst>
           </p:cNvPr>
@@ -4272,7 +3645,7 @@
                 <a:ea typeface="Arial"/>
                 <a:cs typeface="Arial"/>
               </a:rPr>
-              <a:t>Interview a fictional character.</a:t>
+              <a:t>Ask a fictional character questions</a:t>
             </a:r>
           </a:p>
           <a:p xmlns:a="http://schemas.openxmlformats.org/drawingml/2006/main">
@@ -4295,7 +3668,7 @@
                 <a:ea typeface="Arial"/>
                 <a:cs typeface="Arial"/>
               </a:rPr>
-              <a:t>Collect clues, then guess</a:t>
+              <a:t>and use the answers to identify</a:t>
             </a:r>
           </a:p>
           <a:p xmlns:a="http://schemas.openxmlformats.org/drawingml/2006/main">
@@ -4325,10 +3698,10 @@
       </p:sp>
       <p:sp>
         <p:nvSpPr>
-          <p:cNvPr id="12" name="">
+          <p:cNvPr id="10" name="">
             <a:extLst xmlns:a="http://schemas.openxmlformats.org/drawingml/2006/main">
               <a:ext uri="{FF2B5EF4-FFF2-40B4-BE49-F238E27FC236}">
-                <a16:creationId xmlns:a16="http://schemas.microsoft.com/office/drawing/2014/main" id="{52C5A8BD-BFA7-4E3D-90D8-6C0B0FBDF60E}"/>
+                <a16:creationId xmlns:a16="http://schemas.microsoft.com/office/drawing/2014/main" id="{B88BFAB4-04E5-4039-8DF7-32CF2FA641D2}"/>
               </a:ext>
             </a:extLst>
           </p:cNvPr>
@@ -4383,7 +3756,7 @@
     </p:spTree>
     <p:extLst>
       <p:ext uri="{BB962C8B-B14F-4D97-AF65-F5344CB8AC3E}">
-        <p14:creationId xmlns:p14="http://schemas.microsoft.com/office/powerpoint/2010/main" val="1879518823"/>
+        <p14:creationId xmlns:p14="http://schemas.microsoft.com/office/powerpoint/2010/main" val="261506530"/>
       </p:ext>
     </p:extLst>
   </p:cSld>
@@ -4411,10 +3784,10 @@
       </p:grpSpPr>
       <p:sp>
         <p:nvSpPr>
-          <p:cNvPr id="6" name="">
+          <p:cNvPr id="4" name="">
             <a:extLst xmlns:a="http://schemas.openxmlformats.org/drawingml/2006/main">
               <a:ext uri="{FF2B5EF4-FFF2-40B4-BE49-F238E27FC236}">
-                <a16:creationId xmlns:a16="http://schemas.microsoft.com/office/drawing/2014/main" id="{876B20AC-5C7D-4C7F-92F9-18CFC195FDD2}"/>
+                <a16:creationId xmlns:a16="http://schemas.microsoft.com/office/drawing/2014/main" id="{53BF914D-8325-482A-896F-AC665794C31C}"/>
               </a:ext>
             </a:extLst>
           </p:cNvPr>
@@ -4461,7 +3834,7 @@
                 <a:ea typeface="Arial"/>
                 <a:cs typeface="Arial"/>
               </a:rPr>
-              <a:t>Assistants with visible evidence</a:t>
+              <a:t>Tools and Document Retrieval</a:t>
             </a:r>
           </a:p>
         </p:txBody>
@@ -4471,121 +3844,7 @@
           <p:cNvPr id="2" name="">
             <a:extLst xmlns:a="http://schemas.openxmlformats.org/drawingml/2006/main">
               <a:ext uri="{FF2B5EF4-FFF2-40B4-BE49-F238E27FC236}">
-                <a16:creationId xmlns:a16="http://schemas.microsoft.com/office/drawing/2014/main" id="{7FCA11F6-C36A-447C-8D79-E1F7CFF49C50}"/>
-              </a:ext>
-            </a:extLst>
-          </p:cNvPr>
-          <p:cNvSpPr>
-            <a:spLocks xmlns:a="http://schemas.openxmlformats.org/drawingml/2006/main" noGrp="1"/>
-          </p:cNvSpPr>
-          <p:nvPr/>
-        </p:nvSpPr>
-        <p:spPr>
-          <a:xfrm xmlns:a="http://schemas.openxmlformats.org/drawingml/2006/main">
-            <a:off x="666750" y="1333500"/>
-            <a:ext cx="10858500" cy="619125"/>
-          </a:xfrm>
-          <a:prstGeom xmlns:a="http://schemas.openxmlformats.org/drawingml/2006/main" prst="rect">
-            <a:avLst/>
-          </a:prstGeom>
-          <a:noFill xmlns:a="http://schemas.openxmlformats.org/drawingml/2006/main"/>
-          <a:ln xmlns:a="http://schemas.openxmlformats.org/drawingml/2006/main" w="0">
-            <a:noFill/>
-          </a:ln>
-        </p:spPr>
-        <p:txBody>
-          <a:bodyPr xmlns:a="http://schemas.openxmlformats.org/drawingml/2006/main">
-            <a:noAutofit/>
-          </a:bodyPr>
-          <a:lstStyle xmlns:a="http://schemas.openxmlformats.org/drawingml/2006/main"/>
-          <a:p xmlns:a="http://schemas.openxmlformats.org/drawingml/2006/main">
-            <a:pPr>
-              <a:defRPr sz="1950" b="0">
-                <a:solidFill>
-                  <a:srgbClr val="52635B"/>
-                </a:solidFill>
-                <a:latin typeface="Arial"/>
-                <a:ea typeface="Arial"/>
-                <a:cs typeface="Arial"/>
-              </a:defRPr>
-            </a:pPr>
-            <a:r>
-              <a:rPr sz="1950" b="0">
-                <a:solidFill>
-                  <a:srgbClr val="52635B"/>
-                </a:solidFill>
-                <a:latin typeface="Arial"/>
-                <a:ea typeface="Arial"/>
-                <a:cs typeface="Arial"/>
-              </a:rPr>
-              <a:t>Inspect what the model knows, retrieves and calls.</a:t>
-            </a:r>
-          </a:p>
-        </p:txBody>
-      </p:sp>
-      <p:sp>
-        <p:nvSpPr>
-          <p:cNvPr id="3" name="">
-            <a:extLst xmlns:a="http://schemas.openxmlformats.org/drawingml/2006/main">
-              <a:ext uri="{FF2B5EF4-FFF2-40B4-BE49-F238E27FC236}">
-                <a16:creationId xmlns:a16="http://schemas.microsoft.com/office/drawing/2014/main" id="{7FD4D6CD-BCCF-4117-86AA-F5841D2DB4EB}"/>
-              </a:ext>
-            </a:extLst>
-          </p:cNvPr>
-          <p:cNvSpPr>
-            <a:spLocks xmlns:a="http://schemas.openxmlformats.org/drawingml/2006/main" noGrp="1"/>
-          </p:cNvSpPr>
-          <p:nvPr/>
-        </p:nvSpPr>
-        <p:spPr>
-          <a:xfrm xmlns:a="http://schemas.openxmlformats.org/drawingml/2006/main">
-            <a:off x="666750" y="6191250"/>
-            <a:ext cx="10287000" cy="419100"/>
-          </a:xfrm>
-          <a:prstGeom xmlns:a="http://schemas.openxmlformats.org/drawingml/2006/main" prst="rect">
-            <a:avLst/>
-          </a:prstGeom>
-          <a:noFill xmlns:a="http://schemas.openxmlformats.org/drawingml/2006/main"/>
-          <a:ln xmlns:a="http://schemas.openxmlformats.org/drawingml/2006/main" w="0">
-            <a:noFill/>
-          </a:ln>
-        </p:spPr>
-        <p:txBody>
-          <a:bodyPr xmlns:a="http://schemas.openxmlformats.org/drawingml/2006/main">
-            <a:noAutofit/>
-          </a:bodyPr>
-          <a:lstStyle xmlns:a="http://schemas.openxmlformats.org/drawingml/2006/main"/>
-          <a:p xmlns:a="http://schemas.openxmlformats.org/drawingml/2006/main">
-            <a:pPr>
-              <a:defRPr sz="1350" b="0">
-                <a:solidFill>
-                  <a:srgbClr val="52635B"/>
-                </a:solidFill>
-                <a:latin typeface="Arial"/>
-                <a:ea typeface="Arial"/>
-                <a:cs typeface="Arial"/>
-              </a:defRPr>
-            </a:pPr>
-            <a:r>
-              <a:rPr sz="1350" b="0">
-                <a:solidFill>
-                  <a:srgbClr val="52635B"/>
-                </a:solidFill>
-                <a:latin typeface="Arial"/>
-                <a:ea typeface="Arial"/>
-                <a:cs typeface="Arial"/>
-              </a:rPr>
-              <a:t>Read-only tools. Explicit local memory. BM25 retrieval over your own documents.</a:t>
-            </a:r>
-          </a:p>
-        </p:txBody>
-      </p:sp>
-      <p:sp>
-        <p:nvSpPr>
-          <p:cNvPr id="4" name="">
-            <a:extLst xmlns:a="http://schemas.openxmlformats.org/drawingml/2006/main">
-              <a:ext uri="{FF2B5EF4-FFF2-40B4-BE49-F238E27FC236}">
-                <a16:creationId xmlns:a16="http://schemas.microsoft.com/office/drawing/2014/main" id="{431F1BC3-6AD8-48B9-B4AC-CAF1DB19ACF0}"/>
+                <a16:creationId xmlns:a16="http://schemas.microsoft.com/office/drawing/2014/main" id="{6B286F56-7B2C-44A9-BC3E-031452F8BAE2}"/>
               </a:ext>
             </a:extLst>
           </p:cNvPr>
@@ -4639,7 +3898,7 @@
       </p:sp>
       <p:graphicFrame>
         <p:nvGraphicFramePr>
-          <p:cNvPr id="10" name=""/>
+          <p:cNvPr id="6" name=""/>
           <p:cNvGraphicFramePr/>
           <p:nvPr/>
         </p:nvGraphicFramePr>
@@ -4725,7 +3984,7 @@
                           <a:ea typeface="Arial"/>
                           <a:cs typeface="Arial"/>
                         </a:rPr>
-                        <a:t>WHAT STUDENTS DO</a:t>
+                        <a:t>FUNCTION</a:t>
                       </a:r>
                     </a:p>
                   </a:txBody>
@@ -4805,7 +4064,7 @@
                           <a:ea typeface="Arial"/>
                           <a:cs typeface="Arial"/>
                         </a:rPr>
-                        <a:t>Give a mission, inspect its tool plan, then check the evidence.</a:t>
+                        <a:t>Select read-only tools and summarize the returned data.</a:t>
                       </a:r>
                     </a:p>
                   </a:txBody>
@@ -4885,7 +4144,7 @@
                           <a:ea typeface="Arial"/>
                           <a:cs typeface="Arial"/>
                         </a:rPr>
-                        <a:t>Ask the exhibit brief a question and inspect source passages.</a:t>
+                        <a:t>Answer questions from retrieved exhibit passages.</a:t>
                       </a:r>
                     </a:p>
                   </a:txBody>
@@ -4965,7 +4224,7 @@
                           <a:ea typeface="Arial"/>
                           <a:cs typeface="Arial"/>
                         </a:rPr>
-                        <a:t>Store a fictional preference and reuse it in a later session.</a:t>
+                        <a:t>Save explicit facts and retrieve them in later sessions.</a:t>
                       </a:r>
                     </a:p>
                   </a:txBody>
@@ -5045,7 +4304,7 @@
                           <a:ea typeface="Arial"/>
                           <a:cs typeface="Arial"/>
                         </a:rPr>
-                        <a:t>Index notes, retrieve passages and question the answer.</a:t>
+                        <a:t>Index text documents and generate answers from retrieved passages.</a:t>
                       </a:r>
                     </a:p>
                   </a:txBody>
@@ -5125,7 +4384,7 @@
                           <a:ea typeface="Arial"/>
                           <a:cs typeface="Arial"/>
                         </a:rPr>
-                        <a:t>Hold a short local conversation and inspect its memory.</a:t>
+                        <a:t>Generate responses using the preceding conversation.</a:t>
                       </a:r>
                     </a:p>
                   </a:txBody>
@@ -5143,7 +4402,7 @@
     </p:spTree>
     <p:extLst>
       <p:ext uri="{BB962C8B-B14F-4D97-AF65-F5344CB8AC3E}">
-        <p14:creationId xmlns:p14="http://schemas.microsoft.com/office/powerpoint/2010/main" val="854286553"/>
+        <p14:creationId xmlns:p14="http://schemas.microsoft.com/office/powerpoint/2010/main" val="701202595"/>
       </p:ext>
     </p:extLst>
   </p:cSld>
@@ -5171,10 +4430,10 @@
       </p:grpSpPr>
       <p:sp>
         <p:nvSpPr>
-          <p:cNvPr id="6" name="">
+          <p:cNvPr id="4" name="">
             <a:extLst xmlns:a="http://schemas.openxmlformats.org/drawingml/2006/main">
               <a:ext uri="{FF2B5EF4-FFF2-40B4-BE49-F238E27FC236}">
-                <a16:creationId xmlns:a16="http://schemas.microsoft.com/office/drawing/2014/main" id="{6052940C-26EA-4A18-BD62-3107ECA14A20}"/>
+                <a16:creationId xmlns:a16="http://schemas.microsoft.com/office/drawing/2014/main" id="{2C3B22B7-B805-4ADA-83C5-51E019022A13}"/>
               </a:ext>
             </a:extLst>
           </p:cNvPr>
@@ -5221,7 +4480,7 @@
                 <a:ea typeface="Arial"/>
                 <a:cs typeface="Arial"/>
               </a:rPr>
-              <a:t>Language under the microscope</a:t>
+              <a:t>Tokenization and Generation</a:t>
             </a:r>
           </a:p>
         </p:txBody>
@@ -5231,121 +4490,7 @@
           <p:cNvPr id="2" name="">
             <a:extLst xmlns:a="http://schemas.openxmlformats.org/drawingml/2006/main">
               <a:ext uri="{FF2B5EF4-FFF2-40B4-BE49-F238E27FC236}">
-                <a16:creationId xmlns:a16="http://schemas.microsoft.com/office/drawing/2014/main" id="{2A128034-1918-4072-92C7-3CE823D95D79}"/>
-              </a:ext>
-            </a:extLst>
-          </p:cNvPr>
-          <p:cNvSpPr>
-            <a:spLocks xmlns:a="http://schemas.openxmlformats.org/drawingml/2006/main" noGrp="1"/>
-          </p:cNvSpPr>
-          <p:nvPr/>
-        </p:nvSpPr>
-        <p:spPr>
-          <a:xfrm xmlns:a="http://schemas.openxmlformats.org/drawingml/2006/main">
-            <a:off x="666750" y="1333500"/>
-            <a:ext cx="10858500" cy="619125"/>
-          </a:xfrm>
-          <a:prstGeom xmlns:a="http://schemas.openxmlformats.org/drawingml/2006/main" prst="rect">
-            <a:avLst/>
-          </a:prstGeom>
-          <a:noFill xmlns:a="http://schemas.openxmlformats.org/drawingml/2006/main"/>
-          <a:ln xmlns:a="http://schemas.openxmlformats.org/drawingml/2006/main" w="0">
-            <a:noFill/>
-          </a:ln>
-        </p:spPr>
-        <p:txBody>
-          <a:bodyPr xmlns:a="http://schemas.openxmlformats.org/drawingml/2006/main">
-            <a:noAutofit/>
-          </a:bodyPr>
-          <a:lstStyle xmlns:a="http://schemas.openxmlformats.org/drawingml/2006/main"/>
-          <a:p xmlns:a="http://schemas.openxmlformats.org/drawingml/2006/main">
-            <a:pPr>
-              <a:defRPr sz="1950" b="0">
-                <a:solidFill>
-                  <a:srgbClr val="52635B"/>
-                </a:solidFill>
-                <a:latin typeface="Arial"/>
-                <a:ea typeface="Arial"/>
-                <a:cs typeface="Arial"/>
-              </a:defRPr>
-            </a:pPr>
-            <a:r>
-              <a:rPr sz="1950" b="0">
-                <a:solidFill>
-                  <a:srgbClr val="52635B"/>
-                </a:solidFill>
-                <a:latin typeface="Arial"/>
-                <a:ea typeface="Arial"/>
-                <a:cs typeface="Arial"/>
-              </a:rPr>
-              <a:t>Change the input or decoding settings and compare the response.</a:t>
-            </a:r>
-          </a:p>
-        </p:txBody>
-      </p:sp>
-      <p:sp>
-        <p:nvSpPr>
-          <p:cNvPr id="3" name="">
-            <a:extLst xmlns:a="http://schemas.openxmlformats.org/drawingml/2006/main">
-              <a:ext uri="{FF2B5EF4-FFF2-40B4-BE49-F238E27FC236}">
-                <a16:creationId xmlns:a16="http://schemas.microsoft.com/office/drawing/2014/main" id="{DC00DC30-E760-4F3A-BD5A-A88F6F597602}"/>
-              </a:ext>
-            </a:extLst>
-          </p:cNvPr>
-          <p:cNvSpPr>
-            <a:spLocks xmlns:a="http://schemas.openxmlformats.org/drawingml/2006/main" noGrp="1"/>
-          </p:cNvSpPr>
-          <p:nvPr/>
-        </p:nvSpPr>
-        <p:spPr>
-          <a:xfrm xmlns:a="http://schemas.openxmlformats.org/drawingml/2006/main">
-            <a:off x="666750" y="6191250"/>
-            <a:ext cx="10287000" cy="419100"/>
-          </a:xfrm>
-          <a:prstGeom xmlns:a="http://schemas.openxmlformats.org/drawingml/2006/main" prst="rect">
-            <a:avLst/>
-          </a:prstGeom>
-          <a:noFill xmlns:a="http://schemas.openxmlformats.org/drawingml/2006/main"/>
-          <a:ln xmlns:a="http://schemas.openxmlformats.org/drawingml/2006/main" w="0">
-            <a:noFill/>
-          </a:ln>
-        </p:spPr>
-        <p:txBody>
-          <a:bodyPr xmlns:a="http://schemas.openxmlformats.org/drawingml/2006/main">
-            <a:noAutofit/>
-          </a:bodyPr>
-          <a:lstStyle xmlns:a="http://schemas.openxmlformats.org/drawingml/2006/main"/>
-          <a:p xmlns:a="http://schemas.openxmlformats.org/drawingml/2006/main">
-            <a:pPr>
-              <a:defRPr sz="1350" b="0">
-                <a:solidFill>
-                  <a:srgbClr val="52635B"/>
-                </a:solidFill>
-                <a:latin typeface="Arial"/>
-                <a:ea typeface="Arial"/>
-                <a:cs typeface="Arial"/>
-              </a:defRPr>
-            </a:pPr>
-            <a:r>
-              <a:rPr sz="1350" b="0">
-                <a:solidFill>
-                  <a:srgbClr val="52635B"/>
-                </a:solidFill>
-                <a:latin typeface="Arial"/>
-                <a:ea typeface="Arial"/>
-                <a:cs typeface="Arial"/>
-              </a:rPr>
-              <a:t>Ask the class to predict how each change will affect the answer.</a:t>
-            </a:r>
-          </a:p>
-        </p:txBody>
-      </p:sp>
-      <p:sp>
-        <p:nvSpPr>
-          <p:cNvPr id="4" name="">
-            <a:extLst xmlns:a="http://schemas.openxmlformats.org/drawingml/2006/main">
-              <a:ext uri="{FF2B5EF4-FFF2-40B4-BE49-F238E27FC236}">
-                <a16:creationId xmlns:a16="http://schemas.microsoft.com/office/drawing/2014/main" id="{512D35F5-0B15-486C-AD63-C23DAA1F968D}"/>
+                <a16:creationId xmlns:a16="http://schemas.microsoft.com/office/drawing/2014/main" id="{66D60612-F7EC-4B17-8395-FCC44F17CB72}"/>
               </a:ext>
             </a:extLst>
           </p:cNvPr>
@@ -5399,7 +4544,7 @@
       </p:sp>
       <p:graphicFrame>
         <p:nvGraphicFramePr>
-          <p:cNvPr id="10" name=""/>
+          <p:cNvPr id="6" name=""/>
           <p:cNvGraphicFramePr/>
           <p:nvPr/>
         </p:nvGraphicFramePr>
@@ -5485,7 +4630,7 @@
                           <a:ea typeface="Arial"/>
                           <a:cs typeface="Arial"/>
                         </a:rPr>
-                        <a:t>WHAT STUDENTS DO</a:t>
+                        <a:t>FUNCTION</a:t>
                       </a:r>
                     </a:p>
                   </a:txBody>
@@ -5565,7 +4710,7 @@
                           <a:ea typeface="Arial"/>
                           <a:cs typeface="Arial"/>
                         </a:rPr>
-                        <a:t>Test a short question with the configured small model.</a:t>
+                        <a:t>Generate a response to a single prompt.</a:t>
                       </a:r>
                     </a:p>
                   </a:txBody>
@@ -5645,7 +4790,7 @@
                           <a:ea typeface="Arial"/>
                           <a:cs typeface="Arial"/>
                         </a:rPr>
-                        <a:t>Compare how words, code and symbols split into tokens.</a:t>
+                        <a:t>Inspect token IDs for text, code and symbols.</a:t>
                       </a:r>
                     </a:p>
                   </a:txBody>
@@ -5983,7 +5128,7 @@
     </p:spTree>
     <p:extLst>
       <p:ext uri="{BB962C8B-B14F-4D97-AF65-F5344CB8AC3E}">
-        <p14:creationId xmlns:p14="http://schemas.microsoft.com/office/powerpoint/2010/main" val="264836762"/>
+        <p14:creationId xmlns:p14="http://schemas.microsoft.com/office/powerpoint/2010/main" val="201638484"/>
       </p:ext>
     </p:extLst>
   </p:cSld>
@@ -6011,10 +5156,10 @@
       </p:grpSpPr>
       <p:sp>
         <p:nvSpPr>
-          <p:cNvPr id="6" name="">
+          <p:cNvPr id="4" name="">
             <a:extLst xmlns:a="http://schemas.openxmlformats.org/drawingml/2006/main">
               <a:ext uri="{FF2B5EF4-FFF2-40B4-BE49-F238E27FC236}">
-                <a16:creationId xmlns:a16="http://schemas.microsoft.com/office/drawing/2014/main" id="{C4A515BD-39B8-44A1-8641-8D94B5DF303B}"/>
+                <a16:creationId xmlns:a16="http://schemas.microsoft.com/office/drawing/2014/main" id="{E609E92C-4A08-4F2A-B836-56706266AE52}"/>
               </a:ext>
             </a:extLst>
           </p:cNvPr>
@@ -6061,7 +5206,7 @@
                 <a:ea typeface="Arial"/>
                 <a:cs typeface="Arial"/>
               </a:rPr>
-              <a:t>Creativity and practical text tasks</a:t>
+              <a:t>Text Generation and Processing</a:t>
             </a:r>
           </a:p>
         </p:txBody>
@@ -6071,121 +5216,7 @@
           <p:cNvPr id="2" name="">
             <a:extLst xmlns:a="http://schemas.openxmlformats.org/drawingml/2006/main">
               <a:ext uri="{FF2B5EF4-FFF2-40B4-BE49-F238E27FC236}">
-                <a16:creationId xmlns:a16="http://schemas.microsoft.com/office/drawing/2014/main" id="{DA383EA6-2759-4F79-BA73-1381A7BE2E4C}"/>
-              </a:ext>
-            </a:extLst>
-          </p:cNvPr>
-          <p:cNvSpPr>
-            <a:spLocks xmlns:a="http://schemas.openxmlformats.org/drawingml/2006/main" noGrp="1"/>
-          </p:cNvSpPr>
-          <p:nvPr/>
-        </p:nvSpPr>
-        <p:spPr>
-          <a:xfrm xmlns:a="http://schemas.openxmlformats.org/drawingml/2006/main">
-            <a:off x="666750" y="1333500"/>
-            <a:ext cx="10858500" cy="619125"/>
-          </a:xfrm>
-          <a:prstGeom xmlns:a="http://schemas.openxmlformats.org/drawingml/2006/main" prst="rect">
-            <a:avLst/>
-          </a:prstGeom>
-          <a:noFill xmlns:a="http://schemas.openxmlformats.org/drawingml/2006/main"/>
-          <a:ln xmlns:a="http://schemas.openxmlformats.org/drawingml/2006/main" w="0">
-            <a:noFill/>
-          </a:ln>
-        </p:spPr>
-        <p:txBody>
-          <a:bodyPr xmlns:a="http://schemas.openxmlformats.org/drawingml/2006/main">
-            <a:noAutofit/>
-          </a:bodyPr>
-          <a:lstStyle xmlns:a="http://schemas.openxmlformats.org/drawingml/2006/main"/>
-          <a:p xmlns:a="http://schemas.openxmlformats.org/drawingml/2006/main">
-            <a:pPr>
-              <a:defRPr sz="1950" b="0">
-                <a:solidFill>
-                  <a:srgbClr val="52635B"/>
-                </a:solidFill>
-                <a:latin typeface="Arial"/>
-                <a:ea typeface="Arial"/>
-                <a:cs typeface="Arial"/>
-              </a:defRPr>
-            </a:pPr>
-            <a:r>
-              <a:rPr sz="1950" b="0">
-                <a:solidFill>
-                  <a:srgbClr val="52635B"/>
-                </a:solidFill>
-                <a:latin typeface="Arial"/>
-                <a:ea typeface="Arial"/>
-                <a:cs typeface="Arial"/>
-              </a:rPr>
-              <a:t>Let students supply a twist, a message or a passage.</a:t>
-            </a:r>
-          </a:p>
-        </p:txBody>
-      </p:sp>
-      <p:sp>
-        <p:nvSpPr>
-          <p:cNvPr id="3" name="">
-            <a:extLst xmlns:a="http://schemas.openxmlformats.org/drawingml/2006/main">
-              <a:ext uri="{FF2B5EF4-FFF2-40B4-BE49-F238E27FC236}">
-                <a16:creationId xmlns:a16="http://schemas.microsoft.com/office/drawing/2014/main" id="{AF8ED5C8-C3FA-4354-B52C-35EDBE6B0206}"/>
-              </a:ext>
-            </a:extLst>
-          </p:cNvPr>
-          <p:cNvSpPr>
-            <a:spLocks xmlns:a="http://schemas.openxmlformats.org/drawingml/2006/main" noGrp="1"/>
-          </p:cNvSpPr>
-          <p:nvPr/>
-        </p:nvSpPr>
-        <p:spPr>
-          <a:xfrm xmlns:a="http://schemas.openxmlformats.org/drawingml/2006/main">
-            <a:off x="666750" y="6191250"/>
-            <a:ext cx="10287000" cy="419100"/>
-          </a:xfrm>
-          <a:prstGeom xmlns:a="http://schemas.openxmlformats.org/drawingml/2006/main" prst="rect">
-            <a:avLst/>
-          </a:prstGeom>
-          <a:noFill xmlns:a="http://schemas.openxmlformats.org/drawingml/2006/main"/>
-          <a:ln xmlns:a="http://schemas.openxmlformats.org/drawingml/2006/main" w="0">
-            <a:noFill/>
-          </a:ln>
-        </p:spPr>
-        <p:txBody>
-          <a:bodyPr xmlns:a="http://schemas.openxmlformats.org/drawingml/2006/main">
-            <a:noAutofit/>
-          </a:bodyPr>
-          <a:lstStyle xmlns:a="http://schemas.openxmlformats.org/drawingml/2006/main"/>
-          <a:p xmlns:a="http://schemas.openxmlformats.org/drawingml/2006/main">
-            <a:pPr>
-              <a:defRPr sz="1350" b="0">
-                <a:solidFill>
-                  <a:srgbClr val="52635B"/>
-                </a:solidFill>
-                <a:latin typeface="Arial"/>
-                <a:ea typeface="Arial"/>
-                <a:cs typeface="Arial"/>
-              </a:defRPr>
-            </a:pPr>
-            <a:r>
-              <a:rPr sz="1350" b="0">
-                <a:solidFill>
-                  <a:srgbClr val="52635B"/>
-                </a:solidFill>
-                <a:latin typeface="Arial"/>
-                <a:ea typeface="Arial"/>
-                <a:cs typeface="Arial"/>
-              </a:rPr>
-              <a:t>Invite students to bring a story twist, a classroom message or a short passage.</a:t>
-            </a:r>
-          </a:p>
-        </p:txBody>
-      </p:sp>
-      <p:sp>
-        <p:nvSpPr>
-          <p:cNvPr id="4" name="">
-            <a:extLst xmlns:a="http://schemas.openxmlformats.org/drawingml/2006/main">
-              <a:ext uri="{FF2B5EF4-FFF2-40B4-BE49-F238E27FC236}">
-                <a16:creationId xmlns:a16="http://schemas.microsoft.com/office/drawing/2014/main" id="{04B1D60E-820B-4C93-BBC9-4E36F9BF9211}"/>
+                <a16:creationId xmlns:a16="http://schemas.microsoft.com/office/drawing/2014/main" id="{232030A5-1109-4ECA-8FD4-5F3505EA50CF}"/>
               </a:ext>
             </a:extLst>
           </p:cNvPr>
@@ -6239,7 +5270,7 @@
       </p:sp>
       <p:graphicFrame>
         <p:nvGraphicFramePr>
-          <p:cNvPr id="10" name=""/>
+          <p:cNvPr id="6" name=""/>
           <p:cNvGraphicFramePr/>
           <p:nvPr/>
         </p:nvGraphicFramePr>
@@ -6325,7 +5356,7 @@
                           <a:ea typeface="Arial"/>
                           <a:cs typeface="Arial"/>
                         </a:rPr>
-                        <a:t>WHAT STUDENTS DO</a:t>
+                        <a:t>FUNCTION</a:t>
                       </a:r>
                     </a:p>
                   </a:txBody>
@@ -6405,7 +5436,7 @@
                           <a:ea typeface="Arial"/>
                           <a:cs typeface="Arial"/>
                         </a:rPr>
-                        <a:t>Choose a setting, then change the generated story with a twist.</a:t>
+                        <a:t>Generate a story and continue it using a supplied plot change.</a:t>
                       </a:r>
                     </a:p>
                   </a:txBody>
@@ -6485,7 +5516,7 @@
                           <a:ea typeface="Arial"/>
                           <a:cs typeface="Arial"/>
                         </a:rPr>
-                        <a:t>Continue a story with a small dedicated language model.</a:t>
+                        <a:t>Generate text with the TinyStories model.</a:t>
                       </a:r>
                     </a:p>
                   </a:txBody>
@@ -6645,7 +5676,7 @@
                           <a:ea typeface="Arial"/>
                           <a:cs typeface="Arial"/>
                         </a:rPr>
-                        <a:t>Read the source, summary and separate model critique.</a:t>
+                        <a:t>Summarize a passage and compare it with a second model critique.</a:t>
                       </a:r>
                     </a:p>
                   </a:txBody>
@@ -6725,7 +5756,7 @@
                           <a:ea typeface="Arial"/>
                           <a:cs typeface="Arial"/>
                         </a:rPr>
-                        <a:t>Inspect how a tool performs arithmetic for a language model.</a:t>
+                        <a:t>Evaluate a validated arithmetic expression using a calculator tool.</a:t>
                       </a:r>
                     </a:p>
                   </a:txBody>
@@ -6743,7 +5774,7 @@
     </p:spTree>
     <p:extLst>
       <p:ext uri="{BB962C8B-B14F-4D97-AF65-F5344CB8AC3E}">
-        <p14:creationId xmlns:p14="http://schemas.microsoft.com/office/powerpoint/2010/main" val="726683948"/>
+        <p14:creationId xmlns:p14="http://schemas.microsoft.com/office/powerpoint/2010/main" val="1214969562"/>
       </p:ext>
     </p:extLst>
   </p:cSld>
@@ -6771,10 +5802,10 @@
       </p:grpSpPr>
       <p:sp>
         <p:nvSpPr>
-          <p:cNvPr id="13" name="">
+          <p:cNvPr id="11" name="">
             <a:extLst xmlns:a="http://schemas.openxmlformats.org/drawingml/2006/main">
               <a:ext uri="{FF2B5EF4-FFF2-40B4-BE49-F238E27FC236}">
-                <a16:creationId xmlns:a16="http://schemas.microsoft.com/office/drawing/2014/main" id="{1ED31DCA-7B77-4825-9E1D-AE42344DB9AB}"/>
+                <a16:creationId xmlns:a16="http://schemas.microsoft.com/office/drawing/2014/main" id="{70A89D95-701D-4948-824F-A8BCB336A2BA}"/>
               </a:ext>
             </a:extLst>
           </p:cNvPr>
@@ -6821,7 +5852,7 @@
                 <a:ea typeface="Arial"/>
                 <a:cs typeface="Arial"/>
               </a:rPr>
-              <a:t>Memory, uncertainty and trust</a:t>
+              <a:t>Prompt Injection and Context</a:t>
             </a:r>
           </a:p>
         </p:txBody>
@@ -6831,121 +5862,7 @@
           <p:cNvPr id="2" name="">
             <a:extLst xmlns:a="http://schemas.openxmlformats.org/drawingml/2006/main">
               <a:ext uri="{FF2B5EF4-FFF2-40B4-BE49-F238E27FC236}">
-                <a16:creationId xmlns:a16="http://schemas.microsoft.com/office/drawing/2014/main" id="{2F895C9B-E7DB-497D-BB53-C018B77DC6A6}"/>
-              </a:ext>
-            </a:extLst>
-          </p:cNvPr>
-          <p:cNvSpPr>
-            <a:spLocks xmlns:a="http://schemas.openxmlformats.org/drawingml/2006/main" noGrp="1"/>
-          </p:cNvSpPr>
-          <p:nvPr/>
-        </p:nvSpPr>
-        <p:spPr>
-          <a:xfrm xmlns:a="http://schemas.openxmlformats.org/drawingml/2006/main">
-            <a:off x="666750" y="1333500"/>
-            <a:ext cx="10858500" cy="619125"/>
-          </a:xfrm>
-          <a:prstGeom xmlns:a="http://schemas.openxmlformats.org/drawingml/2006/main" prst="rect">
-            <a:avLst/>
-          </a:prstGeom>
-          <a:noFill xmlns:a="http://schemas.openxmlformats.org/drawingml/2006/main"/>
-          <a:ln xmlns:a="http://schemas.openxmlformats.org/drawingml/2006/main" w="0">
-            <a:noFill/>
-          </a:ln>
-        </p:spPr>
-        <p:txBody>
-          <a:bodyPr xmlns:a="http://schemas.openxmlformats.org/drawingml/2006/main">
-            <a:noAutofit/>
-          </a:bodyPr>
-          <a:lstStyle xmlns:a="http://schemas.openxmlformats.org/drawingml/2006/main"/>
-          <a:p xmlns:a="http://schemas.openxmlformats.org/drawingml/2006/main">
-            <a:pPr>
-              <a:defRPr sz="1950" b="0">
-                <a:solidFill>
-                  <a:srgbClr val="52635B"/>
-                </a:solidFill>
-                <a:latin typeface="Arial"/>
-                <a:ea typeface="Arial"/>
-                <a:cs typeface="Arial"/>
-              </a:defRPr>
-            </a:pPr>
-            <a:r>
-              <a:rPr sz="1950" b="0">
-                <a:solidFill>
-                  <a:srgbClr val="52635B"/>
-                </a:solidFill>
-                <a:latin typeface="Arial"/>
-                <a:ea typeface="Arial"/>
-                <a:cs typeface="Arial"/>
-              </a:rPr>
-              <a:t>Explore how an assistant handles instructions, missing facts and memory.</a:t>
-            </a:r>
-          </a:p>
-        </p:txBody>
-      </p:sp>
-      <p:sp>
-        <p:nvSpPr>
-          <p:cNvPr id="3" name="">
-            <a:extLst xmlns:a="http://schemas.openxmlformats.org/drawingml/2006/main">
-              <a:ext uri="{FF2B5EF4-FFF2-40B4-BE49-F238E27FC236}">
-                <a16:creationId xmlns:a16="http://schemas.microsoft.com/office/drawing/2014/main" id="{C7F8F860-EBC3-4E4D-B814-86B521E27433}"/>
-              </a:ext>
-            </a:extLst>
-          </p:cNvPr>
-          <p:cNvSpPr>
-            <a:spLocks xmlns:a="http://schemas.openxmlformats.org/drawingml/2006/main" noGrp="1"/>
-          </p:cNvSpPr>
-          <p:nvPr/>
-        </p:nvSpPr>
-        <p:spPr>
-          <a:xfrm xmlns:a="http://schemas.openxmlformats.org/drawingml/2006/main">
-            <a:off x="666750" y="6191250"/>
-            <a:ext cx="10287000" cy="419100"/>
-          </a:xfrm>
-          <a:prstGeom xmlns:a="http://schemas.openxmlformats.org/drawingml/2006/main" prst="rect">
-            <a:avLst/>
-          </a:prstGeom>
-          <a:noFill xmlns:a="http://schemas.openxmlformats.org/drawingml/2006/main"/>
-          <a:ln xmlns:a="http://schemas.openxmlformats.org/drawingml/2006/main" w="0">
-            <a:noFill/>
-          </a:ln>
-        </p:spPr>
-        <p:txBody>
-          <a:bodyPr xmlns:a="http://schemas.openxmlformats.org/drawingml/2006/main">
-            <a:noAutofit/>
-          </a:bodyPr>
-          <a:lstStyle xmlns:a="http://schemas.openxmlformats.org/drawingml/2006/main"/>
-          <a:p xmlns:a="http://schemas.openxmlformats.org/drawingml/2006/main">
-            <a:pPr>
-              <a:defRPr sz="1350" b="0">
-                <a:solidFill>
-                  <a:srgbClr val="52635B"/>
-                </a:solidFill>
-                <a:latin typeface="Arial"/>
-                <a:ea typeface="Arial"/>
-                <a:cs typeface="Arial"/>
-              </a:defRPr>
-            </a:pPr>
-            <a:r>
-              <a:rPr sz="1350" b="0">
-                <a:solidFill>
-                  <a:srgbClr val="52635B"/>
-                </a:solidFill>
-                <a:latin typeface="Arial"/>
-                <a:ea typeface="Arial"/>
-                <a:cs typeface="Arial"/>
-              </a:rPr>
-              <a:t>Challenge the assistant, inspect its answer, and compare it with the source facts.</a:t>
-            </a:r>
-          </a:p>
-        </p:txBody>
-      </p:sp>
-      <p:sp>
-        <p:nvSpPr>
-          <p:cNvPr id="4" name="">
-            <a:extLst xmlns:a="http://schemas.openxmlformats.org/drawingml/2006/main">
-              <a:ext uri="{FF2B5EF4-FFF2-40B4-BE49-F238E27FC236}">
-                <a16:creationId xmlns:a16="http://schemas.microsoft.com/office/drawing/2014/main" id="{C90618C9-7B1C-4471-BB85-3FDF9BAC3FA6}"/>
+                <a16:creationId xmlns:a16="http://schemas.microsoft.com/office/drawing/2014/main" id="{7270A4AC-2C52-41D1-B44D-23204D18E34A}"/>
               </a:ext>
             </a:extLst>
           </p:cNvPr>
@@ -6999,10 +5916,10 @@
       </p:sp>
       <p:sp>
         <p:nvSpPr>
-          <p:cNvPr id="5" name="">
+          <p:cNvPr id="3" name="">
             <a:extLst xmlns:a="http://schemas.openxmlformats.org/drawingml/2006/main">
               <a:ext uri="{FF2B5EF4-FFF2-40B4-BE49-F238E27FC236}">
-                <a16:creationId xmlns:a16="http://schemas.microsoft.com/office/drawing/2014/main" id="{726D0ED5-DED1-419A-8A1A-4FB4811F6603}"/>
+                <a16:creationId xmlns:a16="http://schemas.microsoft.com/office/drawing/2014/main" id="{285F08BB-E527-49E0-814F-1D4D95F04ACA}"/>
               </a:ext>
             </a:extLst>
           </p:cNvPr>
@@ -7049,17 +5966,17 @@
                 <a:ea typeface="Arial"/>
                 <a:cs typeface="Arial"/>
               </a:rPr>
-              <a:t>Experiment 26</a:t>
-            </a:r>
-          </a:p>
-        </p:txBody>
-      </p:sp>
-      <p:sp>
-        <p:nvSpPr>
-          <p:cNvPr id="6" name="">
+              <a:t>Menu 26</a:t>
+            </a:r>
+          </a:p>
+        </p:txBody>
+      </p:sp>
+      <p:sp>
+        <p:nvSpPr>
+          <p:cNvPr id="4" name="">
             <a:extLst xmlns:a="http://schemas.openxmlformats.org/drawingml/2006/main">
               <a:ext uri="{FF2B5EF4-FFF2-40B4-BE49-F238E27FC236}">
-                <a16:creationId xmlns:a16="http://schemas.microsoft.com/office/drawing/2014/main" id="{29F17C53-8140-40A4-9E48-911159DCEF2E}"/>
+                <a16:creationId xmlns:a16="http://schemas.microsoft.com/office/drawing/2014/main" id="{14652289-B854-43E8-B9B5-6476167009FC}"/>
               </a:ext>
             </a:extLst>
           </p:cNvPr>
@@ -7113,10 +6030,10 @@
       </p:sp>
       <p:sp>
         <p:nvSpPr>
-          <p:cNvPr id="7" name="">
+          <p:cNvPr id="5" name="">
             <a:extLst xmlns:a="http://schemas.openxmlformats.org/drawingml/2006/main">
               <a:ext uri="{FF2B5EF4-FFF2-40B4-BE49-F238E27FC236}">
-                <a16:creationId xmlns:a16="http://schemas.microsoft.com/office/drawing/2014/main" id="{1641CA58-E882-47C6-ADFC-6E417F941C55}"/>
+                <a16:creationId xmlns:a16="http://schemas.microsoft.com/office/drawing/2014/main" id="{C61E6A3C-1B91-473C-89EF-FCAF8FB48589}"/>
               </a:ext>
             </a:extLst>
           </p:cNvPr>
@@ -7170,10 +6087,10 @@
       </p:sp>
       <p:sp>
         <p:nvSpPr>
-          <p:cNvPr id="8" name="">
+          <p:cNvPr id="6" name="">
             <a:extLst xmlns:a="http://schemas.openxmlformats.org/drawingml/2006/main">
               <a:ext uri="{FF2B5EF4-FFF2-40B4-BE49-F238E27FC236}">
-                <a16:creationId xmlns:a16="http://schemas.microsoft.com/office/drawing/2014/main" id="{816BB589-333A-4134-B91D-2DD85B53AB8C}"/>
+                <a16:creationId xmlns:a16="http://schemas.microsoft.com/office/drawing/2014/main" id="{44344DAE-B22E-48AC-AF45-2F2E4939B0DD}"/>
               </a:ext>
             </a:extLst>
           </p:cNvPr>
@@ -7220,17 +6137,17 @@
                 <a:ea typeface="Arial"/>
                 <a:cs typeface="Arial"/>
               </a:rPr>
-              <a:t>Experiment 27</a:t>
-            </a:r>
-          </a:p>
-        </p:txBody>
-      </p:sp>
-      <p:sp>
-        <p:nvSpPr>
-          <p:cNvPr id="9" name="">
+              <a:t>Menu 27</a:t>
+            </a:r>
+          </a:p>
+        </p:txBody>
+      </p:sp>
+      <p:sp>
+        <p:nvSpPr>
+          <p:cNvPr id="7" name="">
             <a:extLst xmlns:a="http://schemas.openxmlformats.org/drawingml/2006/main">
               <a:ext uri="{FF2B5EF4-FFF2-40B4-BE49-F238E27FC236}">
-                <a16:creationId xmlns:a16="http://schemas.microsoft.com/office/drawing/2014/main" id="{B8FF8D72-B20B-4049-9B2C-BA505BBDAC07}"/>
+                <a16:creationId xmlns:a16="http://schemas.microsoft.com/office/drawing/2014/main" id="{F4493DF7-DCBE-49AD-B690-AB17439F744E}"/>
               </a:ext>
             </a:extLst>
           </p:cNvPr>
@@ -7284,10 +6201,10 @@
       </p:sp>
       <p:sp>
         <p:nvSpPr>
-          <p:cNvPr id="10" name="">
+          <p:cNvPr id="8" name="">
             <a:extLst xmlns:a="http://schemas.openxmlformats.org/drawingml/2006/main">
               <a:ext uri="{FF2B5EF4-FFF2-40B4-BE49-F238E27FC236}">
-                <a16:creationId xmlns:a16="http://schemas.microsoft.com/office/drawing/2014/main" id="{F660FA5B-DDCF-429D-8A5F-F42901D36035}"/>
+                <a16:creationId xmlns:a16="http://schemas.microsoft.com/office/drawing/2014/main" id="{615E354F-CA01-449C-9A29-7A692578BEBA}"/>
               </a:ext>
             </a:extLst>
           </p:cNvPr>
@@ -7341,10 +6258,10 @@
       </p:sp>
       <p:sp>
         <p:nvSpPr>
-          <p:cNvPr id="11" name="">
+          <p:cNvPr id="9" name="">
             <a:extLst xmlns:a="http://schemas.openxmlformats.org/drawingml/2006/main">
               <a:ext uri="{FF2B5EF4-FFF2-40B4-BE49-F238E27FC236}">
-                <a16:creationId xmlns:a16="http://schemas.microsoft.com/office/drawing/2014/main" id="{E9693CC6-F79E-4E52-B2C6-BE5CDD345D36}"/>
+                <a16:creationId xmlns:a16="http://schemas.microsoft.com/office/drawing/2014/main" id="{EB7A3841-FF8C-4E7B-B2D4-15B03607D213}"/>
               </a:ext>
             </a:extLst>
           </p:cNvPr>
@@ -7391,17 +6308,17 @@
                 <a:ea typeface="Arial"/>
                 <a:cs typeface="Arial"/>
               </a:rPr>
-              <a:t>Experiment 28: Context Memory Challenge</a:t>
-            </a:r>
-          </a:p>
-        </p:txBody>
-      </p:sp>
-      <p:sp>
-        <p:nvSpPr>
-          <p:cNvPr id="12" name="">
+              <a:t>Menu 28: Context Memory Challenge</a:t>
+            </a:r>
+          </a:p>
+        </p:txBody>
+      </p:sp>
+      <p:sp>
+        <p:nvSpPr>
+          <p:cNvPr id="10" name="">
             <a:extLst xmlns:a="http://schemas.openxmlformats.org/drawingml/2006/main">
               <a:ext uri="{FF2B5EF4-FFF2-40B4-BE49-F238E27FC236}">
-                <a16:creationId xmlns:a16="http://schemas.microsoft.com/office/drawing/2014/main" id="{9AB07230-0B47-43BB-9BBE-DEED6BAD8E58}"/>
+                <a16:creationId xmlns:a16="http://schemas.microsoft.com/office/drawing/2014/main" id="{48F46CC2-CA05-40AD-A18B-32FA627682FA}"/>
               </a:ext>
             </a:extLst>
           </p:cNvPr>
@@ -7456,7 +6373,7 @@
     </p:spTree>
     <p:extLst>
       <p:ext uri="{BB962C8B-B14F-4D97-AF65-F5344CB8AC3E}">
-        <p14:creationId xmlns:p14="http://schemas.microsoft.com/office/powerpoint/2010/main" val="37995341"/>
+        <p14:creationId xmlns:p14="http://schemas.microsoft.com/office/powerpoint/2010/main" val="1561833522"/>
       </p:ext>
     </p:extLst>
   </p:cSld>
@@ -7484,10 +6401,10 @@
       </p:grpSpPr>
       <p:sp>
         <p:nvSpPr>
-          <p:cNvPr id="7" name="">
+          <p:cNvPr id="6" name="">
             <a:extLst xmlns:a="http://schemas.openxmlformats.org/drawingml/2006/main">
               <a:ext uri="{FF2B5EF4-FFF2-40B4-BE49-F238E27FC236}">
-                <a16:creationId xmlns:a16="http://schemas.microsoft.com/office/drawing/2014/main" id="{843E3006-0661-4D69-AF3C-EAB1C8E49FF4}"/>
+                <a16:creationId xmlns:a16="http://schemas.microsoft.com/office/drawing/2014/main" id="{FD14484D-AF43-4B7F-963C-B19C2C969AAD}"/>
               </a:ext>
             </a:extLst>
           </p:cNvPr>
@@ -7534,7 +6451,7 @@
                 <a:ea typeface="Arial"/>
                 <a:cs typeface="Arial"/>
               </a:rPr>
-              <a:t>Camera projects beyond detection</a:t>
+              <a:t>Camera Applications</a:t>
             </a:r>
           </a:p>
         </p:txBody>
@@ -7544,7 +6461,7 @@
           <p:cNvPr id="2" name="">
             <a:extLst xmlns:a="http://schemas.openxmlformats.org/drawingml/2006/main">
               <a:ext uri="{FF2B5EF4-FFF2-40B4-BE49-F238E27FC236}">
-                <a16:creationId xmlns:a16="http://schemas.microsoft.com/office/drawing/2014/main" id="{3FB96AED-A273-40D8-8882-1FCB199807ED}"/>
+                <a16:creationId xmlns:a16="http://schemas.microsoft.com/office/drawing/2014/main" id="{6F3640AD-7C70-4E05-8B3E-83E6A1F1432F}"/>
               </a:ext>
             </a:extLst>
           </p:cNvPr>
@@ -7591,7 +6508,7 @@
                 <a:ea typeface="Arial"/>
                 <a:cs typeface="Arial"/>
               </a:rPr>
-              <a:t>Keep the camera fixed. Move ordinary objects in the scene.</a:t>
+              <a:t>Keep the camera fixed between observations.</a:t>
             </a:r>
           </a:p>
         </p:txBody>
@@ -7601,64 +6518,7 @@
           <p:cNvPr id="3" name="">
             <a:extLst xmlns:a="http://schemas.openxmlformats.org/drawingml/2006/main">
               <a:ext uri="{FF2B5EF4-FFF2-40B4-BE49-F238E27FC236}">
-                <a16:creationId xmlns:a16="http://schemas.microsoft.com/office/drawing/2014/main" id="{EFCB9428-03D2-4401-9CEB-C144681BF218}"/>
-              </a:ext>
-            </a:extLst>
-          </p:cNvPr>
-          <p:cNvSpPr>
-            <a:spLocks xmlns:a="http://schemas.openxmlformats.org/drawingml/2006/main" noGrp="1"/>
-          </p:cNvSpPr>
-          <p:nvPr/>
-        </p:nvSpPr>
-        <p:spPr>
-          <a:xfrm xmlns:a="http://schemas.openxmlformats.org/drawingml/2006/main">
-            <a:off x="666750" y="6191250"/>
-            <a:ext cx="10287000" cy="419100"/>
-          </a:xfrm>
-          <a:prstGeom xmlns:a="http://schemas.openxmlformats.org/drawingml/2006/main" prst="rect">
-            <a:avLst/>
-          </a:prstGeom>
-          <a:noFill xmlns:a="http://schemas.openxmlformats.org/drawingml/2006/main"/>
-          <a:ln xmlns:a="http://schemas.openxmlformats.org/drawingml/2006/main" w="0">
-            <a:noFill/>
-          </a:ln>
-        </p:spPr>
-        <p:txBody>
-          <a:bodyPr xmlns:a="http://schemas.openxmlformats.org/drawingml/2006/main">
-            <a:noAutofit/>
-          </a:bodyPr>
-          <a:lstStyle xmlns:a="http://schemas.openxmlformats.org/drawingml/2006/main"/>
-          <a:p xmlns:a="http://schemas.openxmlformats.org/drawingml/2006/main">
-            <a:pPr>
-              <a:defRPr sz="1350" b="0">
-                <a:solidFill>
-                  <a:srgbClr val="52635B"/>
-                </a:solidFill>
-                <a:latin typeface="Arial"/>
-                <a:ea typeface="Arial"/>
-                <a:cs typeface="Arial"/>
-              </a:defRPr>
-            </a:pPr>
-            <a:r>
-              <a:rPr sz="1350" b="0">
-                <a:solidFill>
-                  <a:srgbClr val="52635B"/>
-                </a:solidFill>
-                <a:latin typeface="Arial"/>
-                <a:ea typeface="Arial"/>
-                <a:cs typeface="Arial"/>
-              </a:rPr>
-              <a:t>Run 13 → install and rehearse detection first. Vision and the language model run sequentially.</a:t>
-            </a:r>
-          </a:p>
-        </p:txBody>
-      </p:sp>
-      <p:sp>
-        <p:nvSpPr>
-          <p:cNvPr id="4" name="">
-            <a:extLst xmlns:a="http://schemas.openxmlformats.org/drawingml/2006/main">
-              <a:ext uri="{FF2B5EF4-FFF2-40B4-BE49-F238E27FC236}">
-                <a16:creationId xmlns:a16="http://schemas.microsoft.com/office/drawing/2014/main" id="{9405CB78-00D6-4411-8237-50AFDDE894FC}"/>
+                <a16:creationId xmlns:a16="http://schemas.microsoft.com/office/drawing/2014/main" id="{D4758701-5A20-4D58-B494-1D742201667E}"/>
               </a:ext>
             </a:extLst>
           </p:cNvPr>
@@ -7712,7 +6572,7 @@
       </p:sp>
       <p:graphicFrame>
         <p:nvGraphicFramePr>
-          <p:cNvPr id="11" name=""/>
+          <p:cNvPr id="9" name=""/>
           <p:cNvGraphicFramePr/>
           <p:nvPr/>
         </p:nvGraphicFramePr>
@@ -7798,7 +6658,7 @@
                           <a:ea typeface="Arial"/>
                           <a:cs typeface="Arial"/>
                         </a:rPr>
-                        <a:t>WHAT STUDENTS DO</a:t>
+                        <a:t>FUNCTION</a:t>
                       </a:r>
                     </a:p>
                   </a:txBody>
@@ -7878,7 +6738,7 @@
                           <a:ea typeface="Arial"/>
                           <a:cs typeface="Arial"/>
                         </a:rPr>
-                        <a:t>Observe the desk, change something, then explain the measured difference.</a:t>
+                        <a:t>Compare object classes, counts and positions across two observations.</a:t>
                       </a:r>
                     </a:p>
                   </a:txBody>
@@ -7958,7 +6818,7 @@
                           <a:ea typeface="Arial"/>
                           <a:cs typeface="Arial"/>
                         </a:rPr>
-                        <a:t>Arrange objects for an AI-generated quest; detector evidence determines the score.</a:t>
+                        <a:t>Generate an object-finding task and score detections against its targets.</a:t>
                       </a:r>
                     </a:p>
                   </a:txBody>
@@ -8038,7 +6898,7 @@
                           <a:ea typeface="Arial"/>
                           <a:cs typeface="Arial"/>
                         </a:rPr>
-                        <a:t>Capture three observations and summarize the recorded changes.</a:t>
+                        <a:t>Record three observations and summarize the detected changes.</a:t>
                       </a:r>
                     </a:p>
                   </a:txBody>
@@ -8118,7 +6978,7 @@
                           <a:ea typeface="Arial"/>
                           <a:cs typeface="Arial"/>
                         </a:rPr>
-                        <a:t>Explore detection, classification, pose or segmentation.</a:t>
+                        <a:t>Run detection, classification, pose estimation or segmentation.</a:t>
                       </a:r>
                     </a:p>
                   </a:txBody>
@@ -8135,10 +6995,10 @@
       </p:graphicFrame>
       <p:sp>
         <p:nvSpPr>
-          <p:cNvPr id="6" name="">
+          <p:cNvPr id="5" name="">
             <a:extLst xmlns:a="http://schemas.openxmlformats.org/drawingml/2006/main">
               <a:ext uri="{FF2B5EF4-FFF2-40B4-BE49-F238E27FC236}">
-                <a16:creationId xmlns:a16="http://schemas.microsoft.com/office/drawing/2014/main" id="{9BF8FC52-3999-4277-9CDF-D3F54FE2ECD4}"/>
+                <a16:creationId xmlns:a16="http://schemas.microsoft.com/office/drawing/2014/main" id="{EBDE1D2B-5CD7-4206-9EB1-DF9CC34B74D8}"/>
               </a:ext>
             </a:extLst>
           </p:cNvPr>
@@ -8149,7 +7009,7 @@
         </p:nvSpPr>
         <p:spPr>
           <a:xfrm xmlns:a="http://schemas.openxmlformats.org/drawingml/2006/main">
-            <a:off x="723900" y="5591175"/>
+            <a:off x="723900" y="5657850"/>
             <a:ext cx="10382250" cy="457200"/>
           </a:xfrm>
           <a:prstGeom xmlns:a="http://schemas.openxmlformats.org/drawingml/2006/main" prst="rect">
@@ -8167,9 +7027,9 @@
           <a:lstStyle xmlns:a="http://schemas.openxmlformats.org/drawingml/2006/main"/>
           <a:p xmlns:a="http://schemas.openxmlformats.org/drawingml/2006/main">
             <a:pPr>
-              <a:defRPr sz="2250" b="1">
-                <a:solidFill>
-                  <a:srgbClr val="397718"/>
+              <a:defRPr sz="1875" b="0">
+                <a:solidFill>
+                  <a:srgbClr val="52635B"/>
                 </a:solidFill>
                 <a:latin typeface="Arial"/>
                 <a:ea typeface="Arial"/>
@@ -8177,15 +7037,15 @@
               </a:defRPr>
             </a:pPr>
             <a:r>
-              <a:rPr sz="2250" b="1">
-                <a:solidFill>
-                  <a:srgbClr val="397718"/>
+              <a:rPr sz="1875" b="0">
+                <a:solidFill>
+                  <a:srgbClr val="52635B"/>
                 </a:solidFill>
                 <a:latin typeface="Arial"/>
                 <a:ea typeface="Arial"/>
                 <a:cs typeface="Arial"/>
               </a:rPr>
-              <a:t>Try it with a cup, a book or a bottle.</a:t>
+              <a:t>Camera setup: menu 13, then install.</a:t>
             </a:r>
           </a:p>
         </p:txBody>
@@ -8193,7 +7053,7 @@
     </p:spTree>
     <p:extLst>
       <p:ext uri="{BB962C8B-B14F-4D97-AF65-F5344CB8AC3E}">
-        <p14:creationId xmlns:p14="http://schemas.microsoft.com/office/powerpoint/2010/main" val="1211632577"/>
+        <p14:creationId xmlns:p14="http://schemas.microsoft.com/office/powerpoint/2010/main" val="357624320"/>
       </p:ext>
     </p:extLst>
   </p:cSld>
@@ -8221,10 +7081,10 @@
       </p:grpSpPr>
       <p:sp>
         <p:nvSpPr>
-          <p:cNvPr id="11" name="">
+          <p:cNvPr id="9" name="">
             <a:extLst xmlns:a="http://schemas.openxmlformats.org/drawingml/2006/main">
               <a:ext uri="{FF2B5EF4-FFF2-40B4-BE49-F238E27FC236}">
-                <a16:creationId xmlns:a16="http://schemas.microsoft.com/office/drawing/2014/main" id="{04B9A307-1337-42F5-A365-DD34E580A834}"/>
+                <a16:creationId xmlns:a16="http://schemas.microsoft.com/office/drawing/2014/main" id="{DE847DF4-805F-490F-940D-69D9BB4220CE}"/>
               </a:ext>
             </a:extLst>
           </p:cNvPr>
@@ -8271,7 +7131,7 @@
                 <a:ea typeface="Arial"/>
                 <a:cs typeface="Arial"/>
               </a:rPr>
-              <a:t>Model performance and evaluation</a:t>
+              <a:t>Performance and Evaluation</a:t>
             </a:r>
           </a:p>
         </p:txBody>
@@ -8281,121 +7141,7 @@
           <p:cNvPr id="2" name="">
             <a:extLst xmlns:a="http://schemas.openxmlformats.org/drawingml/2006/main">
               <a:ext uri="{FF2B5EF4-FFF2-40B4-BE49-F238E27FC236}">
-                <a16:creationId xmlns:a16="http://schemas.microsoft.com/office/drawing/2014/main" id="{31D1AC7E-64C6-4ADD-AAF5-BFDBF1F2A22E}"/>
-              </a:ext>
-            </a:extLst>
-          </p:cNvPr>
-          <p:cNvSpPr>
-            <a:spLocks xmlns:a="http://schemas.openxmlformats.org/drawingml/2006/main" noGrp="1"/>
-          </p:cNvSpPr>
-          <p:nvPr/>
-        </p:nvSpPr>
-        <p:spPr>
-          <a:xfrm xmlns:a="http://schemas.openxmlformats.org/drawingml/2006/main">
-            <a:off x="666750" y="1333500"/>
-            <a:ext cx="10858500" cy="619125"/>
-          </a:xfrm>
-          <a:prstGeom xmlns:a="http://schemas.openxmlformats.org/drawingml/2006/main" prst="rect">
-            <a:avLst/>
-          </a:prstGeom>
-          <a:noFill xmlns:a="http://schemas.openxmlformats.org/drawingml/2006/main"/>
-          <a:ln xmlns:a="http://schemas.openxmlformats.org/drawingml/2006/main" w="0">
-            <a:noFill/>
-          </a:ln>
-        </p:spPr>
-        <p:txBody>
-          <a:bodyPr xmlns:a="http://schemas.openxmlformats.org/drawingml/2006/main">
-            <a:noAutofit/>
-          </a:bodyPr>
-          <a:lstStyle xmlns:a="http://schemas.openxmlformats.org/drawingml/2006/main"/>
-          <a:p xmlns:a="http://schemas.openxmlformats.org/drawingml/2006/main">
-            <a:pPr>
-              <a:defRPr sz="1950" b="0">
-                <a:solidFill>
-                  <a:srgbClr val="52635B"/>
-                </a:solidFill>
-                <a:latin typeface="Arial"/>
-                <a:ea typeface="Arial"/>
-                <a:cs typeface="Arial"/>
-              </a:defRPr>
-            </a:pPr>
-            <a:r>
-              <a:rPr sz="1950" b="0">
-                <a:solidFill>
-                  <a:srgbClr val="52635B"/>
-                </a:solidFill>
-                <a:latin typeface="Arial"/>
-                <a:ea typeface="Arial"/>
-                <a:cs typeface="Arial"/>
-              </a:rPr>
-              <a:t>Inspect model responses and measure runtime.</a:t>
-            </a:r>
-          </a:p>
-        </p:txBody>
-      </p:sp>
-      <p:sp>
-        <p:nvSpPr>
-          <p:cNvPr id="3" name="">
-            <a:extLst xmlns:a="http://schemas.openxmlformats.org/drawingml/2006/main">
-              <a:ext uri="{FF2B5EF4-FFF2-40B4-BE49-F238E27FC236}">
-                <a16:creationId xmlns:a16="http://schemas.microsoft.com/office/drawing/2014/main" id="{339E4887-0413-4C00-8B76-96765999C083}"/>
-              </a:ext>
-            </a:extLst>
-          </p:cNvPr>
-          <p:cNvSpPr>
-            <a:spLocks xmlns:a="http://schemas.openxmlformats.org/drawingml/2006/main" noGrp="1"/>
-          </p:cNvSpPr>
-          <p:nvPr/>
-        </p:nvSpPr>
-        <p:spPr>
-          <a:xfrm xmlns:a="http://schemas.openxmlformats.org/drawingml/2006/main">
-            <a:off x="666750" y="6191250"/>
-            <a:ext cx="10287000" cy="419100"/>
-          </a:xfrm>
-          <a:prstGeom xmlns:a="http://schemas.openxmlformats.org/drawingml/2006/main" prst="rect">
-            <a:avLst/>
-          </a:prstGeom>
-          <a:noFill xmlns:a="http://schemas.openxmlformats.org/drawingml/2006/main"/>
-          <a:ln xmlns:a="http://schemas.openxmlformats.org/drawingml/2006/main" w="0">
-            <a:noFill/>
-          </a:ln>
-        </p:spPr>
-        <p:txBody>
-          <a:bodyPr xmlns:a="http://schemas.openxmlformats.org/drawingml/2006/main">
-            <a:noAutofit/>
-          </a:bodyPr>
-          <a:lstStyle xmlns:a="http://schemas.openxmlformats.org/drawingml/2006/main"/>
-          <a:p xmlns:a="http://schemas.openxmlformats.org/drawingml/2006/main">
-            <a:pPr>
-              <a:defRPr sz="1350" b="0">
-                <a:solidFill>
-                  <a:srgbClr val="52635B"/>
-                </a:solidFill>
-                <a:latin typeface="Arial"/>
-                <a:ea typeface="Arial"/>
-                <a:cs typeface="Arial"/>
-              </a:defRPr>
-            </a:pPr>
-            <a:r>
-              <a:rPr sz="1350" b="0">
-                <a:solidFill>
-                  <a:srgbClr val="52635B"/>
-                </a:solidFill>
-                <a:latin typeface="Arial"/>
-                <a:ea typeface="Arial"/>
-                <a:cs typeface="Arial"/>
-              </a:rPr>
-              <a:t>Compare the saved outputs and timings from your chosen workload.</a:t>
-            </a:r>
-          </a:p>
-        </p:txBody>
-      </p:sp>
-      <p:sp>
-        <p:nvSpPr>
-          <p:cNvPr id="4" name="">
-            <a:extLst xmlns:a="http://schemas.openxmlformats.org/drawingml/2006/main">
-              <a:ext uri="{FF2B5EF4-FFF2-40B4-BE49-F238E27FC236}">
-                <a16:creationId xmlns:a16="http://schemas.microsoft.com/office/drawing/2014/main" id="{64DA0A4E-9FB7-412C-8E78-DD5B5E930959}"/>
+                <a16:creationId xmlns:a16="http://schemas.microsoft.com/office/drawing/2014/main" id="{140CB928-978F-4D89-9BD3-1B354BD703D9}"/>
               </a:ext>
             </a:extLst>
           </p:cNvPr>
@@ -8449,10 +7195,10 @@
       </p:sp>
       <p:sp>
         <p:nvSpPr>
-          <p:cNvPr id="5" name="">
+          <p:cNvPr id="3" name="">
             <a:extLst xmlns:a="http://schemas.openxmlformats.org/drawingml/2006/main">
               <a:ext uri="{FF2B5EF4-FFF2-40B4-BE49-F238E27FC236}">
-                <a16:creationId xmlns:a16="http://schemas.microsoft.com/office/drawing/2014/main" id="{B1F58E43-C718-4831-9023-A1C37FD3DB98}"/>
+                <a16:creationId xmlns:a16="http://schemas.microsoft.com/office/drawing/2014/main" id="{550F984B-ECE6-474C-9294-685F937C5C13}"/>
               </a:ext>
             </a:extLst>
           </p:cNvPr>
@@ -8499,17 +7245,17 @@
                 <a:ea typeface="Arial"/>
                 <a:cs typeface="Arial"/>
               </a:rPr>
-              <a:t>Experiment 11</a:t>
-            </a:r>
-          </a:p>
-        </p:txBody>
-      </p:sp>
-      <p:sp>
-        <p:nvSpPr>
-          <p:cNvPr id="6" name="">
+              <a:t>Menu 11</a:t>
+            </a:r>
+          </a:p>
+        </p:txBody>
+      </p:sp>
+      <p:sp>
+        <p:nvSpPr>
+          <p:cNvPr id="4" name="">
             <a:extLst xmlns:a="http://schemas.openxmlformats.org/drawingml/2006/main">
               <a:ext uri="{FF2B5EF4-FFF2-40B4-BE49-F238E27FC236}">
-                <a16:creationId xmlns:a16="http://schemas.microsoft.com/office/drawing/2014/main" id="{993F2EA9-FD58-496A-AE58-8858A5F0B2B9}"/>
+                <a16:creationId xmlns:a16="http://schemas.microsoft.com/office/drawing/2014/main" id="{E62E4DED-969C-4F26-B420-E6E6EA6C9C1E}"/>
               </a:ext>
             </a:extLst>
           </p:cNvPr>
@@ -8586,10 +7332,10 @@
       </p:sp>
       <p:sp>
         <p:nvSpPr>
-          <p:cNvPr id="7" name="">
+          <p:cNvPr id="5" name="">
             <a:extLst xmlns:a="http://schemas.openxmlformats.org/drawingml/2006/main">
               <a:ext uri="{FF2B5EF4-FFF2-40B4-BE49-F238E27FC236}">
-                <a16:creationId xmlns:a16="http://schemas.microsoft.com/office/drawing/2014/main" id="{594E3212-F208-4853-9E2A-FBF32107D80A}"/>
+                <a16:creationId xmlns:a16="http://schemas.microsoft.com/office/drawing/2014/main" id="{F005D8A6-9A4E-4801-A651-A6F8F7F4347E}"/>
               </a:ext>
             </a:extLst>
           </p:cNvPr>
@@ -8666,10 +7412,10 @@
       </p:sp>
       <p:sp>
         <p:nvSpPr>
-          <p:cNvPr id="8" name="">
+          <p:cNvPr id="6" name="">
             <a:extLst xmlns:a="http://schemas.openxmlformats.org/drawingml/2006/main">
               <a:ext uri="{FF2B5EF4-FFF2-40B4-BE49-F238E27FC236}">
-                <a16:creationId xmlns:a16="http://schemas.microsoft.com/office/drawing/2014/main" id="{5F482AFA-9BA7-4C71-B211-EA2A60C3B0A3}"/>
+                <a16:creationId xmlns:a16="http://schemas.microsoft.com/office/drawing/2014/main" id="{1DDED668-2D72-4A57-A388-09DB00350FE9}"/>
               </a:ext>
             </a:extLst>
           </p:cNvPr>
@@ -8716,17 +7462,17 @@
                 <a:ea typeface="Arial"/>
                 <a:cs typeface="Arial"/>
               </a:rPr>
-              <a:t>Experiment 12</a:t>
-            </a:r>
-          </a:p>
-        </p:txBody>
-      </p:sp>
-      <p:sp>
-        <p:nvSpPr>
-          <p:cNvPr id="9" name="">
+              <a:t>Menu 12</a:t>
+            </a:r>
+          </a:p>
+        </p:txBody>
+      </p:sp>
+      <p:sp>
+        <p:nvSpPr>
+          <p:cNvPr id="7" name="">
             <a:extLst xmlns:a="http://schemas.openxmlformats.org/drawingml/2006/main">
               <a:ext uri="{FF2B5EF4-FFF2-40B4-BE49-F238E27FC236}">
-                <a16:creationId xmlns:a16="http://schemas.microsoft.com/office/drawing/2014/main" id="{1355499E-AEF7-42A5-8D38-1C6222DBD1C0}"/>
+                <a16:creationId xmlns:a16="http://schemas.microsoft.com/office/drawing/2014/main" id="{C02DF85B-CCD4-45AF-931F-575882218103}"/>
               </a:ext>
             </a:extLst>
           </p:cNvPr>
@@ -8803,10 +7549,10 @@
       </p:sp>
       <p:sp>
         <p:nvSpPr>
-          <p:cNvPr id="10" name="">
+          <p:cNvPr id="8" name="">
             <a:extLst xmlns:a="http://schemas.openxmlformats.org/drawingml/2006/main">
               <a:ext uri="{FF2B5EF4-FFF2-40B4-BE49-F238E27FC236}">
-                <a16:creationId xmlns:a16="http://schemas.microsoft.com/office/drawing/2014/main" id="{82C63AC1-1523-4EBB-B3ED-876F489F3169}"/>
+                <a16:creationId xmlns:a16="http://schemas.microsoft.com/office/drawing/2014/main" id="{4B519EAD-9509-4F4E-B0A2-822B64F3B501}"/>
               </a:ext>
             </a:extLst>
           </p:cNvPr>
@@ -8907,7 +7653,7 @@
     </p:spTree>
     <p:extLst>
       <p:ext uri="{BB962C8B-B14F-4D97-AF65-F5344CB8AC3E}">
-        <p14:creationId xmlns:p14="http://schemas.microsoft.com/office/powerpoint/2010/main" val="1855397704"/>
+        <p14:creationId xmlns:p14="http://schemas.microsoft.com/office/powerpoint/2010/main" val="101238428"/>
       </p:ext>
     </p:extLst>
   </p:cSld>

--- a/docs/Jetson_Nano_Local_AI_Experiments.pptx
+++ b/docs/Jetson_Nano_Local_AI_Experiments.pptx
@@ -2,19 +2,19 @@
 <file path=ppt/presentation.xml><?xml version="1.0" encoding="utf-8"?>
 <p:presentation xmlns:p="http://schemas.openxmlformats.org/presentationml/2006/main">
   <p:sldMasterIdLst>
-    <p:sldMasterId xmlns:r="http://schemas.openxmlformats.org/officeDocument/2006/relationships" id="2147483648" r:id="R8f1f77419b1441ae"/>
+    <p:sldMasterId xmlns:r="http://schemas.openxmlformats.org/officeDocument/2006/relationships" id="2147483648" r:id="R34fb2aa7261d4c4b"/>
   </p:sldMasterIdLst>
   <p:notesMasterIdLst>
-    <p:notesMasterId xmlns:r="http://schemas.openxmlformats.org/officeDocument/2006/relationships" r:id="R9cfc5cabd4ff48b5"/>
+    <p:notesMasterId xmlns:r="http://schemas.openxmlformats.org/officeDocument/2006/relationships" r:id="R00e48b11a0ed4e0e"/>
   </p:notesMasterIdLst>
   <p:sldIdLst>
-    <p:sldId xmlns:r="http://schemas.openxmlformats.org/officeDocument/2006/relationships" id="256" r:id="Ree27db097d734db5"/>
-    <p:sldId xmlns:r="http://schemas.openxmlformats.org/officeDocument/2006/relationships" id="257" r:id="R78959b4779f94b07"/>
-    <p:sldId xmlns:r="http://schemas.openxmlformats.org/officeDocument/2006/relationships" id="258" r:id="Rde7f496ac0c14395"/>
-    <p:sldId xmlns:r="http://schemas.openxmlformats.org/officeDocument/2006/relationships" id="259" r:id="R54e774a68c004e14"/>
-    <p:sldId xmlns:r="http://schemas.openxmlformats.org/officeDocument/2006/relationships" id="260" r:id="Rb5a2d6d9a33b421d"/>
-    <p:sldId xmlns:r="http://schemas.openxmlformats.org/officeDocument/2006/relationships" id="261" r:id="Rac6980f06c374dcd"/>
-    <p:sldId xmlns:r="http://schemas.openxmlformats.org/officeDocument/2006/relationships" id="262" r:id="R86c90283679c44a7"/>
+    <p:sldId xmlns:r="http://schemas.openxmlformats.org/officeDocument/2006/relationships" id="256" r:id="R7a16c796209f4805"/>
+    <p:sldId xmlns:r="http://schemas.openxmlformats.org/officeDocument/2006/relationships" id="257" r:id="Rca4c68bceb9e42f8"/>
+    <p:sldId xmlns:r="http://schemas.openxmlformats.org/officeDocument/2006/relationships" id="258" r:id="R0cb36b49d0954811"/>
+    <p:sldId xmlns:r="http://schemas.openxmlformats.org/officeDocument/2006/relationships" id="259" r:id="Rf1c163d1d6114913"/>
+    <p:sldId xmlns:r="http://schemas.openxmlformats.org/officeDocument/2006/relationships" id="260" r:id="R99cdb1abe69e47ed"/>
+    <p:sldId xmlns:r="http://schemas.openxmlformats.org/officeDocument/2006/relationships" id="261" r:id="Rdcbbe0b040984d5f"/>
+    <p:sldId xmlns:r="http://schemas.openxmlformats.org/officeDocument/2006/relationships" id="262" r:id="R75dcefaa57424e8e"/>
   </p:sldIdLst>
   <p:sldSz cx="12192000" cy="6858000"/>
   <p:notesSz cx="6858000" cy="9144000"/>
@@ -668,12 +668,7 @@
           <a:lstStyle xmlns:a="http://schemas.openxmlformats.org/drawingml/2006/main"/>
           <a:p xmlns:a="http://schemas.openxmlformats.org/drawingml/2006/main">
             <a:r>
-              <a:t>Code and menu: https://github.com/nileshsarkar-ai/JetsonNano-Demo/tree/master</a:t>
-            </a:r>
-          </a:p>
-          <a:p xmlns:a="http://schemas.openxmlformats.org/drawingml/2006/main">
-            <a:r>
-              <a:t>Scope and names: docs/EXPERIMENTS.md. Presenter notes: Physical Nano execution unverified. Software tests use mocks. Models may hallucinate; prompt separation and self-critique are not security or accuracy guarantees. Check against visible source facts. Camera projects use object detections plus text generation, not a vision-language model. Default setup does not need audio or external training. Rehearse power, cooling, camera capture, latency and answer quality on the actual board. This is the current local programme, not the historical 72-topic idea catalogue.</a:t>
+              <a:t>AI-generated illustrative scene, not a camera capture or measured detection result. Detection labels and bounding boxes come from labs/vision.py during live execution. Ask students which objects remain detectable after rotation or partial occlusion; no accuracy outcome is predetermined.</a:t>
             </a:r>
           </a:p>
         </p:txBody>
@@ -961,7 +956,7 @@
   </p:cSld>
   <p:clrMap bg1="lt1" tx1="dk1" bg2="lt2" tx2="dk2" accent1="accent1" accent2="accent2" accent3="accent3" accent4="accent4" accent5="accent5" accent6="accent6" hlink="hlink" folHlink="folHlink"/>
   <p:sldLayoutIdLst>
-    <p:sldLayoutId xmlns:r="http://schemas.openxmlformats.org/officeDocument/2006/relationships" id="2147483649" r:id="Ra66acb3724bb4bff"/>
+    <p:sldLayoutId xmlns:r="http://schemas.openxmlformats.org/officeDocument/2006/relationships" id="2147483649" r:id="R5c99be58d48f4117"/>
   </p:sldLayoutIdLst>
   <p:txStyles>
     <p:titleStyle>
@@ -1512,7 +1507,7 @@
           <p:cNvPr id="4" name="">
             <a:extLst xmlns:a="http://schemas.openxmlformats.org/drawingml/2006/main">
               <a:ext uri="{FF2B5EF4-FFF2-40B4-BE49-F238E27FC236}">
-                <a16:creationId xmlns:a16="http://schemas.microsoft.com/office/drawing/2014/main" id="{18BF824D-D129-4837-A225-703C0C1E866B}"/>
+                <a16:creationId xmlns:a16="http://schemas.microsoft.com/office/drawing/2014/main" id="{6B8204A1-FE74-4696-878B-B0C090E04798}"/>
               </a:ext>
             </a:extLst>
           </p:cNvPr>
@@ -1596,7 +1591,7 @@
           <p:nvPr/>
         </p:nvPicPr>
         <p:blipFill>
-          <a:blip xmlns:r="http://schemas.openxmlformats.org/officeDocument/2006/relationships" xmlns:a="http://schemas.openxmlformats.org/drawingml/2006/main" r:embed="Rd1399ac78ee44f44"/>
+          <a:blip xmlns:r="http://schemas.openxmlformats.org/officeDocument/2006/relationships" xmlns:a="http://schemas.openxmlformats.org/drawingml/2006/main" r:embed="R53b2c0b5b09f42ed"/>
           <a:stretch xmlns:a="http://schemas.openxmlformats.org/drawingml/2006/main"/>
         </p:blipFill>
         <p:spPr>
@@ -1614,7 +1609,7 @@
           <p:cNvPr id="3" name="">
             <a:extLst xmlns:a="http://schemas.openxmlformats.org/drawingml/2006/main">
               <a:ext uri="{FF2B5EF4-FFF2-40B4-BE49-F238E27FC236}">
-                <a16:creationId xmlns:a16="http://schemas.microsoft.com/office/drawing/2014/main" id="{4185CD49-713D-4B66-81E5-47B3D35AE1A5}"/>
+                <a16:creationId xmlns:a16="http://schemas.microsoft.com/office/drawing/2014/main" id="{6888DF4B-7B71-4D75-9BA0-421AAC5913E8}"/>
               </a:ext>
             </a:extLst>
           </p:cNvPr>
@@ -1715,7 +1710,7 @@
     </p:spTree>
     <p:extLst>
       <p:ext uri="{BB962C8B-B14F-4D97-AF65-F5344CB8AC3E}">
-        <p14:creationId xmlns:p14="http://schemas.microsoft.com/office/powerpoint/2010/main" val="1942301839"/>
+        <p14:creationId xmlns:p14="http://schemas.microsoft.com/office/powerpoint/2010/main" val="1976310032"/>
       </p:ext>
     </p:extLst>
   </p:cSld>
@@ -1746,7 +1741,7 @@
           <p:cNvPr id="10" name="">
             <a:extLst xmlns:a="http://schemas.openxmlformats.org/drawingml/2006/main">
               <a:ext uri="{FF2B5EF4-FFF2-40B4-BE49-F238E27FC236}">
-                <a16:creationId xmlns:a16="http://schemas.microsoft.com/office/drawing/2014/main" id="{0290E4CF-B054-4C26-90C5-C7F87839298E}"/>
+                <a16:creationId xmlns:a16="http://schemas.microsoft.com/office/drawing/2014/main" id="{2526F82A-9CF2-479B-9D20-9767254A04A6}"/>
               </a:ext>
             </a:extLst>
           </p:cNvPr>
@@ -1803,7 +1798,7 @@
           <p:cNvPr id="2" name="">
             <a:extLst xmlns:a="http://schemas.openxmlformats.org/drawingml/2006/main">
               <a:ext uri="{FF2B5EF4-FFF2-40B4-BE49-F238E27FC236}">
-                <a16:creationId xmlns:a16="http://schemas.microsoft.com/office/drawing/2014/main" id="{33540E8E-52C4-4CAC-86B6-798734FB0EB3}"/>
+                <a16:creationId xmlns:a16="http://schemas.microsoft.com/office/drawing/2014/main" id="{4C6967D6-C26D-4298-9996-865850F76995}"/>
               </a:ext>
             </a:extLst>
           </p:cNvPr>
@@ -1860,7 +1855,7 @@
           <p:cNvPr id="3" name="">
             <a:extLst xmlns:a="http://schemas.openxmlformats.org/drawingml/2006/main">
               <a:ext uri="{FF2B5EF4-FFF2-40B4-BE49-F238E27FC236}">
-                <a16:creationId xmlns:a16="http://schemas.microsoft.com/office/drawing/2014/main" id="{8420DD6D-7180-41FE-A06B-67E84EAB81AE}"/>
+                <a16:creationId xmlns:a16="http://schemas.microsoft.com/office/drawing/2014/main" id="{F0490142-68B9-46FC-95DB-D31EF10791B8}"/>
               </a:ext>
             </a:extLst>
           </p:cNvPr>
@@ -1917,7 +1912,7 @@
           <p:cNvPr id="4" name="">
             <a:extLst xmlns:a="http://schemas.openxmlformats.org/drawingml/2006/main">
               <a:ext uri="{FF2B5EF4-FFF2-40B4-BE49-F238E27FC236}">
-                <a16:creationId xmlns:a16="http://schemas.microsoft.com/office/drawing/2014/main" id="{8DE78796-6B11-4B33-83FA-988354D87B72}"/>
+                <a16:creationId xmlns:a16="http://schemas.microsoft.com/office/drawing/2014/main" id="{2C02CAB8-1338-46F7-8684-0337FBEACADE}"/>
               </a:ext>
             </a:extLst>
           </p:cNvPr>
@@ -1974,7 +1969,7 @@
           <p:cNvPr id="5" name="">
             <a:extLst xmlns:a="http://schemas.openxmlformats.org/drawingml/2006/main">
               <a:ext uri="{FF2B5EF4-FFF2-40B4-BE49-F238E27FC236}">
-                <a16:creationId xmlns:a16="http://schemas.microsoft.com/office/drawing/2014/main" id="{9F769CE5-4228-4546-BF36-0553B0980724}"/>
+                <a16:creationId xmlns:a16="http://schemas.microsoft.com/office/drawing/2014/main" id="{FF9FEEEB-27A6-4C01-9C93-A87649A5FC45}"/>
               </a:ext>
             </a:extLst>
           </p:cNvPr>
@@ -2031,7 +2026,7 @@
           <p:cNvPr id="6" name="">
             <a:extLst xmlns:a="http://schemas.openxmlformats.org/drawingml/2006/main">
               <a:ext uri="{FF2B5EF4-FFF2-40B4-BE49-F238E27FC236}">
-                <a16:creationId xmlns:a16="http://schemas.microsoft.com/office/drawing/2014/main" id="{2CB2DA93-EF69-4479-983B-AAD3559B8328}"/>
+                <a16:creationId xmlns:a16="http://schemas.microsoft.com/office/drawing/2014/main" id="{5B1AB6CA-DCD4-4BCD-8219-0B0B72EC5F9A}"/>
               </a:ext>
             </a:extLst>
           </p:cNvPr>
@@ -2088,7 +2083,7 @@
           <p:cNvPr id="7" name="">
             <a:extLst xmlns:a="http://schemas.openxmlformats.org/drawingml/2006/main">
               <a:ext uri="{FF2B5EF4-FFF2-40B4-BE49-F238E27FC236}">
-                <a16:creationId xmlns:a16="http://schemas.microsoft.com/office/drawing/2014/main" id="{E5352B48-38E6-4DBF-9F9B-C11AC9E90182}"/>
+                <a16:creationId xmlns:a16="http://schemas.microsoft.com/office/drawing/2014/main" id="{55087962-96EB-4253-90AF-2D1F83235EAA}"/>
               </a:ext>
             </a:extLst>
           </p:cNvPr>
@@ -2145,7 +2140,7 @@
           <p:cNvPr id="8" name="">
             <a:extLst xmlns:a="http://schemas.openxmlformats.org/drawingml/2006/main">
               <a:ext uri="{FF2B5EF4-FFF2-40B4-BE49-F238E27FC236}">
-                <a16:creationId xmlns:a16="http://schemas.microsoft.com/office/drawing/2014/main" id="{F9EECA27-115F-4C80-9571-DD103EA15692}"/>
+                <a16:creationId xmlns:a16="http://schemas.microsoft.com/office/drawing/2014/main" id="{D25A62AD-8526-42D2-B249-A30A278A6E29}"/>
               </a:ext>
             </a:extLst>
           </p:cNvPr>
@@ -2202,7 +2197,7 @@
           <p:cNvPr id="9" name="">
             <a:extLst xmlns:a="http://schemas.openxmlformats.org/drawingml/2006/main">
               <a:ext uri="{FF2B5EF4-FFF2-40B4-BE49-F238E27FC236}">
-                <a16:creationId xmlns:a16="http://schemas.microsoft.com/office/drawing/2014/main" id="{9826A751-2C5D-484A-BA17-BDE438D54107}"/>
+                <a16:creationId xmlns:a16="http://schemas.microsoft.com/office/drawing/2014/main" id="{2CEB3730-2229-4721-AF29-6BD9C4139975}"/>
               </a:ext>
             </a:extLst>
           </p:cNvPr>
@@ -2257,7 +2252,7 @@
     </p:spTree>
     <p:extLst>
       <p:ext uri="{BB962C8B-B14F-4D97-AF65-F5344CB8AC3E}">
-        <p14:creationId xmlns:p14="http://schemas.microsoft.com/office/powerpoint/2010/main" val="1604606088"/>
+        <p14:creationId xmlns:p14="http://schemas.microsoft.com/office/powerpoint/2010/main" val="675713208"/>
       </p:ext>
     </p:extLst>
   </p:cSld>
@@ -2288,7 +2283,7 @@
           <p:cNvPr id="9" name="">
             <a:extLst xmlns:a="http://schemas.openxmlformats.org/drawingml/2006/main">
               <a:ext uri="{FF2B5EF4-FFF2-40B4-BE49-F238E27FC236}">
-                <a16:creationId xmlns:a16="http://schemas.microsoft.com/office/drawing/2014/main" id="{808EDBB0-AF2B-40DD-9E64-7D3BB76A9DAA}"/>
+                <a16:creationId xmlns:a16="http://schemas.microsoft.com/office/drawing/2014/main" id="{E55109A8-B186-4379-91EB-0DCCE5A00047}"/>
               </a:ext>
             </a:extLst>
           </p:cNvPr>
@@ -2345,7 +2340,7 @@
           <p:cNvPr id="2" name="">
             <a:extLst xmlns:a="http://schemas.openxmlformats.org/drawingml/2006/main">
               <a:ext uri="{FF2B5EF4-FFF2-40B4-BE49-F238E27FC236}">
-                <a16:creationId xmlns:a16="http://schemas.microsoft.com/office/drawing/2014/main" id="{0AA390A1-1D67-476A-91B1-4263E55B0BB7}"/>
+                <a16:creationId xmlns:a16="http://schemas.microsoft.com/office/drawing/2014/main" id="{4C0AB812-B979-4C3F-BE82-D6BE3284D54D}"/>
               </a:ext>
             </a:extLst>
           </p:cNvPr>
@@ -2402,7 +2397,7 @@
           <p:cNvPr id="3" name="">
             <a:extLst xmlns:a="http://schemas.openxmlformats.org/drawingml/2006/main">
               <a:ext uri="{FF2B5EF4-FFF2-40B4-BE49-F238E27FC236}">
-                <a16:creationId xmlns:a16="http://schemas.microsoft.com/office/drawing/2014/main" id="{627C089E-D2E5-4164-A58C-1E21C3A1CAC0}"/>
+                <a16:creationId xmlns:a16="http://schemas.microsoft.com/office/drawing/2014/main" id="{5BCC955D-43D2-43A3-A612-9CB63F1E9290}"/>
               </a:ext>
             </a:extLst>
           </p:cNvPr>
@@ -2459,7 +2454,7 @@
           <p:cNvPr id="4" name="">
             <a:extLst xmlns:a="http://schemas.openxmlformats.org/drawingml/2006/main">
               <a:ext uri="{FF2B5EF4-FFF2-40B4-BE49-F238E27FC236}">
-                <a16:creationId xmlns:a16="http://schemas.microsoft.com/office/drawing/2014/main" id="{D32C9A22-874B-4A78-83EE-DB0B29915751}"/>
+                <a16:creationId xmlns:a16="http://schemas.microsoft.com/office/drawing/2014/main" id="{A63E9FEB-50BA-4756-9596-F1BD1644D5D2}"/>
               </a:ext>
             </a:extLst>
           </p:cNvPr>
@@ -2470,8 +2465,8 @@
         </p:nvSpPr>
         <p:spPr>
           <a:xfrm xmlns:a="http://schemas.openxmlformats.org/drawingml/2006/main">
-            <a:off x="714375" y="2238375"/>
-            <a:ext cx="10477500" cy="619125"/>
+            <a:off x="742950" y="2143125"/>
+            <a:ext cx="10572750" cy="952500"/>
           </a:xfrm>
           <a:prstGeom xmlns:a="http://schemas.openxmlformats.org/drawingml/2006/main" prst="rect">
             <a:avLst/>
@@ -2488,25 +2483,25 @@
           <a:lstStyle xmlns:a="http://schemas.openxmlformats.org/drawingml/2006/main"/>
           <a:p xmlns:a="http://schemas.openxmlformats.org/drawingml/2006/main">
             <a:pPr>
-              <a:defRPr sz="2850" b="1">
-                <a:solidFill>
-                  <a:srgbClr val="19332A"/>
-                </a:solidFill>
-                <a:latin typeface="Arial"/>
-                <a:ea typeface="Arial"/>
-                <a:cs typeface="Arial"/>
-              </a:defRPr>
-            </a:pPr>
-            <a:r>
-              <a:rPr sz="2850" b="1">
-                <a:solidFill>
-                  <a:srgbClr val="19332A"/>
-                </a:solidFill>
-                <a:latin typeface="Arial"/>
-                <a:ea typeface="Arial"/>
-                <a:cs typeface="Arial"/>
-              </a:rPr>
-              <a:t>SmolLM2-360M Instruct</a:t>
+              <a:defRPr sz="3675" b="1">
+                <a:solidFill>
+                  <a:srgbClr val="19332A"/>
+                </a:solidFill>
+                <a:latin typeface="Arial"/>
+                <a:ea typeface="Arial"/>
+                <a:cs typeface="Arial"/>
+              </a:defRPr>
+            </a:pPr>
+            <a:r>
+              <a:rPr sz="3675" b="1">
+                <a:solidFill>
+                  <a:srgbClr val="19332A"/>
+                </a:solidFill>
+                <a:latin typeface="Arial"/>
+                <a:ea typeface="Arial"/>
+                <a:cs typeface="Arial"/>
+              </a:rPr>
+              <a:t>“Why does a steel ship float?”</a:t>
             </a:r>
           </a:p>
         </p:txBody>
@@ -2516,7 +2511,7 @@
           <p:cNvPr id="5" name="">
             <a:extLst xmlns:a="http://schemas.openxmlformats.org/drawingml/2006/main">
               <a:ext uri="{FF2B5EF4-FFF2-40B4-BE49-F238E27FC236}">
-                <a16:creationId xmlns:a16="http://schemas.microsoft.com/office/drawing/2014/main" id="{C7414B40-7067-4328-8149-AD35412CEDE6}"/>
+                <a16:creationId xmlns:a16="http://schemas.microsoft.com/office/drawing/2014/main" id="{3D5F2A43-0956-4263-ABA0-AF7551D7041D}"/>
               </a:ext>
             </a:extLst>
           </p:cNvPr>
@@ -2527,8 +2522,8 @@
         </p:nvSpPr>
         <p:spPr>
           <a:xfrm xmlns:a="http://schemas.openxmlformats.org/drawingml/2006/main">
-            <a:off x="742950" y="3105150"/>
-            <a:ext cx="10334625" cy="857250"/>
+            <a:off x="762000" y="3524250"/>
+            <a:ext cx="10096500" cy="428625"/>
           </a:xfrm>
           <a:prstGeom xmlns:a="http://schemas.openxmlformats.org/drawingml/2006/main" prst="rect">
             <a:avLst/>
@@ -2545,25 +2540,25 @@
           <a:lstStyle xmlns:a="http://schemas.openxmlformats.org/drawingml/2006/main"/>
           <a:p xmlns:a="http://schemas.openxmlformats.org/drawingml/2006/main">
             <a:pPr>
-              <a:defRPr sz="2325" b="0">
-                <a:solidFill>
-                  <a:srgbClr val="52635B"/>
-                </a:solidFill>
-                <a:latin typeface="Arial"/>
-                <a:ea typeface="Arial"/>
-                <a:cs typeface="Arial"/>
-              </a:defRPr>
-            </a:pPr>
-            <a:r>
-              <a:rPr sz="2325" b="0">
-                <a:solidFill>
-                  <a:srgbClr val="52635B"/>
-                </a:solidFill>
-                <a:latin typeface="Arial"/>
-                <a:ea typeface="Arial"/>
-                <a:cs typeface="Arial"/>
-              </a:rPr>
-              <a:t>Ask a question, then follow up using the same conversation.</a:t>
+              <a:defRPr sz="1800" b="1">
+                <a:solidFill>
+                  <a:srgbClr val="397718"/>
+                </a:solidFill>
+                <a:latin typeface="Arial"/>
+                <a:ea typeface="Arial"/>
+                <a:cs typeface="Arial"/>
+              </a:defRPr>
+            </a:pPr>
+            <a:r>
+              <a:rPr sz="1800" b="1">
+                <a:solidFill>
+                  <a:srgbClr val="397718"/>
+                </a:solidFill>
+                <a:latin typeface="Arial"/>
+                <a:ea typeface="Arial"/>
+                <a:cs typeface="Arial"/>
+              </a:rPr>
+              <a:t>Follow-up prompts</a:t>
             </a:r>
           </a:p>
         </p:txBody>
@@ -2573,7 +2568,7 @@
           <p:cNvPr id="6" name="">
             <a:extLst xmlns:a="http://schemas.openxmlformats.org/drawingml/2006/main">
               <a:ext uri="{FF2B5EF4-FFF2-40B4-BE49-F238E27FC236}">
-                <a16:creationId xmlns:a16="http://schemas.microsoft.com/office/drawing/2014/main" id="{4F429311-D77C-4339-8198-FD988739D087}"/>
+                <a16:creationId xmlns:a16="http://schemas.microsoft.com/office/drawing/2014/main" id="{DC7DF2E9-2157-4980-A853-2E47DB704AA3}"/>
               </a:ext>
             </a:extLst>
           </p:cNvPr>
@@ -2584,8 +2579,8 @@
         </p:nvSpPr>
         <p:spPr>
           <a:xfrm xmlns:a="http://schemas.openxmlformats.org/drawingml/2006/main">
-            <a:off x="742950" y="4229100"/>
-            <a:ext cx="10001250" cy="428625"/>
+            <a:off x="762000" y="4048125"/>
+            <a:ext cx="10382250" cy="1238250"/>
           </a:xfrm>
           <a:prstGeom xmlns:a="http://schemas.openxmlformats.org/drawingml/2006/main" prst="rect">
             <a:avLst/>
@@ -2602,25 +2597,48 @@
           <a:lstStyle xmlns:a="http://schemas.openxmlformats.org/drawingml/2006/main"/>
           <a:p xmlns:a="http://schemas.openxmlformats.org/drawingml/2006/main">
             <a:pPr>
-              <a:defRPr sz="1800" b="1">
-                <a:solidFill>
-                  <a:srgbClr val="397718"/>
-                </a:solidFill>
-                <a:latin typeface="Arial"/>
-                <a:ea typeface="Arial"/>
-                <a:cs typeface="Arial"/>
-              </a:defRPr>
-            </a:pPr>
-            <a:r>
-              <a:rPr sz="1800" b="1">
-                <a:solidFill>
-                  <a:srgbClr val="397718"/>
-                </a:solidFill>
-                <a:latin typeface="Arial"/>
-                <a:ea typeface="Arial"/>
-                <a:cs typeface="Arial"/>
-              </a:rPr>
-              <a:t>Example prompt</a:t>
+              <a:defRPr sz="2550" b="0">
+                <a:solidFill>
+                  <a:srgbClr val="19332A"/>
+                </a:solidFill>
+                <a:latin typeface="Arial"/>
+                <a:ea typeface="Arial"/>
+                <a:cs typeface="Arial"/>
+              </a:defRPr>
+            </a:pPr>
+            <a:r>
+              <a:rPr sz="2550" b="0">
+                <a:solidFill>
+                  <a:srgbClr val="19332A"/>
+                </a:solidFill>
+                <a:latin typeface="Arial"/>
+                <a:ea typeface="Arial"/>
+                <a:cs typeface="Arial"/>
+              </a:rPr>
+              <a:t>“Explain it using an everyday analogy.”</a:t>
+            </a:r>
+          </a:p>
+          <a:p xmlns:a="http://schemas.openxmlformats.org/drawingml/2006/main">
+            <a:pPr>
+              <a:defRPr sz="2550" b="0">
+                <a:solidFill>
+                  <a:srgbClr val="19332A"/>
+                </a:solidFill>
+                <a:latin typeface="Arial"/>
+                <a:ea typeface="Arial"/>
+                <a:cs typeface="Arial"/>
+              </a:defRPr>
+            </a:pPr>
+            <a:r>
+              <a:rPr sz="2550" b="0">
+                <a:solidFill>
+                  <a:srgbClr val="19332A"/>
+                </a:solidFill>
+                <a:latin typeface="Arial"/>
+                <a:ea typeface="Arial"/>
+                <a:cs typeface="Arial"/>
+              </a:rPr>
+              <a:t>“Now explain it in two sentences.”</a:t>
             </a:r>
           </a:p>
         </p:txBody>
@@ -2630,7 +2648,7 @@
           <p:cNvPr id="7" name="">
             <a:extLst xmlns:a="http://schemas.openxmlformats.org/drawingml/2006/main">
               <a:ext uri="{FF2B5EF4-FFF2-40B4-BE49-F238E27FC236}">
-                <a16:creationId xmlns:a16="http://schemas.microsoft.com/office/drawing/2014/main" id="{A0CDD502-46EC-4EA3-A214-5DBA8CFE774C}"/>
+                <a16:creationId xmlns:a16="http://schemas.microsoft.com/office/drawing/2014/main" id="{F4380419-D6F6-4756-879B-85801640862D}"/>
               </a:ext>
             </a:extLst>
           </p:cNvPr>
@@ -2641,8 +2659,8 @@
         </p:nvSpPr>
         <p:spPr>
           <a:xfrm xmlns:a="http://schemas.openxmlformats.org/drawingml/2006/main">
-            <a:off x="742950" y="4714875"/>
-            <a:ext cx="10382250" cy="857250"/>
+            <a:off x="762000" y="5486400"/>
+            <a:ext cx="10382250" cy="428625"/>
           </a:xfrm>
           <a:prstGeom xmlns:a="http://schemas.openxmlformats.org/drawingml/2006/main" prst="rect">
             <a:avLst/>
@@ -2659,25 +2677,25 @@
           <a:lstStyle xmlns:a="http://schemas.openxmlformats.org/drawingml/2006/main"/>
           <a:p xmlns:a="http://schemas.openxmlformats.org/drawingml/2006/main">
             <a:pPr>
-              <a:defRPr sz="2250" b="0">
-                <a:solidFill>
-                  <a:srgbClr val="19332A"/>
-                </a:solidFill>
-                <a:latin typeface="Arial"/>
-                <a:ea typeface="Arial"/>
-                <a:cs typeface="Arial"/>
-              </a:defRPr>
-            </a:pPr>
-            <a:r>
-              <a:rPr sz="2250" b="0">
-                <a:solidFill>
-                  <a:srgbClr val="19332A"/>
-                </a:solidFill>
-                <a:latin typeface="Arial"/>
-                <a:ea typeface="Arial"/>
-                <a:cs typeface="Arial"/>
-              </a:rPr>
-              <a:t>“Explain why a boat floats. Then explain it to a ten-year-old.”</a:t>
+              <a:defRPr sz="1875" b="0">
+                <a:solidFill>
+                  <a:srgbClr val="52635B"/>
+                </a:solidFill>
+                <a:latin typeface="Arial"/>
+                <a:ea typeface="Arial"/>
+                <a:cs typeface="Arial"/>
+              </a:defRPr>
+            </a:pPr>
+            <a:r>
+              <a:rPr sz="1875" b="0">
+                <a:solidFill>
+                  <a:srgbClr val="52635B"/>
+                </a:solidFill>
+                <a:latin typeface="Arial"/>
+                <a:ea typeface="Arial"/>
+                <a:cs typeface="Arial"/>
+              </a:rPr>
+              <a:t>SmolLM2-360M Instruct uses the preceding conversation.</a:t>
             </a:r>
           </a:p>
         </p:txBody>
@@ -2687,7 +2705,7 @@
           <p:cNvPr id="8" name="">
             <a:extLst xmlns:a="http://schemas.openxmlformats.org/drawingml/2006/main">
               <a:ext uri="{FF2B5EF4-FFF2-40B4-BE49-F238E27FC236}">
-                <a16:creationId xmlns:a16="http://schemas.microsoft.com/office/drawing/2014/main" id="{B13FA955-27BB-4CD6-869F-075D1E7F9278}"/>
+                <a16:creationId xmlns:a16="http://schemas.microsoft.com/office/drawing/2014/main" id="{30564BD5-2C75-4930-ABF9-A95AAD1481FC}"/>
               </a:ext>
             </a:extLst>
           </p:cNvPr>
@@ -2698,8 +2716,8 @@
         </p:nvSpPr>
         <p:spPr>
           <a:xfrm xmlns:a="http://schemas.openxmlformats.org/drawingml/2006/main">
-            <a:off x="742950" y="5810250"/>
-            <a:ext cx="10382250" cy="400050"/>
+            <a:off x="762000" y="5972175"/>
+            <a:ext cx="10382250" cy="361950"/>
           </a:xfrm>
           <a:prstGeom xmlns:a="http://schemas.openxmlformats.org/drawingml/2006/main" prst="rect">
             <a:avLst/>
@@ -2734,7 +2752,7 @@
                 <a:ea typeface="Arial"/>
                 <a:cs typeface="Arial"/>
               </a:rPr>
-              <a:t>/reset clears the conversation.  /quit returns to the menu.</a:t>
+              <a:t>/reset clears history.  /quit returns to the menu.</a:t>
             </a:r>
           </a:p>
         </p:txBody>
@@ -2742,7 +2760,7 @@
     </p:spTree>
     <p:extLst>
       <p:ext uri="{BB962C8B-B14F-4D97-AF65-F5344CB8AC3E}">
-        <p14:creationId xmlns:p14="http://schemas.microsoft.com/office/powerpoint/2010/main" val="569457690"/>
+        <p14:creationId xmlns:p14="http://schemas.microsoft.com/office/powerpoint/2010/main" val="877704403"/>
       </p:ext>
     </p:extLst>
   </p:cSld>
@@ -2770,10 +2788,10 @@
       </p:grpSpPr>
       <p:sp>
         <p:nvSpPr>
-          <p:cNvPr id="7" name="">
+          <p:cNvPr id="9" name="">
             <a:extLst xmlns:a="http://schemas.openxmlformats.org/drawingml/2006/main">
               <a:ext uri="{FF2B5EF4-FFF2-40B4-BE49-F238E27FC236}">
-                <a16:creationId xmlns:a16="http://schemas.microsoft.com/office/drawing/2014/main" id="{6A5C69FD-BA21-476A-9CCB-30C8A2E084AB}"/>
+                <a16:creationId xmlns:a16="http://schemas.microsoft.com/office/drawing/2014/main" id="{1A118851-3213-492A-8416-31C17F78B841}"/>
               </a:ext>
             </a:extLst>
           </p:cNvPr>
@@ -2830,7 +2848,7 @@
           <p:cNvPr id="2" name="">
             <a:extLst xmlns:a="http://schemas.openxmlformats.org/drawingml/2006/main">
               <a:ext uri="{FF2B5EF4-FFF2-40B4-BE49-F238E27FC236}">
-                <a16:creationId xmlns:a16="http://schemas.microsoft.com/office/drawing/2014/main" id="{9FD13EC2-5E15-4342-98B7-311C8EAC9356}"/>
+                <a16:creationId xmlns:a16="http://schemas.microsoft.com/office/drawing/2014/main" id="{6EEB9B80-2B2C-4A3F-B2E6-43DAA89DE53E}"/>
               </a:ext>
             </a:extLst>
           </p:cNvPr>
@@ -2887,7 +2905,7 @@
           <p:cNvPr id="3" name="">
             <a:extLst xmlns:a="http://schemas.openxmlformats.org/drawingml/2006/main">
               <a:ext uri="{FF2B5EF4-FFF2-40B4-BE49-F238E27FC236}">
-                <a16:creationId xmlns:a16="http://schemas.microsoft.com/office/drawing/2014/main" id="{CCBDF6A7-B7C6-4AA6-BDB6-B25A2ED7622B}"/>
+                <a16:creationId xmlns:a16="http://schemas.microsoft.com/office/drawing/2014/main" id="{38453BDC-CDE5-4AED-A5A9-49DA3D0E8FA1}"/>
               </a:ext>
             </a:extLst>
           </p:cNvPr>
@@ -2944,7 +2962,7 @@
           <p:cNvPr id="4" name="">
             <a:extLst xmlns:a="http://schemas.openxmlformats.org/drawingml/2006/main">
               <a:ext uri="{FF2B5EF4-FFF2-40B4-BE49-F238E27FC236}">
-                <a16:creationId xmlns:a16="http://schemas.microsoft.com/office/drawing/2014/main" id="{EC417A50-22E8-4C4C-9083-F2C46CC2253B}"/>
+                <a16:creationId xmlns:a16="http://schemas.microsoft.com/office/drawing/2014/main" id="{6304F513-C78A-4091-9717-DEDBD1638DB6}"/>
               </a:ext>
             </a:extLst>
           </p:cNvPr>
@@ -2955,8 +2973,8 @@
         </p:nvSpPr>
         <p:spPr>
           <a:xfrm xmlns:a="http://schemas.openxmlformats.org/drawingml/2006/main">
-            <a:off x="714375" y="2238375"/>
-            <a:ext cx="10477500" cy="619125"/>
+            <a:off x="714375" y="2190750"/>
+            <a:ext cx="4667250" cy="619125"/>
           </a:xfrm>
           <a:prstGeom xmlns:a="http://schemas.openxmlformats.org/drawingml/2006/main" prst="rect">
             <a:avLst/>
@@ -2973,17 +2991,17 @@
           <a:lstStyle xmlns:a="http://schemas.openxmlformats.org/drawingml/2006/main"/>
           <a:p xmlns:a="http://schemas.openxmlformats.org/drawingml/2006/main">
             <a:pPr>
-              <a:defRPr sz="2850" b="1">
-                <a:solidFill>
-                  <a:srgbClr val="19332A"/>
-                </a:solidFill>
-                <a:latin typeface="Arial"/>
-                <a:ea typeface="Arial"/>
-                <a:cs typeface="Arial"/>
-              </a:defRPr>
-            </a:pPr>
-            <a:r>
-              <a:rPr sz="2850" b="1">
+              <a:defRPr sz="2550" b="1">
+                <a:solidFill>
+                  <a:srgbClr val="19332A"/>
+                </a:solidFill>
+                <a:latin typeface="Arial"/>
+                <a:ea typeface="Arial"/>
+                <a:cs typeface="Arial"/>
+              </a:defRPr>
+            </a:pPr>
+            <a:r>
+              <a:rPr sz="2550" b="1">
                 <a:solidFill>
                   <a:srgbClr val="19332A"/>
                 </a:solidFill>
@@ -3001,7 +3019,7 @@
           <p:cNvPr id="5" name="">
             <a:extLst xmlns:a="http://schemas.openxmlformats.org/drawingml/2006/main">
               <a:ext uri="{FF2B5EF4-FFF2-40B4-BE49-F238E27FC236}">
-                <a16:creationId xmlns:a16="http://schemas.microsoft.com/office/drawing/2014/main" id="{F83D84A3-2D86-436E-B45B-E8D52E626810}"/>
+                <a16:creationId xmlns:a16="http://schemas.microsoft.com/office/drawing/2014/main" id="{1174FE26-A9FF-44DB-A59D-DC48E7D4CB6E}"/>
               </a:ext>
             </a:extLst>
           </p:cNvPr>
@@ -3012,8 +3030,8 @@
         </p:nvSpPr>
         <p:spPr>
           <a:xfrm xmlns:a="http://schemas.openxmlformats.org/drawingml/2006/main">
-            <a:off x="742950" y="3162300"/>
-            <a:ext cx="10382250" cy="1238250"/>
+            <a:off x="742950" y="3124200"/>
+            <a:ext cx="4667250" cy="904875"/>
           </a:xfrm>
           <a:prstGeom xmlns:a="http://schemas.openxmlformats.org/drawingml/2006/main" prst="rect">
             <a:avLst/>
@@ -3048,7 +3066,7 @@
                 <a:ea typeface="Arial"/>
                 <a:cs typeface="Arial"/>
               </a:rPr>
-              <a:t>Place a cup, bottle or book in view.</a:t>
+              <a:t>Place everyday objects</a:t>
             </a:r>
           </a:p>
           <a:p xmlns:a="http://schemas.openxmlformats.org/drawingml/2006/main">
@@ -3071,7 +3089,7 @@
                 <a:ea typeface="Arial"/>
                 <a:cs typeface="Arial"/>
               </a:rPr>
-              <a:t>The detector labels objects and draws their bounding boxes.</a:t>
+              <a:t>in the camera’s view.</a:t>
             </a:r>
           </a:p>
         </p:txBody>
@@ -3081,7 +3099,7 @@
           <p:cNvPr id="6" name="">
             <a:extLst xmlns:a="http://schemas.openxmlformats.org/drawingml/2006/main">
               <a:ext uri="{FF2B5EF4-FFF2-40B4-BE49-F238E27FC236}">
-                <a16:creationId xmlns:a16="http://schemas.microsoft.com/office/drawing/2014/main" id="{73105845-3C01-4EA7-9D71-67A70EDD4A67}"/>
+                <a16:creationId xmlns:a16="http://schemas.microsoft.com/office/drawing/2014/main" id="{575CCBE0-3033-439B-8EF6-3E4343F55DDE}"/>
               </a:ext>
             </a:extLst>
           </p:cNvPr>
@@ -3092,8 +3110,8 @@
         </p:nvSpPr>
         <p:spPr>
           <a:xfrm xmlns:a="http://schemas.openxmlformats.org/drawingml/2006/main">
-            <a:off x="742950" y="4857750"/>
-            <a:ext cx="10382250" cy="809625"/>
+            <a:off x="742950" y="4467225"/>
+            <a:ext cx="4667250" cy="1238250"/>
           </a:xfrm>
           <a:prstGeom xmlns:a="http://schemas.openxmlformats.org/drawingml/2006/main" prst="rect">
             <a:avLst/>
@@ -3128,7 +3146,132 @@
                 <a:ea typeface="Arial"/>
                 <a:cs typeface="Arial"/>
               </a:rPr>
-              <a:t>Move an object and observe the changing detections.</a:t>
+              <a:t>Move one object.</a:t>
+            </a:r>
+          </a:p>
+          <a:p xmlns:a="http://schemas.openxmlformats.org/drawingml/2006/main">
+            <a:pPr>
+              <a:defRPr sz="2250" b="0">
+                <a:solidFill>
+                  <a:srgbClr val="19332A"/>
+                </a:solidFill>
+                <a:latin typeface="Arial"/>
+                <a:ea typeface="Arial"/>
+                <a:cs typeface="Arial"/>
+              </a:defRPr>
+            </a:pPr>
+            <a:r>
+              <a:rPr sz="2250" b="0">
+                <a:solidFill>
+                  <a:srgbClr val="19332A"/>
+                </a:solidFill>
+                <a:latin typeface="Arial"/>
+                <a:ea typeface="Arial"/>
+                <a:cs typeface="Arial"/>
+              </a:rPr>
+              <a:t>Turn the book sideways.</a:t>
+            </a:r>
+          </a:p>
+          <a:p xmlns:a="http://schemas.openxmlformats.org/drawingml/2006/main">
+            <a:pPr>
+              <a:defRPr sz="2250" b="0">
+                <a:solidFill>
+                  <a:srgbClr val="19332A"/>
+                </a:solidFill>
+                <a:latin typeface="Arial"/>
+                <a:ea typeface="Arial"/>
+                <a:cs typeface="Arial"/>
+              </a:defRPr>
+            </a:pPr>
+            <a:r>
+              <a:rPr sz="2250" b="0">
+                <a:solidFill>
+                  <a:srgbClr val="19332A"/>
+                </a:solidFill>
+                <a:latin typeface="Arial"/>
+                <a:ea typeface="Arial"/>
+                <a:cs typeface="Arial"/>
+              </a:rPr>
+              <a:t>Partly hide the cup.</a:t>
+            </a:r>
+          </a:p>
+        </p:txBody>
+      </p:sp>
+      <p:pic>
+        <p:nvPicPr>
+          <p:cNvPr id="15" name=""/>
+          <p:cNvPicPr>
+            <a:picLocks xmlns:a="http://schemas.openxmlformats.org/drawingml/2006/main" noChangeAspect="1"/>
+          </p:cNvPicPr>
+          <p:nvPr/>
+        </p:nvPicPr>
+        <p:blipFill>
+          <a:blip xmlns:r="http://schemas.openxmlformats.org/officeDocument/2006/relationships" xmlns:a="http://schemas.openxmlformats.org/drawingml/2006/main" r:embed="R73094318d98b4e52"/>
+          <a:stretch xmlns:a="http://schemas.openxmlformats.org/drawingml/2006/main"/>
+        </p:blipFill>
+        <p:spPr>
+          <a:xfrm xmlns:a="http://schemas.openxmlformats.org/drawingml/2006/main">
+            <a:off x="5500688" y="2095500"/>
+            <a:ext cx="6143625" cy="4095750"/>
+          </a:xfrm>
+          <a:prstGeom xmlns:a="http://schemas.openxmlformats.org/drawingml/2006/main" prst="rect">
+            <a:avLst/>
+          </a:prstGeom>
+        </p:spPr>
+      </p:pic>
+      <p:sp>
+        <p:nvSpPr>
+          <p:cNvPr id="8" name="">
+            <a:extLst xmlns:a="http://schemas.openxmlformats.org/drawingml/2006/main">
+              <a:ext uri="{FF2B5EF4-FFF2-40B4-BE49-F238E27FC236}">
+                <a16:creationId xmlns:a16="http://schemas.microsoft.com/office/drawing/2014/main" id="{E26C5B5A-0CCB-4207-917E-465A315814D4}"/>
+              </a:ext>
+            </a:extLst>
+          </p:cNvPr>
+          <p:cNvSpPr>
+            <a:spLocks xmlns:a="http://schemas.openxmlformats.org/drawingml/2006/main" noGrp="1"/>
+          </p:cNvSpPr>
+          <p:nvPr/>
+        </p:nvSpPr>
+        <p:spPr>
+          <a:xfrm xmlns:a="http://schemas.openxmlformats.org/drawingml/2006/main">
+            <a:off x="7762875" y="6162675"/>
+            <a:ext cx="3714750" cy="304800"/>
+          </a:xfrm>
+          <a:prstGeom xmlns:a="http://schemas.openxmlformats.org/drawingml/2006/main" prst="rect">
+            <a:avLst/>
+          </a:prstGeom>
+          <a:noFill xmlns:a="http://schemas.openxmlformats.org/drawingml/2006/main"/>
+          <a:ln xmlns:a="http://schemas.openxmlformats.org/drawingml/2006/main" w="0">
+            <a:noFill/>
+          </a:ln>
+        </p:spPr>
+        <p:txBody>
+          <a:bodyPr xmlns:a="http://schemas.openxmlformats.org/drawingml/2006/main">
+            <a:noAutofit/>
+          </a:bodyPr>
+          <a:lstStyle xmlns:a="http://schemas.openxmlformats.org/drawingml/2006/main"/>
+          <a:p xmlns:a="http://schemas.openxmlformats.org/drawingml/2006/main">
+            <a:pPr>
+              <a:defRPr sz="1425" b="0">
+                <a:solidFill>
+                  <a:srgbClr val="52635B"/>
+                </a:solidFill>
+                <a:latin typeface="Arial"/>
+                <a:ea typeface="Arial"/>
+                <a:cs typeface="Arial"/>
+              </a:defRPr>
+            </a:pPr>
+            <a:r>
+              <a:rPr sz="1425" b="0">
+                <a:solidFill>
+                  <a:srgbClr val="52635B"/>
+                </a:solidFill>
+                <a:latin typeface="Arial"/>
+                <a:ea typeface="Arial"/>
+                <a:cs typeface="Arial"/>
+              </a:rPr>
+              <a:t>Illustrative scene</a:t>
             </a:r>
           </a:p>
         </p:txBody>
@@ -3136,7 +3279,7 @@
     </p:spTree>
     <p:extLst>
       <p:ext uri="{BB962C8B-B14F-4D97-AF65-F5344CB8AC3E}">
-        <p14:creationId xmlns:p14="http://schemas.microsoft.com/office/powerpoint/2010/main" val="824578974"/>
+        <p14:creationId xmlns:p14="http://schemas.microsoft.com/office/powerpoint/2010/main" val="1825567712"/>
       </p:ext>
     </p:extLst>
   </p:cSld>
@@ -3167,7 +3310,7 @@
           <p:cNvPr id="8" name="">
             <a:extLst xmlns:a="http://schemas.openxmlformats.org/drawingml/2006/main">
               <a:ext uri="{FF2B5EF4-FFF2-40B4-BE49-F238E27FC236}">
-                <a16:creationId xmlns:a16="http://schemas.microsoft.com/office/drawing/2014/main" id="{4475033E-A27A-47E0-8256-BF1C0BE8DB6C}"/>
+                <a16:creationId xmlns:a16="http://schemas.microsoft.com/office/drawing/2014/main" id="{F872C1F8-979B-453D-83F8-AC8109025A40}"/>
               </a:ext>
             </a:extLst>
           </p:cNvPr>
@@ -3224,7 +3367,7 @@
           <p:cNvPr id="2" name="">
             <a:extLst xmlns:a="http://schemas.openxmlformats.org/drawingml/2006/main">
               <a:ext uri="{FF2B5EF4-FFF2-40B4-BE49-F238E27FC236}">
-                <a16:creationId xmlns:a16="http://schemas.microsoft.com/office/drawing/2014/main" id="{7B83659D-D52C-4036-8B57-AF70B50C5704}"/>
+                <a16:creationId xmlns:a16="http://schemas.microsoft.com/office/drawing/2014/main" id="{E3ED2FC5-C5E7-422A-9381-EABB7D4552D7}"/>
               </a:ext>
             </a:extLst>
           </p:cNvPr>
@@ -3281,7 +3424,7 @@
           <p:cNvPr id="3" name="">
             <a:extLst xmlns:a="http://schemas.openxmlformats.org/drawingml/2006/main">
               <a:ext uri="{FF2B5EF4-FFF2-40B4-BE49-F238E27FC236}">
-                <a16:creationId xmlns:a16="http://schemas.microsoft.com/office/drawing/2014/main" id="{A34D4FC5-0A2E-4008-BA8D-6C2C6E7D3E42}"/>
+                <a16:creationId xmlns:a16="http://schemas.microsoft.com/office/drawing/2014/main" id="{DC3954B1-F31E-472B-B935-F9BADCDEBF58}"/>
               </a:ext>
             </a:extLst>
           </p:cNvPr>
@@ -3338,7 +3481,7 @@
           <p:cNvPr id="4" name="">
             <a:extLst xmlns:a="http://schemas.openxmlformats.org/drawingml/2006/main">
               <a:ext uri="{FF2B5EF4-FFF2-40B4-BE49-F238E27FC236}">
-                <a16:creationId xmlns:a16="http://schemas.microsoft.com/office/drawing/2014/main" id="{F74A1BA1-9BB7-4207-9C46-61A732751505}"/>
+                <a16:creationId xmlns:a16="http://schemas.microsoft.com/office/drawing/2014/main" id="{79A57515-2A72-4849-BF55-26087EF11690}"/>
               </a:ext>
             </a:extLst>
           </p:cNvPr>
@@ -3395,7 +3538,7 @@
           <p:cNvPr id="5" name="">
             <a:extLst xmlns:a="http://schemas.openxmlformats.org/drawingml/2006/main">
               <a:ext uri="{FF2B5EF4-FFF2-40B4-BE49-F238E27FC236}">
-                <a16:creationId xmlns:a16="http://schemas.microsoft.com/office/drawing/2014/main" id="{E4CBA464-A3B6-4BEE-A228-9BC7CADC63F9}"/>
+                <a16:creationId xmlns:a16="http://schemas.microsoft.com/office/drawing/2014/main" id="{266E8881-10D9-4EB1-AB44-E5389713BAC0}"/>
               </a:ext>
             </a:extLst>
           </p:cNvPr>
@@ -3452,7 +3595,7 @@
           <p:cNvPr id="6" name="">
             <a:extLst xmlns:a="http://schemas.openxmlformats.org/drawingml/2006/main">
               <a:ext uri="{FF2B5EF4-FFF2-40B4-BE49-F238E27FC236}">
-                <a16:creationId xmlns:a16="http://schemas.microsoft.com/office/drawing/2014/main" id="{5E56824F-4581-4FBD-BE5D-E8496C090915}"/>
+                <a16:creationId xmlns:a16="http://schemas.microsoft.com/office/drawing/2014/main" id="{43D78CE4-4746-48EE-8E16-635BB773E516}"/>
               </a:ext>
             </a:extLst>
           </p:cNvPr>
@@ -3509,7 +3652,7 @@
           <p:cNvPr id="7" name="">
             <a:extLst xmlns:a="http://schemas.openxmlformats.org/drawingml/2006/main">
               <a:ext uri="{FF2B5EF4-FFF2-40B4-BE49-F238E27FC236}">
-                <a16:creationId xmlns:a16="http://schemas.microsoft.com/office/drawing/2014/main" id="{71AA32EB-357C-4FB9-9502-E52656974985}"/>
+                <a16:creationId xmlns:a16="http://schemas.microsoft.com/office/drawing/2014/main" id="{64AD9018-6EC6-439C-AC54-6D91A46DC7A0}"/>
               </a:ext>
             </a:extLst>
           </p:cNvPr>
@@ -3564,7 +3707,7 @@
     </p:spTree>
     <p:extLst>
       <p:ext uri="{BB962C8B-B14F-4D97-AF65-F5344CB8AC3E}">
-        <p14:creationId xmlns:p14="http://schemas.microsoft.com/office/powerpoint/2010/main" val="301894402"/>
+        <p14:creationId xmlns:p14="http://schemas.microsoft.com/office/powerpoint/2010/main" val="423495299"/>
       </p:ext>
     </p:extLst>
   </p:cSld>
@@ -3595,7 +3738,7 @@
           <p:cNvPr id="7" name="">
             <a:extLst xmlns:a="http://schemas.openxmlformats.org/drawingml/2006/main">
               <a:ext uri="{FF2B5EF4-FFF2-40B4-BE49-F238E27FC236}">
-                <a16:creationId xmlns:a16="http://schemas.microsoft.com/office/drawing/2014/main" id="{FB2D2FD4-53BB-41CC-9106-A6842E39870B}"/>
+                <a16:creationId xmlns:a16="http://schemas.microsoft.com/office/drawing/2014/main" id="{057EB73E-4C85-4DBC-9A5D-C4E21F7FF413}"/>
               </a:ext>
             </a:extLst>
           </p:cNvPr>
@@ -3652,7 +3795,7 @@
           <p:cNvPr id="2" name="">
             <a:extLst xmlns:a="http://schemas.openxmlformats.org/drawingml/2006/main">
               <a:ext uri="{FF2B5EF4-FFF2-40B4-BE49-F238E27FC236}">
-                <a16:creationId xmlns:a16="http://schemas.microsoft.com/office/drawing/2014/main" id="{82DBC34A-3B8A-4705-A6B2-A8857F401743}"/>
+                <a16:creationId xmlns:a16="http://schemas.microsoft.com/office/drawing/2014/main" id="{43A548ED-0E58-4B8D-B05E-AF8862AD9E90}"/>
               </a:ext>
             </a:extLst>
           </p:cNvPr>
@@ -3709,7 +3852,7 @@
           <p:cNvPr id="3" name="">
             <a:extLst xmlns:a="http://schemas.openxmlformats.org/drawingml/2006/main">
               <a:ext uri="{FF2B5EF4-FFF2-40B4-BE49-F238E27FC236}">
-                <a16:creationId xmlns:a16="http://schemas.microsoft.com/office/drawing/2014/main" id="{B4E3B92C-DCED-44A2-B118-ABBA5DA78EB8}"/>
+                <a16:creationId xmlns:a16="http://schemas.microsoft.com/office/drawing/2014/main" id="{4F665751-E510-46DA-91DC-4B858BA826BC}"/>
               </a:ext>
             </a:extLst>
           </p:cNvPr>
@@ -3766,7 +3909,7 @@
           <p:cNvPr id="4" name="">
             <a:extLst xmlns:a="http://schemas.openxmlformats.org/drawingml/2006/main">
               <a:ext uri="{FF2B5EF4-FFF2-40B4-BE49-F238E27FC236}">
-                <a16:creationId xmlns:a16="http://schemas.microsoft.com/office/drawing/2014/main" id="{FF746789-0AEE-4797-BDA3-7ECB1EFBE81D}"/>
+                <a16:creationId xmlns:a16="http://schemas.microsoft.com/office/drawing/2014/main" id="{B3B66B94-2114-44EE-93B9-23B82F98DCC6}"/>
               </a:ext>
             </a:extLst>
           </p:cNvPr>
@@ -3869,7 +4012,7 @@
           <p:cNvPr id="5" name="">
             <a:extLst xmlns:a="http://schemas.openxmlformats.org/drawingml/2006/main">
               <a:ext uri="{FF2B5EF4-FFF2-40B4-BE49-F238E27FC236}">
-                <a16:creationId xmlns:a16="http://schemas.microsoft.com/office/drawing/2014/main" id="{27BBA290-2F8B-442B-8627-C93B2988F02F}"/>
+                <a16:creationId xmlns:a16="http://schemas.microsoft.com/office/drawing/2014/main" id="{C853A715-EC9F-4A13-A97F-76534F5CA27F}"/>
               </a:ext>
             </a:extLst>
           </p:cNvPr>
@@ -3926,7 +4069,7 @@
           <p:cNvPr id="6" name="">
             <a:extLst xmlns:a="http://schemas.openxmlformats.org/drawingml/2006/main">
               <a:ext uri="{FF2B5EF4-FFF2-40B4-BE49-F238E27FC236}">
-                <a16:creationId xmlns:a16="http://schemas.microsoft.com/office/drawing/2014/main" id="{C028B8CF-D604-4CBD-AEB8-C723F80E830D}"/>
+                <a16:creationId xmlns:a16="http://schemas.microsoft.com/office/drawing/2014/main" id="{C82C83B5-19D1-4B9F-A417-32A020427752}"/>
               </a:ext>
             </a:extLst>
           </p:cNvPr>
@@ -4027,7 +4170,7 @@
     </p:spTree>
     <p:extLst>
       <p:ext uri="{BB962C8B-B14F-4D97-AF65-F5344CB8AC3E}">
-        <p14:creationId xmlns:p14="http://schemas.microsoft.com/office/powerpoint/2010/main" val="475029624"/>
+        <p14:creationId xmlns:p14="http://schemas.microsoft.com/office/powerpoint/2010/main" val="1818541106"/>
       </p:ext>
     </p:extLst>
   </p:cSld>
@@ -4058,7 +4201,7 @@
           <p:cNvPr id="16" name="">
             <a:extLst xmlns:a="http://schemas.openxmlformats.org/drawingml/2006/main">
               <a:ext uri="{FF2B5EF4-FFF2-40B4-BE49-F238E27FC236}">
-                <a16:creationId xmlns:a16="http://schemas.microsoft.com/office/drawing/2014/main" id="{2F794FE6-D3BF-4E6A-8043-2CE914CE13B3}"/>
+                <a16:creationId xmlns:a16="http://schemas.microsoft.com/office/drawing/2014/main" id="{570841B2-C630-41CA-B199-25AE954FAAA3}"/>
               </a:ext>
             </a:extLst>
           </p:cNvPr>
@@ -4115,7 +4258,7 @@
           <p:cNvPr id="2" name="">
             <a:extLst xmlns:a="http://schemas.openxmlformats.org/drawingml/2006/main">
               <a:ext uri="{FF2B5EF4-FFF2-40B4-BE49-F238E27FC236}">
-                <a16:creationId xmlns:a16="http://schemas.microsoft.com/office/drawing/2014/main" id="{855F9725-1ABF-4C2B-A926-5178BB25C8B5}"/>
+                <a16:creationId xmlns:a16="http://schemas.microsoft.com/office/drawing/2014/main" id="{D2CF4FB4-9EC0-4CA8-9342-79ED00AC5988}"/>
               </a:ext>
             </a:extLst>
           </p:cNvPr>
@@ -4172,7 +4315,7 @@
           <p:cNvPr id="3" name="">
             <a:extLst xmlns:a="http://schemas.openxmlformats.org/drawingml/2006/main">
               <a:ext uri="{FF2B5EF4-FFF2-40B4-BE49-F238E27FC236}">
-                <a16:creationId xmlns:a16="http://schemas.microsoft.com/office/drawing/2014/main" id="{E0E94DC1-8F88-4BD8-8D16-87BAB0F82BA4}"/>
+                <a16:creationId xmlns:a16="http://schemas.microsoft.com/office/drawing/2014/main" id="{75BC5BDF-17D0-4FDE-9075-19BCBA997C89}"/>
               </a:ext>
             </a:extLst>
           </p:cNvPr>
@@ -4229,7 +4372,7 @@
           <p:cNvPr id="4" name="">
             <a:extLst xmlns:a="http://schemas.openxmlformats.org/drawingml/2006/main">
               <a:ext uri="{FF2B5EF4-FFF2-40B4-BE49-F238E27FC236}">
-                <a16:creationId xmlns:a16="http://schemas.microsoft.com/office/drawing/2014/main" id="{6B1C4959-E46E-4B04-B4E7-1ABD3FB65B17}"/>
+                <a16:creationId xmlns:a16="http://schemas.microsoft.com/office/drawing/2014/main" id="{1BE126B1-3F1A-486D-8D15-9D8B1CC1D9AA}"/>
               </a:ext>
             </a:extLst>
           </p:cNvPr>
@@ -4286,7 +4429,7 @@
           <p:cNvPr id="5" name="">
             <a:extLst xmlns:a="http://schemas.openxmlformats.org/drawingml/2006/main">
               <a:ext uri="{FF2B5EF4-FFF2-40B4-BE49-F238E27FC236}">
-                <a16:creationId xmlns:a16="http://schemas.microsoft.com/office/drawing/2014/main" id="{37B03A69-42A1-4513-B2FE-9E454172B2D9}"/>
+                <a16:creationId xmlns:a16="http://schemas.microsoft.com/office/drawing/2014/main" id="{EC4D252E-B47C-4D12-8429-80441C884D53}"/>
               </a:ext>
             </a:extLst>
           </p:cNvPr>
@@ -4343,7 +4486,7 @@
           <p:cNvPr id="6" name="">
             <a:extLst xmlns:a="http://schemas.openxmlformats.org/drawingml/2006/main">
               <a:ext uri="{FF2B5EF4-FFF2-40B4-BE49-F238E27FC236}">
-                <a16:creationId xmlns:a16="http://schemas.microsoft.com/office/drawing/2014/main" id="{F5FDACF7-C2D1-4D5D-AC7E-D12F28C96C59}"/>
+                <a16:creationId xmlns:a16="http://schemas.microsoft.com/office/drawing/2014/main" id="{BD6ECBA0-27C3-4771-AF14-2830CAB11714}"/>
               </a:ext>
             </a:extLst>
           </p:cNvPr>
@@ -4400,7 +4543,7 @@
           <p:cNvPr id="7" name="">
             <a:extLst xmlns:a="http://schemas.openxmlformats.org/drawingml/2006/main">
               <a:ext uri="{FF2B5EF4-FFF2-40B4-BE49-F238E27FC236}">
-                <a16:creationId xmlns:a16="http://schemas.microsoft.com/office/drawing/2014/main" id="{6A13E159-5DEE-4A3B-8EB8-0AFF33B5E462}"/>
+                <a16:creationId xmlns:a16="http://schemas.microsoft.com/office/drawing/2014/main" id="{02AC120B-C9CF-4E09-A1AA-C86A1BDCFB7E}"/>
               </a:ext>
             </a:extLst>
           </p:cNvPr>
@@ -4457,7 +4600,7 @@
           <p:cNvPr id="8" name="">
             <a:extLst xmlns:a="http://schemas.openxmlformats.org/drawingml/2006/main">
               <a:ext uri="{FF2B5EF4-FFF2-40B4-BE49-F238E27FC236}">
-                <a16:creationId xmlns:a16="http://schemas.microsoft.com/office/drawing/2014/main" id="{1535AE7B-BC4C-473B-ACD3-B02F7A9DA255}"/>
+                <a16:creationId xmlns:a16="http://schemas.microsoft.com/office/drawing/2014/main" id="{9398397A-C996-4FC0-9E6F-8DA971A9B10F}"/>
               </a:ext>
             </a:extLst>
           </p:cNvPr>
@@ -4514,7 +4657,7 @@
           <p:cNvPr id="9" name="">
             <a:extLst xmlns:a="http://schemas.openxmlformats.org/drawingml/2006/main">
               <a:ext uri="{FF2B5EF4-FFF2-40B4-BE49-F238E27FC236}">
-                <a16:creationId xmlns:a16="http://schemas.microsoft.com/office/drawing/2014/main" id="{85F70AF5-1CF6-41FD-8B6A-9D4F7481F034}"/>
+                <a16:creationId xmlns:a16="http://schemas.microsoft.com/office/drawing/2014/main" id="{6819CFB7-8114-40B7-BF77-34EAA0450718}"/>
               </a:ext>
             </a:extLst>
           </p:cNvPr>
@@ -4571,7 +4714,7 @@
           <p:cNvPr id="10" name="">
             <a:extLst xmlns:a="http://schemas.openxmlformats.org/drawingml/2006/main">
               <a:ext uri="{FF2B5EF4-FFF2-40B4-BE49-F238E27FC236}">
-                <a16:creationId xmlns:a16="http://schemas.microsoft.com/office/drawing/2014/main" id="{E645211D-323B-43D9-B8E0-E2C98F593963}"/>
+                <a16:creationId xmlns:a16="http://schemas.microsoft.com/office/drawing/2014/main" id="{97B886A7-B295-47EF-ABE6-A58B54F0E670}"/>
               </a:ext>
             </a:extLst>
           </p:cNvPr>
@@ -4628,7 +4771,7 @@
           <p:cNvPr id="11" name="">
             <a:extLst xmlns:a="http://schemas.openxmlformats.org/drawingml/2006/main">
               <a:ext uri="{FF2B5EF4-FFF2-40B4-BE49-F238E27FC236}">
-                <a16:creationId xmlns:a16="http://schemas.microsoft.com/office/drawing/2014/main" id="{B8FA2D4E-2298-4731-B6B8-27670A38CB53}"/>
+                <a16:creationId xmlns:a16="http://schemas.microsoft.com/office/drawing/2014/main" id="{9EC601B7-8A8E-4573-8A5C-C0024AAEA1A0}"/>
               </a:ext>
             </a:extLst>
           </p:cNvPr>
@@ -4685,7 +4828,7 @@
           <p:cNvPr id="12" name="">
             <a:extLst xmlns:a="http://schemas.openxmlformats.org/drawingml/2006/main">
               <a:ext uri="{FF2B5EF4-FFF2-40B4-BE49-F238E27FC236}">
-                <a16:creationId xmlns:a16="http://schemas.microsoft.com/office/drawing/2014/main" id="{BA6D389F-4EB9-4422-8825-CD0C8A539F78}"/>
+                <a16:creationId xmlns:a16="http://schemas.microsoft.com/office/drawing/2014/main" id="{33621989-FB65-4B9E-8CC9-F304E5BF10E2}"/>
               </a:ext>
             </a:extLst>
           </p:cNvPr>
@@ -4742,7 +4885,7 @@
           <p:cNvPr id="13" name="">
             <a:extLst xmlns:a="http://schemas.openxmlformats.org/drawingml/2006/main">
               <a:ext uri="{FF2B5EF4-FFF2-40B4-BE49-F238E27FC236}">
-                <a16:creationId xmlns:a16="http://schemas.microsoft.com/office/drawing/2014/main" id="{0C43F97C-4CD6-4986-A219-2C90C8F38446}"/>
+                <a16:creationId xmlns:a16="http://schemas.microsoft.com/office/drawing/2014/main" id="{B3B28C76-CC40-4A9B-9332-28B1E32BBF8B}"/>
               </a:ext>
             </a:extLst>
           </p:cNvPr>
@@ -4799,7 +4942,7 @@
           <p:cNvPr id="14" name="">
             <a:extLst xmlns:a="http://schemas.openxmlformats.org/drawingml/2006/main">
               <a:ext uri="{FF2B5EF4-FFF2-40B4-BE49-F238E27FC236}">
-                <a16:creationId xmlns:a16="http://schemas.microsoft.com/office/drawing/2014/main" id="{213302E3-7D7A-4F61-90FC-2EE0551B44A3}"/>
+                <a16:creationId xmlns:a16="http://schemas.microsoft.com/office/drawing/2014/main" id="{864C2EEC-EB4E-4B5C-967B-C02982CCFA95}"/>
               </a:ext>
             </a:extLst>
           </p:cNvPr>
@@ -4856,7 +4999,7 @@
           <p:cNvPr id="15" name="">
             <a:extLst xmlns:a="http://schemas.openxmlformats.org/drawingml/2006/main">
               <a:ext uri="{FF2B5EF4-FFF2-40B4-BE49-F238E27FC236}">
-                <a16:creationId xmlns:a16="http://schemas.microsoft.com/office/drawing/2014/main" id="{D881F693-8EDA-4F6D-920A-38D2B9C2E009}"/>
+                <a16:creationId xmlns:a16="http://schemas.microsoft.com/office/drawing/2014/main" id="{E8C5613A-725C-4EA5-AD25-44E0B4A3ED92}"/>
               </a:ext>
             </a:extLst>
           </p:cNvPr>
@@ -4911,7 +5054,7 @@
     </p:spTree>
     <p:extLst>
       <p:ext uri="{BB962C8B-B14F-4D97-AF65-F5344CB8AC3E}">
-        <p14:creationId xmlns:p14="http://schemas.microsoft.com/office/powerpoint/2010/main" val="223284993"/>
+        <p14:creationId xmlns:p14="http://schemas.microsoft.com/office/powerpoint/2010/main" val="1443547205"/>
       </p:ext>
     </p:extLst>
   </p:cSld>
